--- a/docs/presentation/company_form/SafeAlert_보고_2026.08.pptx
+++ b/docs/presentation/company_form/SafeAlert_보고_2026.08.pptx
@@ -4242,6 +4242,64 @@
           </a:p>
         </p:txBody>
       </p:sp>
+      <p:pic>
+        <p:nvPicPr>
+          <p:cNvPr id="13" name="Picture 12" descr="fig_aisle.jpg"/>
+          <p:cNvPicPr>
+            <a:picLocks noChangeAspect="1"/>
+          </p:cNvPicPr>
+          <p:nvPr/>
+        </p:nvPicPr>
+        <p:blipFill>
+          <a:blip r:embed="rId3"/>
+          <a:stretch>
+            <a:fillRect/>
+          </a:stretch>
+        </p:blipFill>
+        <p:spPr>
+          <a:xfrm>
+            <a:off x="7882127" y="1417320"/>
+            <a:ext cx="3913632" cy="2446020"/>
+          </a:xfrm>
+          <a:prstGeom prst="rect">
+            <a:avLst/>
+          </a:prstGeom>
+        </p:spPr>
+      </p:pic>
+      <p:sp>
+        <p:nvSpPr>
+          <p:cNvPr id="14" name="TextBox 13"/>
+          <p:cNvSpPr txBox="1"/>
+          <p:nvPr/>
+        </p:nvSpPr>
+        <p:spPr>
+          <a:xfrm>
+            <a:off x="7882127" y="3973068"/>
+            <a:ext cx="3913632" cy="548640"/>
+          </a:xfrm>
+          <a:prstGeom prst="rect">
+            <a:avLst/>
+          </a:prstGeom>
+          <a:noFill/>
+        </p:spPr>
+        <p:txBody>
+          <a:bodyPr wrap="square">
+            <a:spAutoFit/>
+          </a:bodyPr>
+          <a:lstStyle/>
+          <a:p>
+            <a:pPr algn="ctr"/>
+            <a:r>
+              <a:rPr sz="1050">
+                <a:solidFill>
+                  <a:srgbClr val="5D6D7E"/>
+                </a:solidFill>
+              </a:rPr>
+              <a:t>3m 렉 사이 통로 — 교차 구간에서 서로 보이지 않는다</a:t>
+            </a:r>
+          </a:p>
+        </p:txBody>
+      </p:sp>
     </p:spTree>
     <p:extLst>
       <p:ext uri="{BB962C8B-B14F-4D97-AF65-F5344CB8AC3E}">
@@ -4472,7 +4530,7 @@
                 </a:solidFill>
                 <a:latin typeface="+mn-ea"/>
               </a:rPr>
-              <a:t xml:space="preserve">    → 단말이 늘면 상호 감지쌍이 배로 늘어남 (10대 45쌍 · 20대 190쌍)</a:t>
+              <a:t xml:space="preserve">    → 단말이 늘면 상호 감지쌍이 배로 늘어남 (오른쪽 도식)</a:t>
             </a:r>
             <a:endParaRPr lang="en-US" altLang="ko-KR" sz="1200" b="0" dirty="0">
               <a:solidFill>
@@ -4679,6 +4737,64 @@
               <a:t>4</a:t>
             </a:fld>
             <a:endParaRPr lang="ko-KR" altLang="en-US" dirty="0"/>
+          </a:p>
+        </p:txBody>
+      </p:sp>
+      <p:pic>
+        <p:nvPicPr>
+          <p:cNvPr id="13" name="Picture 12" descr="fig_pairs.png"/>
+          <p:cNvPicPr>
+            <a:picLocks noChangeAspect="1"/>
+          </p:cNvPicPr>
+          <p:nvPr/>
+        </p:nvPicPr>
+        <p:blipFill>
+          <a:blip r:embed="rId2"/>
+          <a:stretch>
+            <a:fillRect/>
+          </a:stretch>
+        </p:blipFill>
+        <p:spPr>
+          <a:xfrm>
+            <a:off x="7882127" y="2103120"/>
+            <a:ext cx="3913632" cy="1494491"/>
+          </a:xfrm>
+          <a:prstGeom prst="rect">
+            <a:avLst/>
+          </a:prstGeom>
+        </p:spPr>
+      </p:pic>
+      <p:sp>
+        <p:nvSpPr>
+          <p:cNvPr id="14" name="TextBox 13"/>
+          <p:cNvSpPr txBox="1"/>
+          <p:nvPr/>
+        </p:nvSpPr>
+        <p:spPr>
+          <a:xfrm>
+            <a:off x="7882127" y="3707339"/>
+            <a:ext cx="3913632" cy="548640"/>
+          </a:xfrm>
+          <a:prstGeom prst="rect">
+            <a:avLst/>
+          </a:prstGeom>
+          <a:noFill/>
+        </p:spPr>
+        <p:txBody>
+          <a:bodyPr wrap="square">
+            <a:spAutoFit/>
+          </a:bodyPr>
+          <a:lstStyle/>
+          <a:p>
+            <a:pPr algn="ctr"/>
+            <a:r>
+              <a:rPr sz="1050">
+                <a:solidFill>
+                  <a:srgbClr val="5D6D7E"/>
+                </a:solidFill>
+              </a:rPr>
+              <a:t>단말 수가 늘면 상호 감지쌍은 더 빨리 늘어난다</a:t>
+            </a:r>
           </a:p>
         </p:txBody>
       </p:sp>
@@ -4824,7 +4940,7 @@
                 </a:solidFill>
                 <a:latin typeface="+mn-ea"/>
               </a:rPr>
-              <a:t xml:space="preserve">  ② 역할 조합별 차등 반경 — 지게차 포함 경고 15m · 위험 8m, 그 외 경고 5m · 위험 3m</a:t>
+              <a:t xml:space="preserve">  ② 역할 조합별 차등 반경 (오른쪽 도식)</a:t>
             </a:r>
             <a:endParaRPr lang="en-US" altLang="ko-KR" sz="1400" dirty="0">
               <a:solidFill>
@@ -4982,7 +5098,7 @@
                 </a:solidFill>
                 <a:latin typeface="+mn-ea"/>
               </a:rPr>
-              <a:t xml:space="preserve">  ① 신호 세기로 거리를 추정해 환경에 흔들림 — 적재물 · 차체가 전파를 가리면 오차 발생</a:t>
+              <a:t xml:space="preserve">  ① 신호 세기로 거리를 추정해 환경에 흔들림</a:t>
             </a:r>
             <a:endParaRPr lang="en-US" altLang="ko-KR" sz="1400" dirty="0">
               <a:solidFill>
@@ -5004,7 +5120,7 @@
                 </a:solidFill>
                 <a:latin typeface="+mn-ea"/>
               </a:rPr>
-              <a:t xml:space="preserve">    → 센터별 보정값으로 완화하되 완전한 제거는 불가</a:t>
+              <a:t xml:space="preserve">    → 적재물 · 차체가 전파를 가리면 오차. 센터별 보정값으로 완화</a:t>
             </a:r>
             <a:endParaRPr lang="en-US" altLang="ko-KR" sz="1200" b="0" dirty="0">
               <a:solidFill>
@@ -5167,6 +5283,64 @@
               <a:t>4</a:t>
             </a:fld>
             <a:endParaRPr lang="ko-KR" altLang="en-US" dirty="0"/>
+          </a:p>
+        </p:txBody>
+      </p:sp>
+      <p:pic>
+        <p:nvPicPr>
+          <p:cNvPr id="13" name="Picture 12" descr="fig_radius.png"/>
+          <p:cNvPicPr>
+            <a:picLocks noChangeAspect="1"/>
+          </p:cNvPicPr>
+          <p:nvPr/>
+        </p:nvPicPr>
+        <p:blipFill>
+          <a:blip r:embed="rId2"/>
+          <a:stretch>
+            <a:fillRect/>
+          </a:stretch>
+        </p:blipFill>
+        <p:spPr>
+          <a:xfrm>
+            <a:off x="7882127" y="1554480"/>
+            <a:ext cx="3913632" cy="2162160"/>
+          </a:xfrm>
+          <a:prstGeom prst="rect">
+            <a:avLst/>
+          </a:prstGeom>
+        </p:spPr>
+      </p:pic>
+      <p:sp>
+        <p:nvSpPr>
+          <p:cNvPr id="14" name="TextBox 13"/>
+          <p:cNvSpPr txBox="1"/>
+          <p:nvPr/>
+        </p:nvSpPr>
+        <p:spPr>
+          <a:xfrm>
+            <a:off x="7882127" y="3826368"/>
+            <a:ext cx="3913632" cy="548640"/>
+          </a:xfrm>
+          <a:prstGeom prst="rect">
+            <a:avLst/>
+          </a:prstGeom>
+          <a:noFill/>
+        </p:spPr>
+        <p:txBody>
+          <a:bodyPr wrap="square">
+            <a:spAutoFit/>
+          </a:bodyPr>
+          <a:lstStyle/>
+          <a:p>
+            <a:pPr algn="ctr"/>
+            <a:r>
+              <a:rPr sz="1050">
+                <a:solidFill>
+                  <a:srgbClr val="5D6D7E"/>
+                </a:solidFill>
+              </a:rPr>
+              <a:t>역할 조합별 판정 반경 (실제 비례 축척)</a:t>
+            </a:r>
           </a:p>
         </p:txBody>
       </p:sp>
@@ -5378,7 +5552,7 @@
                 </a:solidFill>
                 <a:latin typeface="+mn-ea"/>
               </a:rPr>
-              <a:t xml:space="preserve">  ③ 3차 — 세이프존 도입. 휴게실 · 충전 구역에 비콘을 두면 그 구역에서 경보를 억제</a:t>
+              <a:t xml:space="preserve">  ③ 3차 — 세이프존 도입 (오른쪽 도식)</a:t>
             </a:r>
             <a:endParaRPr lang="en-US" altLang="ko-KR" sz="1400" dirty="0">
               <a:solidFill>
@@ -5400,7 +5574,7 @@
                 </a:solidFill>
                 <a:latin typeface="+mn-ea"/>
               </a:rPr>
-              <a:t xml:space="preserve">    → 존 안의 기기는 상대 단말에게도 안전으로 인식됨</a:t>
+              <a:t xml:space="preserve">    → 휴게실 · 충전 구역에 비콘을 두면 그 구역에서 경보를 억제</a:t>
             </a:r>
             <a:endParaRPr lang="en-US" altLang="ko-KR" sz="1200" b="0" dirty="0">
               <a:solidFill>
@@ -5470,7 +5644,7 @@
                 </a:solidFill>
                 <a:latin typeface="+mn-ea"/>
               </a:rPr>
-              <a:t xml:space="preserve">  ① 보호가 끊긴 것을 알 수 없다 → 감지가 멈추면 상시 알림 제목을 이상 표시로 승격</a:t>
+              <a:t xml:space="preserve">  ① 보호가 끊긴 것을 알 수 없다 → 알림에 이상 표시</a:t>
             </a:r>
             <a:endParaRPr lang="en-US" altLang="ko-KR" sz="1400" dirty="0">
               <a:solidFill>
@@ -5492,7 +5666,7 @@
                 </a:solidFill>
                 <a:latin typeface="+mn-ea"/>
               </a:rPr>
-              <a:t xml:space="preserve">  ② 멀어졌는데 다시 울린다 → 이탈 후 경고 범위에서 재발령하지 않도록 수정</a:t>
+              <a:t xml:space="preserve">  ② 멀어졌는데 다시 울린다 → 이탈 후 재발령 억제</a:t>
             </a:r>
             <a:endParaRPr lang="en-US" altLang="ko-KR" sz="1400" dirty="0">
               <a:solidFill>
@@ -5514,7 +5688,7 @@
                 </a:solidFill>
                 <a:latin typeface="+mn-ea"/>
               </a:rPr>
-              <a:t xml:space="preserve">  ③ 알림 끄기가 번거롭다 → 알림 본문을 누르면 즉시 무음, 버튼은 앱 열기로 역할 교체</a:t>
+              <a:t xml:space="preserve">  ③ 알림 끄기가 번거롭다 → 본문 탭 = 즉시 무음</a:t>
             </a:r>
             <a:endParaRPr lang="en-US" altLang="ko-KR" sz="1400" dirty="0">
               <a:solidFill>
@@ -5536,7 +5710,7 @@
                 </a:solidFill>
                 <a:latin typeface="+mn-ea"/>
               </a:rPr>
-              <a:t xml:space="preserve">  ④ 경보 화면이 눈에 안 들어온다 → 화면 가장자리에 붙는 사이드바로 재설계</a:t>
+              <a:t xml:space="preserve">  ④ 경보 화면이 눈에 안 들어온다 → 가장자리 부착 사이드바</a:t>
             </a:r>
             <a:endParaRPr lang="en-US" altLang="ko-KR" sz="1400" dirty="0">
               <a:solidFill>
@@ -5611,6 +5785,64 @@
               <a:t>4</a:t>
             </a:fld>
             <a:endParaRPr lang="ko-KR" altLang="en-US" dirty="0"/>
+          </a:p>
+        </p:txBody>
+      </p:sp>
+      <p:pic>
+        <p:nvPicPr>
+          <p:cNvPr id="13" name="Picture 12" descr="fig_zone.png"/>
+          <p:cNvPicPr>
+            <a:picLocks noChangeAspect="1"/>
+          </p:cNvPicPr>
+          <p:nvPr/>
+        </p:nvPicPr>
+        <p:blipFill>
+          <a:blip r:embed="rId2"/>
+          <a:stretch>
+            <a:fillRect/>
+          </a:stretch>
+        </p:blipFill>
+        <p:spPr>
+          <a:xfrm>
+            <a:off x="7882127" y="1965960"/>
+            <a:ext cx="3913632" cy="1687314"/>
+          </a:xfrm>
+          <a:prstGeom prst="rect">
+            <a:avLst/>
+          </a:prstGeom>
+        </p:spPr>
+      </p:pic>
+      <p:sp>
+        <p:nvSpPr>
+          <p:cNvPr id="14" name="TextBox 13"/>
+          <p:cNvSpPr txBox="1"/>
+          <p:nvPr/>
+        </p:nvSpPr>
+        <p:spPr>
+          <a:xfrm>
+            <a:off x="7882127" y="3763002"/>
+            <a:ext cx="3913632" cy="548640"/>
+          </a:xfrm>
+          <a:prstGeom prst="rect">
+            <a:avLst/>
+          </a:prstGeom>
+          <a:noFill/>
+        </p:spPr>
+        <p:txBody>
+          <a:bodyPr wrap="square">
+            <a:spAutoFit/>
+          </a:bodyPr>
+          <a:lstStyle/>
+          <a:p>
+            <a:pPr algn="ctr"/>
+            <a:r>
+              <a:rPr sz="1050">
+                <a:solidFill>
+                  <a:srgbClr val="5D6D7E"/>
+                </a:solidFill>
+              </a:rPr>
+              <a:t>세이프존 — 구역 안에서는 양쪽 모두 조용하다</a:t>
+            </a:r>
           </a:p>
         </p:txBody>
       </p:sp>
@@ -6067,7 +6299,7 @@
           <a:p>
             <a:r>
               <a:rPr sz="1100" b="1"/>
-              <a:t>시연 영상 — 슬라이드쇼에서 재생</a:t>
+              <a:t>시연 영상 — 슬라이드쇼에서 재생 (경보음 포함)</a:t>
             </a:r>
           </a:p>
         </p:txBody>

--- a/docs/presentation/company_form/SafeAlert_보고_2026.08.pptx
+++ b/docs/presentation/company_form/SafeAlert_보고_2026.08.pptx
@@ -3717,7 +3717,7 @@
           <a:p>
             <a:r>
               <a:rPr lang="en-US" altLang="ko-KR" sz="1400" b="0" dirty="0"/>
-              <a:t xml:space="preserve">  1) 현장 문제</a:t>
+              <a:t xml:space="preserve">  1) 문제의 배경 · 현재 상황</a:t>
             </a:r>
           </a:p>
           <a:p>
@@ -3742,6 +3742,12 @@
           </a:p>
           <a:p>
             <a:r>
+              <a:rPr lang="en-US" altLang="ko-KR" sz="1400" b="0" dirty="0"/>
+              <a:t xml:space="preserve">  1) As-is / To-be</a:t>
+            </a:r>
+          </a:p>
+          <a:p>
+            <a:r>
               <a:rPr lang="en-US" altLang="ko-KR" dirty="0"/>
               <a:t xml:space="preserve"> </a:t>
             </a:r>
@@ -3757,13 +3763,13 @@
           <a:p>
             <a:r>
               <a:rPr lang="en-US" altLang="ko-KR" sz="1400" b="0" dirty="0"/>
-              <a:t xml:space="preserve">  1) 장점</a:t>
+              <a:t xml:space="preserve">  1) Tradeoffs — 무엇을 얻고 무엇을 내줬나</a:t>
             </a:r>
           </a:p>
           <a:p>
             <a:r>
               <a:rPr lang="en-US" altLang="ko-KR" sz="1400" b="0" dirty="0"/>
-              <a:t xml:space="preserve">  2) 단점</a:t>
+              <a:t xml:space="preserve">  2) 남는 한계</a:t>
             </a:r>
           </a:p>
           <a:p>
@@ -3789,7 +3795,7 @@
           <a:p>
             <a:r>
               <a:rPr lang="en-US" altLang="ko-KR" sz="1400" b="0" dirty="0"/>
-              <a:t xml:space="preserve">  2) 현장에서 나온 요구</a:t>
+              <a:t xml:space="preserve">  2) 현장 요구 반영 (Before / After)</a:t>
             </a:r>
           </a:p>
           <a:p>
@@ -3815,7 +3821,7 @@
           <a:p>
             <a:r>
               <a:rPr lang="en-US" altLang="ko-KR" sz="1400" b="0" dirty="0"/>
-              <a:t xml:space="preserve">  2) 첨부 — 시연 영상 · 판정 시뮬레이터</a:t>
+              <a:t xml:space="preserve">  2) 시연 영상 · 판정 시뮬레이터</a:t>
             </a:r>
           </a:p>
         </p:txBody>
@@ -3873,7 +3879,7 @@
         <p:spPr>
           <a:xfrm>
             <a:off x="636390" y="928122"/>
-            <a:ext cx="11342595" cy="5486400"/>
+            <a:ext cx="11342595" cy="3980770"/>
           </a:xfrm>
           <a:prstGeom prst="rect">
             <a:avLst/>
@@ -3909,268 +3915,12 @@
                 <a:spcPct val="150000"/>
               </a:lnSpc>
             </a:pPr>
-            <a:r>
-              <a:rPr lang="en-US" altLang="ko-KR" sz="1400" dirty="0">
-                <a:solidFill>
-                  <a:schemeClr val="tx1"/>
-                </a:solidFill>
-                <a:latin typeface="+mn-ea"/>
-                <a:ea typeface="+mn-ea"/>
-              </a:rPr>
-              <a:t xml:space="preserve">1) 현장 문제</a:t>
-            </a:r>
             <a:endParaRPr lang="en-US" altLang="ko-KR" sz="1400" dirty="0">
               <a:solidFill>
                 <a:schemeClr val="tx1"/>
               </a:solidFill>
               <a:latin typeface="+mn-ea"/>
               <a:ea typeface="+mn-ea"/>
-            </a:endParaRPr>
-          </a:p>
-          <a:p>
-            <a:pPr>
-              <a:lnSpc>
-                <a:spcPct val="150000"/>
-              </a:lnSpc>
-            </a:pPr>
-            <a:r>
-              <a:rPr lang="en-US" altLang="ko-KR" sz="1400" dirty="0">
-                <a:solidFill>
-                  <a:schemeClr val="tx1"/>
-                </a:solidFill>
-                <a:latin typeface="+mn-ea"/>
-              </a:rPr>
-              <a:t xml:space="preserve">  ① 3m 높이 철제 렉 사이 통로에서 지게차와 보행자가 서로를 볼 수 없음</a:t>
-            </a:r>
-            <a:endParaRPr lang="en-US" altLang="ko-KR" sz="1400" dirty="0">
-              <a:solidFill>
-                <a:schemeClr val="tx1"/>
-              </a:solidFill>
-              <a:latin typeface="+mn-ea"/>
-            </a:endParaRPr>
-          </a:p>
-          <a:p>
-            <a:pPr>
-              <a:lnSpc>
-                <a:spcPct val="150000"/>
-              </a:lnSpc>
-            </a:pPr>
-            <a:r>
-              <a:rPr lang="ko-KR" altLang="en-US" sz="1200" b="0" dirty="0">
-                <a:solidFill>
-                  <a:schemeClr val="tx1"/>
-                </a:solidFill>
-                <a:latin typeface="+mn-ea"/>
-              </a:rPr>
-              <a:t xml:space="preserve">    → 교차 · 곡선 구간은 육안 확인 자체가 어려움</a:t>
-            </a:r>
-            <a:endParaRPr lang="en-US" altLang="ko-KR" sz="1200" b="0" dirty="0">
-              <a:solidFill>
-                <a:schemeClr val="tx1"/>
-              </a:solidFill>
-              <a:latin typeface="+mn-ea"/>
-            </a:endParaRPr>
-          </a:p>
-          <a:p>
-            <a:pPr>
-              <a:lnSpc>
-                <a:spcPct val="150000"/>
-              </a:lnSpc>
-            </a:pPr>
-            <a:r>
-              <a:rPr lang="en-US" altLang="ko-KR" sz="1400" dirty="0">
-                <a:solidFill>
-                  <a:schemeClr val="tx1"/>
-                </a:solidFill>
-                <a:latin typeface="+mn-ea"/>
-              </a:rPr>
-              <a:t xml:space="preserve">  ② 적재 파렛트가 2.4GHz 전파를 흡수하고, 장비 소음으로 경적 인지도 늦음</a:t>
-            </a:r>
-            <a:endParaRPr lang="en-US" altLang="ko-KR" sz="1400" dirty="0">
-              <a:solidFill>
-                <a:schemeClr val="tx1"/>
-              </a:solidFill>
-              <a:latin typeface="+mn-ea"/>
-            </a:endParaRPr>
-          </a:p>
-          <a:p>
-            <a:pPr>
-              <a:lnSpc>
-                <a:spcPct val="150000"/>
-              </a:lnSpc>
-            </a:pPr>
-            <a:r>
-              <a:rPr lang="en-US" altLang="ko-KR" sz="1400" dirty="0">
-                <a:solidFill>
-                  <a:schemeClr val="tx1"/>
-                </a:solidFill>
-                <a:latin typeface="+mn-ea"/>
-              </a:rPr>
-              <a:t xml:space="preserve">  ③ 렉 사이 단독 작업 구간이 있어 이탈 여부 확인이 필요</a:t>
-            </a:r>
-            <a:endParaRPr lang="en-US" altLang="ko-KR" sz="1400" dirty="0">
-              <a:solidFill>
-                <a:schemeClr val="tx1"/>
-              </a:solidFill>
-              <a:latin typeface="+mn-ea"/>
-            </a:endParaRPr>
-          </a:p>
-          <a:p>
-            <a:pPr>
-              <a:lnSpc>
-                <a:spcPct val="150000"/>
-              </a:lnSpc>
-            </a:pPr>
-            <a:r>
-              <a:rPr lang="en-US" altLang="ko-KR" sz="1400" dirty="0">
-                <a:solidFill>
-                  <a:schemeClr val="tx1"/>
-                </a:solidFill>
-                <a:latin typeface="+mn-ea"/>
-              </a:rPr>
-              <a:t xml:space="preserve">  ④ 지게차 · 리치 · EPJ · 보행자가 같은 통로를 공유</a:t>
-            </a:r>
-            <a:endParaRPr lang="en-US" altLang="ko-KR" sz="1400" dirty="0">
-              <a:solidFill>
-                <a:schemeClr val="tx1"/>
-              </a:solidFill>
-              <a:latin typeface="+mn-ea"/>
-            </a:endParaRPr>
-          </a:p>
-          <a:p>
-            <a:pPr>
-              <a:lnSpc>
-                <a:spcPct val="150000"/>
-              </a:lnSpc>
-            </a:pPr>
-            <a:r>
-              <a:rPr lang="en-US" altLang="ko-KR" sz="1400" dirty="0">
-                <a:solidFill>
-                  <a:schemeClr val="tx1"/>
-                </a:solidFill>
-                <a:latin typeface="+mn-ea"/>
-                <a:ea typeface="+mn-ea"/>
-              </a:rPr>
-              <a:t xml:space="preserve"> </a:t>
-            </a:r>
-            <a:endParaRPr lang="en-US" altLang="ko-KR" sz="1400" dirty="0">
-              <a:solidFill>
-                <a:schemeClr val="tx1"/>
-              </a:solidFill>
-              <a:latin typeface="+mn-ea"/>
-              <a:ea typeface="+mn-ea"/>
-            </a:endParaRPr>
-          </a:p>
-          <a:p>
-            <a:pPr>
-              <a:lnSpc>
-                <a:spcPct val="150000"/>
-              </a:lnSpc>
-            </a:pPr>
-            <a:r>
-              <a:rPr lang="en-US" altLang="ko-KR" sz="1400" dirty="0">
-                <a:solidFill>
-                  <a:schemeClr val="tx1"/>
-                </a:solidFill>
-                <a:latin typeface="+mn-ea"/>
-                <a:ea typeface="+mn-ea"/>
-              </a:rPr>
-              <a:t xml:space="preserve">2) 왜 앱으로 만들었나</a:t>
-            </a:r>
-            <a:endParaRPr lang="en-US" altLang="ko-KR" sz="1400" dirty="0">
-              <a:solidFill>
-                <a:schemeClr val="tx1"/>
-              </a:solidFill>
-              <a:latin typeface="+mn-ea"/>
-              <a:ea typeface="+mn-ea"/>
-            </a:endParaRPr>
-          </a:p>
-          <a:p>
-            <a:pPr>
-              <a:lnSpc>
-                <a:spcPct val="150000"/>
-              </a:lnSpc>
-            </a:pPr>
-            <a:r>
-              <a:rPr lang="en-US" altLang="ko-KR" sz="1400" dirty="0">
-                <a:solidFill>
-                  <a:schemeClr val="tx1"/>
-                </a:solidFill>
-                <a:latin typeface="+mn-ea"/>
-              </a:rPr>
-              <a:t xml:space="preserve">  ① 앵커 · 배선 · 서버 같은 고정 설비 없이 지급된 단말만으로 동작</a:t>
-            </a:r>
-            <a:endParaRPr lang="en-US" altLang="ko-KR" sz="1400" dirty="0">
-              <a:solidFill>
-                <a:schemeClr val="tx1"/>
-              </a:solidFill>
-              <a:latin typeface="+mn-ea"/>
-            </a:endParaRPr>
-          </a:p>
-          <a:p>
-            <a:pPr>
-              <a:lnSpc>
-                <a:spcPct val="150000"/>
-              </a:lnSpc>
-            </a:pPr>
-            <a:r>
-              <a:rPr lang="ko-KR" altLang="en-US" sz="1200" b="0" dirty="0">
-                <a:solidFill>
-                  <a:schemeClr val="tx1"/>
-                </a:solidFill>
-                <a:latin typeface="+mn-ea"/>
-              </a:rPr>
-              <a:t xml:space="preserve">    → 센터 공사나 별도 인프라 투자가 필요 없음</a:t>
-            </a:r>
-            <a:endParaRPr lang="en-US" altLang="ko-KR" sz="1200" b="0" dirty="0">
-              <a:solidFill>
-                <a:schemeClr val="tx1"/>
-              </a:solidFill>
-              <a:latin typeface="+mn-ea"/>
-            </a:endParaRPr>
-          </a:p>
-          <a:p>
-            <a:pPr>
-              <a:lnSpc>
-                <a:spcPct val="150000"/>
-              </a:lnSpc>
-            </a:pPr>
-            <a:r>
-              <a:rPr lang="en-US" altLang="ko-KR" sz="1400" dirty="0">
-                <a:solidFill>
-                  <a:schemeClr val="tx1"/>
-                </a:solidFill>
-                <a:latin typeface="+mn-ea"/>
-              </a:rPr>
-              <a:t xml:space="preserve">  ② 움직이는 주체끼리 직접 감지 — 설치 대수가 늘수록 감지 범위도 함께 넓어짐</a:t>
-            </a:r>
-            <a:endParaRPr lang="en-US" altLang="ko-KR" sz="1400" dirty="0">
-              <a:solidFill>
-                <a:schemeClr val="tx1"/>
-              </a:solidFill>
-              <a:latin typeface="+mn-ea"/>
-            </a:endParaRPr>
-          </a:p>
-          <a:p>
-            <a:pPr>
-              <a:lnSpc>
-                <a:spcPct val="150000"/>
-              </a:lnSpc>
-            </a:pPr>
-            <a:r>
-              <a:rPr lang="en-US" altLang="ko-KR" sz="1400" dirty="0">
-                <a:solidFill>
-                  <a:schemeClr val="tx1"/>
-                </a:solidFill>
-                <a:latin typeface="+mn-ea"/>
-              </a:rPr>
-              <a:t xml:space="preserve">  ③ v1.0.1 부터 3개월간 70회 이상 배포하며 현장에서 계속 다듬음</a:t>
-            </a:r>
-            <a:endParaRPr lang="en-US" altLang="ko-KR" sz="1400" dirty="0">
-              <a:solidFill>
-                <a:schemeClr val="tx1"/>
-              </a:solidFill>
-              <a:latin typeface="+mn-ea"/>
             </a:endParaRPr>
           </a:p>
         </p:txBody>
@@ -4258,7 +4008,7 @@
         </p:blipFill>
         <p:spPr>
           <a:xfrm>
-            <a:off x="7882127" y="1417320"/>
+            <a:off x="7882127" y="1024128"/>
             <a:ext cx="3913632" cy="2446020"/>
           </a:xfrm>
           <a:prstGeom prst="rect">
@@ -4274,8 +4024,8 @@
         </p:nvSpPr>
         <p:spPr>
           <a:xfrm>
-            <a:off x="7882127" y="3973068"/>
-            <a:ext cx="3913632" cy="548640"/>
+            <a:off x="7882127" y="3561588"/>
+            <a:ext cx="3913632" cy="274320"/>
           </a:xfrm>
           <a:prstGeom prst="rect">
             <a:avLst/>
@@ -4283,19 +4033,625 @@
           <a:noFill/>
         </p:spPr>
         <p:txBody>
-          <a:bodyPr wrap="square">
+          <a:bodyPr wrap="square" lIns="36576" rIns="36576" tIns="0" bIns="0">
             <a:spAutoFit/>
           </a:bodyPr>
           <a:lstStyle/>
           <a:p>
-            <a:pPr algn="ctr"/>
-            <a:r>
-              <a:rPr sz="1050">
+            <a:pPr algn="ctr">
+              <a:spcAft>
+                <a:spcPts val="400"/>
+              </a:spcAft>
+            </a:pPr>
+            <a:r>
+              <a:rPr sz="1000" b="0" i="0">
                 <a:solidFill>
                   <a:srgbClr val="5D6D7E"/>
                 </a:solidFill>
+                <a:latin typeface="Malgun Gothic"/>
               </a:rPr>
               <a:t>3m 렉 사이 통로 — 교차 구간에서 서로 보이지 않는다</a:t>
+            </a:r>
+          </a:p>
+        </p:txBody>
+      </p:sp>
+      <p:sp>
+        <p:nvSpPr>
+          <p:cNvPr id="15" name="Rectangle 14"/>
+          <p:cNvSpPr/>
+          <p:nvPr/>
+        </p:nvSpPr>
+        <p:spPr>
+          <a:xfrm>
+            <a:off x="640080" y="1024128"/>
+            <a:ext cx="1417320" cy="301752"/>
+          </a:xfrm>
+          <a:prstGeom prst="rect">
+            <a:avLst/>
+          </a:prstGeom>
+          <a:solidFill>
+            <a:srgbClr val="8C8C8C"/>
+          </a:solidFill>
+          <a:ln>
+            <a:noFill/>
+          </a:ln>
+          <a:effectLst/>
+        </p:spPr>
+        <p:style>
+          <a:lnRef idx="1">
+            <a:schemeClr val="accent1"/>
+          </a:lnRef>
+          <a:fillRef idx="3">
+            <a:schemeClr val="accent1"/>
+          </a:fillRef>
+          <a:effectRef idx="2">
+            <a:schemeClr val="accent1"/>
+          </a:effectRef>
+          <a:fontRef idx="minor">
+            <a:schemeClr val="lt1"/>
+          </a:fontRef>
+        </p:style>
+        <p:txBody>
+          <a:bodyPr rtlCol="0" anchor="ctr" wrap="square" lIns="36576" rIns="36576" tIns="0" bIns="0"/>
+          <a:lstStyle/>
+          <a:p>
+            <a:pPr algn="ctr"/>
+            <a:r>
+              <a:rPr sz="1100" b="1" i="0">
+                <a:solidFill>
+                  <a:srgbClr val="FFFFFF"/>
+                </a:solidFill>
+                <a:latin typeface="Malgun Gothic"/>
+              </a:rPr>
+              <a:t>문제의 배경</a:t>
+            </a:r>
+          </a:p>
+        </p:txBody>
+      </p:sp>
+      <p:sp>
+        <p:nvSpPr>
+          <p:cNvPr id="16" name="TextBox 15"/>
+          <p:cNvSpPr txBox="1"/>
+          <p:nvPr/>
+        </p:nvSpPr>
+        <p:spPr>
+          <a:xfrm>
+            <a:off x="868680" y="1499616"/>
+            <a:ext cx="6858000" cy="310896"/>
+          </a:xfrm>
+          <a:prstGeom prst="rect">
+            <a:avLst/>
+          </a:prstGeom>
+          <a:noFill/>
+        </p:spPr>
+        <p:txBody>
+          <a:bodyPr wrap="square" lIns="36576" rIns="36576" tIns="0" bIns="0">
+            <a:spAutoFit/>
+          </a:bodyPr>
+          <a:lstStyle/>
+          <a:p>
+            <a:pPr algn="l">
+              <a:spcAft>
+                <a:spcPts val="400"/>
+              </a:spcAft>
+            </a:pPr>
+            <a:r>
+              <a:rPr sz="1200" b="1" i="0">
+                <a:solidFill>
+                  <a:srgbClr val="1C2833"/>
+                </a:solidFill>
+                <a:latin typeface="Malgun Gothic"/>
+              </a:rPr>
+              <a:t>AS-IS : </a:t>
+            </a:r>
+            <a:r>
+              <a:rPr sz="1200" b="0" i="0">
+                <a:solidFill>
+                  <a:srgbClr val="1C2833"/>
+                </a:solidFill>
+                <a:latin typeface="Malgun Gothic"/>
+              </a:rPr>
+              <a:t>3m 높이 철제 렉 사이 통로에서 지게차와 보행자가 서로를 볼 수 없음</a:t>
+            </a:r>
+          </a:p>
+        </p:txBody>
+      </p:sp>
+      <p:sp>
+        <p:nvSpPr>
+          <p:cNvPr id="17" name="TextBox 16"/>
+          <p:cNvSpPr txBox="1"/>
+          <p:nvPr/>
+        </p:nvSpPr>
+        <p:spPr>
+          <a:xfrm>
+            <a:off x="868680" y="1810512"/>
+            <a:ext cx="6858000" cy="310896"/>
+          </a:xfrm>
+          <a:prstGeom prst="rect">
+            <a:avLst/>
+          </a:prstGeom>
+          <a:noFill/>
+        </p:spPr>
+        <p:txBody>
+          <a:bodyPr wrap="square" lIns="36576" rIns="36576" tIns="0" bIns="0">
+            <a:spAutoFit/>
+          </a:bodyPr>
+          <a:lstStyle/>
+          <a:p>
+            <a:pPr algn="l">
+              <a:spcAft>
+                <a:spcPts val="400"/>
+              </a:spcAft>
+            </a:pPr>
+            <a:r>
+              <a:rPr sz="1200" b="1" i="0">
+                <a:solidFill>
+                  <a:srgbClr val="1C2833"/>
+                </a:solidFill>
+                <a:latin typeface="Malgun Gothic"/>
+              </a:rPr>
+              <a:t>Pain Point : </a:t>
+            </a:r>
+            <a:r>
+              <a:rPr sz="1200" b="0" i="0">
+                <a:solidFill>
+                  <a:srgbClr val="1C2833"/>
+                </a:solidFill>
+                <a:latin typeface="Malgun Gothic"/>
+              </a:rPr>
+              <a:t>적재 파렛트가 2.4GHz 전파를 흡수하고, 장비 소음으로 경적 인지도 늦음</a:t>
+            </a:r>
+          </a:p>
+        </p:txBody>
+      </p:sp>
+      <p:sp>
+        <p:nvSpPr>
+          <p:cNvPr id="18" name="Rectangle 17"/>
+          <p:cNvSpPr/>
+          <p:nvPr/>
+        </p:nvSpPr>
+        <p:spPr>
+          <a:xfrm>
+            <a:off x="640080" y="2304288"/>
+            <a:ext cx="1417320" cy="301752"/>
+          </a:xfrm>
+          <a:prstGeom prst="rect">
+            <a:avLst/>
+          </a:prstGeom>
+          <a:solidFill>
+            <a:srgbClr val="8C8C8C"/>
+          </a:solidFill>
+          <a:ln>
+            <a:noFill/>
+          </a:ln>
+          <a:effectLst/>
+        </p:spPr>
+        <p:style>
+          <a:lnRef idx="1">
+            <a:schemeClr val="accent1"/>
+          </a:lnRef>
+          <a:fillRef idx="3">
+            <a:schemeClr val="accent1"/>
+          </a:fillRef>
+          <a:effectRef idx="2">
+            <a:schemeClr val="accent1"/>
+          </a:effectRef>
+          <a:fontRef idx="minor">
+            <a:schemeClr val="lt1"/>
+          </a:fontRef>
+        </p:style>
+        <p:txBody>
+          <a:bodyPr rtlCol="0" anchor="ctr" wrap="square" lIns="36576" rIns="36576" tIns="0" bIns="0"/>
+          <a:lstStyle/>
+          <a:p>
+            <a:pPr algn="ctr"/>
+            <a:r>
+              <a:rPr sz="1100" b="1" i="0">
+                <a:solidFill>
+                  <a:srgbClr val="FFFFFF"/>
+                </a:solidFill>
+                <a:latin typeface="Malgun Gothic"/>
+              </a:rPr>
+              <a:t>현재 상황</a:t>
+            </a:r>
+          </a:p>
+        </p:txBody>
+      </p:sp>
+      <p:sp>
+        <p:nvSpPr>
+          <p:cNvPr id="19" name="TextBox 18"/>
+          <p:cNvSpPr txBox="1"/>
+          <p:nvPr/>
+        </p:nvSpPr>
+        <p:spPr>
+          <a:xfrm>
+            <a:off x="868680" y="2779776"/>
+            <a:ext cx="6858000" cy="310896"/>
+          </a:xfrm>
+          <a:prstGeom prst="rect">
+            <a:avLst/>
+          </a:prstGeom>
+          <a:noFill/>
+        </p:spPr>
+        <p:txBody>
+          <a:bodyPr wrap="square" lIns="36576" rIns="36576" tIns="0" bIns="0">
+            <a:spAutoFit/>
+          </a:bodyPr>
+          <a:lstStyle/>
+          <a:p>
+            <a:pPr algn="l">
+              <a:spcAft>
+                <a:spcPts val="400"/>
+              </a:spcAft>
+            </a:pPr>
+            <a:r>
+              <a:rPr sz="1200" b="1" i="0">
+                <a:solidFill>
+                  <a:srgbClr val="1C2833"/>
+                </a:solidFill>
+                <a:latin typeface="Malgun Gothic"/>
+              </a:rPr>
+              <a:t>Data : </a:t>
+            </a:r>
+            <a:r>
+              <a:rPr sz="1200" b="0" i="0">
+                <a:solidFill>
+                  <a:srgbClr val="1C2833"/>
+                </a:solidFill>
+                <a:latin typeface="Malgun Gothic"/>
+              </a:rPr>
+              <a:t>지게차 · 리치 · EPJ · 보행자가 같은 통로를 공유. 렉 사이 단독 작업 구간도 있음</a:t>
+            </a:r>
+          </a:p>
+        </p:txBody>
+      </p:sp>
+      <p:sp>
+        <p:nvSpPr>
+          <p:cNvPr id="20" name="TextBox 19"/>
+          <p:cNvSpPr txBox="1"/>
+          <p:nvPr/>
+        </p:nvSpPr>
+        <p:spPr>
+          <a:xfrm>
+            <a:off x="868680" y="3090672"/>
+            <a:ext cx="6858000" cy="310896"/>
+          </a:xfrm>
+          <a:prstGeom prst="rect">
+            <a:avLst/>
+          </a:prstGeom>
+          <a:noFill/>
+        </p:spPr>
+        <p:txBody>
+          <a:bodyPr wrap="square" lIns="36576" rIns="36576" tIns="0" bIns="0">
+            <a:spAutoFit/>
+          </a:bodyPr>
+          <a:lstStyle/>
+          <a:p>
+            <a:pPr algn="l">
+              <a:spcAft>
+                <a:spcPts val="400"/>
+              </a:spcAft>
+            </a:pPr>
+            <a:r>
+              <a:rPr sz="1200" b="1" i="0">
+                <a:solidFill>
+                  <a:srgbClr val="1C2833"/>
+                </a:solidFill>
+                <a:latin typeface="Malgun Gothic"/>
+              </a:rPr>
+              <a:t>Issue : </a:t>
+            </a:r>
+            <a:r>
+              <a:rPr sz="1200" b="0" i="0">
+                <a:solidFill>
+                  <a:srgbClr val="1C2833"/>
+                </a:solidFill>
+                <a:latin typeface="Malgun Gothic"/>
+              </a:rPr>
+              <a:t>사각지대를 사람의 주의력에만 맡기고 있어, 보이지 않는 구간은 대책이 없음</a:t>
+            </a:r>
+          </a:p>
+        </p:txBody>
+      </p:sp>
+      <p:sp>
+        <p:nvSpPr>
+          <p:cNvPr id="21" name="Rectangle 20"/>
+          <p:cNvSpPr/>
+          <p:nvPr/>
+        </p:nvSpPr>
+        <p:spPr>
+          <a:xfrm>
+            <a:off x="640080" y="3675887"/>
+            <a:ext cx="1874519" cy="301752"/>
+          </a:xfrm>
+          <a:prstGeom prst="rect">
+            <a:avLst/>
+          </a:prstGeom>
+          <a:solidFill>
+            <a:srgbClr val="8C8C8C"/>
+          </a:solidFill>
+          <a:ln>
+            <a:noFill/>
+          </a:ln>
+          <a:effectLst/>
+        </p:spPr>
+        <p:style>
+          <a:lnRef idx="1">
+            <a:schemeClr val="accent1"/>
+          </a:lnRef>
+          <a:fillRef idx="3">
+            <a:schemeClr val="accent1"/>
+          </a:fillRef>
+          <a:effectRef idx="2">
+            <a:schemeClr val="accent1"/>
+          </a:effectRef>
+          <a:fontRef idx="minor">
+            <a:schemeClr val="lt1"/>
+          </a:fontRef>
+        </p:style>
+        <p:txBody>
+          <a:bodyPr rtlCol="0" anchor="ctr" wrap="square" lIns="36576" rIns="36576" tIns="0" bIns="0"/>
+          <a:lstStyle/>
+          <a:p>
+            <a:pPr algn="ctr"/>
+            <a:r>
+              <a:rPr sz="1100" b="1" i="0">
+                <a:solidFill>
+                  <a:srgbClr val="FFFFFF"/>
+                </a:solidFill>
+                <a:latin typeface="Malgun Gothic"/>
+              </a:rPr>
+              <a:t>왜 앱으로 만들었나</a:t>
+            </a:r>
+          </a:p>
+        </p:txBody>
+      </p:sp>
+      <p:sp>
+        <p:nvSpPr>
+          <p:cNvPr id="22" name="TextBox 21"/>
+          <p:cNvSpPr txBox="1"/>
+          <p:nvPr/>
+        </p:nvSpPr>
+        <p:spPr>
+          <a:xfrm>
+            <a:off x="868680" y="4151376"/>
+            <a:ext cx="10881360" cy="310896"/>
+          </a:xfrm>
+          <a:prstGeom prst="rect">
+            <a:avLst/>
+          </a:prstGeom>
+          <a:noFill/>
+        </p:spPr>
+        <p:txBody>
+          <a:bodyPr wrap="square" lIns="36576" rIns="36576" tIns="0" bIns="0">
+            <a:spAutoFit/>
+          </a:bodyPr>
+          <a:lstStyle/>
+          <a:p>
+            <a:pPr algn="l">
+              <a:spcAft>
+                <a:spcPts val="400"/>
+              </a:spcAft>
+            </a:pPr>
+            <a:r>
+              <a:rPr sz="1200" b="0" i="0">
+                <a:solidFill>
+                  <a:srgbClr val="1C2833"/>
+                </a:solidFill>
+                <a:latin typeface="Malgun Gothic"/>
+              </a:rPr>
+              <a:t>①  앵커 · 배선 · 서버 같은 고정 설비 없이 지급된 단말만으로 동작 — 센터 공사 불필요</a:t>
+            </a:r>
+          </a:p>
+        </p:txBody>
+      </p:sp>
+      <p:sp>
+        <p:nvSpPr>
+          <p:cNvPr id="23" name="TextBox 22"/>
+          <p:cNvSpPr txBox="1"/>
+          <p:nvPr/>
+        </p:nvSpPr>
+        <p:spPr>
+          <a:xfrm>
+            <a:off x="868680" y="4471416"/>
+            <a:ext cx="10881360" cy="310896"/>
+          </a:xfrm>
+          <a:prstGeom prst="rect">
+            <a:avLst/>
+          </a:prstGeom>
+          <a:noFill/>
+        </p:spPr>
+        <p:txBody>
+          <a:bodyPr wrap="square" lIns="36576" rIns="36576" tIns="0" bIns="0">
+            <a:spAutoFit/>
+          </a:bodyPr>
+          <a:lstStyle/>
+          <a:p>
+            <a:pPr algn="l">
+              <a:spcAft>
+                <a:spcPts val="400"/>
+              </a:spcAft>
+            </a:pPr>
+            <a:r>
+              <a:rPr sz="1200" b="0" i="0">
+                <a:solidFill>
+                  <a:srgbClr val="1C2833"/>
+                </a:solidFill>
+                <a:latin typeface="Malgun Gothic"/>
+              </a:rPr>
+              <a:t>②  움직이는 주체끼리 직접 감지 — 설치 대수가 늘수록 감지 범위도 함께 넓어짐</a:t>
+            </a:r>
+          </a:p>
+        </p:txBody>
+      </p:sp>
+      <p:sp>
+        <p:nvSpPr>
+          <p:cNvPr id="24" name="TextBox 23"/>
+          <p:cNvSpPr txBox="1"/>
+          <p:nvPr/>
+        </p:nvSpPr>
+        <p:spPr>
+          <a:xfrm>
+            <a:off x="868680" y="4791456"/>
+            <a:ext cx="10881360" cy="310896"/>
+          </a:xfrm>
+          <a:prstGeom prst="rect">
+            <a:avLst/>
+          </a:prstGeom>
+          <a:noFill/>
+        </p:spPr>
+        <p:txBody>
+          <a:bodyPr wrap="square" lIns="36576" rIns="36576" tIns="0" bIns="0">
+            <a:spAutoFit/>
+          </a:bodyPr>
+          <a:lstStyle/>
+          <a:p>
+            <a:pPr algn="l">
+              <a:spcAft>
+                <a:spcPts val="400"/>
+              </a:spcAft>
+            </a:pPr>
+            <a:r>
+              <a:rPr sz="1200" b="0" i="0">
+                <a:solidFill>
+                  <a:srgbClr val="1C2833"/>
+                </a:solidFill>
+                <a:latin typeface="Malgun Gothic"/>
+              </a:rPr>
+              <a:t>③  v1.0.1 부터 3개월간 70회 이상 배포하며 현장에서 계속 다듬음</a:t>
+            </a:r>
+          </a:p>
+        </p:txBody>
+      </p:sp>
+      <p:sp>
+        <p:nvSpPr>
+          <p:cNvPr id="25" name="TextBox 24"/>
+          <p:cNvSpPr txBox="1"/>
+          <p:nvPr/>
+        </p:nvSpPr>
+        <p:spPr>
+          <a:xfrm>
+            <a:off x="640080" y="5230368"/>
+            <a:ext cx="10908792" cy="384048"/>
+          </a:xfrm>
+          <a:prstGeom prst="rect">
+            <a:avLst/>
+          </a:prstGeom>
+          <a:noFill/>
+        </p:spPr>
+        <p:txBody>
+          <a:bodyPr wrap="square" lIns="36576" rIns="36576" tIns="0" bIns="0">
+            <a:spAutoFit/>
+          </a:bodyPr>
+          <a:lstStyle/>
+          <a:p>
+            <a:pPr algn="ctr"/>
+            <a:r>
+              <a:rPr sz="1500" b="1" i="0">
+                <a:solidFill>
+                  <a:srgbClr val="C0392B"/>
+                </a:solidFill>
+                <a:latin typeface="Malgun Gothic"/>
+              </a:rPr>
+              <a:t>1. </a:t>
+            </a:r>
+            <a:r>
+              <a:rPr sz="1500" b="1" i="0">
+                <a:solidFill>
+                  <a:srgbClr val="1C2833"/>
+                </a:solidFill>
+                <a:latin typeface="Malgun Gothic"/>
+              </a:rPr>
+              <a:t>사각지대 해소      </a:t>
+            </a:r>
+            <a:r>
+              <a:rPr sz="1500" b="1" i="0">
+                <a:solidFill>
+                  <a:srgbClr val="C0392B"/>
+                </a:solidFill>
+                <a:latin typeface="Malgun Gothic"/>
+              </a:rPr>
+              <a:t>2. </a:t>
+            </a:r>
+            <a:r>
+              <a:rPr sz="1500" b="1" i="0">
+                <a:solidFill>
+                  <a:srgbClr val="1C2833"/>
+                </a:solidFill>
+                <a:latin typeface="Malgun Gothic"/>
+              </a:rPr>
+              <a:t>인프라 없는 확산      </a:t>
+            </a:r>
+            <a:r>
+              <a:rPr sz="1500" b="1" i="0">
+                <a:solidFill>
+                  <a:srgbClr val="C0392B"/>
+                </a:solidFill>
+                <a:latin typeface="Malgun Gothic"/>
+              </a:rPr>
+              <a:t>3. </a:t>
+            </a:r>
+            <a:r>
+              <a:rPr sz="1500" b="1" i="0">
+                <a:solidFill>
+                  <a:srgbClr val="1C2833"/>
+                </a:solidFill>
+                <a:latin typeface="Malgun Gothic"/>
+              </a:rPr>
+              <a:t>오경보 억제      </a:t>
+            </a:r>
+            <a:r>
+              <a:rPr sz="1500" b="1" i="0">
+                <a:solidFill>
+                  <a:srgbClr val="C0392B"/>
+                </a:solidFill>
+                <a:latin typeface="Malgun Gothic"/>
+              </a:rPr>
+              <a:t>4. </a:t>
+            </a:r>
+            <a:r>
+              <a:rPr sz="1500" b="1" i="0">
+                <a:solidFill>
+                  <a:srgbClr val="1C2833"/>
+                </a:solidFill>
+                <a:latin typeface="Malgun Gothic"/>
+              </a:rPr>
+              <a:t>조용한 실패 제거</a:t>
+            </a:r>
+          </a:p>
+        </p:txBody>
+      </p:sp>
+      <p:sp>
+        <p:nvSpPr>
+          <p:cNvPr id="26" name="TextBox 25"/>
+          <p:cNvSpPr txBox="1"/>
+          <p:nvPr/>
+        </p:nvSpPr>
+        <p:spPr>
+          <a:xfrm>
+            <a:off x="640080" y="5779008"/>
+            <a:ext cx="10908792" cy="365760"/>
+          </a:xfrm>
+          <a:prstGeom prst="rect">
+            <a:avLst/>
+          </a:prstGeom>
+          <a:noFill/>
+        </p:spPr>
+        <p:txBody>
+          <a:bodyPr wrap="square" lIns="36576" rIns="36576" tIns="0" bIns="0">
+            <a:spAutoFit/>
+          </a:bodyPr>
+          <a:lstStyle/>
+          <a:p>
+            <a:pPr algn="ctr"/>
+            <a:r>
+              <a:rPr sz="1150" b="0" i="1">
+                <a:solidFill>
+                  <a:srgbClr val="5D6D7E"/>
+                </a:solidFill>
+                <a:latin typeface="Malgun Gothic"/>
+              </a:rPr>
+              <a:t>“현장 안전은 아직 ‘보고 나서 피하기’에 기대고 있고, 보이지 않는 구간을 메우는 장치가 없습니다.”</a:t>
             </a:r>
           </a:p>
         </p:txBody>
@@ -4353,7 +4709,7 @@
         <p:spPr>
           <a:xfrm>
             <a:off x="636390" y="928122"/>
-            <a:ext cx="11342595" cy="5486400"/>
+            <a:ext cx="11342595" cy="3980770"/>
           </a:xfrm>
           <a:prstGeom prst="rect">
             <a:avLst/>
@@ -4389,286 +4745,12 @@
                 <a:spcPct val="150000"/>
               </a:lnSpc>
             </a:pPr>
-            <a:r>
-              <a:rPr lang="en-US" altLang="ko-KR" sz="1400" dirty="0">
-                <a:solidFill>
-                  <a:schemeClr val="tx1"/>
-                </a:solidFill>
-                <a:latin typeface="+mn-ea"/>
-                <a:ea typeface="+mn-ea"/>
-              </a:rPr>
-              <a:t xml:space="preserve">1) 만들면서 기대한 것</a:t>
-            </a:r>
             <a:endParaRPr lang="en-US" altLang="ko-KR" sz="1400" dirty="0">
               <a:solidFill>
                 <a:schemeClr val="tx1"/>
               </a:solidFill>
               <a:latin typeface="+mn-ea"/>
               <a:ea typeface="+mn-ea"/>
-            </a:endParaRPr>
-          </a:p>
-          <a:p>
-            <a:pPr>
-              <a:lnSpc>
-                <a:spcPct val="150000"/>
-              </a:lnSpc>
-            </a:pPr>
-            <a:r>
-              <a:rPr lang="en-US" altLang="ko-KR" sz="1400" dirty="0">
-                <a:solidFill>
-                  <a:schemeClr val="tx1"/>
-                </a:solidFill>
-                <a:latin typeface="+mn-ea"/>
-              </a:rPr>
-              <a:t xml:space="preserve">  ① 사각지대 접촉 위험 감소</a:t>
-            </a:r>
-            <a:endParaRPr lang="en-US" altLang="ko-KR" sz="1400" dirty="0">
-              <a:solidFill>
-                <a:schemeClr val="tx1"/>
-              </a:solidFill>
-              <a:latin typeface="+mn-ea"/>
-            </a:endParaRPr>
-          </a:p>
-          <a:p>
-            <a:pPr>
-              <a:lnSpc>
-                <a:spcPct val="150000"/>
-              </a:lnSpc>
-            </a:pPr>
-            <a:r>
-              <a:rPr lang="ko-KR" altLang="en-US" sz="1200" b="0" dirty="0">
-                <a:solidFill>
-                  <a:schemeClr val="tx1"/>
-                </a:solidFill>
-                <a:latin typeface="+mn-ea"/>
-              </a:rPr>
-              <a:t xml:space="preserve">    → 육안으로 확인되지 않는 구간을 소리 · 진동 · 화면으로 보완</a:t>
-            </a:r>
-            <a:endParaRPr lang="en-US" altLang="ko-KR" sz="1200" b="0" dirty="0">
-              <a:solidFill>
-                <a:schemeClr val="tx1"/>
-              </a:solidFill>
-              <a:latin typeface="+mn-ea"/>
-            </a:endParaRPr>
-          </a:p>
-          <a:p>
-            <a:pPr>
-              <a:lnSpc>
-                <a:spcPct val="150000"/>
-              </a:lnSpc>
-            </a:pPr>
-            <a:r>
-              <a:rPr lang="en-US" altLang="ko-KR" sz="1400" dirty="0">
-                <a:solidFill>
-                  <a:schemeClr val="tx1"/>
-                </a:solidFill>
-                <a:latin typeface="+mn-ea"/>
-              </a:rPr>
-              <a:t xml:space="preserve">  ② 인프라 투자 없이 즉시 적용</a:t>
-            </a:r>
-            <a:endParaRPr lang="en-US" altLang="ko-KR" sz="1400" dirty="0">
-              <a:solidFill>
-                <a:schemeClr val="tx1"/>
-              </a:solidFill>
-              <a:latin typeface="+mn-ea"/>
-            </a:endParaRPr>
-          </a:p>
-          <a:p>
-            <a:pPr>
-              <a:lnSpc>
-                <a:spcPct val="150000"/>
-              </a:lnSpc>
-            </a:pPr>
-            <a:r>
-              <a:rPr lang="ko-KR" altLang="en-US" sz="1200" b="0" dirty="0">
-                <a:solidFill>
-                  <a:schemeClr val="tx1"/>
-                </a:solidFill>
-                <a:latin typeface="+mn-ea"/>
-              </a:rPr>
-              <a:t xml:space="preserve">    → 앱 설치만으로 시작, 센터 공사 불필요</a:t>
-            </a:r>
-            <a:endParaRPr lang="en-US" altLang="ko-KR" sz="1200" b="0" dirty="0">
-              <a:solidFill>
-                <a:schemeClr val="tx1"/>
-              </a:solidFill>
-              <a:latin typeface="+mn-ea"/>
-            </a:endParaRPr>
-          </a:p>
-          <a:p>
-            <a:pPr>
-              <a:lnSpc>
-                <a:spcPct val="150000"/>
-              </a:lnSpc>
-            </a:pPr>
-            <a:r>
-              <a:rPr lang="en-US" altLang="ko-KR" sz="1400" dirty="0">
-                <a:solidFill>
-                  <a:schemeClr val="tx1"/>
-                </a:solidFill>
-                <a:latin typeface="+mn-ea"/>
-              </a:rPr>
-              <a:t xml:space="preserve">  ③ 확산할수록 커지는 효과</a:t>
-            </a:r>
-            <a:endParaRPr lang="en-US" altLang="ko-KR" sz="1400" dirty="0">
-              <a:solidFill>
-                <a:schemeClr val="tx1"/>
-              </a:solidFill>
-              <a:latin typeface="+mn-ea"/>
-            </a:endParaRPr>
-          </a:p>
-          <a:p>
-            <a:pPr>
-              <a:lnSpc>
-                <a:spcPct val="150000"/>
-              </a:lnSpc>
-            </a:pPr>
-            <a:r>
-              <a:rPr lang="ko-KR" altLang="en-US" sz="1200" b="0" dirty="0">
-                <a:solidFill>
-                  <a:schemeClr val="tx1"/>
-                </a:solidFill>
-                <a:latin typeface="+mn-ea"/>
-              </a:rPr>
-              <a:t xml:space="preserve">    → 단말이 늘면 상호 감지쌍이 배로 늘어남 (오른쪽 도식)</a:t>
-            </a:r>
-            <a:endParaRPr lang="en-US" altLang="ko-KR" sz="1200" b="0" dirty="0">
-              <a:solidFill>
-                <a:schemeClr val="tx1"/>
-              </a:solidFill>
-              <a:latin typeface="+mn-ea"/>
-            </a:endParaRPr>
-          </a:p>
-          <a:p>
-            <a:pPr>
-              <a:lnSpc>
-                <a:spcPct val="150000"/>
-              </a:lnSpc>
-            </a:pPr>
-            <a:r>
-              <a:rPr lang="en-US" altLang="ko-KR" sz="1400" dirty="0">
-                <a:solidFill>
-                  <a:schemeClr val="tx1"/>
-                </a:solidFill>
-                <a:latin typeface="+mn-ea"/>
-              </a:rPr>
-              <a:t xml:space="preserve">  ④ 센터별 조건 대응</a:t>
-            </a:r>
-            <a:endParaRPr lang="en-US" altLang="ko-KR" sz="1400" dirty="0">
-              <a:solidFill>
-                <a:schemeClr val="tx1"/>
-              </a:solidFill>
-              <a:latin typeface="+mn-ea"/>
-            </a:endParaRPr>
-          </a:p>
-          <a:p>
-            <a:pPr>
-              <a:lnSpc>
-                <a:spcPct val="150000"/>
-              </a:lnSpc>
-            </a:pPr>
-            <a:r>
-              <a:rPr lang="ko-KR" altLang="en-US" sz="1200" b="0" dirty="0">
-                <a:solidFill>
-                  <a:schemeClr val="tx1"/>
-                </a:solidFill>
-                <a:latin typeface="+mn-ea"/>
-              </a:rPr>
-              <a:t xml:space="preserve">    → 렉 높이 · 적재물이 다른 센터마다 판정 반경과 신호 임계를 설정으로 조정</a:t>
-            </a:r>
-            <a:endParaRPr lang="en-US" altLang="ko-KR" sz="1200" b="0" dirty="0">
-              <a:solidFill>
-                <a:schemeClr val="tx1"/>
-              </a:solidFill>
-              <a:latin typeface="+mn-ea"/>
-            </a:endParaRPr>
-          </a:p>
-          <a:p>
-            <a:pPr>
-              <a:lnSpc>
-                <a:spcPct val="150000"/>
-              </a:lnSpc>
-            </a:pPr>
-            <a:r>
-              <a:rPr lang="en-US" altLang="ko-KR" sz="1400" dirty="0">
-                <a:solidFill>
-                  <a:schemeClr val="tx1"/>
-                </a:solidFill>
-                <a:latin typeface="+mn-ea"/>
-              </a:rPr>
-              <a:t xml:space="preserve">  ⑤ 안전 규정 준수 보조</a:t>
-            </a:r>
-            <a:endParaRPr lang="en-US" altLang="ko-KR" sz="1400" dirty="0">
-              <a:solidFill>
-                <a:schemeClr val="tx1"/>
-              </a:solidFill>
-              <a:latin typeface="+mn-ea"/>
-            </a:endParaRPr>
-          </a:p>
-          <a:p>
-            <a:pPr>
-              <a:lnSpc>
-                <a:spcPct val="150000"/>
-              </a:lnSpc>
-            </a:pPr>
-            <a:r>
-              <a:rPr lang="ko-KR" altLang="en-US" sz="1200" b="0" dirty="0">
-                <a:solidFill>
-                  <a:schemeClr val="tx1"/>
-                </a:solidFill>
-                <a:latin typeface="+mn-ea"/>
-              </a:rPr>
-              <a:t xml:space="preserve">    → 후진 · 하역 중인 장비가 접근하면 즉시 최고 등급으로 경보</a:t>
-            </a:r>
-            <a:endParaRPr lang="en-US" altLang="ko-KR" sz="1200" b="0" dirty="0">
-              <a:solidFill>
-                <a:schemeClr val="tx1"/>
-              </a:solidFill>
-              <a:latin typeface="+mn-ea"/>
-            </a:endParaRPr>
-          </a:p>
-          <a:p>
-            <a:pPr>
-              <a:lnSpc>
-                <a:spcPct val="150000"/>
-              </a:lnSpc>
-            </a:pPr>
-            <a:r>
-              <a:rPr lang="en-US" altLang="ko-KR" sz="1400" dirty="0">
-                <a:solidFill>
-                  <a:schemeClr val="tx1"/>
-                </a:solidFill>
-                <a:latin typeface="+mn-ea"/>
-              </a:rPr>
-              <a:t xml:space="preserve">  ⑥ 경보 피로 방지</a:t>
-            </a:r>
-            <a:endParaRPr lang="en-US" altLang="ko-KR" sz="1400" dirty="0">
-              <a:solidFill>
-                <a:schemeClr val="tx1"/>
-              </a:solidFill>
-              <a:latin typeface="+mn-ea"/>
-            </a:endParaRPr>
-          </a:p>
-          <a:p>
-            <a:pPr>
-              <a:lnSpc>
-                <a:spcPct val="150000"/>
-              </a:lnSpc>
-            </a:pPr>
-            <a:r>
-              <a:rPr lang="ko-KR" altLang="en-US" sz="1200" b="0" dirty="0">
-                <a:solidFill>
-                  <a:schemeClr val="tx1"/>
-                </a:solidFill>
-                <a:latin typeface="+mn-ea"/>
-              </a:rPr>
-              <a:t xml:space="preserve">    → 울릴 필요가 없는 구역과 상황에서는 울리지 않도록 설계</a:t>
-            </a:r>
-            <a:endParaRPr lang="en-US" altLang="ko-KR" sz="1200" b="0" dirty="0">
-              <a:solidFill>
-                <a:schemeClr val="tx1"/>
-              </a:solidFill>
-              <a:latin typeface="+mn-ea"/>
             </a:endParaRPr>
           </a:p>
         </p:txBody>
@@ -4740,9 +4822,1006 @@
           </a:p>
         </p:txBody>
       </p:sp>
+      <p:sp>
+        <p:nvSpPr>
+          <p:cNvPr id="13" name="Rectangle 12"/>
+          <p:cNvSpPr/>
+          <p:nvPr/>
+        </p:nvSpPr>
+        <p:spPr>
+          <a:xfrm>
+            <a:off x="640080" y="1024128"/>
+            <a:ext cx="1600200" cy="301752"/>
+          </a:xfrm>
+          <a:prstGeom prst="rect">
+            <a:avLst/>
+          </a:prstGeom>
+          <a:solidFill>
+            <a:srgbClr val="8C8C8C"/>
+          </a:solidFill>
+          <a:ln>
+            <a:noFill/>
+          </a:ln>
+          <a:effectLst/>
+        </p:spPr>
+        <p:style>
+          <a:lnRef idx="1">
+            <a:schemeClr val="accent1"/>
+          </a:lnRef>
+          <a:fillRef idx="3">
+            <a:schemeClr val="accent1"/>
+          </a:fillRef>
+          <a:effectRef idx="2">
+            <a:schemeClr val="accent1"/>
+          </a:effectRef>
+          <a:fontRef idx="minor">
+            <a:schemeClr val="lt1"/>
+          </a:fontRef>
+        </p:style>
+        <p:txBody>
+          <a:bodyPr rtlCol="0" anchor="ctr" wrap="square" lIns="36576" rIns="36576" tIns="0" bIns="0"/>
+          <a:lstStyle/>
+          <a:p>
+            <a:pPr algn="ctr"/>
+            <a:r>
+              <a:rPr sz="1100" b="1" i="0">
+                <a:solidFill>
+                  <a:srgbClr val="FFFFFF"/>
+                </a:solidFill>
+                <a:latin typeface="Malgun Gothic"/>
+              </a:rPr>
+              <a:t>As-is / To-be</a:t>
+            </a:r>
+          </a:p>
+        </p:txBody>
+      </p:sp>
+      <p:graphicFrame>
+        <p:nvGraphicFramePr>
+          <p:cNvPr id="14" name="Table 13"/>
+          <p:cNvGraphicFramePr>
+            <a:graphicFrameLocks noGrp="1"/>
+          </p:cNvGraphicFramePr>
+          <p:nvPr/>
+        </p:nvGraphicFramePr>
+        <p:xfrm>
+          <a:off x="658368" y="1463040"/>
+          <a:ext cx="11064240" cy="3346704"/>
+        </p:xfrm>
+        <a:graphic>
+          <a:graphicData uri="http://schemas.openxmlformats.org/drawingml/2006/table">
+            <a:tbl>
+              <a:tblPr firstRow="1" bandRow="0">
+                <a:tableStyleId>{5C22544A-7EE6-4342-B048-85BDC9FD1C3A}</a:tableStyleId>
+              </a:tblPr>
+              <a:tblGrid>
+                <a:gridCol w="1417320"/>
+                <a:gridCol w="4434840"/>
+                <a:gridCol w="5212080"/>
+              </a:tblGrid>
+              <a:tr h="329184">
+                <a:tc>
+                  <a:txBody>
+                    <a:bodyPr/>
+                    <a:lstStyle/>
+                    <a:p>
+                      <a:pPr algn="ctr"/>
+                      <a:r>
+                        <a:rPr sz="1100" b="1" i="0">
+                          <a:solidFill>
+                            <a:srgbClr val="FFFFFF"/>
+                          </a:solidFill>
+                          <a:latin typeface="Malgun Gothic"/>
+                        </a:rPr>
+                        <a:t>구분</a:t>
+                      </a:r>
+                    </a:p>
+                  </a:txBody>
+                  <a:tcPr marL="73152" marR="73152" marT="0" marB="0" anchor="ctr">
+                    <a:lnB w="9525" cap="flat" cmpd="sng" algn="ctr">
+                      <a:solidFill>
+                        <a:srgbClr val="333B45"/>
+                      </a:solidFill>
+                    </a:lnB>
+                    <a:lnT w="9525" cap="flat" cmpd="sng" algn="ctr">
+                      <a:solidFill>
+                        <a:srgbClr val="333B45"/>
+                      </a:solidFill>
+                    </a:lnT>
+                    <a:lnR w="9525" cap="flat" cmpd="sng" algn="ctr">
+                      <a:solidFill>
+                        <a:srgbClr val="333B45"/>
+                      </a:solidFill>
+                    </a:lnR>
+                    <a:lnL w="9525" cap="flat" cmpd="sng" algn="ctr">
+                      <a:solidFill>
+                        <a:srgbClr val="333B45"/>
+                      </a:solidFill>
+                    </a:lnL>
+                    <a:solidFill>
+                      <a:srgbClr val="333B45"/>
+                    </a:solidFill>
+                  </a:tcPr>
+                </a:tc>
+                <a:tc>
+                  <a:txBody>
+                    <a:bodyPr/>
+                    <a:lstStyle/>
+                    <a:p>
+                      <a:pPr algn="ctr"/>
+                      <a:r>
+                        <a:rPr sz="1100" b="1" i="0">
+                          <a:solidFill>
+                            <a:srgbClr val="FFFFFF"/>
+                          </a:solidFill>
+                          <a:latin typeface="Malgun Gothic"/>
+                        </a:rPr>
+                        <a:t>As-is</a:t>
+                      </a:r>
+                    </a:p>
+                  </a:txBody>
+                  <a:tcPr marL="73152" marR="73152" marT="0" marB="0" anchor="ctr">
+                    <a:lnB w="9525" cap="flat" cmpd="sng" algn="ctr">
+                      <a:solidFill>
+                        <a:srgbClr val="333B45"/>
+                      </a:solidFill>
+                    </a:lnB>
+                    <a:lnT w="9525" cap="flat" cmpd="sng" algn="ctr">
+                      <a:solidFill>
+                        <a:srgbClr val="333B45"/>
+                      </a:solidFill>
+                    </a:lnT>
+                    <a:lnR w="9525" cap="flat" cmpd="sng" algn="ctr">
+                      <a:solidFill>
+                        <a:srgbClr val="333B45"/>
+                      </a:solidFill>
+                    </a:lnR>
+                    <a:lnL w="9525" cap="flat" cmpd="sng" algn="ctr">
+                      <a:solidFill>
+                        <a:srgbClr val="333B45"/>
+                      </a:solidFill>
+                    </a:lnL>
+                    <a:solidFill>
+                      <a:srgbClr val="333B45"/>
+                    </a:solidFill>
+                  </a:tcPr>
+                </a:tc>
+                <a:tc>
+                  <a:txBody>
+                    <a:bodyPr/>
+                    <a:lstStyle/>
+                    <a:p>
+                      <a:pPr algn="ctr"/>
+                      <a:r>
+                        <a:rPr sz="1100" b="1" i="0">
+                          <a:solidFill>
+                            <a:srgbClr val="FFFFFF"/>
+                          </a:solidFill>
+                          <a:latin typeface="Malgun Gothic"/>
+                        </a:rPr>
+                        <a:t>To-be</a:t>
+                      </a:r>
+                    </a:p>
+                  </a:txBody>
+                  <a:tcPr marL="73152" marR="73152" marT="0" marB="0" anchor="ctr">
+                    <a:lnB w="9525" cap="flat" cmpd="sng" algn="ctr">
+                      <a:solidFill>
+                        <a:srgbClr val="333B45"/>
+                      </a:solidFill>
+                    </a:lnB>
+                    <a:lnT w="9525" cap="flat" cmpd="sng" algn="ctr">
+                      <a:solidFill>
+                        <a:srgbClr val="333B45"/>
+                      </a:solidFill>
+                    </a:lnT>
+                    <a:lnR w="9525" cap="flat" cmpd="sng" algn="ctr">
+                      <a:solidFill>
+                        <a:srgbClr val="333B45"/>
+                      </a:solidFill>
+                    </a:lnR>
+                    <a:lnL w="9525" cap="flat" cmpd="sng" algn="ctr">
+                      <a:solidFill>
+                        <a:srgbClr val="333B45"/>
+                      </a:solidFill>
+                    </a:lnL>
+                    <a:solidFill>
+                      <a:srgbClr val="333B45"/>
+                    </a:solidFill>
+                  </a:tcPr>
+                </a:tc>
+              </a:tr>
+              <a:tr h="502920">
+                <a:tc>
+                  <a:txBody>
+                    <a:bodyPr/>
+                    <a:lstStyle/>
+                    <a:p>
+                      <a:pPr algn="l"/>
+                      <a:r>
+                        <a:rPr sz="1150" b="1" i="0">
+                          <a:solidFill>
+                            <a:srgbClr val="1C2833"/>
+                          </a:solidFill>
+                          <a:latin typeface="Malgun Gothic"/>
+                        </a:rPr>
+                        <a:t>감지</a:t>
+                      </a:r>
+                    </a:p>
+                  </a:txBody>
+                  <a:tcPr marL="73152" marR="73152" marT="18288" marB="18288" anchor="ctr">
+                    <a:lnB w="9525" cap="flat" cmpd="sng" algn="ctr">
+                      <a:solidFill>
+                        <a:srgbClr val="D5DBDB"/>
+                      </a:solidFill>
+                    </a:lnB>
+                    <a:lnT w="9525" cap="flat" cmpd="sng" algn="ctr">
+                      <a:solidFill>
+                        <a:srgbClr val="FFFFFF"/>
+                      </a:solidFill>
+                    </a:lnT>
+                    <a:lnR w="9525" cap="flat" cmpd="sng" algn="ctr">
+                      <a:solidFill>
+                        <a:srgbClr val="FFFFFF"/>
+                      </a:solidFill>
+                    </a:lnR>
+                    <a:lnL w="9525" cap="flat" cmpd="sng" algn="ctr">
+                      <a:solidFill>
+                        <a:srgbClr val="FFFFFF"/>
+                      </a:solidFill>
+                    </a:lnL>
+                    <a:solidFill>
+                      <a:srgbClr val="FFFFFF"/>
+                    </a:solidFill>
+                  </a:tcPr>
+                </a:tc>
+                <a:tc>
+                  <a:txBody>
+                    <a:bodyPr/>
+                    <a:lstStyle/>
+                    <a:p>
+                      <a:pPr algn="l"/>
+                      <a:r>
+                        <a:rPr sz="1150" b="0" i="0">
+                          <a:solidFill>
+                            <a:srgbClr val="1C2833"/>
+                          </a:solidFill>
+                          <a:latin typeface="Malgun Gothic"/>
+                        </a:rPr>
+                        <a:t>사람의 주의력에만 의존</a:t>
+                      </a:r>
+                    </a:p>
+                  </a:txBody>
+                  <a:tcPr marL="73152" marR="73152" marT="18288" marB="18288" anchor="ctr">
+                    <a:lnB w="9525" cap="flat" cmpd="sng" algn="ctr">
+                      <a:solidFill>
+                        <a:srgbClr val="D5DBDB"/>
+                      </a:solidFill>
+                    </a:lnB>
+                    <a:lnT w="9525" cap="flat" cmpd="sng" algn="ctr">
+                      <a:solidFill>
+                        <a:srgbClr val="FFFFFF"/>
+                      </a:solidFill>
+                    </a:lnT>
+                    <a:lnR w="9525" cap="flat" cmpd="sng" algn="ctr">
+                      <a:solidFill>
+                        <a:srgbClr val="FFFFFF"/>
+                      </a:solidFill>
+                    </a:lnR>
+                    <a:lnL w="9525" cap="flat" cmpd="sng" algn="ctr">
+                      <a:solidFill>
+                        <a:srgbClr val="FFFFFF"/>
+                      </a:solidFill>
+                    </a:lnL>
+                    <a:solidFill>
+                      <a:srgbClr val="FFFFFF"/>
+                    </a:solidFill>
+                  </a:tcPr>
+                </a:tc>
+                <a:tc>
+                  <a:txBody>
+                    <a:bodyPr/>
+                    <a:lstStyle/>
+                    <a:p>
+                      <a:pPr algn="l"/>
+                      <a:r>
+                        <a:rPr sz="1150" b="0" i="0">
+                          <a:solidFill>
+                            <a:srgbClr val="1C2833"/>
+                          </a:solidFill>
+                          <a:latin typeface="Malgun Gothic"/>
+                        </a:rPr>
+                        <a:t>소리 · 진동 · 화면 3중 경보로 보완</a:t>
+                      </a:r>
+                    </a:p>
+                  </a:txBody>
+                  <a:tcPr marL="73152" marR="73152" marT="18288" marB="18288" anchor="ctr">
+                    <a:lnB w="9525" cap="flat" cmpd="sng" algn="ctr">
+                      <a:solidFill>
+                        <a:srgbClr val="D5DBDB"/>
+                      </a:solidFill>
+                    </a:lnB>
+                    <a:lnT w="9525" cap="flat" cmpd="sng" algn="ctr">
+                      <a:solidFill>
+                        <a:srgbClr val="FFFFFF"/>
+                      </a:solidFill>
+                    </a:lnT>
+                    <a:lnR w="9525" cap="flat" cmpd="sng" algn="ctr">
+                      <a:solidFill>
+                        <a:srgbClr val="FFFFFF"/>
+                      </a:solidFill>
+                    </a:lnR>
+                    <a:lnL w="9525" cap="flat" cmpd="sng" algn="ctr">
+                      <a:solidFill>
+                        <a:srgbClr val="FFFFFF"/>
+                      </a:solidFill>
+                    </a:lnL>
+                    <a:solidFill>
+                      <a:srgbClr val="FFFFFF"/>
+                    </a:solidFill>
+                  </a:tcPr>
+                </a:tc>
+              </a:tr>
+              <a:tr h="502920">
+                <a:tc>
+                  <a:txBody>
+                    <a:bodyPr/>
+                    <a:lstStyle/>
+                    <a:p>
+                      <a:pPr algn="l"/>
+                      <a:r>
+                        <a:rPr sz="1150" b="1" i="0">
+                          <a:solidFill>
+                            <a:srgbClr val="1C2833"/>
+                          </a:solidFill>
+                          <a:latin typeface="Malgun Gothic"/>
+                        </a:rPr>
+                        <a:t>도입</a:t>
+                      </a:r>
+                    </a:p>
+                  </a:txBody>
+                  <a:tcPr marL="73152" marR="73152" marT="18288" marB="18288" anchor="ctr">
+                    <a:lnB w="9525" cap="flat" cmpd="sng" algn="ctr">
+                      <a:solidFill>
+                        <a:srgbClr val="D5DBDB"/>
+                      </a:solidFill>
+                    </a:lnB>
+                    <a:lnT w="9525" cap="flat" cmpd="sng" algn="ctr">
+                      <a:solidFill>
+                        <a:srgbClr val="FFFFFF"/>
+                      </a:solidFill>
+                    </a:lnT>
+                    <a:lnR w="9525" cap="flat" cmpd="sng" algn="ctr">
+                      <a:solidFill>
+                        <a:srgbClr val="FFFFFF"/>
+                      </a:solidFill>
+                    </a:lnR>
+                    <a:lnL w="9525" cap="flat" cmpd="sng" algn="ctr">
+                      <a:solidFill>
+                        <a:srgbClr val="FFFFFF"/>
+                      </a:solidFill>
+                    </a:lnL>
+                    <a:solidFill>
+                      <a:srgbClr val="FFFFFF"/>
+                    </a:solidFill>
+                  </a:tcPr>
+                </a:tc>
+                <a:tc>
+                  <a:txBody>
+                    <a:bodyPr/>
+                    <a:lstStyle/>
+                    <a:p>
+                      <a:pPr algn="l"/>
+                      <a:r>
+                        <a:rPr sz="1150" b="0" i="0">
+                          <a:solidFill>
+                            <a:srgbClr val="1C2833"/>
+                          </a:solidFill>
+                          <a:latin typeface="Malgun Gothic"/>
+                        </a:rPr>
+                        <a:t>안전 설비를 깔려면 센터 공사가 필요</a:t>
+                      </a:r>
+                    </a:p>
+                  </a:txBody>
+                  <a:tcPr marL="73152" marR="73152" marT="18288" marB="18288" anchor="ctr">
+                    <a:lnB w="9525" cap="flat" cmpd="sng" algn="ctr">
+                      <a:solidFill>
+                        <a:srgbClr val="D5DBDB"/>
+                      </a:solidFill>
+                    </a:lnB>
+                    <a:lnT w="9525" cap="flat" cmpd="sng" algn="ctr">
+                      <a:solidFill>
+                        <a:srgbClr val="FFFFFF"/>
+                      </a:solidFill>
+                    </a:lnT>
+                    <a:lnR w="9525" cap="flat" cmpd="sng" algn="ctr">
+                      <a:solidFill>
+                        <a:srgbClr val="FFFFFF"/>
+                      </a:solidFill>
+                    </a:lnR>
+                    <a:lnL w="9525" cap="flat" cmpd="sng" algn="ctr">
+                      <a:solidFill>
+                        <a:srgbClr val="FFFFFF"/>
+                      </a:solidFill>
+                    </a:lnL>
+                    <a:solidFill>
+                      <a:srgbClr val="FFFFFF"/>
+                    </a:solidFill>
+                  </a:tcPr>
+                </a:tc>
+                <a:tc>
+                  <a:txBody>
+                    <a:bodyPr/>
+                    <a:lstStyle/>
+                    <a:p>
+                      <a:pPr algn="l"/>
+                      <a:r>
+                        <a:rPr sz="1150" b="0" i="0">
+                          <a:solidFill>
+                            <a:srgbClr val="1C2833"/>
+                          </a:solidFill>
+                          <a:latin typeface="Malgun Gothic"/>
+                        </a:rPr>
+                        <a:t>앱 설치만으로 즉시 적용</a:t>
+                      </a:r>
+                    </a:p>
+                  </a:txBody>
+                  <a:tcPr marL="73152" marR="73152" marT="18288" marB="18288" anchor="ctr">
+                    <a:lnB w="9525" cap="flat" cmpd="sng" algn="ctr">
+                      <a:solidFill>
+                        <a:srgbClr val="D5DBDB"/>
+                      </a:solidFill>
+                    </a:lnB>
+                    <a:lnT w="9525" cap="flat" cmpd="sng" algn="ctr">
+                      <a:solidFill>
+                        <a:srgbClr val="FFFFFF"/>
+                      </a:solidFill>
+                    </a:lnT>
+                    <a:lnR w="9525" cap="flat" cmpd="sng" algn="ctr">
+                      <a:solidFill>
+                        <a:srgbClr val="FFFFFF"/>
+                      </a:solidFill>
+                    </a:lnR>
+                    <a:lnL w="9525" cap="flat" cmpd="sng" algn="ctr">
+                      <a:solidFill>
+                        <a:srgbClr val="FFFFFF"/>
+                      </a:solidFill>
+                    </a:lnL>
+                    <a:solidFill>
+                      <a:srgbClr val="FFFFFF"/>
+                    </a:solidFill>
+                  </a:tcPr>
+                </a:tc>
+              </a:tr>
+              <a:tr h="502920">
+                <a:tc>
+                  <a:txBody>
+                    <a:bodyPr/>
+                    <a:lstStyle/>
+                    <a:p>
+                      <a:pPr algn="l"/>
+                      <a:r>
+                        <a:rPr sz="1150" b="1" i="0">
+                          <a:solidFill>
+                            <a:srgbClr val="1C2833"/>
+                          </a:solidFill>
+                          <a:latin typeface="Malgun Gothic"/>
+                        </a:rPr>
+                        <a:t>확산</a:t>
+                      </a:r>
+                    </a:p>
+                  </a:txBody>
+                  <a:tcPr marL="73152" marR="73152" marT="18288" marB="18288" anchor="ctr">
+                    <a:lnB w="9525" cap="flat" cmpd="sng" algn="ctr">
+                      <a:solidFill>
+                        <a:srgbClr val="D5DBDB"/>
+                      </a:solidFill>
+                    </a:lnB>
+                    <a:lnT w="9525" cap="flat" cmpd="sng" algn="ctr">
+                      <a:solidFill>
+                        <a:srgbClr val="FFFFFF"/>
+                      </a:solidFill>
+                    </a:lnT>
+                    <a:lnR w="9525" cap="flat" cmpd="sng" algn="ctr">
+                      <a:solidFill>
+                        <a:srgbClr val="FFFFFF"/>
+                      </a:solidFill>
+                    </a:lnR>
+                    <a:lnL w="9525" cap="flat" cmpd="sng" algn="ctr">
+                      <a:solidFill>
+                        <a:srgbClr val="FFFFFF"/>
+                      </a:solidFill>
+                    </a:lnL>
+                    <a:solidFill>
+                      <a:srgbClr val="FFFFFF"/>
+                    </a:solidFill>
+                  </a:tcPr>
+                </a:tc>
+                <a:tc>
+                  <a:txBody>
+                    <a:bodyPr/>
+                    <a:lstStyle/>
+                    <a:p>
+                      <a:pPr algn="l"/>
+                      <a:r>
+                        <a:rPr sz="1150" b="0" i="0">
+                          <a:solidFill>
+                            <a:srgbClr val="1C2833"/>
+                          </a:solidFill>
+                          <a:latin typeface="Malgun Gothic"/>
+                        </a:rPr>
+                        <a:t>장비를 늘려도 감지 범위는 그대로</a:t>
+                      </a:r>
+                    </a:p>
+                  </a:txBody>
+                  <a:tcPr marL="73152" marR="73152" marT="18288" marB="18288" anchor="ctr">
+                    <a:lnB w="9525" cap="flat" cmpd="sng" algn="ctr">
+                      <a:solidFill>
+                        <a:srgbClr val="D5DBDB"/>
+                      </a:solidFill>
+                    </a:lnB>
+                    <a:lnT w="9525" cap="flat" cmpd="sng" algn="ctr">
+                      <a:solidFill>
+                        <a:srgbClr val="FFFFFF"/>
+                      </a:solidFill>
+                    </a:lnT>
+                    <a:lnR w="9525" cap="flat" cmpd="sng" algn="ctr">
+                      <a:solidFill>
+                        <a:srgbClr val="FFFFFF"/>
+                      </a:solidFill>
+                    </a:lnR>
+                    <a:lnL w="9525" cap="flat" cmpd="sng" algn="ctr">
+                      <a:solidFill>
+                        <a:srgbClr val="FFFFFF"/>
+                      </a:solidFill>
+                    </a:lnL>
+                    <a:solidFill>
+                      <a:srgbClr val="FFFFFF"/>
+                    </a:solidFill>
+                  </a:tcPr>
+                </a:tc>
+                <a:tc>
+                  <a:txBody>
+                    <a:bodyPr/>
+                    <a:lstStyle/>
+                    <a:p>
+                      <a:pPr algn="l"/>
+                      <a:r>
+                        <a:rPr sz="1150" b="0" i="0">
+                          <a:solidFill>
+                            <a:srgbClr val="1C2833"/>
+                          </a:solidFill>
+                          <a:latin typeface="Malgun Gothic"/>
+                        </a:rPr>
+                        <a:t>단말이 늘수록 감지쌍이 배로 (3대 3쌍 → 10대 45쌍)</a:t>
+                      </a:r>
+                    </a:p>
+                  </a:txBody>
+                  <a:tcPr marL="73152" marR="73152" marT="18288" marB="18288" anchor="ctr">
+                    <a:lnB w="9525" cap="flat" cmpd="sng" algn="ctr">
+                      <a:solidFill>
+                        <a:srgbClr val="D5DBDB"/>
+                      </a:solidFill>
+                    </a:lnB>
+                    <a:lnT w="9525" cap="flat" cmpd="sng" algn="ctr">
+                      <a:solidFill>
+                        <a:srgbClr val="FFFFFF"/>
+                      </a:solidFill>
+                    </a:lnT>
+                    <a:lnR w="9525" cap="flat" cmpd="sng" algn="ctr">
+                      <a:solidFill>
+                        <a:srgbClr val="FFFFFF"/>
+                      </a:solidFill>
+                    </a:lnR>
+                    <a:lnL w="9525" cap="flat" cmpd="sng" algn="ctr">
+                      <a:solidFill>
+                        <a:srgbClr val="FFFFFF"/>
+                      </a:solidFill>
+                    </a:lnL>
+                    <a:solidFill>
+                      <a:srgbClr val="FFFFFF"/>
+                    </a:solidFill>
+                  </a:tcPr>
+                </a:tc>
+              </a:tr>
+              <a:tr h="502920">
+                <a:tc>
+                  <a:txBody>
+                    <a:bodyPr/>
+                    <a:lstStyle/>
+                    <a:p>
+                      <a:pPr algn="l"/>
+                      <a:r>
+                        <a:rPr sz="1150" b="1" i="0">
+                          <a:solidFill>
+                            <a:srgbClr val="1C2833"/>
+                          </a:solidFill>
+                          <a:latin typeface="Malgun Gothic"/>
+                        </a:rPr>
+                        <a:t>센터 차이</a:t>
+                      </a:r>
+                    </a:p>
+                  </a:txBody>
+                  <a:tcPr marL="73152" marR="73152" marT="18288" marB="18288" anchor="ctr">
+                    <a:lnB w="9525" cap="flat" cmpd="sng" algn="ctr">
+                      <a:solidFill>
+                        <a:srgbClr val="D5DBDB"/>
+                      </a:solidFill>
+                    </a:lnB>
+                    <a:lnT w="9525" cap="flat" cmpd="sng" algn="ctr">
+                      <a:solidFill>
+                        <a:srgbClr val="FFFFFF"/>
+                      </a:solidFill>
+                    </a:lnT>
+                    <a:lnR w="9525" cap="flat" cmpd="sng" algn="ctr">
+                      <a:solidFill>
+                        <a:srgbClr val="FFFFFF"/>
+                      </a:solidFill>
+                    </a:lnR>
+                    <a:lnL w="9525" cap="flat" cmpd="sng" algn="ctr">
+                      <a:solidFill>
+                        <a:srgbClr val="FFFFFF"/>
+                      </a:solidFill>
+                    </a:lnL>
+                    <a:solidFill>
+                      <a:srgbClr val="FFFFFF"/>
+                    </a:solidFill>
+                  </a:tcPr>
+                </a:tc>
+                <a:tc>
+                  <a:txBody>
+                    <a:bodyPr/>
+                    <a:lstStyle/>
+                    <a:p>
+                      <a:pPr algn="l"/>
+                      <a:r>
+                        <a:rPr sz="1150" b="0" i="0">
+                          <a:solidFill>
+                            <a:srgbClr val="1C2833"/>
+                          </a:solidFill>
+                          <a:latin typeface="Malgun Gothic"/>
+                        </a:rPr>
+                        <a:t>센터마다 다른 조건에 대응 못 함</a:t>
+                      </a:r>
+                    </a:p>
+                  </a:txBody>
+                  <a:tcPr marL="73152" marR="73152" marT="18288" marB="18288" anchor="ctr">
+                    <a:lnB w="9525" cap="flat" cmpd="sng" algn="ctr">
+                      <a:solidFill>
+                        <a:srgbClr val="D5DBDB"/>
+                      </a:solidFill>
+                    </a:lnB>
+                    <a:lnT w="9525" cap="flat" cmpd="sng" algn="ctr">
+                      <a:solidFill>
+                        <a:srgbClr val="FFFFFF"/>
+                      </a:solidFill>
+                    </a:lnT>
+                    <a:lnR w="9525" cap="flat" cmpd="sng" algn="ctr">
+                      <a:solidFill>
+                        <a:srgbClr val="FFFFFF"/>
+                      </a:solidFill>
+                    </a:lnR>
+                    <a:lnL w="9525" cap="flat" cmpd="sng" algn="ctr">
+                      <a:solidFill>
+                        <a:srgbClr val="FFFFFF"/>
+                      </a:solidFill>
+                    </a:lnL>
+                    <a:solidFill>
+                      <a:srgbClr val="FFFFFF"/>
+                    </a:solidFill>
+                  </a:tcPr>
+                </a:tc>
+                <a:tc>
+                  <a:txBody>
+                    <a:bodyPr/>
+                    <a:lstStyle/>
+                    <a:p>
+                      <a:pPr algn="l"/>
+                      <a:r>
+                        <a:rPr sz="1150" b="0" i="0">
+                          <a:solidFill>
+                            <a:srgbClr val="1C2833"/>
+                          </a:solidFill>
+                          <a:latin typeface="Malgun Gothic"/>
+                        </a:rPr>
+                        <a:t>판정 반경 · 신호 임계를 설정으로 조정</a:t>
+                      </a:r>
+                    </a:p>
+                  </a:txBody>
+                  <a:tcPr marL="73152" marR="73152" marT="18288" marB="18288" anchor="ctr">
+                    <a:lnB w="9525" cap="flat" cmpd="sng" algn="ctr">
+                      <a:solidFill>
+                        <a:srgbClr val="D5DBDB"/>
+                      </a:solidFill>
+                    </a:lnB>
+                    <a:lnT w="9525" cap="flat" cmpd="sng" algn="ctr">
+                      <a:solidFill>
+                        <a:srgbClr val="FFFFFF"/>
+                      </a:solidFill>
+                    </a:lnT>
+                    <a:lnR w="9525" cap="flat" cmpd="sng" algn="ctr">
+                      <a:solidFill>
+                        <a:srgbClr val="FFFFFF"/>
+                      </a:solidFill>
+                    </a:lnR>
+                    <a:lnL w="9525" cap="flat" cmpd="sng" algn="ctr">
+                      <a:solidFill>
+                        <a:srgbClr val="FFFFFF"/>
+                      </a:solidFill>
+                    </a:lnL>
+                    <a:solidFill>
+                      <a:srgbClr val="FFFFFF"/>
+                    </a:solidFill>
+                  </a:tcPr>
+                </a:tc>
+              </a:tr>
+              <a:tr h="502920">
+                <a:tc>
+                  <a:txBody>
+                    <a:bodyPr/>
+                    <a:lstStyle/>
+                    <a:p>
+                      <a:pPr algn="l"/>
+                      <a:r>
+                        <a:rPr sz="1150" b="1" i="0">
+                          <a:solidFill>
+                            <a:srgbClr val="1C2833"/>
+                          </a:solidFill>
+                          <a:latin typeface="Malgun Gothic"/>
+                        </a:rPr>
+                        <a:t>후진 · 하역</a:t>
+                      </a:r>
+                    </a:p>
+                  </a:txBody>
+                  <a:tcPr marL="73152" marR="73152" marT="18288" marB="18288" anchor="ctr">
+                    <a:lnB w="9525" cap="flat" cmpd="sng" algn="ctr">
+                      <a:solidFill>
+                        <a:srgbClr val="D5DBDB"/>
+                      </a:solidFill>
+                    </a:lnB>
+                    <a:lnT w="9525" cap="flat" cmpd="sng" algn="ctr">
+                      <a:solidFill>
+                        <a:srgbClr val="FFFFFF"/>
+                      </a:solidFill>
+                    </a:lnT>
+                    <a:lnR w="9525" cap="flat" cmpd="sng" algn="ctr">
+                      <a:solidFill>
+                        <a:srgbClr val="FFFFFF"/>
+                      </a:solidFill>
+                    </a:lnR>
+                    <a:lnL w="9525" cap="flat" cmpd="sng" algn="ctr">
+                      <a:solidFill>
+                        <a:srgbClr val="FFFFFF"/>
+                      </a:solidFill>
+                    </a:lnL>
+                    <a:solidFill>
+                      <a:srgbClr val="FFFFFF"/>
+                    </a:solidFill>
+                  </a:tcPr>
+                </a:tc>
+                <a:tc>
+                  <a:txBody>
+                    <a:bodyPr/>
+                    <a:lstStyle/>
+                    <a:p>
+                      <a:pPr algn="l"/>
+                      <a:r>
+                        <a:rPr sz="1150" b="0" i="0">
+                          <a:solidFill>
+                            <a:srgbClr val="1C2833"/>
+                          </a:solidFill>
+                          <a:latin typeface="Malgun Gothic"/>
+                        </a:rPr>
+                        <a:t>접근을 육안으로만 확인</a:t>
+                      </a:r>
+                    </a:p>
+                  </a:txBody>
+                  <a:tcPr marL="73152" marR="73152" marT="18288" marB="18288" anchor="ctr">
+                    <a:lnB w="9525" cap="flat" cmpd="sng" algn="ctr">
+                      <a:solidFill>
+                        <a:srgbClr val="D5DBDB"/>
+                      </a:solidFill>
+                    </a:lnB>
+                    <a:lnT w="9525" cap="flat" cmpd="sng" algn="ctr">
+                      <a:solidFill>
+                        <a:srgbClr val="FFFFFF"/>
+                      </a:solidFill>
+                    </a:lnT>
+                    <a:lnR w="9525" cap="flat" cmpd="sng" algn="ctr">
+                      <a:solidFill>
+                        <a:srgbClr val="FFFFFF"/>
+                      </a:solidFill>
+                    </a:lnR>
+                    <a:lnL w="9525" cap="flat" cmpd="sng" algn="ctr">
+                      <a:solidFill>
+                        <a:srgbClr val="FFFFFF"/>
+                      </a:solidFill>
+                    </a:lnL>
+                    <a:solidFill>
+                      <a:srgbClr val="FFFFFF"/>
+                    </a:solidFill>
+                  </a:tcPr>
+                </a:tc>
+                <a:tc>
+                  <a:txBody>
+                    <a:bodyPr/>
+                    <a:lstStyle/>
+                    <a:p>
+                      <a:pPr algn="l"/>
+                      <a:r>
+                        <a:rPr sz="1150" b="0" i="0">
+                          <a:solidFill>
+                            <a:srgbClr val="1C2833"/>
+                          </a:solidFill>
+                          <a:latin typeface="Malgun Gothic"/>
+                        </a:rPr>
+                        <a:t>거리와 무관하게 즉시 최고 등급으로 경보</a:t>
+                      </a:r>
+                    </a:p>
+                  </a:txBody>
+                  <a:tcPr marL="73152" marR="73152" marT="18288" marB="18288" anchor="ctr">
+                    <a:lnB w="9525" cap="flat" cmpd="sng" algn="ctr">
+                      <a:solidFill>
+                        <a:srgbClr val="D5DBDB"/>
+                      </a:solidFill>
+                    </a:lnB>
+                    <a:lnT w="9525" cap="flat" cmpd="sng" algn="ctr">
+                      <a:solidFill>
+                        <a:srgbClr val="FFFFFF"/>
+                      </a:solidFill>
+                    </a:lnT>
+                    <a:lnR w="9525" cap="flat" cmpd="sng" algn="ctr">
+                      <a:solidFill>
+                        <a:srgbClr val="FFFFFF"/>
+                      </a:solidFill>
+                    </a:lnR>
+                    <a:lnL w="9525" cap="flat" cmpd="sng" algn="ctr">
+                      <a:solidFill>
+                        <a:srgbClr val="FFFFFF"/>
+                      </a:solidFill>
+                    </a:lnL>
+                    <a:solidFill>
+                      <a:srgbClr val="FFFFFF"/>
+                    </a:solidFill>
+                  </a:tcPr>
+                </a:tc>
+              </a:tr>
+              <a:tr h="502920">
+                <a:tc>
+                  <a:txBody>
+                    <a:bodyPr/>
+                    <a:lstStyle/>
+                    <a:p>
+                      <a:pPr algn="l"/>
+                      <a:r>
+                        <a:rPr sz="1150" b="1" i="0">
+                          <a:solidFill>
+                            <a:srgbClr val="1C2833"/>
+                          </a:solidFill>
+                          <a:latin typeface="Malgun Gothic"/>
+                        </a:rPr>
+                        <a:t>경보 피로</a:t>
+                      </a:r>
+                    </a:p>
+                  </a:txBody>
+                  <a:tcPr marL="73152" marR="73152" marT="18288" marB="18288" anchor="ctr">
+                    <a:lnB w="9525" cap="flat" cmpd="sng" algn="ctr">
+                      <a:solidFill>
+                        <a:srgbClr val="D5DBDB"/>
+                      </a:solidFill>
+                    </a:lnB>
+                    <a:lnT w="9525" cap="flat" cmpd="sng" algn="ctr">
+                      <a:solidFill>
+                        <a:srgbClr val="FFFFFF"/>
+                      </a:solidFill>
+                    </a:lnT>
+                    <a:lnR w="9525" cap="flat" cmpd="sng" algn="ctr">
+                      <a:solidFill>
+                        <a:srgbClr val="FFFFFF"/>
+                      </a:solidFill>
+                    </a:lnR>
+                    <a:lnL w="9525" cap="flat" cmpd="sng" algn="ctr">
+                      <a:solidFill>
+                        <a:srgbClr val="FFFFFF"/>
+                      </a:solidFill>
+                    </a:lnL>
+                    <a:solidFill>
+                      <a:srgbClr val="FFFFFF"/>
+                    </a:solidFill>
+                  </a:tcPr>
+                </a:tc>
+                <a:tc>
+                  <a:txBody>
+                    <a:bodyPr/>
+                    <a:lstStyle/>
+                    <a:p>
+                      <a:pPr algn="l"/>
+                      <a:r>
+                        <a:rPr sz="1150" b="0" i="0">
+                          <a:solidFill>
+                            <a:srgbClr val="1C2833"/>
+                          </a:solidFill>
+                          <a:latin typeface="Malgun Gothic"/>
+                        </a:rPr>
+                        <a:t>잦으면 작업자가 꺼버림</a:t>
+                      </a:r>
+                    </a:p>
+                  </a:txBody>
+                  <a:tcPr marL="73152" marR="73152" marT="18288" marB="18288" anchor="ctr">
+                    <a:lnB w="9525" cap="flat" cmpd="sng" algn="ctr">
+                      <a:solidFill>
+                        <a:srgbClr val="D5DBDB"/>
+                      </a:solidFill>
+                    </a:lnB>
+                    <a:lnT w="9525" cap="flat" cmpd="sng" algn="ctr">
+                      <a:solidFill>
+                        <a:srgbClr val="FFFFFF"/>
+                      </a:solidFill>
+                    </a:lnT>
+                    <a:lnR w="9525" cap="flat" cmpd="sng" algn="ctr">
+                      <a:solidFill>
+                        <a:srgbClr val="FFFFFF"/>
+                      </a:solidFill>
+                    </a:lnR>
+                    <a:lnL w="9525" cap="flat" cmpd="sng" algn="ctr">
+                      <a:solidFill>
+                        <a:srgbClr val="FFFFFF"/>
+                      </a:solidFill>
+                    </a:lnL>
+                    <a:solidFill>
+                      <a:srgbClr val="FFFFFF"/>
+                    </a:solidFill>
+                  </a:tcPr>
+                </a:tc>
+                <a:tc>
+                  <a:txBody>
+                    <a:bodyPr/>
+                    <a:lstStyle/>
+                    <a:p>
+                      <a:pPr algn="l"/>
+                      <a:r>
+                        <a:rPr sz="1150" b="0" i="0">
+                          <a:solidFill>
+                            <a:srgbClr val="1C2833"/>
+                          </a:solidFill>
+                          <a:latin typeface="Malgun Gothic"/>
+                        </a:rPr>
+                        <a:t>세이프존 · 자동 음소거로 울릴 곳에서만</a:t>
+                      </a:r>
+                    </a:p>
+                  </a:txBody>
+                  <a:tcPr marL="73152" marR="73152" marT="18288" marB="18288" anchor="ctr">
+                    <a:lnB w="9525" cap="flat" cmpd="sng" algn="ctr">
+                      <a:solidFill>
+                        <a:srgbClr val="D5DBDB"/>
+                      </a:solidFill>
+                    </a:lnB>
+                    <a:lnT w="9525" cap="flat" cmpd="sng" algn="ctr">
+                      <a:solidFill>
+                        <a:srgbClr val="FFFFFF"/>
+                      </a:solidFill>
+                    </a:lnT>
+                    <a:lnR w="9525" cap="flat" cmpd="sng" algn="ctr">
+                      <a:solidFill>
+                        <a:srgbClr val="FFFFFF"/>
+                      </a:solidFill>
+                    </a:lnR>
+                    <a:lnL w="9525" cap="flat" cmpd="sng" algn="ctr">
+                      <a:solidFill>
+                        <a:srgbClr val="FFFFFF"/>
+                      </a:solidFill>
+                    </a:lnL>
+                    <a:solidFill>
+                      <a:srgbClr val="FFFFFF"/>
+                    </a:solidFill>
+                  </a:tcPr>
+                </a:tc>
+              </a:tr>
+            </a:tbl>
+          </a:graphicData>
+        </a:graphic>
+      </p:graphicFrame>
       <p:pic>
         <p:nvPicPr>
-          <p:cNvPr id="13" name="Picture 12" descr="fig_pairs.png"/>
+          <p:cNvPr id="15" name="Picture 14" descr="fig_pairs.png"/>
           <p:cNvPicPr>
             <a:picLocks noChangeAspect="1"/>
           </p:cNvPicPr>
@@ -4756,48 +5835,14 @@
         </p:blipFill>
         <p:spPr>
           <a:xfrm>
-            <a:off x="7882127" y="2103120"/>
-            <a:ext cx="3913632" cy="1494491"/>
+            <a:off x="4261104" y="4864608"/>
+            <a:ext cx="3657600" cy="1396720"/>
           </a:xfrm>
           <a:prstGeom prst="rect">
             <a:avLst/>
           </a:prstGeom>
         </p:spPr>
       </p:pic>
-      <p:sp>
-        <p:nvSpPr>
-          <p:cNvPr id="14" name="TextBox 13"/>
-          <p:cNvSpPr txBox="1"/>
-          <p:nvPr/>
-        </p:nvSpPr>
-        <p:spPr>
-          <a:xfrm>
-            <a:off x="7882127" y="3707339"/>
-            <a:ext cx="3913632" cy="548640"/>
-          </a:xfrm>
-          <a:prstGeom prst="rect">
-            <a:avLst/>
-          </a:prstGeom>
-          <a:noFill/>
-        </p:spPr>
-        <p:txBody>
-          <a:bodyPr wrap="square">
-            <a:spAutoFit/>
-          </a:bodyPr>
-          <a:lstStyle/>
-          <a:p>
-            <a:pPr algn="ctr"/>
-            <a:r>
-              <a:rPr sz="1050">
-                <a:solidFill>
-                  <a:srgbClr val="5D6D7E"/>
-                </a:solidFill>
-              </a:rPr>
-              <a:t>단말 수가 늘면 상호 감지쌍은 더 빨리 늘어난다</a:t>
-            </a:r>
-          </a:p>
-        </p:txBody>
-      </p:sp>
     </p:spTree>
     <p:extLst>
       <p:ext uri="{BB962C8B-B14F-4D97-AF65-F5344CB8AC3E}">
@@ -4851,7 +5896,7 @@
         <p:spPr>
           <a:xfrm>
             <a:off x="636390" y="928122"/>
-            <a:ext cx="11342595" cy="5486400"/>
+            <a:ext cx="11342595" cy="3980770"/>
           </a:xfrm>
           <a:prstGeom prst="rect">
             <a:avLst/>
@@ -4887,334 +5932,12 @@
                 <a:spcPct val="150000"/>
               </a:lnSpc>
             </a:pPr>
-            <a:r>
-              <a:rPr lang="en-US" altLang="ko-KR" sz="1400" dirty="0">
-                <a:solidFill>
-                  <a:schemeClr val="tx1"/>
-                </a:solidFill>
-                <a:latin typeface="+mn-ea"/>
-                <a:ea typeface="+mn-ea"/>
-              </a:rPr>
-              <a:t xml:space="preserve">1) 장점</a:t>
-            </a:r>
             <a:endParaRPr lang="en-US" altLang="ko-KR" sz="1400" dirty="0">
               <a:solidFill>
                 <a:schemeClr val="tx1"/>
               </a:solidFill>
               <a:latin typeface="+mn-ea"/>
               <a:ea typeface="+mn-ea"/>
-            </a:endParaRPr>
-          </a:p>
-          <a:p>
-            <a:pPr>
-              <a:lnSpc>
-                <a:spcPct val="150000"/>
-              </a:lnSpc>
-            </a:pPr>
-            <a:r>
-              <a:rPr lang="en-US" altLang="ko-KR" sz="1400" dirty="0">
-                <a:solidFill>
-                  <a:schemeClr val="tx1"/>
-                </a:solidFill>
-                <a:latin typeface="+mn-ea"/>
-              </a:rPr>
-              <a:t xml:space="preserve">  ① 고정 설비가 필요 없음 — 앱 설치만으로 동작</a:t>
-            </a:r>
-            <a:endParaRPr lang="en-US" altLang="ko-KR" sz="1400" dirty="0">
-              <a:solidFill>
-                <a:schemeClr val="tx1"/>
-              </a:solidFill>
-              <a:latin typeface="+mn-ea"/>
-            </a:endParaRPr>
-          </a:p>
-          <a:p>
-            <a:pPr>
-              <a:lnSpc>
-                <a:spcPct val="150000"/>
-              </a:lnSpc>
-            </a:pPr>
-            <a:r>
-              <a:rPr lang="en-US" altLang="ko-KR" sz="1400" dirty="0">
-                <a:solidFill>
-                  <a:schemeClr val="tx1"/>
-                </a:solidFill>
-                <a:latin typeface="+mn-ea"/>
-              </a:rPr>
-              <a:t xml:space="preserve">  ② 역할 조합별 차등 반경 (오른쪽 도식)</a:t>
-            </a:r>
-            <a:endParaRPr lang="en-US" altLang="ko-KR" sz="1400" dirty="0">
-              <a:solidFill>
-                <a:schemeClr val="tx1"/>
-              </a:solidFill>
-              <a:latin typeface="+mn-ea"/>
-            </a:endParaRPr>
-          </a:p>
-          <a:p>
-            <a:pPr>
-              <a:lnSpc>
-                <a:spcPct val="150000"/>
-              </a:lnSpc>
-            </a:pPr>
-            <a:r>
-              <a:rPr lang="ko-KR" altLang="en-US" sz="1200" b="0" dirty="0">
-                <a:solidFill>
-                  <a:schemeClr val="tx1"/>
-                </a:solidFill>
-                <a:latin typeface="+mn-ea"/>
-              </a:rPr>
-              <a:t xml:space="preserve">    → FC 대비 감지 범위를 두 배로 책정</a:t>
-            </a:r>
-            <a:endParaRPr lang="en-US" altLang="ko-KR" sz="1200" b="0" dirty="0">
-              <a:solidFill>
-                <a:schemeClr val="tx1"/>
-              </a:solidFill>
-              <a:latin typeface="+mn-ea"/>
-            </a:endParaRPr>
-          </a:p>
-          <a:p>
-            <a:pPr>
-              <a:lnSpc>
-                <a:spcPct val="150000"/>
-              </a:lnSpc>
-            </a:pPr>
-            <a:r>
-              <a:rPr lang="en-US" altLang="ko-KR" sz="1400" dirty="0">
-                <a:solidFill>
-                  <a:schemeClr val="tx1"/>
-                </a:solidFill>
-                <a:latin typeface="+mn-ea"/>
-              </a:rPr>
-              <a:t xml:space="preserve">  ③ 3중 경보 — 소리 · 진동 · 화면 사이드바를 동시에 출력</a:t>
-            </a:r>
-            <a:endParaRPr lang="en-US" altLang="ko-KR" sz="1400" dirty="0">
-              <a:solidFill>
-                <a:schemeClr val="tx1"/>
-              </a:solidFill>
-              <a:latin typeface="+mn-ea"/>
-            </a:endParaRPr>
-          </a:p>
-          <a:p>
-            <a:pPr>
-              <a:lnSpc>
-                <a:spcPct val="150000"/>
-              </a:lnSpc>
-            </a:pPr>
-            <a:r>
-              <a:rPr lang="en-US" altLang="ko-KR" sz="1400" dirty="0">
-                <a:solidFill>
-                  <a:schemeClr val="tx1"/>
-                </a:solidFill>
-                <a:latin typeface="+mn-ea"/>
-              </a:rPr>
-              <a:t xml:space="preserve">  ④ 화면을 꺼도 상시 동작하고, 감지가 멈추면 그 사실 자체를 알림으로 표시</a:t>
-            </a:r>
-            <a:endParaRPr lang="en-US" altLang="ko-KR" sz="1400" dirty="0">
-              <a:solidFill>
-                <a:schemeClr val="tx1"/>
-              </a:solidFill>
-              <a:latin typeface="+mn-ea"/>
-            </a:endParaRPr>
-          </a:p>
-          <a:p>
-            <a:pPr>
-              <a:lnSpc>
-                <a:spcPct val="150000"/>
-              </a:lnSpc>
-            </a:pPr>
-            <a:r>
-              <a:rPr lang="en-US" altLang="ko-KR" sz="1400" dirty="0">
-                <a:solidFill>
-                  <a:schemeClr val="tx1"/>
-                </a:solidFill>
-                <a:latin typeface="+mn-ea"/>
-              </a:rPr>
-              <a:t xml:space="preserve">  ⑤ 구버전 기기와 통신 유지 — 신버전 배포가 기존 기기를 무력화하지 않음</a:t>
-            </a:r>
-            <a:endParaRPr lang="en-US" altLang="ko-KR" sz="1400" dirty="0">
-              <a:solidFill>
-                <a:schemeClr val="tx1"/>
-              </a:solidFill>
-              <a:latin typeface="+mn-ea"/>
-            </a:endParaRPr>
-          </a:p>
-          <a:p>
-            <a:pPr>
-              <a:lnSpc>
-                <a:spcPct val="150000"/>
-              </a:lnSpc>
-            </a:pPr>
-            <a:r>
-              <a:rPr lang="en-US" altLang="ko-KR" sz="1400" dirty="0">
-                <a:solidFill>
-                  <a:schemeClr val="tx1"/>
-                </a:solidFill>
-                <a:latin typeface="+mn-ea"/>
-                <a:ea typeface="+mn-ea"/>
-              </a:rPr>
-              <a:t xml:space="preserve"> </a:t>
-            </a:r>
-            <a:endParaRPr lang="en-US" altLang="ko-KR" sz="1400" dirty="0">
-              <a:solidFill>
-                <a:schemeClr val="tx1"/>
-              </a:solidFill>
-              <a:latin typeface="+mn-ea"/>
-              <a:ea typeface="+mn-ea"/>
-            </a:endParaRPr>
-          </a:p>
-          <a:p>
-            <a:pPr>
-              <a:lnSpc>
-                <a:spcPct val="150000"/>
-              </a:lnSpc>
-            </a:pPr>
-            <a:r>
-              <a:rPr lang="en-US" altLang="ko-KR" sz="1400" dirty="0">
-                <a:solidFill>
-                  <a:schemeClr val="tx1"/>
-                </a:solidFill>
-                <a:latin typeface="+mn-ea"/>
-                <a:ea typeface="+mn-ea"/>
-              </a:rPr>
-              <a:t xml:space="preserve">2) 단점</a:t>
-            </a:r>
-            <a:endParaRPr lang="en-US" altLang="ko-KR" sz="1400" dirty="0">
-              <a:solidFill>
-                <a:schemeClr val="tx1"/>
-              </a:solidFill>
-              <a:latin typeface="+mn-ea"/>
-              <a:ea typeface="+mn-ea"/>
-            </a:endParaRPr>
-          </a:p>
-          <a:p>
-            <a:pPr>
-              <a:lnSpc>
-                <a:spcPct val="150000"/>
-              </a:lnSpc>
-            </a:pPr>
-            <a:r>
-              <a:rPr lang="en-US" altLang="ko-KR" sz="1400" dirty="0">
-                <a:solidFill>
-                  <a:schemeClr val="tx1"/>
-                </a:solidFill>
-                <a:latin typeface="+mn-ea"/>
-              </a:rPr>
-              <a:t xml:space="preserve">  ① 신호 세기로 거리를 추정해 환경에 흔들림</a:t>
-            </a:r>
-            <a:endParaRPr lang="en-US" altLang="ko-KR" sz="1400" dirty="0">
-              <a:solidFill>
-                <a:schemeClr val="tx1"/>
-              </a:solidFill>
-              <a:latin typeface="+mn-ea"/>
-            </a:endParaRPr>
-          </a:p>
-          <a:p>
-            <a:pPr>
-              <a:lnSpc>
-                <a:spcPct val="150000"/>
-              </a:lnSpc>
-            </a:pPr>
-            <a:r>
-              <a:rPr lang="ko-KR" altLang="en-US" sz="1200" b="0" dirty="0">
-                <a:solidFill>
-                  <a:schemeClr val="tx1"/>
-                </a:solidFill>
-                <a:latin typeface="+mn-ea"/>
-              </a:rPr>
-              <a:t xml:space="preserve">    → 적재물 · 차체가 전파를 가리면 오차. 센터별 보정값으로 완화</a:t>
-            </a:r>
-            <a:endParaRPr lang="en-US" altLang="ko-KR" sz="1200" b="0" dirty="0">
-              <a:solidFill>
-                <a:schemeClr val="tx1"/>
-              </a:solidFill>
-              <a:latin typeface="+mn-ea"/>
-            </a:endParaRPr>
-          </a:p>
-          <a:p>
-            <a:pPr>
-              <a:lnSpc>
-                <a:spcPct val="150000"/>
-              </a:lnSpc>
-            </a:pPr>
-            <a:r>
-              <a:rPr lang="en-US" altLang="ko-KR" sz="1400" dirty="0">
-                <a:solidFill>
-                  <a:schemeClr val="tx1"/>
-                </a:solidFill>
-                <a:latin typeface="+mn-ea"/>
-              </a:rPr>
-              <a:t xml:space="preserve">  ② 기기가 밀집하면 화면 반응이 느려짐 (20대 이상)</a:t>
-            </a:r>
-            <a:endParaRPr lang="en-US" altLang="ko-KR" sz="1400" dirty="0">
-              <a:solidFill>
-                <a:schemeClr val="tx1"/>
-              </a:solidFill>
-              <a:latin typeface="+mn-ea"/>
-            </a:endParaRPr>
-          </a:p>
-          <a:p>
-            <a:pPr>
-              <a:lnSpc>
-                <a:spcPct val="150000"/>
-              </a:lnSpc>
-            </a:pPr>
-            <a:r>
-              <a:rPr lang="en-US" altLang="ko-KR" sz="1400" dirty="0">
-                <a:solidFill>
-                  <a:schemeClr val="tx1"/>
-                </a:solidFill>
-                <a:latin typeface="+mn-ea"/>
-              </a:rPr>
-              <a:t xml:space="preserve">  ③ 앱이 설치된 기기끼리만 감지 — 미설치 인원 · 장비는 보이지 않음</a:t>
-            </a:r>
-            <a:endParaRPr lang="en-US" altLang="ko-KR" sz="1400" dirty="0">
-              <a:solidFill>
-                <a:schemeClr val="tx1"/>
-              </a:solidFill>
-              <a:latin typeface="+mn-ea"/>
-            </a:endParaRPr>
-          </a:p>
-          <a:p>
-            <a:pPr>
-              <a:lnSpc>
-                <a:spcPct val="150000"/>
-              </a:lnSpc>
-            </a:pPr>
-            <a:r>
-              <a:rPr lang="en-US" altLang="ko-KR" sz="1400" dirty="0">
-                <a:solidFill>
-                  <a:schemeClr val="tx1"/>
-                </a:solidFill>
-                <a:latin typeface="+mn-ea"/>
-              </a:rPr>
-              <a:t xml:space="preserve">  ④ 단말마다 송수신 감도가 달라 한쪽만 먼저 감지하는 경우가 있음</a:t>
-            </a:r>
-            <a:endParaRPr lang="en-US" altLang="ko-KR" sz="1400" dirty="0">
-              <a:solidFill>
-                <a:schemeClr val="tx1"/>
-              </a:solidFill>
-              <a:latin typeface="+mn-ea"/>
-            </a:endParaRPr>
-          </a:p>
-          <a:p>
-            <a:pPr>
-              <a:lnSpc>
-                <a:spcPct val="150000"/>
-              </a:lnSpc>
-            </a:pPr>
-            <a:r>
-              <a:rPr lang="ko-KR" altLang="en-US" sz="1200" b="0" dirty="0">
-                <a:solidFill>
-                  <a:schemeClr val="tx1"/>
-                </a:solidFill>
-                <a:latin typeface="+mn-ea"/>
-              </a:rPr>
-              <a:t xml:space="preserve">    → 상대가 보낸 위험도를 받아 내 등급을 올리는 방식으로 보완</a:t>
-            </a:r>
-            <a:endParaRPr lang="en-US" altLang="ko-KR" sz="1200" b="0" dirty="0">
-              <a:solidFill>
-                <a:schemeClr val="tx1"/>
-              </a:solidFill>
-              <a:latin typeface="+mn-ea"/>
             </a:endParaRPr>
           </a:p>
         </p:txBody>
@@ -5286,9 +6009,610 @@
           </a:p>
         </p:txBody>
       </p:sp>
+      <p:sp>
+        <p:nvSpPr>
+          <p:cNvPr id="13" name="Rectangle 12"/>
+          <p:cNvSpPr/>
+          <p:nvPr/>
+        </p:nvSpPr>
+        <p:spPr>
+          <a:xfrm>
+            <a:off x="640080" y="1024128"/>
+            <a:ext cx="1234440" cy="301752"/>
+          </a:xfrm>
+          <a:prstGeom prst="rect">
+            <a:avLst/>
+          </a:prstGeom>
+          <a:solidFill>
+            <a:srgbClr val="8C8C8C"/>
+          </a:solidFill>
+          <a:ln>
+            <a:noFill/>
+          </a:ln>
+          <a:effectLst/>
+        </p:spPr>
+        <p:style>
+          <a:lnRef idx="1">
+            <a:schemeClr val="accent1"/>
+          </a:lnRef>
+          <a:fillRef idx="3">
+            <a:schemeClr val="accent1"/>
+          </a:fillRef>
+          <a:effectRef idx="2">
+            <a:schemeClr val="accent1"/>
+          </a:effectRef>
+          <a:fontRef idx="minor">
+            <a:schemeClr val="lt1"/>
+          </a:fontRef>
+        </p:style>
+        <p:txBody>
+          <a:bodyPr rtlCol="0" anchor="ctr" wrap="square" lIns="36576" rIns="36576" tIns="0" bIns="0"/>
+          <a:lstStyle/>
+          <a:p>
+            <a:pPr algn="ctr"/>
+            <a:r>
+              <a:rPr sz="1100" b="1" i="0">
+                <a:solidFill>
+                  <a:srgbClr val="FFFFFF"/>
+                </a:solidFill>
+                <a:latin typeface="Malgun Gothic"/>
+              </a:rPr>
+              <a:t>Tradeoffs</a:t>
+            </a:r>
+          </a:p>
+        </p:txBody>
+      </p:sp>
+      <p:sp>
+        <p:nvSpPr>
+          <p:cNvPr id="14" name="TextBox 13"/>
+          <p:cNvSpPr txBox="1"/>
+          <p:nvPr/>
+        </p:nvSpPr>
+        <p:spPr>
+          <a:xfrm>
+            <a:off x="777240" y="1481328"/>
+            <a:ext cx="4160520" cy="822960"/>
+          </a:xfrm>
+          <a:prstGeom prst="rect">
+            <a:avLst/>
+          </a:prstGeom>
+          <a:noFill/>
+        </p:spPr>
+        <p:txBody>
+          <a:bodyPr wrap="square" lIns="36576" rIns="36576" tIns="0" bIns="0">
+            <a:spAutoFit/>
+          </a:bodyPr>
+          <a:lstStyle/>
+          <a:p>
+            <a:pPr algn="l">
+              <a:spcAft>
+                <a:spcPts val="300"/>
+              </a:spcAft>
+            </a:pPr>
+            <a:r>
+              <a:rPr sz="1250" b="1" i="0">
+                <a:solidFill>
+                  <a:srgbClr val="1C2833"/>
+                </a:solidFill>
+                <a:latin typeface="Malgun Gothic"/>
+              </a:rPr>
+              <a:t>고정 설비 vs. 앱만으로</a:t>
+            </a:r>
+          </a:p>
+          <a:p>
+            <a:pPr algn="l">
+              <a:spcAft>
+                <a:spcPts val="300"/>
+              </a:spcAft>
+            </a:pPr>
+            <a:r>
+              <a:rPr sz="1150" b="1" i="0">
+                <a:solidFill>
+                  <a:srgbClr val="C0392B"/>
+                </a:solidFill>
+                <a:latin typeface="Malgun Gothic"/>
+              </a:rPr>
+              <a:t>앱 설치만으로 동작 → 즉시 적용 우선</a:t>
+            </a:r>
+          </a:p>
+        </p:txBody>
+      </p:sp>
+      <p:sp>
+        <p:nvSpPr>
+          <p:cNvPr id="15" name="Right Arrow 14"/>
+          <p:cNvSpPr/>
+          <p:nvPr/>
+        </p:nvSpPr>
+        <p:spPr>
+          <a:xfrm>
+            <a:off x="5138928" y="1609344"/>
+            <a:ext cx="777240" cy="347472"/>
+          </a:xfrm>
+          <a:prstGeom prst="rightArrow">
+            <a:avLst/>
+          </a:prstGeom>
+          <a:solidFill>
+            <a:srgbClr val="C7CCD1"/>
+          </a:solidFill>
+          <a:ln>
+            <a:noFill/>
+          </a:ln>
+          <a:effectLst/>
+        </p:spPr>
+        <p:style>
+          <a:lnRef idx="1">
+            <a:schemeClr val="accent1"/>
+          </a:lnRef>
+          <a:fillRef idx="3">
+            <a:schemeClr val="accent1"/>
+          </a:fillRef>
+          <a:effectRef idx="2">
+            <a:schemeClr val="accent1"/>
+          </a:effectRef>
+          <a:fontRef idx="minor">
+            <a:schemeClr val="lt1"/>
+          </a:fontRef>
+        </p:style>
+        <p:txBody>
+          <a:bodyPr rtlCol="0" anchor="ctr"/>
+          <a:lstStyle/>
+          <a:p>
+            <a:pPr algn="ctr"/>
+          </a:p>
+        </p:txBody>
+      </p:sp>
+      <p:sp>
+        <p:nvSpPr>
+          <p:cNvPr id="16" name="TextBox 15"/>
+          <p:cNvSpPr txBox="1"/>
+          <p:nvPr/>
+        </p:nvSpPr>
+        <p:spPr>
+          <a:xfrm>
+            <a:off x="6144768" y="1499616"/>
+            <a:ext cx="5623560" cy="822960"/>
+          </a:xfrm>
+          <a:prstGeom prst="rect">
+            <a:avLst/>
+          </a:prstGeom>
+          <a:noFill/>
+        </p:spPr>
+        <p:txBody>
+          <a:bodyPr wrap="square" lIns="36576" rIns="36576" tIns="0" bIns="0">
+            <a:spAutoFit/>
+          </a:bodyPr>
+          <a:lstStyle/>
+          <a:p>
+            <a:pPr algn="l">
+              <a:spcAft>
+                <a:spcPts val="400"/>
+              </a:spcAft>
+            </a:pPr>
+            <a:r>
+              <a:rPr sz="1150" b="0" i="0">
+                <a:solidFill>
+                  <a:srgbClr val="5D6D7E"/>
+                </a:solidFill>
+                <a:latin typeface="Malgun Gothic"/>
+              </a:rPr>
+              <a:t>앵커 · 배선 · 서버가 없어 센터 공사 없이 시작한다.
+대신 정밀 측위는 포기하고 신호 세기 추정을 받아들였다.</a:t>
+            </a:r>
+          </a:p>
+        </p:txBody>
+      </p:sp>
+      <p:sp>
+        <p:nvSpPr>
+          <p:cNvPr id="17" name="TextBox 16"/>
+          <p:cNvSpPr txBox="1"/>
+          <p:nvPr/>
+        </p:nvSpPr>
+        <p:spPr>
+          <a:xfrm>
+            <a:off x="777240" y="2487168"/>
+            <a:ext cx="4160520" cy="822960"/>
+          </a:xfrm>
+          <a:prstGeom prst="rect">
+            <a:avLst/>
+          </a:prstGeom>
+          <a:noFill/>
+        </p:spPr>
+        <p:txBody>
+          <a:bodyPr wrap="square" lIns="36576" rIns="36576" tIns="0" bIns="0">
+            <a:spAutoFit/>
+          </a:bodyPr>
+          <a:lstStyle/>
+          <a:p>
+            <a:pPr algn="l">
+              <a:spcAft>
+                <a:spcPts val="300"/>
+              </a:spcAft>
+            </a:pPr>
+            <a:r>
+              <a:rPr sz="1250" b="1" i="0">
+                <a:solidFill>
+                  <a:srgbClr val="1C2833"/>
+                </a:solidFill>
+                <a:latin typeface="Malgun Gothic"/>
+              </a:rPr>
+              <a:t>정밀도 vs. 어디서나 동작</a:t>
+            </a:r>
+          </a:p>
+          <a:p>
+            <a:pPr algn="l">
+              <a:spcAft>
+                <a:spcPts val="300"/>
+              </a:spcAft>
+            </a:pPr>
+            <a:r>
+              <a:rPr sz="1150" b="1" i="0">
+                <a:solidFill>
+                  <a:srgbClr val="C0392B"/>
+                </a:solidFill>
+                <a:latin typeface="Malgun Gothic"/>
+              </a:rPr>
+              <a:t>BLE 신호 세기 主 판정 → 현장 적용성 우선</a:t>
+            </a:r>
+          </a:p>
+        </p:txBody>
+      </p:sp>
+      <p:sp>
+        <p:nvSpPr>
+          <p:cNvPr id="18" name="Right Arrow 17"/>
+          <p:cNvSpPr/>
+          <p:nvPr/>
+        </p:nvSpPr>
+        <p:spPr>
+          <a:xfrm>
+            <a:off x="5138928" y="2615184"/>
+            <a:ext cx="777240" cy="347472"/>
+          </a:xfrm>
+          <a:prstGeom prst="rightArrow">
+            <a:avLst/>
+          </a:prstGeom>
+          <a:solidFill>
+            <a:srgbClr val="C7CCD1"/>
+          </a:solidFill>
+          <a:ln>
+            <a:noFill/>
+          </a:ln>
+          <a:effectLst/>
+        </p:spPr>
+        <p:style>
+          <a:lnRef idx="1">
+            <a:schemeClr val="accent1"/>
+          </a:lnRef>
+          <a:fillRef idx="3">
+            <a:schemeClr val="accent1"/>
+          </a:fillRef>
+          <a:effectRef idx="2">
+            <a:schemeClr val="accent1"/>
+          </a:effectRef>
+          <a:fontRef idx="minor">
+            <a:schemeClr val="lt1"/>
+          </a:fontRef>
+        </p:style>
+        <p:txBody>
+          <a:bodyPr rtlCol="0" anchor="ctr"/>
+          <a:lstStyle/>
+          <a:p>
+            <a:pPr algn="ctr"/>
+          </a:p>
+        </p:txBody>
+      </p:sp>
+      <p:sp>
+        <p:nvSpPr>
+          <p:cNvPr id="19" name="TextBox 18"/>
+          <p:cNvSpPr txBox="1"/>
+          <p:nvPr/>
+        </p:nvSpPr>
+        <p:spPr>
+          <a:xfrm>
+            <a:off x="6144768" y="2505456"/>
+            <a:ext cx="5623560" cy="822960"/>
+          </a:xfrm>
+          <a:prstGeom prst="rect">
+            <a:avLst/>
+          </a:prstGeom>
+          <a:noFill/>
+        </p:spPr>
+        <p:txBody>
+          <a:bodyPr wrap="square" lIns="36576" rIns="36576" tIns="0" bIns="0">
+            <a:spAutoFit/>
+          </a:bodyPr>
+          <a:lstStyle/>
+          <a:p>
+            <a:pPr algn="l">
+              <a:spcAft>
+                <a:spcPts val="400"/>
+              </a:spcAft>
+            </a:pPr>
+            <a:r>
+              <a:rPr sz="1150" b="0" i="0">
+                <a:solidFill>
+                  <a:srgbClr val="5D6D7E"/>
+                </a:solidFill>
+                <a:latin typeface="Malgun Gothic"/>
+              </a:rPr>
+              <a:t>적재물 · 차체가 전파를 가리면 거리 오차가 난다. 센터별 보정값으로
+완화하되 완전 제거는 불가. UWB 는 지원 단말에서 보조로만 쓴다.</a:t>
+            </a:r>
+          </a:p>
+        </p:txBody>
+      </p:sp>
+      <p:sp>
+        <p:nvSpPr>
+          <p:cNvPr id="20" name="TextBox 19"/>
+          <p:cNvSpPr txBox="1"/>
+          <p:nvPr/>
+        </p:nvSpPr>
+        <p:spPr>
+          <a:xfrm>
+            <a:off x="777240" y="3493008"/>
+            <a:ext cx="4160520" cy="822960"/>
+          </a:xfrm>
+          <a:prstGeom prst="rect">
+            <a:avLst/>
+          </a:prstGeom>
+          <a:noFill/>
+        </p:spPr>
+        <p:txBody>
+          <a:bodyPr wrap="square" lIns="36576" rIns="36576" tIns="0" bIns="0">
+            <a:spAutoFit/>
+          </a:bodyPr>
+          <a:lstStyle/>
+          <a:p>
+            <a:pPr algn="l">
+              <a:spcAft>
+                <a:spcPts val="300"/>
+              </a:spcAft>
+            </a:pPr>
+            <a:r>
+              <a:rPr sz="1250" b="1" i="0">
+                <a:solidFill>
+                  <a:srgbClr val="1C2833"/>
+                </a:solidFill>
+                <a:latin typeface="Malgun Gothic"/>
+              </a:rPr>
+              <a:t>민감한 경보 vs. 경보 피로</a:t>
+            </a:r>
+          </a:p>
+          <a:p>
+            <a:pPr algn="l">
+              <a:spcAft>
+                <a:spcPts val="300"/>
+              </a:spcAft>
+            </a:pPr>
+            <a:r>
+              <a:rPr sz="1150" b="1" i="0">
+                <a:solidFill>
+                  <a:srgbClr val="C0392B"/>
+                </a:solidFill>
+                <a:latin typeface="Malgun Gothic"/>
+              </a:rPr>
+              <a:t>억제 장치를 넣음 → 끄지 않게 만드는 것 우선</a:t>
+            </a:r>
+          </a:p>
+        </p:txBody>
+      </p:sp>
+      <p:sp>
+        <p:nvSpPr>
+          <p:cNvPr id="21" name="Right Arrow 20"/>
+          <p:cNvSpPr/>
+          <p:nvPr/>
+        </p:nvSpPr>
+        <p:spPr>
+          <a:xfrm>
+            <a:off x="5138928" y="3621024"/>
+            <a:ext cx="777240" cy="347472"/>
+          </a:xfrm>
+          <a:prstGeom prst="rightArrow">
+            <a:avLst/>
+          </a:prstGeom>
+          <a:solidFill>
+            <a:srgbClr val="C7CCD1"/>
+          </a:solidFill>
+          <a:ln>
+            <a:noFill/>
+          </a:ln>
+          <a:effectLst/>
+        </p:spPr>
+        <p:style>
+          <a:lnRef idx="1">
+            <a:schemeClr val="accent1"/>
+          </a:lnRef>
+          <a:fillRef idx="3">
+            <a:schemeClr val="accent1"/>
+          </a:fillRef>
+          <a:effectRef idx="2">
+            <a:schemeClr val="accent1"/>
+          </a:effectRef>
+          <a:fontRef idx="minor">
+            <a:schemeClr val="lt1"/>
+          </a:fontRef>
+        </p:style>
+        <p:txBody>
+          <a:bodyPr rtlCol="0" anchor="ctr"/>
+          <a:lstStyle/>
+          <a:p>
+            <a:pPr algn="ctr"/>
+          </a:p>
+        </p:txBody>
+      </p:sp>
+      <p:sp>
+        <p:nvSpPr>
+          <p:cNvPr id="22" name="TextBox 21"/>
+          <p:cNvSpPr txBox="1"/>
+          <p:nvPr/>
+        </p:nvSpPr>
+        <p:spPr>
+          <a:xfrm>
+            <a:off x="6144768" y="3511296"/>
+            <a:ext cx="5623560" cy="822960"/>
+          </a:xfrm>
+          <a:prstGeom prst="rect">
+            <a:avLst/>
+          </a:prstGeom>
+          <a:noFill/>
+        </p:spPr>
+        <p:txBody>
+          <a:bodyPr wrap="square" lIns="36576" rIns="36576" tIns="0" bIns="0">
+            <a:spAutoFit/>
+          </a:bodyPr>
+          <a:lstStyle/>
+          <a:p>
+            <a:pPr algn="l">
+              <a:spcAft>
+                <a:spcPts val="400"/>
+              </a:spcAft>
+            </a:pPr>
+            <a:r>
+              <a:rPr sz="1150" b="0" i="0">
+                <a:solidFill>
+                  <a:srgbClr val="5D6D7E"/>
+                </a:solidFill>
+                <a:latin typeface="Malgun Gothic"/>
+              </a:rPr>
+              <a:t>세이프존 · 5초 체류 자동 음소거를 둔다. 억제 구간에서 놓칠 위험은
+화면 표시와 기록을 그대로 유지해 상쇄한다.</a:t>
+            </a:r>
+          </a:p>
+        </p:txBody>
+      </p:sp>
+      <p:sp>
+        <p:nvSpPr>
+          <p:cNvPr id="23" name="Rectangle 22"/>
+          <p:cNvSpPr/>
+          <p:nvPr/>
+        </p:nvSpPr>
+        <p:spPr>
+          <a:xfrm>
+            <a:off x="640080" y="4553712"/>
+            <a:ext cx="1234440" cy="301752"/>
+          </a:xfrm>
+          <a:prstGeom prst="rect">
+            <a:avLst/>
+          </a:prstGeom>
+          <a:solidFill>
+            <a:srgbClr val="8C8C8C"/>
+          </a:solidFill>
+          <a:ln>
+            <a:noFill/>
+          </a:ln>
+          <a:effectLst/>
+        </p:spPr>
+        <p:style>
+          <a:lnRef idx="1">
+            <a:schemeClr val="accent1"/>
+          </a:lnRef>
+          <a:fillRef idx="3">
+            <a:schemeClr val="accent1"/>
+          </a:fillRef>
+          <a:effectRef idx="2">
+            <a:schemeClr val="accent1"/>
+          </a:effectRef>
+          <a:fontRef idx="minor">
+            <a:schemeClr val="lt1"/>
+          </a:fontRef>
+        </p:style>
+        <p:txBody>
+          <a:bodyPr rtlCol="0" anchor="ctr" wrap="square" lIns="36576" rIns="36576" tIns="0" bIns="0"/>
+          <a:lstStyle/>
+          <a:p>
+            <a:pPr algn="ctr"/>
+            <a:r>
+              <a:rPr sz="1100" b="1" i="0">
+                <a:solidFill>
+                  <a:srgbClr val="FFFFFF"/>
+                </a:solidFill>
+                <a:latin typeface="Malgun Gothic"/>
+              </a:rPr>
+              <a:t>남는 한계</a:t>
+            </a:r>
+          </a:p>
+        </p:txBody>
+      </p:sp>
+      <p:sp>
+        <p:nvSpPr>
+          <p:cNvPr id="24" name="TextBox 23"/>
+          <p:cNvSpPr txBox="1"/>
+          <p:nvPr/>
+        </p:nvSpPr>
+        <p:spPr>
+          <a:xfrm>
+            <a:off x="868680" y="5010912"/>
+            <a:ext cx="7223760" cy="310896"/>
+          </a:xfrm>
+          <a:prstGeom prst="rect">
+            <a:avLst/>
+          </a:prstGeom>
+          <a:noFill/>
+        </p:spPr>
+        <p:txBody>
+          <a:bodyPr wrap="square" lIns="36576" rIns="36576" tIns="0" bIns="0">
+            <a:spAutoFit/>
+          </a:bodyPr>
+          <a:lstStyle/>
+          <a:p>
+            <a:pPr algn="l">
+              <a:spcAft>
+                <a:spcPts val="400"/>
+              </a:spcAft>
+            </a:pPr>
+            <a:r>
+              <a:rPr sz="1200" b="0" i="0">
+                <a:solidFill>
+                  <a:srgbClr val="1C2833"/>
+                </a:solidFill>
+                <a:latin typeface="Malgun Gothic"/>
+              </a:rPr>
+              <a:t>①  앱이 설치된 기기끼리만 감지 — 미설치 인원 · 장비는 보이지 않음</a:t>
+            </a:r>
+          </a:p>
+        </p:txBody>
+      </p:sp>
+      <p:sp>
+        <p:nvSpPr>
+          <p:cNvPr id="25" name="TextBox 24"/>
+          <p:cNvSpPr txBox="1"/>
+          <p:nvPr/>
+        </p:nvSpPr>
+        <p:spPr>
+          <a:xfrm>
+            <a:off x="868680" y="5340096"/>
+            <a:ext cx="7223760" cy="310896"/>
+          </a:xfrm>
+          <a:prstGeom prst="rect">
+            <a:avLst/>
+          </a:prstGeom>
+          <a:noFill/>
+        </p:spPr>
+        <p:txBody>
+          <a:bodyPr wrap="square" lIns="36576" rIns="36576" tIns="0" bIns="0">
+            <a:spAutoFit/>
+          </a:bodyPr>
+          <a:lstStyle/>
+          <a:p>
+            <a:pPr algn="l">
+              <a:spcAft>
+                <a:spcPts val="400"/>
+              </a:spcAft>
+            </a:pPr>
+            <a:r>
+              <a:rPr sz="1200" b="0" i="0">
+                <a:solidFill>
+                  <a:srgbClr val="1C2833"/>
+                </a:solidFill>
+                <a:latin typeface="Malgun Gothic"/>
+              </a:rPr>
+              <a:t>②  기기가 밀집하면 화면 반응이 느려짐 (20대 이상)</a:t>
+            </a:r>
+          </a:p>
+        </p:txBody>
+      </p:sp>
       <p:pic>
         <p:nvPicPr>
-          <p:cNvPr id="13" name="Picture 12" descr="fig_radius.png"/>
+          <p:cNvPr id="26" name="Picture 25" descr="fig_radius.png"/>
           <p:cNvPicPr>
             <a:picLocks noChangeAspect="1"/>
           </p:cNvPicPr>
@@ -5302,48 +6626,14 @@
         </p:blipFill>
         <p:spPr>
           <a:xfrm>
-            <a:off x="7882127" y="1554480"/>
-            <a:ext cx="3913632" cy="2162160"/>
+            <a:off x="8549640" y="4370832"/>
+            <a:ext cx="2834640" cy="1566051"/>
           </a:xfrm>
           <a:prstGeom prst="rect">
             <a:avLst/>
           </a:prstGeom>
         </p:spPr>
       </p:pic>
-      <p:sp>
-        <p:nvSpPr>
-          <p:cNvPr id="14" name="TextBox 13"/>
-          <p:cNvSpPr txBox="1"/>
-          <p:nvPr/>
-        </p:nvSpPr>
-        <p:spPr>
-          <a:xfrm>
-            <a:off x="7882127" y="3826368"/>
-            <a:ext cx="3913632" cy="548640"/>
-          </a:xfrm>
-          <a:prstGeom prst="rect">
-            <a:avLst/>
-          </a:prstGeom>
-          <a:noFill/>
-        </p:spPr>
-        <p:txBody>
-          <a:bodyPr wrap="square">
-            <a:spAutoFit/>
-          </a:bodyPr>
-          <a:lstStyle/>
-          <a:p>
-            <a:pPr algn="ctr"/>
-            <a:r>
-              <a:rPr sz="1050">
-                <a:solidFill>
-                  <a:srgbClr val="5D6D7E"/>
-                </a:solidFill>
-              </a:rPr>
-              <a:t>역할 조합별 판정 반경 (실제 비례 축척)</a:t>
-            </a:r>
-          </a:p>
-        </p:txBody>
-      </p:sp>
     </p:spTree>
     <p:extLst>
       <p:ext uri="{BB962C8B-B14F-4D97-AF65-F5344CB8AC3E}">
@@ -5397,7 +6687,7 @@
         <p:spPr>
           <a:xfrm>
             <a:off x="636390" y="928122"/>
-            <a:ext cx="11342595" cy="5486400"/>
+            <a:ext cx="11342595" cy="3980770"/>
           </a:xfrm>
           <a:prstGeom prst="rect">
             <a:avLst/>
@@ -5433,290 +6723,12 @@
                 <a:spcPct val="150000"/>
               </a:lnSpc>
             </a:pPr>
-            <a:r>
-              <a:rPr lang="en-US" altLang="ko-KR" sz="1400" dirty="0">
-                <a:solidFill>
-                  <a:schemeClr val="tx1"/>
-                </a:solidFill>
-                <a:latin typeface="+mn-ea"/>
-                <a:ea typeface="+mn-ea"/>
-              </a:rPr>
-              <a:t xml:space="preserve">1) 오더십 리뷰 반영 (3차에 걸쳐 반영 완료)</a:t>
-            </a:r>
             <a:endParaRPr lang="en-US" altLang="ko-KR" sz="1400" dirty="0">
               <a:solidFill>
                 <a:schemeClr val="tx1"/>
               </a:solidFill>
               <a:latin typeface="+mn-ea"/>
               <a:ea typeface="+mn-ea"/>
-            </a:endParaRPr>
-          </a:p>
-          <a:p>
-            <a:pPr>
-              <a:lnSpc>
-                <a:spcPct val="150000"/>
-              </a:lnSpc>
-            </a:pPr>
-            <a:r>
-              <a:rPr lang="en-US" altLang="ko-KR" sz="1400" dirty="0">
-                <a:solidFill>
-                  <a:schemeClr val="tx1"/>
-                </a:solidFill>
-                <a:latin typeface="+mn-ea"/>
-              </a:rPr>
-              <a:t xml:space="preserve">  ① 1차 — 역할 전환 버튼 추가 · EPJ 역할 버튼 숨김 · 스플래시 화면 교체</a:t>
-            </a:r>
-            <a:endParaRPr lang="en-US" altLang="ko-KR" sz="1400" dirty="0">
-              <a:solidFill>
-                <a:schemeClr val="tx1"/>
-              </a:solidFill>
-              <a:latin typeface="+mn-ea"/>
-            </a:endParaRPr>
-          </a:p>
-          <a:p>
-            <a:pPr>
-              <a:lnSpc>
-                <a:spcPct val="150000"/>
-              </a:lnSpc>
-            </a:pPr>
-            <a:r>
-              <a:rPr lang="ko-KR" altLang="en-US" sz="1200" b="0" dirty="0">
-                <a:solidFill>
-                  <a:schemeClr val="tx1"/>
-                </a:solidFill>
-                <a:latin typeface="+mn-ea"/>
-              </a:rPr>
-              <a:t xml:space="preserve">    → 지게차 ↔ 보행자를 앱 재설치 없이 화면에서 전환</a:t>
-            </a:r>
-            <a:endParaRPr lang="en-US" altLang="ko-KR" sz="1200" b="0" dirty="0">
-              <a:solidFill>
-                <a:schemeClr val="tx1"/>
-              </a:solidFill>
-              <a:latin typeface="+mn-ea"/>
-            </a:endParaRPr>
-          </a:p>
-          <a:p>
-            <a:pPr>
-              <a:lnSpc>
-                <a:spcPct val="150000"/>
-              </a:lnSpc>
-            </a:pPr>
-            <a:r>
-              <a:rPr lang="en-US" altLang="ko-KR" sz="1400" dirty="0">
-                <a:solidFill>
-                  <a:schemeClr val="tx1"/>
-                </a:solidFill>
-                <a:latin typeface="+mn-ea"/>
-              </a:rPr>
-              <a:t xml:space="preserve">  ② 2차 — 같은 기기 · 같은 등급에 5초 이상 머물면 소리 · 진동 자동 음소거</a:t>
-            </a:r>
-            <a:endParaRPr lang="en-US" altLang="ko-KR" sz="1400" dirty="0">
-              <a:solidFill>
-                <a:schemeClr val="tx1"/>
-              </a:solidFill>
-              <a:latin typeface="+mn-ea"/>
-            </a:endParaRPr>
-          </a:p>
-          <a:p>
-            <a:pPr>
-              <a:lnSpc>
-                <a:spcPct val="150000"/>
-              </a:lnSpc>
-            </a:pPr>
-            <a:r>
-              <a:rPr lang="ko-KR" altLang="en-US" sz="1200" b="0" dirty="0">
-                <a:solidFill>
-                  <a:schemeClr val="tx1"/>
-                </a:solidFill>
-                <a:latin typeface="+mn-ea"/>
-              </a:rPr>
-              <a:t xml:space="preserve">    → 화면 표시와 기록은 유지하고, 등급이 오르면 즉시 다시 울림</a:t>
-            </a:r>
-            <a:endParaRPr lang="en-US" altLang="ko-KR" sz="1200" b="0" dirty="0">
-              <a:solidFill>
-                <a:schemeClr val="tx1"/>
-              </a:solidFill>
-              <a:latin typeface="+mn-ea"/>
-            </a:endParaRPr>
-          </a:p>
-          <a:p>
-            <a:pPr>
-              <a:lnSpc>
-                <a:spcPct val="150000"/>
-              </a:lnSpc>
-            </a:pPr>
-            <a:r>
-              <a:rPr lang="en-US" altLang="ko-KR" sz="1400" dirty="0">
-                <a:solidFill>
-                  <a:schemeClr val="tx1"/>
-                </a:solidFill>
-                <a:latin typeface="+mn-ea"/>
-              </a:rPr>
-              <a:t xml:space="preserve">  ③ 3차 — 세이프존 도입 (오른쪽 도식)</a:t>
-            </a:r>
-            <a:endParaRPr lang="en-US" altLang="ko-KR" sz="1400" dirty="0">
-              <a:solidFill>
-                <a:schemeClr val="tx1"/>
-              </a:solidFill>
-              <a:latin typeface="+mn-ea"/>
-            </a:endParaRPr>
-          </a:p>
-          <a:p>
-            <a:pPr>
-              <a:lnSpc>
-                <a:spcPct val="150000"/>
-              </a:lnSpc>
-            </a:pPr>
-            <a:r>
-              <a:rPr lang="ko-KR" altLang="en-US" sz="1200" b="0" dirty="0">
-                <a:solidFill>
-                  <a:schemeClr val="tx1"/>
-                </a:solidFill>
-                <a:latin typeface="+mn-ea"/>
-              </a:rPr>
-              <a:t xml:space="preserve">    → 휴게실 · 충전 구역에 비콘을 두면 그 구역에서 경보를 억제</a:t>
-            </a:r>
-            <a:endParaRPr lang="en-US" altLang="ko-KR" sz="1200" b="0" dirty="0">
-              <a:solidFill>
-                <a:schemeClr val="tx1"/>
-              </a:solidFill>
-              <a:latin typeface="+mn-ea"/>
-            </a:endParaRPr>
-          </a:p>
-          <a:p>
-            <a:pPr>
-              <a:lnSpc>
-                <a:spcPct val="150000"/>
-              </a:lnSpc>
-            </a:pPr>
-            <a:r>
-              <a:rPr lang="en-US" altLang="ko-KR" sz="1400" dirty="0">
-                <a:solidFill>
-                  <a:schemeClr val="tx1"/>
-                </a:solidFill>
-                <a:latin typeface="+mn-ea"/>
-                <a:ea typeface="+mn-ea"/>
-              </a:rPr>
-              <a:t xml:space="preserve"> </a:t>
-            </a:r>
-            <a:endParaRPr lang="en-US" altLang="ko-KR" sz="1400" dirty="0">
-              <a:solidFill>
-                <a:schemeClr val="tx1"/>
-              </a:solidFill>
-              <a:latin typeface="+mn-ea"/>
-              <a:ea typeface="+mn-ea"/>
-            </a:endParaRPr>
-          </a:p>
-          <a:p>
-            <a:pPr>
-              <a:lnSpc>
-                <a:spcPct val="150000"/>
-              </a:lnSpc>
-            </a:pPr>
-            <a:r>
-              <a:rPr lang="en-US" altLang="ko-KR" sz="1400" dirty="0">
-                <a:solidFill>
-                  <a:schemeClr val="tx1"/>
-                </a:solidFill>
-                <a:latin typeface="+mn-ea"/>
-                <a:ea typeface="+mn-ea"/>
-              </a:rPr>
-              <a:t xml:space="preserve">2) 현장에서 나온 요구</a:t>
-            </a:r>
-            <a:endParaRPr lang="en-US" altLang="ko-KR" sz="1400" dirty="0">
-              <a:solidFill>
-                <a:schemeClr val="tx1"/>
-              </a:solidFill>
-              <a:latin typeface="+mn-ea"/>
-              <a:ea typeface="+mn-ea"/>
-            </a:endParaRPr>
-          </a:p>
-          <a:p>
-            <a:pPr>
-              <a:lnSpc>
-                <a:spcPct val="150000"/>
-              </a:lnSpc>
-            </a:pPr>
-            <a:r>
-              <a:rPr lang="en-US" altLang="ko-KR" sz="1400" dirty="0">
-                <a:solidFill>
-                  <a:schemeClr val="tx1"/>
-                </a:solidFill>
-                <a:latin typeface="+mn-ea"/>
-              </a:rPr>
-              <a:t xml:space="preserve">  ① 보호가 끊긴 것을 알 수 없다 → 알림에 이상 표시</a:t>
-            </a:r>
-            <a:endParaRPr lang="en-US" altLang="ko-KR" sz="1400" dirty="0">
-              <a:solidFill>
-                <a:schemeClr val="tx1"/>
-              </a:solidFill>
-              <a:latin typeface="+mn-ea"/>
-            </a:endParaRPr>
-          </a:p>
-          <a:p>
-            <a:pPr>
-              <a:lnSpc>
-                <a:spcPct val="150000"/>
-              </a:lnSpc>
-            </a:pPr>
-            <a:r>
-              <a:rPr lang="en-US" altLang="ko-KR" sz="1400" dirty="0">
-                <a:solidFill>
-                  <a:schemeClr val="tx1"/>
-                </a:solidFill>
-                <a:latin typeface="+mn-ea"/>
-              </a:rPr>
-              <a:t xml:space="preserve">  ② 멀어졌는데 다시 울린다 → 이탈 후 재발령 억제</a:t>
-            </a:r>
-            <a:endParaRPr lang="en-US" altLang="ko-KR" sz="1400" dirty="0">
-              <a:solidFill>
-                <a:schemeClr val="tx1"/>
-              </a:solidFill>
-              <a:latin typeface="+mn-ea"/>
-            </a:endParaRPr>
-          </a:p>
-          <a:p>
-            <a:pPr>
-              <a:lnSpc>
-                <a:spcPct val="150000"/>
-              </a:lnSpc>
-            </a:pPr>
-            <a:r>
-              <a:rPr lang="en-US" altLang="ko-KR" sz="1400" dirty="0">
-                <a:solidFill>
-                  <a:schemeClr val="tx1"/>
-                </a:solidFill>
-                <a:latin typeface="+mn-ea"/>
-              </a:rPr>
-              <a:t xml:space="preserve">  ③ 알림 끄기가 번거롭다 → 본문 탭 = 즉시 무음</a:t>
-            </a:r>
-            <a:endParaRPr lang="en-US" altLang="ko-KR" sz="1400" dirty="0">
-              <a:solidFill>
-                <a:schemeClr val="tx1"/>
-              </a:solidFill>
-              <a:latin typeface="+mn-ea"/>
-            </a:endParaRPr>
-          </a:p>
-          <a:p>
-            <a:pPr>
-              <a:lnSpc>
-                <a:spcPct val="150000"/>
-              </a:lnSpc>
-            </a:pPr>
-            <a:r>
-              <a:rPr lang="en-US" altLang="ko-KR" sz="1400" dirty="0">
-                <a:solidFill>
-                  <a:schemeClr val="tx1"/>
-                </a:solidFill>
-                <a:latin typeface="+mn-ea"/>
-              </a:rPr>
-              <a:t xml:space="preserve">  ④ 경보 화면이 눈에 안 들어온다 → 가장자리 부착 사이드바</a:t>
-            </a:r>
-            <a:endParaRPr lang="en-US" altLang="ko-KR" sz="1400" dirty="0">
-              <a:solidFill>
-                <a:schemeClr val="tx1"/>
-              </a:solidFill>
-              <a:latin typeface="+mn-ea"/>
             </a:endParaRPr>
           </a:p>
         </p:txBody>
@@ -5788,9 +6800,613 @@
           </a:p>
         </p:txBody>
       </p:sp>
+      <p:sp>
+        <p:nvSpPr>
+          <p:cNvPr id="13" name="Rectangle 12"/>
+          <p:cNvSpPr/>
+          <p:nvPr/>
+        </p:nvSpPr>
+        <p:spPr>
+          <a:xfrm>
+            <a:off x="640080" y="1024128"/>
+            <a:ext cx="1828800" cy="301752"/>
+          </a:xfrm>
+          <a:prstGeom prst="rect">
+            <a:avLst/>
+          </a:prstGeom>
+          <a:solidFill>
+            <a:srgbClr val="8C8C8C"/>
+          </a:solidFill>
+          <a:ln>
+            <a:noFill/>
+          </a:ln>
+          <a:effectLst/>
+        </p:spPr>
+        <p:style>
+          <a:lnRef idx="1">
+            <a:schemeClr val="accent1"/>
+          </a:lnRef>
+          <a:fillRef idx="3">
+            <a:schemeClr val="accent1"/>
+          </a:fillRef>
+          <a:effectRef idx="2">
+            <a:schemeClr val="accent1"/>
+          </a:effectRef>
+          <a:fontRef idx="minor">
+            <a:schemeClr val="lt1"/>
+          </a:fontRef>
+        </p:style>
+        <p:txBody>
+          <a:bodyPr rtlCol="0" anchor="ctr" wrap="square" lIns="36576" rIns="36576" tIns="0" bIns="0"/>
+          <a:lstStyle/>
+          <a:p>
+            <a:pPr algn="ctr"/>
+            <a:r>
+              <a:rPr sz="1100" b="1" i="0">
+                <a:solidFill>
+                  <a:srgbClr val="FFFFFF"/>
+                </a:solidFill>
+                <a:latin typeface="Malgun Gothic"/>
+              </a:rPr>
+              <a:t>오더십 리뷰 반영</a:t>
+            </a:r>
+          </a:p>
+        </p:txBody>
+      </p:sp>
+      <p:graphicFrame>
+        <p:nvGraphicFramePr>
+          <p:cNvPr id="14" name="Table 13"/>
+          <p:cNvGraphicFramePr>
+            <a:graphicFrameLocks noGrp="1"/>
+          </p:cNvGraphicFramePr>
+          <p:nvPr/>
+        </p:nvGraphicFramePr>
+        <p:xfrm>
+          <a:off x="658368" y="1463040"/>
+          <a:ext cx="7589519" cy="2029968"/>
+        </p:xfrm>
+        <a:graphic>
+          <a:graphicData uri="http://schemas.openxmlformats.org/drawingml/2006/table">
+            <a:tbl>
+              <a:tblPr firstRow="1" bandRow="0">
+                <a:tableStyleId>{5C22544A-7EE6-4342-B048-85BDC9FD1C3A}</a:tableStyleId>
+              </a:tblPr>
+              <a:tblGrid>
+                <a:gridCol w="777240"/>
+                <a:gridCol w="3977639"/>
+                <a:gridCol w="2834640"/>
+              </a:tblGrid>
+              <a:tr h="329184">
+                <a:tc>
+                  <a:txBody>
+                    <a:bodyPr/>
+                    <a:lstStyle/>
+                    <a:p>
+                      <a:pPr algn="ctr"/>
+                      <a:r>
+                        <a:rPr sz="1100" b="1" i="0">
+                          <a:solidFill>
+                            <a:srgbClr val="FFFFFF"/>
+                          </a:solidFill>
+                          <a:latin typeface="Malgun Gothic"/>
+                        </a:rPr>
+                        <a:t>차수</a:t>
+                      </a:r>
+                    </a:p>
+                  </a:txBody>
+                  <a:tcPr marL="73152" marR="73152" marT="0" marB="0" anchor="ctr">
+                    <a:lnB w="9525" cap="flat" cmpd="sng" algn="ctr">
+                      <a:solidFill>
+                        <a:srgbClr val="333B45"/>
+                      </a:solidFill>
+                    </a:lnB>
+                    <a:lnT w="9525" cap="flat" cmpd="sng" algn="ctr">
+                      <a:solidFill>
+                        <a:srgbClr val="333B45"/>
+                      </a:solidFill>
+                    </a:lnT>
+                    <a:lnR w="9525" cap="flat" cmpd="sng" algn="ctr">
+                      <a:solidFill>
+                        <a:srgbClr val="333B45"/>
+                      </a:solidFill>
+                    </a:lnR>
+                    <a:lnL w="9525" cap="flat" cmpd="sng" algn="ctr">
+                      <a:solidFill>
+                        <a:srgbClr val="333B45"/>
+                      </a:solidFill>
+                    </a:lnL>
+                    <a:solidFill>
+                      <a:srgbClr val="333B45"/>
+                    </a:solidFill>
+                  </a:tcPr>
+                </a:tc>
+                <a:tc>
+                  <a:txBody>
+                    <a:bodyPr/>
+                    <a:lstStyle/>
+                    <a:p>
+                      <a:pPr algn="ctr"/>
+                      <a:r>
+                        <a:rPr sz="1100" b="1" i="0">
+                          <a:solidFill>
+                            <a:srgbClr val="FFFFFF"/>
+                          </a:solidFill>
+                          <a:latin typeface="Malgun Gothic"/>
+                        </a:rPr>
+                        <a:t>반영 내용</a:t>
+                      </a:r>
+                    </a:p>
+                  </a:txBody>
+                  <a:tcPr marL="73152" marR="73152" marT="0" marB="0" anchor="ctr">
+                    <a:lnB w="9525" cap="flat" cmpd="sng" algn="ctr">
+                      <a:solidFill>
+                        <a:srgbClr val="333B45"/>
+                      </a:solidFill>
+                    </a:lnB>
+                    <a:lnT w="9525" cap="flat" cmpd="sng" algn="ctr">
+                      <a:solidFill>
+                        <a:srgbClr val="333B45"/>
+                      </a:solidFill>
+                    </a:lnT>
+                    <a:lnR w="9525" cap="flat" cmpd="sng" algn="ctr">
+                      <a:solidFill>
+                        <a:srgbClr val="333B45"/>
+                      </a:solidFill>
+                    </a:lnR>
+                    <a:lnL w="9525" cap="flat" cmpd="sng" algn="ctr">
+                      <a:solidFill>
+                        <a:srgbClr val="333B45"/>
+                      </a:solidFill>
+                    </a:lnL>
+                    <a:solidFill>
+                      <a:srgbClr val="333B45"/>
+                    </a:solidFill>
+                  </a:tcPr>
+                </a:tc>
+                <a:tc>
+                  <a:txBody>
+                    <a:bodyPr/>
+                    <a:lstStyle/>
+                    <a:p>
+                      <a:pPr algn="ctr"/>
+                      <a:r>
+                        <a:rPr sz="1100" b="1" i="0">
+                          <a:solidFill>
+                            <a:srgbClr val="FFFFFF"/>
+                          </a:solidFill>
+                          <a:latin typeface="Malgun Gothic"/>
+                        </a:rPr>
+                        <a:t>결과</a:t>
+                      </a:r>
+                    </a:p>
+                  </a:txBody>
+                  <a:tcPr marL="73152" marR="73152" marT="0" marB="0" anchor="ctr">
+                    <a:lnB w="9525" cap="flat" cmpd="sng" algn="ctr">
+                      <a:solidFill>
+                        <a:srgbClr val="333B45"/>
+                      </a:solidFill>
+                    </a:lnB>
+                    <a:lnT w="9525" cap="flat" cmpd="sng" algn="ctr">
+                      <a:solidFill>
+                        <a:srgbClr val="333B45"/>
+                      </a:solidFill>
+                    </a:lnT>
+                    <a:lnR w="9525" cap="flat" cmpd="sng" algn="ctr">
+                      <a:solidFill>
+                        <a:srgbClr val="333B45"/>
+                      </a:solidFill>
+                    </a:lnR>
+                    <a:lnL w="9525" cap="flat" cmpd="sng" algn="ctr">
+                      <a:solidFill>
+                        <a:srgbClr val="333B45"/>
+                      </a:solidFill>
+                    </a:lnL>
+                    <a:solidFill>
+                      <a:srgbClr val="333B45"/>
+                    </a:solidFill>
+                  </a:tcPr>
+                </a:tc>
+              </a:tr>
+              <a:tr h="566928">
+                <a:tc>
+                  <a:txBody>
+                    <a:bodyPr/>
+                    <a:lstStyle/>
+                    <a:p>
+                      <a:pPr algn="l"/>
+                      <a:r>
+                        <a:rPr sz="1100" b="1" i="0">
+                          <a:solidFill>
+                            <a:srgbClr val="1C2833"/>
+                          </a:solidFill>
+                          <a:latin typeface="Malgun Gothic"/>
+                        </a:rPr>
+                        <a:t>1차</a:t>
+                      </a:r>
+                    </a:p>
+                  </a:txBody>
+                  <a:tcPr marL="73152" marR="73152" marT="18288" marB="18288" anchor="ctr">
+                    <a:lnB w="9525" cap="flat" cmpd="sng" algn="ctr">
+                      <a:solidFill>
+                        <a:srgbClr val="D5DBDB"/>
+                      </a:solidFill>
+                    </a:lnB>
+                    <a:lnT w="9525" cap="flat" cmpd="sng" algn="ctr">
+                      <a:solidFill>
+                        <a:srgbClr val="FFFFFF"/>
+                      </a:solidFill>
+                    </a:lnT>
+                    <a:lnR w="9525" cap="flat" cmpd="sng" algn="ctr">
+                      <a:solidFill>
+                        <a:srgbClr val="FFFFFF"/>
+                      </a:solidFill>
+                    </a:lnR>
+                    <a:lnL w="9525" cap="flat" cmpd="sng" algn="ctr">
+                      <a:solidFill>
+                        <a:srgbClr val="FFFFFF"/>
+                      </a:solidFill>
+                    </a:lnL>
+                    <a:solidFill>
+                      <a:srgbClr val="FFFFFF"/>
+                    </a:solidFill>
+                  </a:tcPr>
+                </a:tc>
+                <a:tc>
+                  <a:txBody>
+                    <a:bodyPr/>
+                    <a:lstStyle/>
+                    <a:p>
+                      <a:pPr algn="l"/>
+                      <a:r>
+                        <a:rPr sz="1100" b="0" i="0">
+                          <a:solidFill>
+                            <a:srgbClr val="1C2833"/>
+                          </a:solidFill>
+                          <a:latin typeface="Malgun Gothic"/>
+                        </a:rPr>
+                        <a:t>역할 전환 버튼 추가 · EPJ 역할 버튼 숨김 · 스플래시 교체</a:t>
+                      </a:r>
+                    </a:p>
+                  </a:txBody>
+                  <a:tcPr marL="73152" marR="73152" marT="18288" marB="18288" anchor="ctr">
+                    <a:lnB w="9525" cap="flat" cmpd="sng" algn="ctr">
+                      <a:solidFill>
+                        <a:srgbClr val="D5DBDB"/>
+                      </a:solidFill>
+                    </a:lnB>
+                    <a:lnT w="9525" cap="flat" cmpd="sng" algn="ctr">
+                      <a:solidFill>
+                        <a:srgbClr val="FFFFFF"/>
+                      </a:solidFill>
+                    </a:lnT>
+                    <a:lnR w="9525" cap="flat" cmpd="sng" algn="ctr">
+                      <a:solidFill>
+                        <a:srgbClr val="FFFFFF"/>
+                      </a:solidFill>
+                    </a:lnR>
+                    <a:lnL w="9525" cap="flat" cmpd="sng" algn="ctr">
+                      <a:solidFill>
+                        <a:srgbClr val="FFFFFF"/>
+                      </a:solidFill>
+                    </a:lnL>
+                    <a:solidFill>
+                      <a:srgbClr val="FFFFFF"/>
+                    </a:solidFill>
+                  </a:tcPr>
+                </a:tc>
+                <a:tc>
+                  <a:txBody>
+                    <a:bodyPr/>
+                    <a:lstStyle/>
+                    <a:p>
+                      <a:pPr algn="l"/>
+                      <a:r>
+                        <a:rPr sz="1100" b="0" i="0">
+                          <a:solidFill>
+                            <a:srgbClr val="1C2833"/>
+                          </a:solidFill>
+                          <a:latin typeface="Malgun Gothic"/>
+                        </a:rPr>
+                        <a:t>앱 재설치 없이 화면에서 역할 전환</a:t>
+                      </a:r>
+                    </a:p>
+                  </a:txBody>
+                  <a:tcPr marL="73152" marR="73152" marT="18288" marB="18288" anchor="ctr">
+                    <a:lnB w="9525" cap="flat" cmpd="sng" algn="ctr">
+                      <a:solidFill>
+                        <a:srgbClr val="D5DBDB"/>
+                      </a:solidFill>
+                    </a:lnB>
+                    <a:lnT w="9525" cap="flat" cmpd="sng" algn="ctr">
+                      <a:solidFill>
+                        <a:srgbClr val="FFFFFF"/>
+                      </a:solidFill>
+                    </a:lnT>
+                    <a:lnR w="9525" cap="flat" cmpd="sng" algn="ctr">
+                      <a:solidFill>
+                        <a:srgbClr val="FFFFFF"/>
+                      </a:solidFill>
+                    </a:lnR>
+                    <a:lnL w="9525" cap="flat" cmpd="sng" algn="ctr">
+                      <a:solidFill>
+                        <a:srgbClr val="FFFFFF"/>
+                      </a:solidFill>
+                    </a:lnL>
+                    <a:solidFill>
+                      <a:srgbClr val="FFFFFF"/>
+                    </a:solidFill>
+                  </a:tcPr>
+                </a:tc>
+              </a:tr>
+              <a:tr h="566928">
+                <a:tc>
+                  <a:txBody>
+                    <a:bodyPr/>
+                    <a:lstStyle/>
+                    <a:p>
+                      <a:pPr algn="l"/>
+                      <a:r>
+                        <a:rPr sz="1100" b="1" i="0">
+                          <a:solidFill>
+                            <a:srgbClr val="1C2833"/>
+                          </a:solidFill>
+                          <a:latin typeface="Malgun Gothic"/>
+                        </a:rPr>
+                        <a:t>2차</a:t>
+                      </a:r>
+                    </a:p>
+                  </a:txBody>
+                  <a:tcPr marL="73152" marR="73152" marT="18288" marB="18288" anchor="ctr">
+                    <a:lnB w="9525" cap="flat" cmpd="sng" algn="ctr">
+                      <a:solidFill>
+                        <a:srgbClr val="D5DBDB"/>
+                      </a:solidFill>
+                    </a:lnB>
+                    <a:lnT w="9525" cap="flat" cmpd="sng" algn="ctr">
+                      <a:solidFill>
+                        <a:srgbClr val="FFFFFF"/>
+                      </a:solidFill>
+                    </a:lnT>
+                    <a:lnR w="9525" cap="flat" cmpd="sng" algn="ctr">
+                      <a:solidFill>
+                        <a:srgbClr val="FFFFFF"/>
+                      </a:solidFill>
+                    </a:lnR>
+                    <a:lnL w="9525" cap="flat" cmpd="sng" algn="ctr">
+                      <a:solidFill>
+                        <a:srgbClr val="FFFFFF"/>
+                      </a:solidFill>
+                    </a:lnL>
+                    <a:solidFill>
+                      <a:srgbClr val="FFFFFF"/>
+                    </a:solidFill>
+                  </a:tcPr>
+                </a:tc>
+                <a:tc>
+                  <a:txBody>
+                    <a:bodyPr/>
+                    <a:lstStyle/>
+                    <a:p>
+                      <a:pPr algn="l"/>
+                      <a:r>
+                        <a:rPr sz="1100" b="0" i="0">
+                          <a:solidFill>
+                            <a:srgbClr val="1C2833"/>
+                          </a:solidFill>
+                          <a:latin typeface="Malgun Gothic"/>
+                        </a:rPr>
+                        <a:t>같은 기기 · 같은 등급에 5초 이상 머물면 소리 · 진동 자동 음소거</a:t>
+                      </a:r>
+                    </a:p>
+                  </a:txBody>
+                  <a:tcPr marL="73152" marR="73152" marT="18288" marB="18288" anchor="ctr">
+                    <a:lnB w="9525" cap="flat" cmpd="sng" algn="ctr">
+                      <a:solidFill>
+                        <a:srgbClr val="D5DBDB"/>
+                      </a:solidFill>
+                    </a:lnB>
+                    <a:lnT w="9525" cap="flat" cmpd="sng" algn="ctr">
+                      <a:solidFill>
+                        <a:srgbClr val="FFFFFF"/>
+                      </a:solidFill>
+                    </a:lnT>
+                    <a:lnR w="9525" cap="flat" cmpd="sng" algn="ctr">
+                      <a:solidFill>
+                        <a:srgbClr val="FFFFFF"/>
+                      </a:solidFill>
+                    </a:lnR>
+                    <a:lnL w="9525" cap="flat" cmpd="sng" algn="ctr">
+                      <a:solidFill>
+                        <a:srgbClr val="FFFFFF"/>
+                      </a:solidFill>
+                    </a:lnL>
+                    <a:solidFill>
+                      <a:srgbClr val="FFFFFF"/>
+                    </a:solidFill>
+                  </a:tcPr>
+                </a:tc>
+                <a:tc>
+                  <a:txBody>
+                    <a:bodyPr/>
+                    <a:lstStyle/>
+                    <a:p>
+                      <a:pPr algn="l"/>
+                      <a:r>
+                        <a:rPr sz="1100" b="0" i="0">
+                          <a:solidFill>
+                            <a:srgbClr val="1C2833"/>
+                          </a:solidFill>
+                          <a:latin typeface="Malgun Gothic"/>
+                        </a:rPr>
+                        <a:t>표시 · 기록은 유지, 등급 오르면 즉시 재발령</a:t>
+                      </a:r>
+                    </a:p>
+                  </a:txBody>
+                  <a:tcPr marL="73152" marR="73152" marT="18288" marB="18288" anchor="ctr">
+                    <a:lnB w="9525" cap="flat" cmpd="sng" algn="ctr">
+                      <a:solidFill>
+                        <a:srgbClr val="D5DBDB"/>
+                      </a:solidFill>
+                    </a:lnB>
+                    <a:lnT w="9525" cap="flat" cmpd="sng" algn="ctr">
+                      <a:solidFill>
+                        <a:srgbClr val="FFFFFF"/>
+                      </a:solidFill>
+                    </a:lnT>
+                    <a:lnR w="9525" cap="flat" cmpd="sng" algn="ctr">
+                      <a:solidFill>
+                        <a:srgbClr val="FFFFFF"/>
+                      </a:solidFill>
+                    </a:lnR>
+                    <a:lnL w="9525" cap="flat" cmpd="sng" algn="ctr">
+                      <a:solidFill>
+                        <a:srgbClr val="FFFFFF"/>
+                      </a:solidFill>
+                    </a:lnL>
+                    <a:solidFill>
+                      <a:srgbClr val="FFFFFF"/>
+                    </a:solidFill>
+                  </a:tcPr>
+                </a:tc>
+              </a:tr>
+              <a:tr h="566928">
+                <a:tc>
+                  <a:txBody>
+                    <a:bodyPr/>
+                    <a:lstStyle/>
+                    <a:p>
+                      <a:pPr algn="l"/>
+                      <a:r>
+                        <a:rPr sz="1100" b="1" i="0">
+                          <a:solidFill>
+                            <a:srgbClr val="1C2833"/>
+                          </a:solidFill>
+                          <a:latin typeface="Malgun Gothic"/>
+                        </a:rPr>
+                        <a:t>3차</a:t>
+                      </a:r>
+                    </a:p>
+                  </a:txBody>
+                  <a:tcPr marL="73152" marR="73152" marT="18288" marB="18288" anchor="ctr">
+                    <a:lnB w="9525" cap="flat" cmpd="sng" algn="ctr">
+                      <a:solidFill>
+                        <a:srgbClr val="D5DBDB"/>
+                      </a:solidFill>
+                    </a:lnB>
+                    <a:lnT w="9525" cap="flat" cmpd="sng" algn="ctr">
+                      <a:solidFill>
+                        <a:srgbClr val="FFFFFF"/>
+                      </a:solidFill>
+                    </a:lnT>
+                    <a:lnR w="9525" cap="flat" cmpd="sng" algn="ctr">
+                      <a:solidFill>
+                        <a:srgbClr val="FFFFFF"/>
+                      </a:solidFill>
+                    </a:lnR>
+                    <a:lnL w="9525" cap="flat" cmpd="sng" algn="ctr">
+                      <a:solidFill>
+                        <a:srgbClr val="FFFFFF"/>
+                      </a:solidFill>
+                    </a:lnL>
+                    <a:solidFill>
+                      <a:srgbClr val="FFFFFF"/>
+                    </a:solidFill>
+                  </a:tcPr>
+                </a:tc>
+                <a:tc>
+                  <a:txBody>
+                    <a:bodyPr/>
+                    <a:lstStyle/>
+                    <a:p>
+                      <a:pPr algn="l"/>
+                      <a:r>
+                        <a:rPr sz="1100" b="0" i="0">
+                          <a:solidFill>
+                            <a:srgbClr val="1C2833"/>
+                          </a:solidFill>
+                          <a:latin typeface="Malgun Gothic"/>
+                        </a:rPr>
+                        <a:t>세이프존 — 휴게실 · 충전 구역에 비콘을 두면 경보 억제</a:t>
+                      </a:r>
+                    </a:p>
+                  </a:txBody>
+                  <a:tcPr marL="73152" marR="73152" marT="18288" marB="18288" anchor="ctr">
+                    <a:lnB w="9525" cap="flat" cmpd="sng" algn="ctr">
+                      <a:solidFill>
+                        <a:srgbClr val="D5DBDB"/>
+                      </a:solidFill>
+                    </a:lnB>
+                    <a:lnT w="9525" cap="flat" cmpd="sng" algn="ctr">
+                      <a:solidFill>
+                        <a:srgbClr val="FFFFFF"/>
+                      </a:solidFill>
+                    </a:lnT>
+                    <a:lnR w="9525" cap="flat" cmpd="sng" algn="ctr">
+                      <a:solidFill>
+                        <a:srgbClr val="FFFFFF"/>
+                      </a:solidFill>
+                    </a:lnR>
+                    <a:lnL w="9525" cap="flat" cmpd="sng" algn="ctr">
+                      <a:solidFill>
+                        <a:srgbClr val="FFFFFF"/>
+                      </a:solidFill>
+                    </a:lnL>
+                    <a:solidFill>
+                      <a:srgbClr val="FFFFFF"/>
+                    </a:solidFill>
+                  </a:tcPr>
+                </a:tc>
+                <a:tc>
+                  <a:txBody>
+                    <a:bodyPr/>
+                    <a:lstStyle/>
+                    <a:p>
+                      <a:pPr algn="l"/>
+                      <a:r>
+                        <a:rPr sz="1100" b="0" i="0">
+                          <a:solidFill>
+                            <a:srgbClr val="1C2833"/>
+                          </a:solidFill>
+                          <a:latin typeface="Malgun Gothic"/>
+                        </a:rPr>
+                        <a:t>존 안의 기기는 상대에게도 안전으로 인식</a:t>
+                      </a:r>
+                    </a:p>
+                  </a:txBody>
+                  <a:tcPr marL="73152" marR="73152" marT="18288" marB="18288" anchor="ctr">
+                    <a:lnB w="9525" cap="flat" cmpd="sng" algn="ctr">
+                      <a:solidFill>
+                        <a:srgbClr val="D5DBDB"/>
+                      </a:solidFill>
+                    </a:lnB>
+                    <a:lnT w="9525" cap="flat" cmpd="sng" algn="ctr">
+                      <a:solidFill>
+                        <a:srgbClr val="FFFFFF"/>
+                      </a:solidFill>
+                    </a:lnT>
+                    <a:lnR w="9525" cap="flat" cmpd="sng" algn="ctr">
+                      <a:solidFill>
+                        <a:srgbClr val="FFFFFF"/>
+                      </a:solidFill>
+                    </a:lnR>
+                    <a:lnL w="9525" cap="flat" cmpd="sng" algn="ctr">
+                      <a:solidFill>
+                        <a:srgbClr val="FFFFFF"/>
+                      </a:solidFill>
+                    </a:lnL>
+                    <a:solidFill>
+                      <a:srgbClr val="FFFFFF"/>
+                    </a:solidFill>
+                  </a:tcPr>
+                </a:tc>
+              </a:tr>
+            </a:tbl>
+          </a:graphicData>
+        </a:graphic>
+      </p:graphicFrame>
       <p:pic>
         <p:nvPicPr>
-          <p:cNvPr id="13" name="Picture 12" descr="fig_zone.png"/>
+          <p:cNvPr id="15" name="Picture 14" descr="fig_zone.png"/>
           <p:cNvPicPr>
             <a:picLocks noChangeAspect="1"/>
           </p:cNvPicPr>
@@ -5804,8 +7420,8 @@
         </p:blipFill>
         <p:spPr>
           <a:xfrm>
-            <a:off x="7882127" y="1965960"/>
-            <a:ext cx="3913632" cy="1687314"/>
+            <a:off x="8485632" y="1389888"/>
+            <a:ext cx="3182112" cy="1371928"/>
           </a:xfrm>
           <a:prstGeom prst="rect">
             <a:avLst/>
@@ -5814,38 +7430,739 @@
       </p:pic>
       <p:sp>
         <p:nvSpPr>
-          <p:cNvPr id="14" name="TextBox 13"/>
-          <p:cNvSpPr txBox="1"/>
+          <p:cNvPr id="16" name="Rectangle 15"/>
+          <p:cNvSpPr/>
           <p:nvPr/>
         </p:nvSpPr>
         <p:spPr>
           <a:xfrm>
-            <a:off x="7882127" y="3763002"/>
-            <a:ext cx="3913632" cy="548640"/>
+            <a:off x="640080" y="3675887"/>
+            <a:ext cx="1691640" cy="301752"/>
           </a:xfrm>
           <a:prstGeom prst="rect">
             <a:avLst/>
           </a:prstGeom>
-          <a:noFill/>
-        </p:spPr>
+          <a:solidFill>
+            <a:srgbClr val="8C8C8C"/>
+          </a:solidFill>
+          <a:ln>
+            <a:noFill/>
+          </a:ln>
+          <a:effectLst/>
+        </p:spPr>
+        <p:style>
+          <a:lnRef idx="1">
+            <a:schemeClr val="accent1"/>
+          </a:lnRef>
+          <a:fillRef idx="3">
+            <a:schemeClr val="accent1"/>
+          </a:fillRef>
+          <a:effectRef idx="2">
+            <a:schemeClr val="accent1"/>
+          </a:effectRef>
+          <a:fontRef idx="minor">
+            <a:schemeClr val="lt1"/>
+          </a:fontRef>
+        </p:style>
         <p:txBody>
-          <a:bodyPr wrap="square">
-            <a:spAutoFit/>
-          </a:bodyPr>
+          <a:bodyPr rtlCol="0" anchor="ctr" wrap="square" lIns="36576" rIns="36576" tIns="0" bIns="0"/>
           <a:lstStyle/>
           <a:p>
             <a:pPr algn="ctr"/>
             <a:r>
-              <a:rPr sz="1050">
+              <a:rPr sz="1100" b="1" i="0">
                 <a:solidFill>
-                  <a:srgbClr val="5D6D7E"/>
+                  <a:srgbClr val="FFFFFF"/>
                 </a:solidFill>
+                <a:latin typeface="Malgun Gothic"/>
               </a:rPr>
-              <a:t>세이프존 — 구역 안에서는 양쪽 모두 조용하다</a:t>
+              <a:t>현장 요구 반영</a:t>
             </a:r>
           </a:p>
         </p:txBody>
       </p:sp>
+      <p:graphicFrame>
+        <p:nvGraphicFramePr>
+          <p:cNvPr id="17" name="Table 16"/>
+          <p:cNvGraphicFramePr>
+            <a:graphicFrameLocks noGrp="1"/>
+          </p:cNvGraphicFramePr>
+          <p:nvPr/>
+        </p:nvGraphicFramePr>
+        <p:xfrm>
+          <a:off x="658368" y="4114800"/>
+          <a:ext cx="11064240" cy="1938528"/>
+        </p:xfrm>
+        <a:graphic>
+          <a:graphicData uri="http://schemas.openxmlformats.org/drawingml/2006/table">
+            <a:tbl>
+              <a:tblPr firstRow="1" bandRow="0">
+                <a:tableStyleId>{5C22544A-7EE6-4342-B048-85BDC9FD1C3A}</a:tableStyleId>
+              </a:tblPr>
+              <a:tblGrid>
+                <a:gridCol w="1600200"/>
+                <a:gridCol w="4251960"/>
+                <a:gridCol w="5212080"/>
+              </a:tblGrid>
+              <a:tr h="329184">
+                <a:tc>
+                  <a:txBody>
+                    <a:bodyPr/>
+                    <a:lstStyle/>
+                    <a:p>
+                      <a:pPr algn="ctr"/>
+                      <a:r>
+                        <a:rPr sz="1100" b="1" i="0">
+                          <a:solidFill>
+                            <a:srgbClr val="FFFFFF"/>
+                          </a:solidFill>
+                          <a:latin typeface="Malgun Gothic"/>
+                        </a:rPr>
+                        <a:t>항목</a:t>
+                      </a:r>
+                    </a:p>
+                  </a:txBody>
+                  <a:tcPr marL="73152" marR="73152" marT="0" marB="0" anchor="ctr">
+                    <a:lnB w="9525" cap="flat" cmpd="sng" algn="ctr">
+                      <a:solidFill>
+                        <a:srgbClr val="333B45"/>
+                      </a:solidFill>
+                    </a:lnB>
+                    <a:lnT w="9525" cap="flat" cmpd="sng" algn="ctr">
+                      <a:solidFill>
+                        <a:srgbClr val="333B45"/>
+                      </a:solidFill>
+                    </a:lnT>
+                    <a:lnR w="9525" cap="flat" cmpd="sng" algn="ctr">
+                      <a:solidFill>
+                        <a:srgbClr val="333B45"/>
+                      </a:solidFill>
+                    </a:lnR>
+                    <a:lnL w="9525" cap="flat" cmpd="sng" algn="ctr">
+                      <a:solidFill>
+                        <a:srgbClr val="333B45"/>
+                      </a:solidFill>
+                    </a:lnL>
+                    <a:solidFill>
+                      <a:srgbClr val="333B45"/>
+                    </a:solidFill>
+                  </a:tcPr>
+                </a:tc>
+                <a:tc>
+                  <a:txBody>
+                    <a:bodyPr/>
+                    <a:lstStyle/>
+                    <a:p>
+                      <a:pPr algn="ctr"/>
+                      <a:r>
+                        <a:rPr sz="1100" b="1" i="0">
+                          <a:solidFill>
+                            <a:srgbClr val="FFFFFF"/>
+                          </a:solidFill>
+                          <a:latin typeface="Malgun Gothic"/>
+                        </a:rPr>
+                        <a:t>Before</a:t>
+                      </a:r>
+                    </a:p>
+                  </a:txBody>
+                  <a:tcPr marL="73152" marR="73152" marT="0" marB="0" anchor="ctr">
+                    <a:lnB w="9525" cap="flat" cmpd="sng" algn="ctr">
+                      <a:solidFill>
+                        <a:srgbClr val="333B45"/>
+                      </a:solidFill>
+                    </a:lnB>
+                    <a:lnT w="9525" cap="flat" cmpd="sng" algn="ctr">
+                      <a:solidFill>
+                        <a:srgbClr val="333B45"/>
+                      </a:solidFill>
+                    </a:lnT>
+                    <a:lnR w="9525" cap="flat" cmpd="sng" algn="ctr">
+                      <a:solidFill>
+                        <a:srgbClr val="333B45"/>
+                      </a:solidFill>
+                    </a:lnR>
+                    <a:lnL w="9525" cap="flat" cmpd="sng" algn="ctr">
+                      <a:solidFill>
+                        <a:srgbClr val="333B45"/>
+                      </a:solidFill>
+                    </a:lnL>
+                    <a:solidFill>
+                      <a:srgbClr val="333B45"/>
+                    </a:solidFill>
+                  </a:tcPr>
+                </a:tc>
+                <a:tc>
+                  <a:txBody>
+                    <a:bodyPr/>
+                    <a:lstStyle/>
+                    <a:p>
+                      <a:pPr algn="ctr"/>
+                      <a:r>
+                        <a:rPr sz="1100" b="1" i="0">
+                          <a:solidFill>
+                            <a:srgbClr val="FFFFFF"/>
+                          </a:solidFill>
+                          <a:latin typeface="Malgun Gothic"/>
+                        </a:rPr>
+                        <a:t>After</a:t>
+                      </a:r>
+                    </a:p>
+                  </a:txBody>
+                  <a:tcPr marL="73152" marR="73152" marT="0" marB="0" anchor="ctr">
+                    <a:lnB w="9525" cap="flat" cmpd="sng" algn="ctr">
+                      <a:solidFill>
+                        <a:srgbClr val="333B45"/>
+                      </a:solidFill>
+                    </a:lnB>
+                    <a:lnT w="9525" cap="flat" cmpd="sng" algn="ctr">
+                      <a:solidFill>
+                        <a:srgbClr val="333B45"/>
+                      </a:solidFill>
+                    </a:lnT>
+                    <a:lnR w="9525" cap="flat" cmpd="sng" algn="ctr">
+                      <a:solidFill>
+                        <a:srgbClr val="333B45"/>
+                      </a:solidFill>
+                    </a:lnR>
+                    <a:lnL w="9525" cap="flat" cmpd="sng" algn="ctr">
+                      <a:solidFill>
+                        <a:srgbClr val="333B45"/>
+                      </a:solidFill>
+                    </a:lnL>
+                    <a:solidFill>
+                      <a:srgbClr val="333B45"/>
+                    </a:solidFill>
+                  </a:tcPr>
+                </a:tc>
+              </a:tr>
+              <a:tr h="402336">
+                <a:tc>
+                  <a:txBody>
+                    <a:bodyPr/>
+                    <a:lstStyle/>
+                    <a:p>
+                      <a:pPr algn="l"/>
+                      <a:r>
+                        <a:rPr sz="1150" b="1" i="0">
+                          <a:solidFill>
+                            <a:srgbClr val="1C2833"/>
+                          </a:solidFill>
+                          <a:latin typeface="Malgun Gothic"/>
+                        </a:rPr>
+                        <a:t>보호 상태</a:t>
+                      </a:r>
+                    </a:p>
+                  </a:txBody>
+                  <a:tcPr marL="73152" marR="73152" marT="18288" marB="18288" anchor="ctr">
+                    <a:lnB w="9525" cap="flat" cmpd="sng" algn="ctr">
+                      <a:solidFill>
+                        <a:srgbClr val="D5DBDB"/>
+                      </a:solidFill>
+                    </a:lnB>
+                    <a:lnT w="9525" cap="flat" cmpd="sng" algn="ctr">
+                      <a:solidFill>
+                        <a:srgbClr val="FFFFFF"/>
+                      </a:solidFill>
+                    </a:lnT>
+                    <a:lnR w="9525" cap="flat" cmpd="sng" algn="ctr">
+                      <a:solidFill>
+                        <a:srgbClr val="FFFFFF"/>
+                      </a:solidFill>
+                    </a:lnR>
+                    <a:lnL w="9525" cap="flat" cmpd="sng" algn="ctr">
+                      <a:solidFill>
+                        <a:srgbClr val="FFFFFF"/>
+                      </a:solidFill>
+                    </a:lnL>
+                    <a:solidFill>
+                      <a:srgbClr val="FFFFFF"/>
+                    </a:solidFill>
+                  </a:tcPr>
+                </a:tc>
+                <a:tc>
+                  <a:txBody>
+                    <a:bodyPr/>
+                    <a:lstStyle/>
+                    <a:p>
+                      <a:pPr algn="l"/>
+                      <a:r>
+                        <a:rPr sz="1150" b="0" i="0">
+                          <a:solidFill>
+                            <a:srgbClr val="1C2833"/>
+                          </a:solidFill>
+                          <a:latin typeface="Malgun Gothic"/>
+                        </a:rPr>
+                        <a:t>끊겨도 작업자가 알 수 없음</a:t>
+                      </a:r>
+                    </a:p>
+                  </a:txBody>
+                  <a:tcPr marL="73152" marR="73152" marT="18288" marB="18288" anchor="ctr">
+                    <a:lnB w="9525" cap="flat" cmpd="sng" algn="ctr">
+                      <a:solidFill>
+                        <a:srgbClr val="D5DBDB"/>
+                      </a:solidFill>
+                    </a:lnB>
+                    <a:lnT w="9525" cap="flat" cmpd="sng" algn="ctr">
+                      <a:solidFill>
+                        <a:srgbClr val="FFFFFF"/>
+                      </a:solidFill>
+                    </a:lnT>
+                    <a:lnR w="9525" cap="flat" cmpd="sng" algn="ctr">
+                      <a:solidFill>
+                        <a:srgbClr val="FFFFFF"/>
+                      </a:solidFill>
+                    </a:lnR>
+                    <a:lnL w="9525" cap="flat" cmpd="sng" algn="ctr">
+                      <a:solidFill>
+                        <a:srgbClr val="FFFFFF"/>
+                      </a:solidFill>
+                    </a:lnL>
+                    <a:solidFill>
+                      <a:srgbClr val="FFFFFF"/>
+                    </a:solidFill>
+                  </a:tcPr>
+                </a:tc>
+                <a:tc>
+                  <a:txBody>
+                    <a:bodyPr/>
+                    <a:lstStyle/>
+                    <a:p>
+                      <a:pPr algn="l"/>
+                      <a:r>
+                        <a:rPr sz="1150" b="0" i="0">
+                          <a:solidFill>
+                            <a:srgbClr val="1C2833"/>
+                          </a:solidFill>
+                          <a:latin typeface="Malgun Gothic"/>
+                        </a:rPr>
+                        <a:t>감지가 멈추면 상시 알림에 이상 표시</a:t>
+                      </a:r>
+                    </a:p>
+                  </a:txBody>
+                  <a:tcPr marL="73152" marR="73152" marT="18288" marB="18288" anchor="ctr">
+                    <a:lnB w="9525" cap="flat" cmpd="sng" algn="ctr">
+                      <a:solidFill>
+                        <a:srgbClr val="D5DBDB"/>
+                      </a:solidFill>
+                    </a:lnB>
+                    <a:lnT w="9525" cap="flat" cmpd="sng" algn="ctr">
+                      <a:solidFill>
+                        <a:srgbClr val="FFFFFF"/>
+                      </a:solidFill>
+                    </a:lnT>
+                    <a:lnR w="9525" cap="flat" cmpd="sng" algn="ctr">
+                      <a:solidFill>
+                        <a:srgbClr val="FFFFFF"/>
+                      </a:solidFill>
+                    </a:lnR>
+                    <a:lnL w="9525" cap="flat" cmpd="sng" algn="ctr">
+                      <a:solidFill>
+                        <a:srgbClr val="FFFFFF"/>
+                      </a:solidFill>
+                    </a:lnL>
+                    <a:solidFill>
+                      <a:srgbClr val="FFFFFF"/>
+                    </a:solidFill>
+                  </a:tcPr>
+                </a:tc>
+              </a:tr>
+              <a:tr h="402336">
+                <a:tc>
+                  <a:txBody>
+                    <a:bodyPr/>
+                    <a:lstStyle/>
+                    <a:p>
+                      <a:pPr algn="l"/>
+                      <a:r>
+                        <a:rPr sz="1150" b="1" i="0">
+                          <a:solidFill>
+                            <a:srgbClr val="1C2833"/>
+                          </a:solidFill>
+                          <a:latin typeface="Malgun Gothic"/>
+                        </a:rPr>
+                        <a:t>이탈 후</a:t>
+                      </a:r>
+                    </a:p>
+                  </a:txBody>
+                  <a:tcPr marL="73152" marR="73152" marT="18288" marB="18288" anchor="ctr">
+                    <a:lnB w="9525" cap="flat" cmpd="sng" algn="ctr">
+                      <a:solidFill>
+                        <a:srgbClr val="D5DBDB"/>
+                      </a:solidFill>
+                    </a:lnB>
+                    <a:lnT w="9525" cap="flat" cmpd="sng" algn="ctr">
+                      <a:solidFill>
+                        <a:srgbClr val="FFFFFF"/>
+                      </a:solidFill>
+                    </a:lnT>
+                    <a:lnR w="9525" cap="flat" cmpd="sng" algn="ctr">
+                      <a:solidFill>
+                        <a:srgbClr val="FFFFFF"/>
+                      </a:solidFill>
+                    </a:lnR>
+                    <a:lnL w="9525" cap="flat" cmpd="sng" algn="ctr">
+                      <a:solidFill>
+                        <a:srgbClr val="FFFFFF"/>
+                      </a:solidFill>
+                    </a:lnL>
+                    <a:solidFill>
+                      <a:srgbClr val="FFFFFF"/>
+                    </a:solidFill>
+                  </a:tcPr>
+                </a:tc>
+                <a:tc>
+                  <a:txBody>
+                    <a:bodyPr/>
+                    <a:lstStyle/>
+                    <a:p>
+                      <a:pPr algn="l"/>
+                      <a:r>
+                        <a:rPr sz="1150" b="0" i="0">
+                          <a:solidFill>
+                            <a:srgbClr val="1C2833"/>
+                          </a:solidFill>
+                          <a:latin typeface="Malgun Gothic"/>
+                        </a:rPr>
+                        <a:t>멀어졌는데 다시 울림</a:t>
+                      </a:r>
+                    </a:p>
+                  </a:txBody>
+                  <a:tcPr marL="73152" marR="73152" marT="18288" marB="18288" anchor="ctr">
+                    <a:lnB w="9525" cap="flat" cmpd="sng" algn="ctr">
+                      <a:solidFill>
+                        <a:srgbClr val="D5DBDB"/>
+                      </a:solidFill>
+                    </a:lnB>
+                    <a:lnT w="9525" cap="flat" cmpd="sng" algn="ctr">
+                      <a:solidFill>
+                        <a:srgbClr val="FFFFFF"/>
+                      </a:solidFill>
+                    </a:lnT>
+                    <a:lnR w="9525" cap="flat" cmpd="sng" algn="ctr">
+                      <a:solidFill>
+                        <a:srgbClr val="FFFFFF"/>
+                      </a:solidFill>
+                    </a:lnR>
+                    <a:lnL w="9525" cap="flat" cmpd="sng" algn="ctr">
+                      <a:solidFill>
+                        <a:srgbClr val="FFFFFF"/>
+                      </a:solidFill>
+                    </a:lnL>
+                    <a:solidFill>
+                      <a:srgbClr val="FFFFFF"/>
+                    </a:solidFill>
+                  </a:tcPr>
+                </a:tc>
+                <a:tc>
+                  <a:txBody>
+                    <a:bodyPr/>
+                    <a:lstStyle/>
+                    <a:p>
+                      <a:pPr algn="l"/>
+                      <a:r>
+                        <a:rPr sz="1150" b="0" i="0">
+                          <a:solidFill>
+                            <a:srgbClr val="1C2833"/>
+                          </a:solidFill>
+                          <a:latin typeface="Malgun Gothic"/>
+                        </a:rPr>
+                        <a:t>경고 범위 재발령 억제</a:t>
+                      </a:r>
+                    </a:p>
+                  </a:txBody>
+                  <a:tcPr marL="73152" marR="73152" marT="18288" marB="18288" anchor="ctr">
+                    <a:lnB w="9525" cap="flat" cmpd="sng" algn="ctr">
+                      <a:solidFill>
+                        <a:srgbClr val="D5DBDB"/>
+                      </a:solidFill>
+                    </a:lnB>
+                    <a:lnT w="9525" cap="flat" cmpd="sng" algn="ctr">
+                      <a:solidFill>
+                        <a:srgbClr val="FFFFFF"/>
+                      </a:solidFill>
+                    </a:lnT>
+                    <a:lnR w="9525" cap="flat" cmpd="sng" algn="ctr">
+                      <a:solidFill>
+                        <a:srgbClr val="FFFFFF"/>
+                      </a:solidFill>
+                    </a:lnR>
+                    <a:lnL w="9525" cap="flat" cmpd="sng" algn="ctr">
+                      <a:solidFill>
+                        <a:srgbClr val="FFFFFF"/>
+                      </a:solidFill>
+                    </a:lnL>
+                    <a:solidFill>
+                      <a:srgbClr val="FFFFFF"/>
+                    </a:solidFill>
+                  </a:tcPr>
+                </a:tc>
+              </a:tr>
+              <a:tr h="402336">
+                <a:tc>
+                  <a:txBody>
+                    <a:bodyPr/>
+                    <a:lstStyle/>
+                    <a:p>
+                      <a:pPr algn="l"/>
+                      <a:r>
+                        <a:rPr sz="1150" b="1" i="0">
+                          <a:solidFill>
+                            <a:srgbClr val="1C2833"/>
+                          </a:solidFill>
+                          <a:latin typeface="Malgun Gothic"/>
+                        </a:rPr>
+                        <a:t>알림 끄기</a:t>
+                      </a:r>
+                    </a:p>
+                  </a:txBody>
+                  <a:tcPr marL="73152" marR="73152" marT="18288" marB="18288" anchor="ctr">
+                    <a:lnB w="9525" cap="flat" cmpd="sng" algn="ctr">
+                      <a:solidFill>
+                        <a:srgbClr val="D5DBDB"/>
+                      </a:solidFill>
+                    </a:lnB>
+                    <a:lnT w="9525" cap="flat" cmpd="sng" algn="ctr">
+                      <a:solidFill>
+                        <a:srgbClr val="FFFFFF"/>
+                      </a:solidFill>
+                    </a:lnT>
+                    <a:lnR w="9525" cap="flat" cmpd="sng" algn="ctr">
+                      <a:solidFill>
+                        <a:srgbClr val="FFFFFF"/>
+                      </a:solidFill>
+                    </a:lnR>
+                    <a:lnL w="9525" cap="flat" cmpd="sng" algn="ctr">
+                      <a:solidFill>
+                        <a:srgbClr val="FFFFFF"/>
+                      </a:solidFill>
+                    </a:lnL>
+                    <a:solidFill>
+                      <a:srgbClr val="FFFFFF"/>
+                    </a:solidFill>
+                  </a:tcPr>
+                </a:tc>
+                <a:tc>
+                  <a:txBody>
+                    <a:bodyPr/>
+                    <a:lstStyle/>
+                    <a:p>
+                      <a:pPr algn="l"/>
+                      <a:r>
+                        <a:rPr sz="1150" b="0" i="0">
+                          <a:solidFill>
+                            <a:srgbClr val="1C2833"/>
+                          </a:solidFill>
+                          <a:latin typeface="Malgun Gothic"/>
+                        </a:rPr>
+                        <a:t>단계가 번거로움</a:t>
+                      </a:r>
+                    </a:p>
+                  </a:txBody>
+                  <a:tcPr marL="73152" marR="73152" marT="18288" marB="18288" anchor="ctr">
+                    <a:lnB w="9525" cap="flat" cmpd="sng" algn="ctr">
+                      <a:solidFill>
+                        <a:srgbClr val="D5DBDB"/>
+                      </a:solidFill>
+                    </a:lnB>
+                    <a:lnT w="9525" cap="flat" cmpd="sng" algn="ctr">
+                      <a:solidFill>
+                        <a:srgbClr val="FFFFFF"/>
+                      </a:solidFill>
+                    </a:lnT>
+                    <a:lnR w="9525" cap="flat" cmpd="sng" algn="ctr">
+                      <a:solidFill>
+                        <a:srgbClr val="FFFFFF"/>
+                      </a:solidFill>
+                    </a:lnR>
+                    <a:lnL w="9525" cap="flat" cmpd="sng" algn="ctr">
+                      <a:solidFill>
+                        <a:srgbClr val="FFFFFF"/>
+                      </a:solidFill>
+                    </a:lnL>
+                    <a:solidFill>
+                      <a:srgbClr val="FFFFFF"/>
+                    </a:solidFill>
+                  </a:tcPr>
+                </a:tc>
+                <a:tc>
+                  <a:txBody>
+                    <a:bodyPr/>
+                    <a:lstStyle/>
+                    <a:p>
+                      <a:pPr algn="l"/>
+                      <a:r>
+                        <a:rPr sz="1150" b="0" i="0">
+                          <a:solidFill>
+                            <a:srgbClr val="1C2833"/>
+                          </a:solidFill>
+                          <a:latin typeface="Malgun Gothic"/>
+                        </a:rPr>
+                        <a:t>알림 본문을 누르면 즉시 무음</a:t>
+                      </a:r>
+                    </a:p>
+                  </a:txBody>
+                  <a:tcPr marL="73152" marR="73152" marT="18288" marB="18288" anchor="ctr">
+                    <a:lnB w="9525" cap="flat" cmpd="sng" algn="ctr">
+                      <a:solidFill>
+                        <a:srgbClr val="D5DBDB"/>
+                      </a:solidFill>
+                    </a:lnB>
+                    <a:lnT w="9525" cap="flat" cmpd="sng" algn="ctr">
+                      <a:solidFill>
+                        <a:srgbClr val="FFFFFF"/>
+                      </a:solidFill>
+                    </a:lnT>
+                    <a:lnR w="9525" cap="flat" cmpd="sng" algn="ctr">
+                      <a:solidFill>
+                        <a:srgbClr val="FFFFFF"/>
+                      </a:solidFill>
+                    </a:lnR>
+                    <a:lnL w="9525" cap="flat" cmpd="sng" algn="ctr">
+                      <a:solidFill>
+                        <a:srgbClr val="FFFFFF"/>
+                      </a:solidFill>
+                    </a:lnL>
+                    <a:solidFill>
+                      <a:srgbClr val="FFFFFF"/>
+                    </a:solidFill>
+                  </a:tcPr>
+                </a:tc>
+              </a:tr>
+              <a:tr h="402336">
+                <a:tc>
+                  <a:txBody>
+                    <a:bodyPr/>
+                    <a:lstStyle/>
+                    <a:p>
+                      <a:pPr algn="l"/>
+                      <a:r>
+                        <a:rPr sz="1150" b="1" i="0">
+                          <a:solidFill>
+                            <a:srgbClr val="1C2833"/>
+                          </a:solidFill>
+                          <a:latin typeface="Malgun Gothic"/>
+                        </a:rPr>
+                        <a:t>경보 화면</a:t>
+                      </a:r>
+                    </a:p>
+                  </a:txBody>
+                  <a:tcPr marL="73152" marR="73152" marT="18288" marB="18288" anchor="ctr">
+                    <a:lnB w="9525" cap="flat" cmpd="sng" algn="ctr">
+                      <a:solidFill>
+                        <a:srgbClr val="D5DBDB"/>
+                      </a:solidFill>
+                    </a:lnB>
+                    <a:lnT w="9525" cap="flat" cmpd="sng" algn="ctr">
+                      <a:solidFill>
+                        <a:srgbClr val="FFFFFF"/>
+                      </a:solidFill>
+                    </a:lnT>
+                    <a:lnR w="9525" cap="flat" cmpd="sng" algn="ctr">
+                      <a:solidFill>
+                        <a:srgbClr val="FFFFFF"/>
+                      </a:solidFill>
+                    </a:lnR>
+                    <a:lnL w="9525" cap="flat" cmpd="sng" algn="ctr">
+                      <a:solidFill>
+                        <a:srgbClr val="FFFFFF"/>
+                      </a:solidFill>
+                    </a:lnL>
+                    <a:solidFill>
+                      <a:srgbClr val="FFFFFF"/>
+                    </a:solidFill>
+                  </a:tcPr>
+                </a:tc>
+                <a:tc>
+                  <a:txBody>
+                    <a:bodyPr/>
+                    <a:lstStyle/>
+                    <a:p>
+                      <a:pPr algn="l"/>
+                      <a:r>
+                        <a:rPr sz="1150" b="0" i="0">
+                          <a:solidFill>
+                            <a:srgbClr val="1C2833"/>
+                          </a:solidFill>
+                          <a:latin typeface="Malgun Gothic"/>
+                        </a:rPr>
+                        <a:t>눈에 잘 들어오지 않음</a:t>
+                      </a:r>
+                    </a:p>
+                  </a:txBody>
+                  <a:tcPr marL="73152" marR="73152" marT="18288" marB="18288" anchor="ctr">
+                    <a:lnB w="9525" cap="flat" cmpd="sng" algn="ctr">
+                      <a:solidFill>
+                        <a:srgbClr val="D5DBDB"/>
+                      </a:solidFill>
+                    </a:lnB>
+                    <a:lnT w="9525" cap="flat" cmpd="sng" algn="ctr">
+                      <a:solidFill>
+                        <a:srgbClr val="FFFFFF"/>
+                      </a:solidFill>
+                    </a:lnT>
+                    <a:lnR w="9525" cap="flat" cmpd="sng" algn="ctr">
+                      <a:solidFill>
+                        <a:srgbClr val="FFFFFF"/>
+                      </a:solidFill>
+                    </a:lnR>
+                    <a:lnL w="9525" cap="flat" cmpd="sng" algn="ctr">
+                      <a:solidFill>
+                        <a:srgbClr val="FFFFFF"/>
+                      </a:solidFill>
+                    </a:lnL>
+                    <a:solidFill>
+                      <a:srgbClr val="FFFFFF"/>
+                    </a:solidFill>
+                  </a:tcPr>
+                </a:tc>
+                <a:tc>
+                  <a:txBody>
+                    <a:bodyPr/>
+                    <a:lstStyle/>
+                    <a:p>
+                      <a:pPr algn="l"/>
+                      <a:r>
+                        <a:rPr sz="1150" b="0" i="0">
+                          <a:solidFill>
+                            <a:srgbClr val="1C2833"/>
+                          </a:solidFill>
+                          <a:latin typeface="Malgun Gothic"/>
+                        </a:rPr>
+                        <a:t>화면 가장자리에 붙는 사이드바</a:t>
+                      </a:r>
+                    </a:p>
+                  </a:txBody>
+                  <a:tcPr marL="73152" marR="73152" marT="18288" marB="18288" anchor="ctr">
+                    <a:lnB w="9525" cap="flat" cmpd="sng" algn="ctr">
+                      <a:solidFill>
+                        <a:srgbClr val="D5DBDB"/>
+                      </a:solidFill>
+                    </a:lnB>
+                    <a:lnT w="9525" cap="flat" cmpd="sng" algn="ctr">
+                      <a:solidFill>
+                        <a:srgbClr val="FFFFFF"/>
+                      </a:solidFill>
+                    </a:lnT>
+                    <a:lnR w="9525" cap="flat" cmpd="sng" algn="ctr">
+                      <a:solidFill>
+                        <a:srgbClr val="FFFFFF"/>
+                      </a:solidFill>
+                    </a:lnR>
+                    <a:lnL w="9525" cap="flat" cmpd="sng" algn="ctr">
+                      <a:solidFill>
+                        <a:srgbClr val="FFFFFF"/>
+                      </a:solidFill>
+                    </a:lnL>
+                    <a:solidFill>
+                      <a:srgbClr val="FFFFFF"/>
+                    </a:solidFill>
+                  </a:tcPr>
+                </a:tc>
+              </a:tr>
+            </a:tbl>
+          </a:graphicData>
+        </a:graphic>
+      </p:graphicFrame>
     </p:spTree>
     <p:extLst>
       <p:ext uri="{BB962C8B-B14F-4D97-AF65-F5344CB8AC3E}">
@@ -5899,7 +8216,7 @@
         <p:spPr>
           <a:xfrm>
             <a:off x="636390" y="928122"/>
-            <a:ext cx="4754880" cy="5486400"/>
+            <a:ext cx="11342595" cy="3980770"/>
           </a:xfrm>
           <a:prstGeom prst="rect">
             <a:avLst/>
@@ -5935,134 +8252,12 @@
                 <a:spcPct val="150000"/>
               </a:lnSpc>
             </a:pPr>
-            <a:r>
-              <a:rPr lang="en-US" altLang="ko-KR" sz="1400" dirty="0">
-                <a:solidFill>
-                  <a:schemeClr val="tx1"/>
-                </a:solidFill>
-                <a:latin typeface="+mn-ea"/>
-                <a:ea typeface="+mn-ea"/>
-              </a:rPr>
-              <a:t xml:space="preserve">1) 동작 화면 · 설정 화면</a:t>
-            </a:r>
             <a:endParaRPr lang="en-US" altLang="ko-KR" sz="1400" dirty="0">
               <a:solidFill>
                 <a:schemeClr val="tx1"/>
               </a:solidFill>
               <a:latin typeface="+mn-ea"/>
               <a:ea typeface="+mn-ea"/>
-            </a:endParaRPr>
-          </a:p>
-          <a:p>
-            <a:pPr>
-              <a:lnSpc>
-                <a:spcPct val="150000"/>
-              </a:lnSpc>
-            </a:pPr>
-            <a:r>
-              <a:rPr lang="en-US" altLang="ko-KR" sz="1400" dirty="0">
-                <a:solidFill>
-                  <a:schemeClr val="tx1"/>
-                </a:solidFill>
-                <a:latin typeface="+mn-ea"/>
-              </a:rPr>
-              <a:t xml:space="preserve">  ① 역할만 고르면 나머지는 백그라운드에서 동작</a:t>
-            </a:r>
-            <a:endParaRPr lang="en-US" altLang="ko-KR" sz="1400" dirty="0">
-              <a:solidFill>
-                <a:schemeClr val="tx1"/>
-              </a:solidFill>
-              <a:latin typeface="+mn-ea"/>
-            </a:endParaRPr>
-          </a:p>
-          <a:p>
-            <a:pPr>
-              <a:lnSpc>
-                <a:spcPct val="150000"/>
-              </a:lnSpc>
-            </a:pPr>
-            <a:r>
-              <a:rPr lang="en-US" altLang="ko-KR" sz="1400" dirty="0">
-                <a:solidFill>
-                  <a:schemeClr val="tx1"/>
-                </a:solidFill>
-                <a:latin typeface="+mn-ea"/>
-              </a:rPr>
-              <a:t xml:space="preserve">  ② 센터별 조건은 설정 화면에서 조정</a:t>
-            </a:r>
-            <a:endParaRPr lang="en-US" altLang="ko-KR" sz="1400" dirty="0">
-              <a:solidFill>
-                <a:schemeClr val="tx1"/>
-              </a:solidFill>
-              <a:latin typeface="+mn-ea"/>
-            </a:endParaRPr>
-          </a:p>
-          <a:p>
-            <a:pPr>
-              <a:lnSpc>
-                <a:spcPct val="150000"/>
-              </a:lnSpc>
-            </a:pPr>
-            <a:r>
-              <a:rPr lang="en-US" altLang="ko-KR" sz="1400" dirty="0">
-                <a:solidFill>
-                  <a:schemeClr val="tx1"/>
-                </a:solidFill>
-                <a:latin typeface="+mn-ea"/>
-                <a:ea typeface="+mn-ea"/>
-              </a:rPr>
-              <a:t xml:space="preserve">2) 첨부</a:t>
-            </a:r>
-            <a:endParaRPr lang="en-US" altLang="ko-KR" sz="1400" dirty="0">
-              <a:solidFill>
-                <a:schemeClr val="tx1"/>
-              </a:solidFill>
-              <a:latin typeface="+mn-ea"/>
-              <a:ea typeface="+mn-ea"/>
-            </a:endParaRPr>
-          </a:p>
-          <a:p>
-            <a:pPr>
-              <a:lnSpc>
-                <a:spcPct val="150000"/>
-              </a:lnSpc>
-            </a:pPr>
-            <a:r>
-              <a:rPr lang="en-US" altLang="ko-KR" sz="1400" dirty="0">
-                <a:solidFill>
-                  <a:schemeClr val="tx1"/>
-                </a:solidFill>
-                <a:latin typeface="+mn-ea"/>
-              </a:rPr>
-              <a:t xml:space="preserve">  ① 시연 영상 — 재생하면 판정 네 가지가 차례로 재현</a:t>
-            </a:r>
-            <a:endParaRPr lang="en-US" altLang="ko-KR" sz="1400" dirty="0">
-              <a:solidFill>
-                <a:schemeClr val="tx1"/>
-              </a:solidFill>
-              <a:latin typeface="+mn-ea"/>
-            </a:endParaRPr>
-          </a:p>
-          <a:p>
-            <a:pPr>
-              <a:lnSpc>
-                <a:spcPct val="150000"/>
-              </a:lnSpc>
-            </a:pPr>
-            <a:r>
-              <a:rPr lang="en-US" altLang="ko-KR" sz="1400" dirty="0">
-                <a:solidFill>
-                  <a:schemeClr val="tx1"/>
-                </a:solidFill>
-                <a:latin typeface="+mn-ea"/>
-              </a:rPr>
-              <a:t xml:space="preserve">  ② 판정 시뮬레이터 — 브라우저에서 직접 조작</a:t>
-            </a:r>
-            <a:endParaRPr lang="en-US" altLang="ko-KR" sz="1400" dirty="0">
-              <a:solidFill>
-                <a:schemeClr val="tx1"/>
-              </a:solidFill>
-              <a:latin typeface="+mn-ea"/>
             </a:endParaRPr>
           </a:p>
         </p:txBody>
@@ -6134,9 +8329,203 @@
           </a:p>
         </p:txBody>
       </p:sp>
+      <p:sp>
+        <p:nvSpPr>
+          <p:cNvPr id="13" name="TextBox 12"/>
+          <p:cNvSpPr txBox="1"/>
+          <p:nvPr/>
+        </p:nvSpPr>
+        <p:spPr>
+          <a:xfrm>
+            <a:off x="640080" y="932688"/>
+            <a:ext cx="11155680" cy="640080"/>
+          </a:xfrm>
+          <a:prstGeom prst="rect">
+            <a:avLst/>
+          </a:prstGeom>
+          <a:noFill/>
+        </p:spPr>
+        <p:txBody>
+          <a:bodyPr wrap="square" lIns="36576" rIns="36576" tIns="0" bIns="0">
+            <a:spAutoFit/>
+          </a:bodyPr>
+          <a:lstStyle/>
+          <a:p>
+            <a:pPr algn="ctr"/>
+            <a:r>
+              <a:rPr sz="1400" b="1" i="0">
+                <a:solidFill>
+                  <a:srgbClr val="1C2833"/>
+                </a:solidFill>
+                <a:latin typeface="Malgun Gothic"/>
+              </a:rPr>
+              <a:t>신호 수신</a:t>
+            </a:r>
+            <a:r>
+              <a:rPr sz="1400" b="1" i="0">
+                <a:solidFill>
+                  <a:srgbClr val="8A949E"/>
+                </a:solidFill>
+                <a:latin typeface="Malgun Gothic"/>
+              </a:rPr>
+              <a:t>  →  </a:t>
+            </a:r>
+            <a:r>
+              <a:rPr sz="1400" b="1" i="0">
+                <a:solidFill>
+                  <a:srgbClr val="1C2833"/>
+                </a:solidFill>
+                <a:latin typeface="Malgun Gothic"/>
+              </a:rPr>
+              <a:t>거리 추정</a:t>
+            </a:r>
+            <a:r>
+              <a:rPr sz="1400" b="1" i="0">
+                <a:solidFill>
+                  <a:srgbClr val="8A949E"/>
+                </a:solidFill>
+                <a:latin typeface="Malgun Gothic"/>
+              </a:rPr>
+              <a:t>  →  </a:t>
+            </a:r>
+            <a:r>
+              <a:rPr sz="1400" b="1" i="0">
+                <a:solidFill>
+                  <a:srgbClr val="1C2833"/>
+                </a:solidFill>
+                <a:latin typeface="Malgun Gothic"/>
+              </a:rPr>
+              <a:t>등급 판정</a:t>
+            </a:r>
+            <a:r>
+              <a:rPr sz="1400" b="1" i="0">
+                <a:solidFill>
+                  <a:srgbClr val="8A949E"/>
+                </a:solidFill>
+                <a:latin typeface="Malgun Gothic"/>
+              </a:rPr>
+              <a:t>  →  </a:t>
+            </a:r>
+            <a:r>
+              <a:rPr sz="1400" b="1" i="0">
+                <a:solidFill>
+                  <a:srgbClr val="1C2833"/>
+                </a:solidFill>
+                <a:latin typeface="Malgun Gothic"/>
+              </a:rPr>
+              <a:t>3중 경보</a:t>
+            </a:r>
+          </a:p>
+          <a:p>
+            <a:pPr algn="ctr"/>
+            <a:r>
+              <a:rPr sz="1050" b="0" i="1">
+                <a:solidFill>
+                  <a:srgbClr val="8A949E"/>
+                </a:solidFill>
+                <a:latin typeface="Malgun Gothic"/>
+              </a:rPr>
+              <a:t>BLE 광고</a:t>
+            </a:r>
+            <a:r>
+              <a:rPr sz="1050" b="0" i="1">
+                <a:solidFill>
+                  <a:srgbClr val="8A949E"/>
+                </a:solidFill>
+                <a:latin typeface="Malgun Gothic"/>
+              </a:rPr>
+              <a:t>   →   </a:t>
+            </a:r>
+            <a:r>
+              <a:rPr sz="1050" b="0" i="1">
+                <a:solidFill>
+                  <a:srgbClr val="8A949E"/>
+                </a:solidFill>
+                <a:latin typeface="Malgun Gothic"/>
+              </a:rPr>
+              <a:t>3단 필터</a:t>
+            </a:r>
+            <a:r>
+              <a:rPr sz="1050" b="0" i="1">
+                <a:solidFill>
+                  <a:srgbClr val="8A949E"/>
+                </a:solidFill>
+                <a:latin typeface="Malgun Gothic"/>
+              </a:rPr>
+              <a:t>   →   </a:t>
+            </a:r>
+            <a:r>
+              <a:rPr sz="1050" b="0" i="1">
+                <a:solidFill>
+                  <a:srgbClr val="8A949E"/>
+                </a:solidFill>
+                <a:latin typeface="Malgun Gothic"/>
+              </a:rPr>
+              <a:t>상태머신</a:t>
+            </a:r>
+            <a:r>
+              <a:rPr sz="1050" b="0" i="1">
+                <a:solidFill>
+                  <a:srgbClr val="8A949E"/>
+                </a:solidFill>
+                <a:latin typeface="Malgun Gothic"/>
+              </a:rPr>
+              <a:t>   →   </a:t>
+            </a:r>
+            <a:r>
+              <a:rPr sz="1050" b="0" i="1">
+                <a:solidFill>
+                  <a:srgbClr val="8A949E"/>
+                </a:solidFill>
+                <a:latin typeface="Malgun Gothic"/>
+              </a:rPr>
+              <a:t>소리 · 진동 · 화면</a:t>
+            </a:r>
+          </a:p>
+        </p:txBody>
+      </p:sp>
+      <p:sp>
+        <p:nvSpPr>
+          <p:cNvPr id="14" name="TextBox 13"/>
+          <p:cNvSpPr txBox="1"/>
+          <p:nvPr/>
+        </p:nvSpPr>
+        <p:spPr>
+          <a:xfrm>
+            <a:off x="822959" y="1938528"/>
+            <a:ext cx="2127738" cy="274320"/>
+          </a:xfrm>
+          <a:prstGeom prst="rect">
+            <a:avLst/>
+          </a:prstGeom>
+          <a:noFill/>
+        </p:spPr>
+        <p:txBody>
+          <a:bodyPr wrap="square" lIns="36576" rIns="36576" tIns="0" bIns="0">
+            <a:spAutoFit/>
+          </a:bodyPr>
+          <a:lstStyle/>
+          <a:p>
+            <a:pPr algn="ctr">
+              <a:spcAft>
+                <a:spcPts val="400"/>
+              </a:spcAft>
+            </a:pPr>
+            <a:r>
+              <a:rPr sz="1200" b="1" i="0">
+                <a:solidFill>
+                  <a:srgbClr val="1C2833"/>
+                </a:solidFill>
+                <a:latin typeface="Malgun Gothic"/>
+              </a:rPr>
+              <a:t>동작 화면</a:t>
+            </a:r>
+          </a:p>
+        </p:txBody>
+      </p:sp>
       <p:pic>
         <p:nvPicPr>
-          <p:cNvPr id="13" name="Picture 12" descr="screen_running.png"/>
+          <p:cNvPr id="15" name="Picture 14" descr="screen_running.png"/>
           <p:cNvPicPr>
             <a:picLocks noChangeAspect="1"/>
           </p:cNvPicPr>
@@ -6150,8 +8539,8 @@
         </p:blipFill>
         <p:spPr>
           <a:xfrm>
-            <a:off x="868680" y="3566160"/>
-            <a:ext cx="1208942" cy="2514600"/>
+            <a:off x="1051560" y="2267712"/>
+            <a:ext cx="1670538" cy="3474720"/>
           </a:xfrm>
           <a:prstGeom prst="rect">
             <a:avLst/>
@@ -6160,14 +8549,14 @@
       </p:pic>
       <p:sp>
         <p:nvSpPr>
-          <p:cNvPr id="14" name="TextBox 13"/>
+          <p:cNvPr id="16" name="TextBox 15"/>
           <p:cNvSpPr txBox="1"/>
           <p:nvPr/>
         </p:nvSpPr>
         <p:spPr>
           <a:xfrm>
-            <a:off x="685800" y="3246120"/>
-            <a:ext cx="1574702" cy="274320"/>
+            <a:off x="2950698" y="1938528"/>
+            <a:ext cx="2127738" cy="274320"/>
           </a:xfrm>
           <a:prstGeom prst="rect">
             <a:avLst/>
@@ -6175,22 +8564,31 @@
           <a:noFill/>
         </p:spPr>
         <p:txBody>
-          <a:bodyPr wrap="none">
+          <a:bodyPr wrap="square" lIns="36576" rIns="36576" tIns="0" bIns="0">
             <a:spAutoFit/>
           </a:bodyPr>
           <a:lstStyle/>
           <a:p>
-            <a:pPr algn="l"/>
-            <a:r>
-              <a:rPr sz="1000" b="1"/>
-              <a:t>동작 화면</a:t>
+            <a:pPr algn="ctr">
+              <a:spcAft>
+                <a:spcPts val="400"/>
+              </a:spcAft>
+            </a:pPr>
+            <a:r>
+              <a:rPr sz="1200" b="1" i="0">
+                <a:solidFill>
+                  <a:srgbClr val="1C2833"/>
+                </a:solidFill>
+                <a:latin typeface="Malgun Gothic"/>
+              </a:rPr>
+              <a:t>설정 화면</a:t>
             </a:r>
           </a:p>
         </p:txBody>
       </p:sp>
       <p:pic>
         <p:nvPicPr>
-          <p:cNvPr id="15" name="Picture 14" descr="screen_settings.png"/>
+          <p:cNvPr id="17" name="Picture 16" descr="screen_settings.png"/>
           <p:cNvPicPr>
             <a:picLocks noChangeAspect="1"/>
           </p:cNvPicPr>
@@ -6204,8 +8602,8 @@
         </p:blipFill>
         <p:spPr>
           <a:xfrm>
-            <a:off x="2489102" y="3566160"/>
-            <a:ext cx="1208942" cy="2514600"/>
+            <a:off x="3179298" y="2267712"/>
+            <a:ext cx="1670538" cy="3474720"/>
           </a:xfrm>
           <a:prstGeom prst="rect">
             <a:avLst/>
@@ -6214,14 +8612,14 @@
       </p:pic>
       <p:sp>
         <p:nvSpPr>
-          <p:cNvPr id="16" name="TextBox 15"/>
+          <p:cNvPr id="18" name="TextBox 17"/>
           <p:cNvSpPr txBox="1"/>
           <p:nvPr/>
         </p:nvSpPr>
         <p:spPr>
           <a:xfrm>
-            <a:off x="2306222" y="3246120"/>
-            <a:ext cx="1574702" cy="274320"/>
+            <a:off x="5870448" y="1773936"/>
+            <a:ext cx="5806440" cy="292608"/>
           </a:xfrm>
           <a:prstGeom prst="rect">
             <a:avLst/>
@@ -6229,22 +8627,31 @@
           <a:noFill/>
         </p:spPr>
         <p:txBody>
-          <a:bodyPr wrap="none">
+          <a:bodyPr wrap="square" lIns="36576" rIns="36576" tIns="0" bIns="0">
             <a:spAutoFit/>
           </a:bodyPr>
           <a:lstStyle/>
           <a:p>
-            <a:pPr algn="l"/>
-            <a:r>
-              <a:rPr sz="1000" b="1"/>
-              <a:t>설정 화면</a:t>
+            <a:pPr algn="ctr">
+              <a:spcAft>
+                <a:spcPts val="400"/>
+              </a:spcAft>
+            </a:pPr>
+            <a:r>
+              <a:rPr sz="1200" b="1" i="0">
+                <a:solidFill>
+                  <a:srgbClr val="1C2833"/>
+                </a:solidFill>
+                <a:latin typeface="Malgun Gothic"/>
+              </a:rPr>
+              <a:t>시연 영상 — 슬라이드쇼에서 재생 (경보음 포함)</a:t>
             </a:r>
           </a:p>
         </p:txBody>
       </p:sp>
       <p:pic>
         <p:nvPicPr>
-          <p:cNvPr id="17" name="safealert-sim.mp4">
+          <p:cNvPr id="19" name="safealert-sim.mp4">
             <a:hlinkClick r:id="" action="ppaction://media"/>
           </p:cNvPr>
           <p:cNvPicPr>
@@ -6267,8 +8674,8 @@
         </p:blipFill>
         <p:spPr>
           <a:xfrm>
-            <a:off x="5760720" y="1874519"/>
-            <a:ext cx="5760720" cy="3238539"/>
+            <a:off x="5870448" y="2121408"/>
+            <a:ext cx="5806440" cy="3264242"/>
           </a:xfrm>
           <a:prstGeom prst="rect">
             <a:avLst/>
@@ -6277,14 +8684,14 @@
       </p:pic>
       <p:sp>
         <p:nvSpPr>
-          <p:cNvPr id="18" name="TextBox 17"/>
+          <p:cNvPr id="20" name="TextBox 19"/>
           <p:cNvSpPr txBox="1"/>
           <p:nvPr/>
         </p:nvSpPr>
         <p:spPr>
           <a:xfrm>
-            <a:off x="5760720" y="1490471"/>
-            <a:ext cx="5760720" cy="310896"/>
+            <a:off x="5870448" y="5550242"/>
+            <a:ext cx="5806440" cy="292608"/>
           </a:xfrm>
           <a:prstGeom prst="rect">
             <a:avLst/>
@@ -6292,14 +8699,24 @@
           <a:noFill/>
         </p:spPr>
         <p:txBody>
-          <a:bodyPr wrap="none">
+          <a:bodyPr wrap="square" lIns="36576" rIns="36576" tIns="0" bIns="0">
             <a:spAutoFit/>
           </a:bodyPr>
           <a:lstStyle/>
           <a:p>
-            <a:r>
-              <a:rPr sz="1100" b="1"/>
-              <a:t>시연 영상 — 슬라이드쇼에서 재생 (경보음 포함)</a:t>
+            <a:pPr algn="ctr">
+              <a:spcAft>
+                <a:spcPts val="400"/>
+              </a:spcAft>
+            </a:pPr>
+            <a:r>
+              <a:rPr sz="1100" b="0" i="0">
+                <a:solidFill>
+                  <a:srgbClr val="5D6D7E"/>
+                </a:solidFill>
+                <a:latin typeface="Malgun Gothic"/>
+              </a:rPr>
+              <a:t>판정 시뮬레이터 — web/safealert-simulator.html 에서 직접 조작</a:t>
             </a:r>
           </a:p>
         </p:txBody>
@@ -6327,7 +8744,7 @@
                   </p:stCondLst>
                 </p:cTn>
                 <p:tgtEl>
-                  <p:spTgt spid="17"/>
+                  <p:spTgt spid="19"/>
                 </p:tgtEl>
               </p:cMediaNode>
             </p:video>

--- a/docs/presentation/company_form/SafeAlert_보고_2026.08.pptx
+++ b/docs/presentation/company_form/SafeAlert_보고_2026.08.pptx
@@ -11,6 +11,8 @@
     <p:sldId id="256" r:id="rId6"/>
     <p:sldId id="342" r:id="rId7"/>
     <p:sldId id="394" r:id="rId9"/>
+    <p:sldId id="400" r:id="rId33"/>
+    <p:sldId id="399" r:id="rId32"/>
     <p:sldId id="398" r:id="rId31"/>
     <p:sldId id="397" r:id="rId30"/>
     <p:sldId id="396" r:id="rId29"/>
@@ -3824,6 +3826,34 @@
               <a:t xml:space="preserve">  2) 시연 영상 · 판정 시뮬레이터</a:t>
             </a:r>
           </a:p>
+          <a:p>
+            <a:r>
+              <a:rPr lang="en-US" altLang="ko-KR" dirty="0"/>
+              <a:t xml:space="preserve"> </a:t>
+            </a:r>
+            <a:endParaRPr lang="en-US" altLang="ko-KR" dirty="0"/>
+          </a:p>
+          <a:p>
+            <a:r>
+              <a:rPr lang="en-US" altLang="ko-KR" dirty="0"/>
+              <a:t xml:space="preserve">6. 진행 단계 (Phase 1 ~ 5)</a:t>
+            </a:r>
+            <a:endParaRPr lang="en-US" altLang="ko-KR" dirty="0"/>
+          </a:p>
+          <a:p>
+            <a:r>
+              <a:rPr lang="en-US" altLang="ko-KR" dirty="0"/>
+              <a:t xml:space="preserve"> </a:t>
+            </a:r>
+            <a:endParaRPr lang="en-US" altLang="ko-KR" dirty="0"/>
+          </a:p>
+          <a:p>
+            <a:r>
+              <a:rPr lang="en-US" altLang="ko-KR" dirty="0"/>
+              <a:t xml:space="preserve">7. Andon — 중단 · 롤백 기준</a:t>
+            </a:r>
+            <a:endParaRPr lang="en-US" altLang="ko-KR" dirty="0"/>
+          </a:p>
         </p:txBody>
       </p:sp>
     </p:spTree>
@@ -8753,6 +8783,2302 @@
       </p:par>
     </p:tnLst>
   </p:timing>
+</p:sld>
+</file>
+
+<file path=ppt/slides/slide8.xml><?xml version="1.0" encoding="utf-8"?>
+<p:sld xmlns:a="http://schemas.openxmlformats.org/drawingml/2006/main" xmlns:r="http://schemas.openxmlformats.org/officeDocument/2006/relationships" xmlns:p="http://schemas.openxmlformats.org/presentationml/2006/main">
+  <p:cSld>
+    <p:spTree>
+      <p:nvGrpSpPr>
+        <p:cNvPr id="1" name="">
+          <a:extLst>
+            <a:ext uri="{FF2B5EF4-FFF2-40B4-BE49-F238E27FC236}">
+              <a16:creationId xmlns:a16="http://schemas.microsoft.com/office/drawing/2014/main" id="{E4EFD6F4-EBDD-9AC2-DC28-2DDF0C04A565}"/>
+            </a:ext>
+          </a:extLst>
+        </p:cNvPr>
+        <p:cNvGrpSpPr/>
+        <p:nvPr/>
+      </p:nvGrpSpPr>
+      <p:grpSpPr>
+        <a:xfrm>
+          <a:off x="0" y="0"/>
+          <a:ext cx="0" cy="0"/>
+          <a:chOff x="0" y="0"/>
+          <a:chExt cx="0" cy="0"/>
+        </a:xfrm>
+      </p:grpSpPr>
+      <p:sp>
+        <p:nvSpPr>
+          <p:cNvPr id="5" name="제목 1">
+            <a:extLst>
+              <a:ext uri="{FF2B5EF4-FFF2-40B4-BE49-F238E27FC236}">
+                <a16:creationId xmlns:a16="http://schemas.microsoft.com/office/drawing/2014/main" id="{3462F1EA-748D-175E-1C14-5E9984552716}"/>
+              </a:ext>
+            </a:extLst>
+          </p:cNvPr>
+          <p:cNvSpPr txBox="1">
+            <a:spLocks/>
+          </p:cNvSpPr>
+          <p:nvPr/>
+        </p:nvSpPr>
+        <p:spPr>
+          <a:xfrm>
+            <a:off x="636390" y="928122"/>
+            <a:ext cx="11342595" cy="3980770"/>
+          </a:xfrm>
+          <a:prstGeom prst="rect">
+            <a:avLst/>
+          </a:prstGeom>
+          <a:noFill/>
+        </p:spPr>
+        <p:txBody>
+          <a:bodyPr vert="horz" wrap="square" lIns="91440" tIns="45720" rIns="91440" bIns="45720" rtlCol="0" anchor="t">
+            <a:spAutoFit/>
+          </a:bodyPr>
+          <a:lstStyle>
+            <a:lvl1pPr marL="0" indent="0" algn="l" defTabSz="914400" rtl="0" eaLnBrk="1" latinLnBrk="1" hangingPunct="1">
+              <a:lnSpc>
+                <a:spcPct val="100000"/>
+              </a:lnSpc>
+              <a:spcBef>
+                <a:spcPct val="0"/>
+              </a:spcBef>
+              <a:buNone/>
+              <a:defRPr lang="en-US" sz="1600" b="1" kern="1200" dirty="0">
+                <a:solidFill>
+                  <a:srgbClr val="560000"/>
+                </a:solidFill>
+                <a:latin typeface="+mj-ea"/>
+                <a:ea typeface="+mj-ea"/>
+                <a:cs typeface="+mn-cs"/>
+              </a:defRPr>
+            </a:lvl1pPr>
+          </a:lstStyle>
+          <a:p>
+            <a:pPr>
+              <a:lnSpc>
+                <a:spcPct val="150000"/>
+              </a:lnSpc>
+            </a:pPr>
+            <a:endParaRPr lang="en-US" altLang="ko-KR" sz="1400" dirty="0">
+              <a:solidFill>
+                <a:schemeClr val="tx1"/>
+              </a:solidFill>
+              <a:latin typeface="+mn-ea"/>
+              <a:ea typeface="+mn-ea"/>
+            </a:endParaRPr>
+          </a:p>
+        </p:txBody>
+      </p:sp>
+      <p:sp>
+        <p:nvSpPr>
+          <p:cNvPr id="2" name="제목 1">
+            <a:extLst>
+              <a:ext uri="{FF2B5EF4-FFF2-40B4-BE49-F238E27FC236}">
+                <a16:creationId xmlns:a16="http://schemas.microsoft.com/office/drawing/2014/main" id="{54B5B938-7AFE-1302-EB19-024D633AA023}"/>
+              </a:ext>
+            </a:extLst>
+          </p:cNvPr>
+          <p:cNvSpPr>
+            <a:spLocks noGrp="1"/>
+          </p:cNvSpPr>
+          <p:nvPr>
+            <p:ph type="title"/>
+          </p:nvPr>
+        </p:nvSpPr>
+        <p:spPr>
+          <a:xfrm>
+            <a:off x="636391" y="595686"/>
+            <a:ext cx="11293263" cy="338554"/>
+          </a:xfrm>
+        </p:spPr>
+        <p:txBody>
+          <a:bodyPr/>
+          <a:lstStyle/>
+          <a:p>
+            <a:r>
+              <a:rPr lang="en-US" altLang="ko-KR" dirty="0">
+                <a:latin typeface="맑은 고딕" panose="020B0503020000020004" pitchFamily="50" charset="-127"/>
+                <a:ea typeface="맑은 고딕" panose="020B0503020000020004" pitchFamily="50" charset="-127"/>
+              </a:rPr>
+              <a:t>6. 진행 단계</a:t>
+            </a:r>
+            <a:endParaRPr lang="ko-KR" altLang="en-US" dirty="0"/>
+          </a:p>
+        </p:txBody>
+      </p:sp>
+      <p:sp>
+        <p:nvSpPr>
+          <p:cNvPr id="12" name="슬라이드 번호 개체 틀 11">
+            <a:extLst>
+              <a:ext uri="{FF2B5EF4-FFF2-40B4-BE49-F238E27FC236}">
+                <a16:creationId xmlns:a16="http://schemas.microsoft.com/office/drawing/2014/main" id="{B7184ABC-D9FC-E120-072A-5615A9569176}"/>
+              </a:ext>
+            </a:extLst>
+          </p:cNvPr>
+          <p:cNvSpPr>
+            <a:spLocks noGrp="1"/>
+          </p:cNvSpPr>
+          <p:nvPr>
+            <p:ph type="sldNum" sz="quarter" idx="12"/>
+          </p:nvPr>
+        </p:nvSpPr>
+        <p:spPr/>
+        <p:txBody>
+          <a:bodyPr/>
+          <a:lstStyle/>
+          <a:p>
+            <a:fld id="{A2CF8A37-2FCE-495B-9275-FE23C56C2D36}" type="slidenum">
+              <a:rPr lang="ko-KR" altLang="en-US" smtClean="0"/>
+              <a:pPr/>
+              <a:t>4</a:t>
+            </a:fld>
+            <a:endParaRPr lang="ko-KR" altLang="en-US" dirty="0"/>
+          </a:p>
+        </p:txBody>
+      </p:sp>
+      <p:sp>
+        <p:nvSpPr>
+          <p:cNvPr id="13" name="Rectangle 12"/>
+          <p:cNvSpPr/>
+          <p:nvPr/>
+        </p:nvSpPr>
+        <p:spPr>
+          <a:xfrm>
+            <a:off x="640080" y="1024128"/>
+            <a:ext cx="1463040" cy="301752"/>
+          </a:xfrm>
+          <a:prstGeom prst="rect">
+            <a:avLst/>
+          </a:prstGeom>
+          <a:solidFill>
+            <a:srgbClr val="8C8C8C"/>
+          </a:solidFill>
+          <a:ln>
+            <a:noFill/>
+          </a:ln>
+          <a:effectLst/>
+        </p:spPr>
+        <p:style>
+          <a:lnRef idx="1">
+            <a:schemeClr val="accent1"/>
+          </a:lnRef>
+          <a:fillRef idx="3">
+            <a:schemeClr val="accent1"/>
+          </a:fillRef>
+          <a:effectRef idx="2">
+            <a:schemeClr val="accent1"/>
+          </a:effectRef>
+          <a:fontRef idx="minor">
+            <a:schemeClr val="lt1"/>
+          </a:fontRef>
+        </p:style>
+        <p:txBody>
+          <a:bodyPr rtlCol="0" anchor="ctr" wrap="square" lIns="36576" rIns="36576" tIns="0" bIns="0"/>
+          <a:lstStyle/>
+          <a:p>
+            <a:pPr algn="ctr"/>
+            <a:r>
+              <a:rPr sz="1100" b="1" i="0">
+                <a:solidFill>
+                  <a:srgbClr val="FFFFFF"/>
+                </a:solidFill>
+                <a:latin typeface="Malgun Gothic"/>
+              </a:rPr>
+              <a:t>Phase 1 ~ 5</a:t>
+            </a:r>
+          </a:p>
+        </p:txBody>
+      </p:sp>
+      <p:sp>
+        <p:nvSpPr>
+          <p:cNvPr id="14" name="TextBox 13"/>
+          <p:cNvSpPr txBox="1"/>
+          <p:nvPr/>
+        </p:nvSpPr>
+        <p:spPr>
+          <a:xfrm>
+            <a:off x="2240280" y="1051560"/>
+            <a:ext cx="9326880" cy="274320"/>
+          </a:xfrm>
+          <a:prstGeom prst="rect">
+            <a:avLst/>
+          </a:prstGeom>
+          <a:noFill/>
+        </p:spPr>
+        <p:txBody>
+          <a:bodyPr wrap="square" lIns="36576" rIns="36576" tIns="0" bIns="0">
+            <a:spAutoFit/>
+          </a:bodyPr>
+          <a:lstStyle/>
+          <a:p>
+            <a:pPr algn="l">
+              <a:spcAft>
+                <a:spcPts val="400"/>
+              </a:spcAft>
+            </a:pPr>
+            <a:r>
+              <a:rPr sz="1200" b="0" i="0">
+                <a:solidFill>
+                  <a:srgbClr val="5D6D7E"/>
+                </a:solidFill>
+                <a:latin typeface="Malgun Gothic"/>
+              </a:rPr>
+              <a:t>새 기능을 붙이는 작업이 아니다. 판정이 흔들리는 구조적 원인을 걷어낸다.</a:t>
+            </a:r>
+          </a:p>
+        </p:txBody>
+      </p:sp>
+      <p:graphicFrame>
+        <p:nvGraphicFramePr>
+          <p:cNvPr id="15" name="Table 14"/>
+          <p:cNvGraphicFramePr>
+            <a:graphicFrameLocks noGrp="1"/>
+          </p:cNvGraphicFramePr>
+          <p:nvPr/>
+        </p:nvGraphicFramePr>
+        <p:xfrm>
+          <a:off x="658368" y="1481328"/>
+          <a:ext cx="11064240" cy="2706624"/>
+        </p:xfrm>
+        <a:graphic>
+          <a:graphicData uri="http://schemas.openxmlformats.org/drawingml/2006/table">
+            <a:tbl>
+              <a:tblPr firstRow="1" bandRow="0">
+                <a:tableStyleId>{5C22544A-7EE6-4342-B048-85BDC9FD1C3A}</a:tableStyleId>
+              </a:tblPr>
+              <a:tblGrid>
+                <a:gridCol w="685800"/>
+                <a:gridCol w="3794760"/>
+                <a:gridCol w="5394960"/>
+                <a:gridCol w="1188720"/>
+              </a:tblGrid>
+              <a:tr h="329184">
+                <a:tc>
+                  <a:txBody>
+                    <a:bodyPr/>
+                    <a:lstStyle/>
+                    <a:p>
+                      <a:pPr algn="ctr"/>
+                      <a:r>
+                        <a:rPr sz="1100" b="1" i="0">
+                          <a:solidFill>
+                            <a:srgbClr val="FFFFFF"/>
+                          </a:solidFill>
+                          <a:latin typeface="Malgun Gothic"/>
+                        </a:rPr>
+                        <a:t>단계</a:t>
+                      </a:r>
+                    </a:p>
+                  </a:txBody>
+                  <a:tcPr marL="73152" marR="73152" marT="0" marB="0" anchor="ctr">
+                    <a:lnB w="9525" cap="flat" cmpd="sng" algn="ctr">
+                      <a:solidFill>
+                        <a:srgbClr val="333B45"/>
+                      </a:solidFill>
+                    </a:lnB>
+                    <a:lnT w="9525" cap="flat" cmpd="sng" algn="ctr">
+                      <a:solidFill>
+                        <a:srgbClr val="333B45"/>
+                      </a:solidFill>
+                    </a:lnT>
+                    <a:lnR w="9525" cap="flat" cmpd="sng" algn="ctr">
+                      <a:solidFill>
+                        <a:srgbClr val="333B45"/>
+                      </a:solidFill>
+                    </a:lnR>
+                    <a:lnL w="9525" cap="flat" cmpd="sng" algn="ctr">
+                      <a:solidFill>
+                        <a:srgbClr val="333B45"/>
+                      </a:solidFill>
+                    </a:lnL>
+                    <a:solidFill>
+                      <a:srgbClr val="333B45"/>
+                    </a:solidFill>
+                  </a:tcPr>
+                </a:tc>
+                <a:tc>
+                  <a:txBody>
+                    <a:bodyPr/>
+                    <a:lstStyle/>
+                    <a:p>
+                      <a:pPr algn="ctr"/>
+                      <a:r>
+                        <a:rPr sz="1100" b="1" i="0">
+                          <a:solidFill>
+                            <a:srgbClr val="FFFFFF"/>
+                          </a:solidFill>
+                          <a:latin typeface="Malgun Gothic"/>
+                        </a:rPr>
+                        <a:t>무엇을 하는가</a:t>
+                      </a:r>
+                    </a:p>
+                  </a:txBody>
+                  <a:tcPr marL="73152" marR="73152" marT="0" marB="0" anchor="ctr">
+                    <a:lnB w="9525" cap="flat" cmpd="sng" algn="ctr">
+                      <a:solidFill>
+                        <a:srgbClr val="333B45"/>
+                      </a:solidFill>
+                    </a:lnB>
+                    <a:lnT w="9525" cap="flat" cmpd="sng" algn="ctr">
+                      <a:solidFill>
+                        <a:srgbClr val="333B45"/>
+                      </a:solidFill>
+                    </a:lnT>
+                    <a:lnR w="9525" cap="flat" cmpd="sng" algn="ctr">
+                      <a:solidFill>
+                        <a:srgbClr val="333B45"/>
+                      </a:solidFill>
+                    </a:lnR>
+                    <a:lnL w="9525" cap="flat" cmpd="sng" algn="ctr">
+                      <a:solidFill>
+                        <a:srgbClr val="333B45"/>
+                      </a:solidFill>
+                    </a:lnL>
+                    <a:solidFill>
+                      <a:srgbClr val="333B45"/>
+                    </a:solidFill>
+                  </a:tcPr>
+                </a:tc>
+                <a:tc>
+                  <a:txBody>
+                    <a:bodyPr/>
+                    <a:lstStyle/>
+                    <a:p>
+                      <a:pPr algn="ctr"/>
+                      <a:r>
+                        <a:rPr sz="1100" b="1" i="0">
+                          <a:solidFill>
+                            <a:srgbClr val="FFFFFF"/>
+                          </a:solidFill>
+                          <a:latin typeface="Malgun Gothic"/>
+                        </a:rPr>
+                        <a:t>출하 시 현장에서 확인할 것</a:t>
+                      </a:r>
+                    </a:p>
+                  </a:txBody>
+                  <a:tcPr marL="73152" marR="73152" marT="0" marB="0" anchor="ctr">
+                    <a:lnB w="9525" cap="flat" cmpd="sng" algn="ctr">
+                      <a:solidFill>
+                        <a:srgbClr val="333B45"/>
+                      </a:solidFill>
+                    </a:lnB>
+                    <a:lnT w="9525" cap="flat" cmpd="sng" algn="ctr">
+                      <a:solidFill>
+                        <a:srgbClr val="333B45"/>
+                      </a:solidFill>
+                    </a:lnT>
+                    <a:lnR w="9525" cap="flat" cmpd="sng" algn="ctr">
+                      <a:solidFill>
+                        <a:srgbClr val="333B45"/>
+                      </a:solidFill>
+                    </a:lnR>
+                    <a:lnL w="9525" cap="flat" cmpd="sng" algn="ctr">
+                      <a:solidFill>
+                        <a:srgbClr val="333B45"/>
+                      </a:solidFill>
+                    </a:lnL>
+                    <a:solidFill>
+                      <a:srgbClr val="333B45"/>
+                    </a:solidFill>
+                  </a:tcPr>
+                </a:tc>
+                <a:tc>
+                  <a:txBody>
+                    <a:bodyPr/>
+                    <a:lstStyle/>
+                    <a:p>
+                      <a:pPr algn="ctr"/>
+                      <a:r>
+                        <a:rPr sz="1100" b="1" i="0">
+                          <a:solidFill>
+                            <a:srgbClr val="FFFFFF"/>
+                          </a:solidFill>
+                          <a:latin typeface="Malgun Gothic"/>
+                        </a:rPr>
+                        <a:t>상태</a:t>
+                      </a:r>
+                    </a:p>
+                  </a:txBody>
+                  <a:tcPr marL="73152" marR="73152" marT="0" marB="0" anchor="ctr">
+                    <a:lnB w="9525" cap="flat" cmpd="sng" algn="ctr">
+                      <a:solidFill>
+                        <a:srgbClr val="333B45"/>
+                      </a:solidFill>
+                    </a:lnB>
+                    <a:lnT w="9525" cap="flat" cmpd="sng" algn="ctr">
+                      <a:solidFill>
+                        <a:srgbClr val="333B45"/>
+                      </a:solidFill>
+                    </a:lnT>
+                    <a:lnR w="9525" cap="flat" cmpd="sng" algn="ctr">
+                      <a:solidFill>
+                        <a:srgbClr val="333B45"/>
+                      </a:solidFill>
+                    </a:lnR>
+                    <a:lnL w="9525" cap="flat" cmpd="sng" algn="ctr">
+                      <a:solidFill>
+                        <a:srgbClr val="333B45"/>
+                      </a:solidFill>
+                    </a:lnL>
+                    <a:solidFill>
+                      <a:srgbClr val="333B45"/>
+                    </a:solidFill>
+                  </a:tcPr>
+                </a:tc>
+              </a:tr>
+              <a:tr h="475488">
+                <a:tc>
+                  <a:txBody>
+                    <a:bodyPr/>
+                    <a:lstStyle/>
+                    <a:p>
+                      <a:pPr algn="ctr"/>
+                      <a:r>
+                        <a:rPr sz="1150" b="1" i="0">
+                          <a:solidFill>
+                            <a:srgbClr val="1C2833"/>
+                          </a:solidFill>
+                          <a:latin typeface="Malgun Gothic"/>
+                        </a:rPr>
+                        <a:t>1</a:t>
+                      </a:r>
+                    </a:p>
+                  </a:txBody>
+                  <a:tcPr marL="73152" marR="73152" marT="18288" marB="18288" anchor="ctr">
+                    <a:lnB w="9525" cap="flat" cmpd="sng" algn="ctr">
+                      <a:solidFill>
+                        <a:srgbClr val="D5DBDB"/>
+                      </a:solidFill>
+                    </a:lnB>
+                    <a:lnT w="9525" cap="flat" cmpd="sng" algn="ctr">
+                      <a:solidFill>
+                        <a:srgbClr val="FFFFFF"/>
+                      </a:solidFill>
+                    </a:lnT>
+                    <a:lnR w="9525" cap="flat" cmpd="sng" algn="ctr">
+                      <a:solidFill>
+                        <a:srgbClr val="FFFFFF"/>
+                      </a:solidFill>
+                    </a:lnR>
+                    <a:lnL w="9525" cap="flat" cmpd="sng" algn="ctr">
+                      <a:solidFill>
+                        <a:srgbClr val="FFFFFF"/>
+                      </a:solidFill>
+                    </a:lnL>
+                    <a:solidFill>
+                      <a:srgbClr val="FFFFFF"/>
+                    </a:solidFill>
+                  </a:tcPr>
+                </a:tc>
+                <a:tc>
+                  <a:txBody>
+                    <a:bodyPr/>
+                    <a:lstStyle/>
+                    <a:p>
+                      <a:pPr algn="l"/>
+                      <a:r>
+                        <a:rPr sz="1150" b="0" i="0">
+                          <a:solidFill>
+                            <a:srgbClr val="1C2833"/>
+                          </a:solidFill>
+                          <a:latin typeface="Malgun Gothic"/>
+                        </a:rPr>
+                        <a:t>테스트 하네스와 CI 회귀 게이트</a:t>
+                      </a:r>
+                    </a:p>
+                  </a:txBody>
+                  <a:tcPr marL="73152" marR="73152" marT="18288" marB="18288" anchor="ctr">
+                    <a:lnB w="9525" cap="flat" cmpd="sng" algn="ctr">
+                      <a:solidFill>
+                        <a:srgbClr val="D5DBDB"/>
+                      </a:solidFill>
+                    </a:lnB>
+                    <a:lnT w="9525" cap="flat" cmpd="sng" algn="ctr">
+                      <a:solidFill>
+                        <a:srgbClr val="FFFFFF"/>
+                      </a:solidFill>
+                    </a:lnT>
+                    <a:lnR w="9525" cap="flat" cmpd="sng" algn="ctr">
+                      <a:solidFill>
+                        <a:srgbClr val="FFFFFF"/>
+                      </a:solidFill>
+                    </a:lnR>
+                    <a:lnL w="9525" cap="flat" cmpd="sng" algn="ctr">
+                      <a:solidFill>
+                        <a:srgbClr val="FFFFFF"/>
+                      </a:solidFill>
+                    </a:lnL>
+                    <a:solidFill>
+                      <a:srgbClr val="FFFFFF"/>
+                    </a:solidFill>
+                  </a:tcPr>
+                </a:tc>
+                <a:tc>
+                  <a:txBody>
+                    <a:bodyPr/>
+                    <a:lstStyle/>
+                    <a:p>
+                      <a:pPr algn="l"/>
+                      <a:r>
+                        <a:rPr sz="1150" b="0" i="0">
+                          <a:solidFill>
+                            <a:srgbClr val="1C2833"/>
+                          </a:solidFill>
+                          <a:latin typeface="Malgun Gothic"/>
+                        </a:rPr>
+                        <a:t>설치 · 경보 동작이 이전과 같은가</a:t>
+                      </a:r>
+                    </a:p>
+                  </a:txBody>
+                  <a:tcPr marL="73152" marR="73152" marT="18288" marB="18288" anchor="ctr">
+                    <a:lnB w="9525" cap="flat" cmpd="sng" algn="ctr">
+                      <a:solidFill>
+                        <a:srgbClr val="D5DBDB"/>
+                      </a:solidFill>
+                    </a:lnB>
+                    <a:lnT w="9525" cap="flat" cmpd="sng" algn="ctr">
+                      <a:solidFill>
+                        <a:srgbClr val="FFFFFF"/>
+                      </a:solidFill>
+                    </a:lnT>
+                    <a:lnR w="9525" cap="flat" cmpd="sng" algn="ctr">
+                      <a:solidFill>
+                        <a:srgbClr val="FFFFFF"/>
+                      </a:solidFill>
+                    </a:lnR>
+                    <a:lnL w="9525" cap="flat" cmpd="sng" algn="ctr">
+                      <a:solidFill>
+                        <a:srgbClr val="FFFFFF"/>
+                      </a:solidFill>
+                    </a:lnL>
+                    <a:solidFill>
+                      <a:srgbClr val="FFFFFF"/>
+                    </a:solidFill>
+                  </a:tcPr>
+                </a:tc>
+                <a:tc>
+                  <a:txBody>
+                    <a:bodyPr/>
+                    <a:lstStyle/>
+                    <a:p>
+                      <a:pPr algn="ctr"/>
+                      <a:r>
+                        <a:rPr sz="1150" b="0" i="0">
+                          <a:solidFill>
+                            <a:srgbClr val="1C2833"/>
+                          </a:solidFill>
+                          <a:latin typeface="Malgun Gothic"/>
+                        </a:rPr>
+                        <a:t>완료</a:t>
+                      </a:r>
+                    </a:p>
+                  </a:txBody>
+                  <a:tcPr marL="73152" marR="73152" marT="18288" marB="18288" anchor="ctr">
+                    <a:lnB w="9525" cap="flat" cmpd="sng" algn="ctr">
+                      <a:solidFill>
+                        <a:srgbClr val="D5DBDB"/>
+                      </a:solidFill>
+                    </a:lnB>
+                    <a:lnT w="9525" cap="flat" cmpd="sng" algn="ctr">
+                      <a:solidFill>
+                        <a:srgbClr val="FFFFFF"/>
+                      </a:solidFill>
+                    </a:lnT>
+                    <a:lnR w="9525" cap="flat" cmpd="sng" algn="ctr">
+                      <a:solidFill>
+                        <a:srgbClr val="FFFFFF"/>
+                      </a:solidFill>
+                    </a:lnR>
+                    <a:lnL w="9525" cap="flat" cmpd="sng" algn="ctr">
+                      <a:solidFill>
+                        <a:srgbClr val="FFFFFF"/>
+                      </a:solidFill>
+                    </a:lnL>
+                    <a:solidFill>
+                      <a:srgbClr val="FFFFFF"/>
+                    </a:solidFill>
+                  </a:tcPr>
+                </a:tc>
+              </a:tr>
+              <a:tr h="475488">
+                <a:tc>
+                  <a:txBody>
+                    <a:bodyPr/>
+                    <a:lstStyle/>
+                    <a:p>
+                      <a:pPr algn="ctr"/>
+                      <a:r>
+                        <a:rPr sz="1150" b="1" i="0">
+                          <a:solidFill>
+                            <a:srgbClr val="1C2833"/>
+                          </a:solidFill>
+                          <a:latin typeface="Malgun Gothic"/>
+                        </a:rPr>
+                        <a:t>2</a:t>
+                      </a:r>
+                    </a:p>
+                  </a:txBody>
+                  <a:tcPr marL="73152" marR="73152" marT="18288" marB="18288" anchor="ctr">
+                    <a:lnB w="9525" cap="flat" cmpd="sng" algn="ctr">
+                      <a:solidFill>
+                        <a:srgbClr val="D5DBDB"/>
+                      </a:solidFill>
+                    </a:lnB>
+                    <a:lnT w="9525" cap="flat" cmpd="sng" algn="ctr">
+                      <a:solidFill>
+                        <a:srgbClr val="FFFFFF"/>
+                      </a:solidFill>
+                    </a:lnT>
+                    <a:lnR w="9525" cap="flat" cmpd="sng" algn="ctr">
+                      <a:solidFill>
+                        <a:srgbClr val="FFFFFF"/>
+                      </a:solidFill>
+                    </a:lnR>
+                    <a:lnL w="9525" cap="flat" cmpd="sng" algn="ctr">
+                      <a:solidFill>
+                        <a:srgbClr val="FFFFFF"/>
+                      </a:solidFill>
+                    </a:lnL>
+                    <a:solidFill>
+                      <a:srgbClr val="FFFFFF"/>
+                    </a:solidFill>
+                  </a:tcPr>
+                </a:tc>
+                <a:tc>
+                  <a:txBody>
+                    <a:bodyPr/>
+                    <a:lstStyle/>
+                    <a:p>
+                      <a:pPr algn="l"/>
+                      <a:r>
+                        <a:rPr sz="1150" b="0" i="0">
+                          <a:solidFill>
+                            <a:srgbClr val="1C2833"/>
+                          </a:solidFill>
+                          <a:latin typeface="Malgun Gothic"/>
+                        </a:rPr>
+                        <a:t>안전 크리티컬 경로 골든 테스트</a:t>
+                      </a:r>
+                    </a:p>
+                  </a:txBody>
+                  <a:tcPr marL="73152" marR="73152" marT="18288" marB="18288" anchor="ctr">
+                    <a:lnB w="9525" cap="flat" cmpd="sng" algn="ctr">
+                      <a:solidFill>
+                        <a:srgbClr val="D5DBDB"/>
+                      </a:solidFill>
+                    </a:lnB>
+                    <a:lnT w="9525" cap="flat" cmpd="sng" algn="ctr">
+                      <a:solidFill>
+                        <a:srgbClr val="FFFFFF"/>
+                      </a:solidFill>
+                    </a:lnT>
+                    <a:lnR w="9525" cap="flat" cmpd="sng" algn="ctr">
+                      <a:solidFill>
+                        <a:srgbClr val="FFFFFF"/>
+                      </a:solidFill>
+                    </a:lnR>
+                    <a:lnL w="9525" cap="flat" cmpd="sng" algn="ctr">
+                      <a:solidFill>
+                        <a:srgbClr val="FFFFFF"/>
+                      </a:solidFill>
+                    </a:lnL>
+                    <a:solidFill>
+                      <a:srgbClr val="FFFFFF"/>
+                    </a:solidFill>
+                  </a:tcPr>
+                </a:tc>
+                <a:tc>
+                  <a:txBody>
+                    <a:bodyPr/>
+                    <a:lstStyle/>
+                    <a:p>
+                      <a:pPr algn="l"/>
+                      <a:r>
+                        <a:rPr sz="1150" b="0" i="0">
+                          <a:solidFill>
+                            <a:srgbClr val="1C2833"/>
+                          </a:solidFill>
+                          <a:latin typeface="Malgun Gothic"/>
+                        </a:rPr>
+                        <a:t>천천히 접근하는 지게차에 경고가 뜨는가</a:t>
+                      </a:r>
+                    </a:p>
+                  </a:txBody>
+                  <a:tcPr marL="73152" marR="73152" marT="18288" marB="18288" anchor="ctr">
+                    <a:lnB w="9525" cap="flat" cmpd="sng" algn="ctr">
+                      <a:solidFill>
+                        <a:srgbClr val="D5DBDB"/>
+                      </a:solidFill>
+                    </a:lnB>
+                    <a:lnT w="9525" cap="flat" cmpd="sng" algn="ctr">
+                      <a:solidFill>
+                        <a:srgbClr val="FFFFFF"/>
+                      </a:solidFill>
+                    </a:lnT>
+                    <a:lnR w="9525" cap="flat" cmpd="sng" algn="ctr">
+                      <a:solidFill>
+                        <a:srgbClr val="FFFFFF"/>
+                      </a:solidFill>
+                    </a:lnR>
+                    <a:lnL w="9525" cap="flat" cmpd="sng" algn="ctr">
+                      <a:solidFill>
+                        <a:srgbClr val="FFFFFF"/>
+                      </a:solidFill>
+                    </a:lnL>
+                    <a:solidFill>
+                      <a:srgbClr val="FFFFFF"/>
+                    </a:solidFill>
+                  </a:tcPr>
+                </a:tc>
+                <a:tc>
+                  <a:txBody>
+                    <a:bodyPr/>
+                    <a:lstStyle/>
+                    <a:p>
+                      <a:pPr algn="ctr"/>
+                      <a:r>
+                        <a:rPr sz="1150" b="0" i="0">
+                          <a:solidFill>
+                            <a:srgbClr val="1C2833"/>
+                          </a:solidFill>
+                          <a:latin typeface="Malgun Gothic"/>
+                        </a:rPr>
+                        <a:t>예정</a:t>
+                      </a:r>
+                    </a:p>
+                  </a:txBody>
+                  <a:tcPr marL="73152" marR="73152" marT="18288" marB="18288" anchor="ctr">
+                    <a:lnB w="9525" cap="flat" cmpd="sng" algn="ctr">
+                      <a:solidFill>
+                        <a:srgbClr val="D5DBDB"/>
+                      </a:solidFill>
+                    </a:lnB>
+                    <a:lnT w="9525" cap="flat" cmpd="sng" algn="ctr">
+                      <a:solidFill>
+                        <a:srgbClr val="FFFFFF"/>
+                      </a:solidFill>
+                    </a:lnT>
+                    <a:lnR w="9525" cap="flat" cmpd="sng" algn="ctr">
+                      <a:solidFill>
+                        <a:srgbClr val="FFFFFF"/>
+                      </a:solidFill>
+                    </a:lnR>
+                    <a:lnL w="9525" cap="flat" cmpd="sng" algn="ctr">
+                      <a:solidFill>
+                        <a:srgbClr val="FFFFFF"/>
+                      </a:solidFill>
+                    </a:lnL>
+                    <a:solidFill>
+                      <a:srgbClr val="FFFFFF"/>
+                    </a:solidFill>
+                  </a:tcPr>
+                </a:tc>
+              </a:tr>
+              <a:tr h="475488">
+                <a:tc>
+                  <a:txBody>
+                    <a:bodyPr/>
+                    <a:lstStyle/>
+                    <a:p>
+                      <a:pPr algn="ctr"/>
+                      <a:r>
+                        <a:rPr sz="1150" b="1" i="0">
+                          <a:solidFill>
+                            <a:srgbClr val="1C2833"/>
+                          </a:solidFill>
+                          <a:latin typeface="Malgun Gothic"/>
+                        </a:rPr>
+                        <a:t>3</a:t>
+                      </a:r>
+                    </a:p>
+                  </a:txBody>
+                  <a:tcPr marL="73152" marR="73152" marT="18288" marB="18288" anchor="ctr">
+                    <a:lnB w="9525" cap="flat" cmpd="sng" algn="ctr">
+                      <a:solidFill>
+                        <a:srgbClr val="D5DBDB"/>
+                      </a:solidFill>
+                    </a:lnB>
+                    <a:lnT w="9525" cap="flat" cmpd="sng" algn="ctr">
+                      <a:solidFill>
+                        <a:srgbClr val="FFFFFF"/>
+                      </a:solidFill>
+                    </a:lnT>
+                    <a:lnR w="9525" cap="flat" cmpd="sng" algn="ctr">
+                      <a:solidFill>
+                        <a:srgbClr val="FFFFFF"/>
+                      </a:solidFill>
+                    </a:lnR>
+                    <a:lnL w="9525" cap="flat" cmpd="sng" algn="ctr">
+                      <a:solidFill>
+                        <a:srgbClr val="FFFFFF"/>
+                      </a:solidFill>
+                    </a:lnL>
+                    <a:solidFill>
+                      <a:srgbClr val="FFFFFF"/>
+                    </a:solidFill>
+                  </a:tcPr>
+                </a:tc>
+                <a:tc>
+                  <a:txBody>
+                    <a:bodyPr/>
+                    <a:lstStyle/>
+                    <a:p>
+                      <a:pPr algn="l"/>
+                      <a:r>
+                        <a:rPr sz="1150" b="0" i="0">
+                          <a:solidFill>
+                            <a:srgbClr val="1C2833"/>
+                          </a:solidFill>
+                          <a:latin typeface="Malgun Gothic"/>
+                        </a:rPr>
+                        <a:t>BleService 분해</a:t>
+                      </a:r>
+                    </a:p>
+                  </a:txBody>
+                  <a:tcPr marL="73152" marR="73152" marT="18288" marB="18288" anchor="ctr">
+                    <a:lnB w="9525" cap="flat" cmpd="sng" algn="ctr">
+                      <a:solidFill>
+                        <a:srgbClr val="D5DBDB"/>
+                      </a:solidFill>
+                    </a:lnB>
+                    <a:lnT w="9525" cap="flat" cmpd="sng" algn="ctr">
+                      <a:solidFill>
+                        <a:srgbClr val="FFFFFF"/>
+                      </a:solidFill>
+                    </a:lnT>
+                    <a:lnR w="9525" cap="flat" cmpd="sng" algn="ctr">
+                      <a:solidFill>
+                        <a:srgbClr val="FFFFFF"/>
+                      </a:solidFill>
+                    </a:lnR>
+                    <a:lnL w="9525" cap="flat" cmpd="sng" algn="ctr">
+                      <a:solidFill>
+                        <a:srgbClr val="FFFFFF"/>
+                      </a:solidFill>
+                    </a:lnL>
+                    <a:solidFill>
+                      <a:srgbClr val="FFFFFF"/>
+                    </a:solidFill>
+                  </a:tcPr>
+                </a:tc>
+                <a:tc>
+                  <a:txBody>
+                    <a:bodyPr/>
+                    <a:lstStyle/>
+                    <a:p>
+                      <a:pPr algn="l"/>
+                      <a:r>
+                        <a:rPr sz="1150" b="0" i="0">
+                          <a:solidFill>
+                            <a:srgbClr val="1C2833"/>
+                          </a:solidFill>
+                          <a:latin typeface="Malgun Gothic"/>
+                        </a:rPr>
+                        <a:t>달라진 게 없는가 (동작 보존)</a:t>
+                      </a:r>
+                    </a:p>
+                  </a:txBody>
+                  <a:tcPr marL="73152" marR="73152" marT="18288" marB="18288" anchor="ctr">
+                    <a:lnB w="9525" cap="flat" cmpd="sng" algn="ctr">
+                      <a:solidFill>
+                        <a:srgbClr val="D5DBDB"/>
+                      </a:solidFill>
+                    </a:lnB>
+                    <a:lnT w="9525" cap="flat" cmpd="sng" algn="ctr">
+                      <a:solidFill>
+                        <a:srgbClr val="FFFFFF"/>
+                      </a:solidFill>
+                    </a:lnT>
+                    <a:lnR w="9525" cap="flat" cmpd="sng" algn="ctr">
+                      <a:solidFill>
+                        <a:srgbClr val="FFFFFF"/>
+                      </a:solidFill>
+                    </a:lnR>
+                    <a:lnL w="9525" cap="flat" cmpd="sng" algn="ctr">
+                      <a:solidFill>
+                        <a:srgbClr val="FFFFFF"/>
+                      </a:solidFill>
+                    </a:lnL>
+                    <a:solidFill>
+                      <a:srgbClr val="FFFFFF"/>
+                    </a:solidFill>
+                  </a:tcPr>
+                </a:tc>
+                <a:tc>
+                  <a:txBody>
+                    <a:bodyPr/>
+                    <a:lstStyle/>
+                    <a:p>
+                      <a:pPr algn="ctr"/>
+                      <a:r>
+                        <a:rPr sz="1150" b="0" i="0">
+                          <a:solidFill>
+                            <a:srgbClr val="1C2833"/>
+                          </a:solidFill>
+                          <a:latin typeface="Malgun Gothic"/>
+                        </a:rPr>
+                        <a:t>예정</a:t>
+                      </a:r>
+                    </a:p>
+                  </a:txBody>
+                  <a:tcPr marL="73152" marR="73152" marT="18288" marB="18288" anchor="ctr">
+                    <a:lnB w="9525" cap="flat" cmpd="sng" algn="ctr">
+                      <a:solidFill>
+                        <a:srgbClr val="D5DBDB"/>
+                      </a:solidFill>
+                    </a:lnB>
+                    <a:lnT w="9525" cap="flat" cmpd="sng" algn="ctr">
+                      <a:solidFill>
+                        <a:srgbClr val="FFFFFF"/>
+                      </a:solidFill>
+                    </a:lnT>
+                    <a:lnR w="9525" cap="flat" cmpd="sng" algn="ctr">
+                      <a:solidFill>
+                        <a:srgbClr val="FFFFFF"/>
+                      </a:solidFill>
+                    </a:lnR>
+                    <a:lnL w="9525" cap="flat" cmpd="sng" algn="ctr">
+                      <a:solidFill>
+                        <a:srgbClr val="FFFFFF"/>
+                      </a:solidFill>
+                    </a:lnL>
+                    <a:solidFill>
+                      <a:srgbClr val="FFFFFF"/>
+                    </a:solidFill>
+                  </a:tcPr>
+                </a:tc>
+              </a:tr>
+              <a:tr h="475488">
+                <a:tc>
+                  <a:txBody>
+                    <a:bodyPr/>
+                    <a:lstStyle/>
+                    <a:p>
+                      <a:pPr algn="ctr"/>
+                      <a:r>
+                        <a:rPr sz="1150" b="1" i="0">
+                          <a:solidFill>
+                            <a:srgbClr val="1C2833"/>
+                          </a:solidFill>
+                          <a:latin typeface="Malgun Gothic"/>
+                        </a:rPr>
+                        <a:t>4</a:t>
+                      </a:r>
+                    </a:p>
+                  </a:txBody>
+                  <a:tcPr marL="73152" marR="73152" marT="18288" marB="18288" anchor="ctr">
+                    <a:lnB w="9525" cap="flat" cmpd="sng" algn="ctr">
+                      <a:solidFill>
+                        <a:srgbClr val="D5DBDB"/>
+                      </a:solidFill>
+                    </a:lnB>
+                    <a:lnT w="9525" cap="flat" cmpd="sng" algn="ctr">
+                      <a:solidFill>
+                        <a:srgbClr val="FFFFFF"/>
+                      </a:solidFill>
+                    </a:lnT>
+                    <a:lnR w="9525" cap="flat" cmpd="sng" algn="ctr">
+                      <a:solidFill>
+                        <a:srgbClr val="FFFFFF"/>
+                      </a:solidFill>
+                    </a:lnR>
+                    <a:lnL w="9525" cap="flat" cmpd="sng" algn="ctr">
+                      <a:solidFill>
+                        <a:srgbClr val="FFFFFF"/>
+                      </a:solidFill>
+                    </a:lnL>
+                    <a:solidFill>
+                      <a:srgbClr val="FFFFFF"/>
+                    </a:solidFill>
+                  </a:tcPr>
+                </a:tc>
+                <a:tc>
+                  <a:txBody>
+                    <a:bodyPr/>
+                    <a:lstStyle/>
+                    <a:p>
+                      <a:pPr algn="l"/>
+                      <a:r>
+                        <a:rPr sz="1150" b="0" i="0">
+                          <a:solidFill>
+                            <a:srgbClr val="1C2833"/>
+                          </a:solidFill>
+                          <a:latin typeface="Malgun Gothic"/>
+                        </a:rPr>
+                        <a:t>기기 상태 단일화</a:t>
+                      </a:r>
+                    </a:p>
+                  </a:txBody>
+                  <a:tcPr marL="73152" marR="73152" marT="18288" marB="18288" anchor="ctr">
+                    <a:lnB w="9525" cap="flat" cmpd="sng" algn="ctr">
+                      <a:solidFill>
+                        <a:srgbClr val="D5DBDB"/>
+                      </a:solidFill>
+                    </a:lnB>
+                    <a:lnT w="9525" cap="flat" cmpd="sng" algn="ctr">
+                      <a:solidFill>
+                        <a:srgbClr val="FFFFFF"/>
+                      </a:solidFill>
+                    </a:lnT>
+                    <a:lnR w="9525" cap="flat" cmpd="sng" algn="ctr">
+                      <a:solidFill>
+                        <a:srgbClr val="FFFFFF"/>
+                      </a:solidFill>
+                    </a:lnR>
+                    <a:lnL w="9525" cap="flat" cmpd="sng" algn="ctr">
+                      <a:solidFill>
+                        <a:srgbClr val="FFFFFF"/>
+                      </a:solidFill>
+                    </a:lnL>
+                    <a:solidFill>
+                      <a:srgbClr val="FFFFFF"/>
+                    </a:solidFill>
+                  </a:tcPr>
+                </a:tc>
+                <a:tc>
+                  <a:txBody>
+                    <a:bodyPr/>
+                    <a:lstStyle/>
+                    <a:p>
+                      <a:pPr algn="l"/>
+                      <a:r>
+                        <a:rPr sz="1150" b="0" i="0">
+                          <a:solidFill>
+                            <a:srgbClr val="1C2833"/>
+                          </a:solidFill>
+                          <a:latin typeface="Malgun Gothic"/>
+                        </a:rPr>
+                        <a:t>2시간 이상 구동 후에도 느려지지 않는가</a:t>
+                      </a:r>
+                    </a:p>
+                  </a:txBody>
+                  <a:tcPr marL="73152" marR="73152" marT="18288" marB="18288" anchor="ctr">
+                    <a:lnB w="9525" cap="flat" cmpd="sng" algn="ctr">
+                      <a:solidFill>
+                        <a:srgbClr val="D5DBDB"/>
+                      </a:solidFill>
+                    </a:lnB>
+                    <a:lnT w="9525" cap="flat" cmpd="sng" algn="ctr">
+                      <a:solidFill>
+                        <a:srgbClr val="FFFFFF"/>
+                      </a:solidFill>
+                    </a:lnT>
+                    <a:lnR w="9525" cap="flat" cmpd="sng" algn="ctr">
+                      <a:solidFill>
+                        <a:srgbClr val="FFFFFF"/>
+                      </a:solidFill>
+                    </a:lnR>
+                    <a:lnL w="9525" cap="flat" cmpd="sng" algn="ctr">
+                      <a:solidFill>
+                        <a:srgbClr val="FFFFFF"/>
+                      </a:solidFill>
+                    </a:lnL>
+                    <a:solidFill>
+                      <a:srgbClr val="FFFFFF"/>
+                    </a:solidFill>
+                  </a:tcPr>
+                </a:tc>
+                <a:tc>
+                  <a:txBody>
+                    <a:bodyPr/>
+                    <a:lstStyle/>
+                    <a:p>
+                      <a:pPr algn="ctr"/>
+                      <a:r>
+                        <a:rPr sz="1150" b="0" i="0">
+                          <a:solidFill>
+                            <a:srgbClr val="1C2833"/>
+                          </a:solidFill>
+                          <a:latin typeface="Malgun Gothic"/>
+                        </a:rPr>
+                        <a:t>예정</a:t>
+                      </a:r>
+                    </a:p>
+                  </a:txBody>
+                  <a:tcPr marL="73152" marR="73152" marT="18288" marB="18288" anchor="ctr">
+                    <a:lnB w="9525" cap="flat" cmpd="sng" algn="ctr">
+                      <a:solidFill>
+                        <a:srgbClr val="D5DBDB"/>
+                      </a:solidFill>
+                    </a:lnB>
+                    <a:lnT w="9525" cap="flat" cmpd="sng" algn="ctr">
+                      <a:solidFill>
+                        <a:srgbClr val="FFFFFF"/>
+                      </a:solidFill>
+                    </a:lnT>
+                    <a:lnR w="9525" cap="flat" cmpd="sng" algn="ctr">
+                      <a:solidFill>
+                        <a:srgbClr val="FFFFFF"/>
+                      </a:solidFill>
+                    </a:lnR>
+                    <a:lnL w="9525" cap="flat" cmpd="sng" algn="ctr">
+                      <a:solidFill>
+                        <a:srgbClr val="FFFFFF"/>
+                      </a:solidFill>
+                    </a:lnL>
+                    <a:solidFill>
+                      <a:srgbClr val="FFFFFF"/>
+                    </a:solidFill>
+                  </a:tcPr>
+                </a:tc>
+              </a:tr>
+              <a:tr h="475488">
+                <a:tc>
+                  <a:txBody>
+                    <a:bodyPr/>
+                    <a:lstStyle/>
+                    <a:p>
+                      <a:pPr algn="ctr"/>
+                      <a:r>
+                        <a:rPr sz="1150" b="1" i="0">
+                          <a:solidFill>
+                            <a:srgbClr val="1C2833"/>
+                          </a:solidFill>
+                          <a:latin typeface="Malgun Gothic"/>
+                        </a:rPr>
+                        <a:t>5</a:t>
+                      </a:r>
+                    </a:p>
+                  </a:txBody>
+                  <a:tcPr marL="73152" marR="73152" marT="18288" marB="18288" anchor="ctr">
+                    <a:lnB w="9525" cap="flat" cmpd="sng" algn="ctr">
+                      <a:solidFill>
+                        <a:srgbClr val="D5DBDB"/>
+                      </a:solidFill>
+                    </a:lnB>
+                    <a:lnT w="9525" cap="flat" cmpd="sng" algn="ctr">
+                      <a:solidFill>
+                        <a:srgbClr val="FFFFFF"/>
+                      </a:solidFill>
+                    </a:lnT>
+                    <a:lnR w="9525" cap="flat" cmpd="sng" algn="ctr">
+                      <a:solidFill>
+                        <a:srgbClr val="FFFFFF"/>
+                      </a:solidFill>
+                    </a:lnR>
+                    <a:lnL w="9525" cap="flat" cmpd="sng" algn="ctr">
+                      <a:solidFill>
+                        <a:srgbClr val="FFFFFF"/>
+                      </a:solidFill>
+                    </a:lnL>
+                    <a:solidFill>
+                      <a:srgbClr val="FFFFFF"/>
+                    </a:solidFill>
+                  </a:tcPr>
+                </a:tc>
+                <a:tc>
+                  <a:txBody>
+                    <a:bodyPr/>
+                    <a:lstStyle/>
+                    <a:p>
+                      <a:pPr algn="l"/>
+                      <a:r>
+                        <a:rPr sz="1150" b="0" i="0">
+                          <a:solidFill>
+                            <a:srgbClr val="1C2833"/>
+                          </a:solidFill>
+                          <a:latin typeface="Malgun Gothic"/>
+                        </a:rPr>
+                        <a:t>판정 워커 분리</a:t>
+                      </a:r>
+                    </a:p>
+                  </a:txBody>
+                  <a:tcPr marL="73152" marR="73152" marT="18288" marB="18288" anchor="ctr">
+                    <a:lnB w="9525" cap="flat" cmpd="sng" algn="ctr">
+                      <a:solidFill>
+                        <a:srgbClr val="D5DBDB"/>
+                      </a:solidFill>
+                    </a:lnB>
+                    <a:lnT w="9525" cap="flat" cmpd="sng" algn="ctr">
+                      <a:solidFill>
+                        <a:srgbClr val="FFFFFF"/>
+                      </a:solidFill>
+                    </a:lnT>
+                    <a:lnR w="9525" cap="flat" cmpd="sng" algn="ctr">
+                      <a:solidFill>
+                        <a:srgbClr val="FFFFFF"/>
+                      </a:solidFill>
+                    </a:lnR>
+                    <a:lnL w="9525" cap="flat" cmpd="sng" algn="ctr">
+                      <a:solidFill>
+                        <a:srgbClr val="FFFFFF"/>
+                      </a:solidFill>
+                    </a:lnL>
+                    <a:solidFill>
+                      <a:srgbClr val="FFFFFF"/>
+                    </a:solidFill>
+                  </a:tcPr>
+                </a:tc>
+                <a:tc>
+                  <a:txBody>
+                    <a:bodyPr/>
+                    <a:lstStyle/>
+                    <a:p>
+                      <a:pPr algn="l"/>
+                      <a:r>
+                        <a:rPr sz="1150" b="0" i="0">
+                          <a:solidFill>
+                            <a:srgbClr val="1C2833"/>
+                          </a:solidFill>
+                          <a:latin typeface="Malgun Gothic"/>
+                        </a:rPr>
+                        <a:t>20대 이상에서 화면이 끊기지 않는가</a:t>
+                      </a:r>
+                    </a:p>
+                  </a:txBody>
+                  <a:tcPr marL="73152" marR="73152" marT="18288" marB="18288" anchor="ctr">
+                    <a:lnB w="9525" cap="flat" cmpd="sng" algn="ctr">
+                      <a:solidFill>
+                        <a:srgbClr val="D5DBDB"/>
+                      </a:solidFill>
+                    </a:lnB>
+                    <a:lnT w="9525" cap="flat" cmpd="sng" algn="ctr">
+                      <a:solidFill>
+                        <a:srgbClr val="FFFFFF"/>
+                      </a:solidFill>
+                    </a:lnT>
+                    <a:lnR w="9525" cap="flat" cmpd="sng" algn="ctr">
+                      <a:solidFill>
+                        <a:srgbClr val="FFFFFF"/>
+                      </a:solidFill>
+                    </a:lnR>
+                    <a:lnL w="9525" cap="flat" cmpd="sng" algn="ctr">
+                      <a:solidFill>
+                        <a:srgbClr val="FFFFFF"/>
+                      </a:solidFill>
+                    </a:lnL>
+                    <a:solidFill>
+                      <a:srgbClr val="FFFFFF"/>
+                    </a:solidFill>
+                  </a:tcPr>
+                </a:tc>
+                <a:tc>
+                  <a:txBody>
+                    <a:bodyPr/>
+                    <a:lstStyle/>
+                    <a:p>
+                      <a:pPr algn="ctr"/>
+                      <a:r>
+                        <a:rPr sz="1150" b="0" i="0">
+                          <a:solidFill>
+                            <a:srgbClr val="1C2833"/>
+                          </a:solidFill>
+                          <a:latin typeface="Malgun Gothic"/>
+                        </a:rPr>
+                        <a:t>예정</a:t>
+                      </a:r>
+                    </a:p>
+                  </a:txBody>
+                  <a:tcPr marL="73152" marR="73152" marT="18288" marB="18288" anchor="ctr">
+                    <a:lnB w="9525" cap="flat" cmpd="sng" algn="ctr">
+                      <a:solidFill>
+                        <a:srgbClr val="D5DBDB"/>
+                      </a:solidFill>
+                    </a:lnB>
+                    <a:lnT w="9525" cap="flat" cmpd="sng" algn="ctr">
+                      <a:solidFill>
+                        <a:srgbClr val="FFFFFF"/>
+                      </a:solidFill>
+                    </a:lnT>
+                    <a:lnR w="9525" cap="flat" cmpd="sng" algn="ctr">
+                      <a:solidFill>
+                        <a:srgbClr val="FFFFFF"/>
+                      </a:solidFill>
+                    </a:lnR>
+                    <a:lnL w="9525" cap="flat" cmpd="sng" algn="ctr">
+                      <a:solidFill>
+                        <a:srgbClr val="FFFFFF"/>
+                      </a:solidFill>
+                    </a:lnL>
+                    <a:solidFill>
+                      <a:srgbClr val="FFFFFF"/>
+                    </a:solidFill>
+                  </a:tcPr>
+                </a:tc>
+              </a:tr>
+            </a:tbl>
+          </a:graphicData>
+        </a:graphic>
+      </p:graphicFrame>
+      <p:sp>
+        <p:nvSpPr>
+          <p:cNvPr id="16" name="Rectangle 15"/>
+          <p:cNvSpPr/>
+          <p:nvPr/>
+        </p:nvSpPr>
+        <p:spPr>
+          <a:xfrm>
+            <a:off x="640080" y="4315968"/>
+            <a:ext cx="1463040" cy="301752"/>
+          </a:xfrm>
+          <a:prstGeom prst="rect">
+            <a:avLst/>
+          </a:prstGeom>
+          <a:solidFill>
+            <a:srgbClr val="8C8C8C"/>
+          </a:solidFill>
+          <a:ln>
+            <a:noFill/>
+          </a:ln>
+          <a:effectLst/>
+        </p:spPr>
+        <p:style>
+          <a:lnRef idx="1">
+            <a:schemeClr val="accent1"/>
+          </a:lnRef>
+          <a:fillRef idx="3">
+            <a:schemeClr val="accent1"/>
+          </a:fillRef>
+          <a:effectRef idx="2">
+            <a:schemeClr val="accent1"/>
+          </a:effectRef>
+          <a:fontRef idx="minor">
+            <a:schemeClr val="lt1"/>
+          </a:fontRef>
+        </p:style>
+        <p:txBody>
+          <a:bodyPr rtlCol="0" anchor="ctr" wrap="square" lIns="36576" rIns="36576" tIns="0" bIns="0"/>
+          <a:lstStyle/>
+          <a:p>
+            <a:pPr algn="ctr"/>
+            <a:r>
+              <a:rPr sz="1100" b="1" i="0">
+                <a:solidFill>
+                  <a:srgbClr val="FFFFFF"/>
+                </a:solidFill>
+                <a:latin typeface="Malgun Gothic"/>
+              </a:rPr>
+              <a:t>이 순서인 이유</a:t>
+            </a:r>
+          </a:p>
+        </p:txBody>
+      </p:sp>
+      <p:sp>
+        <p:nvSpPr>
+          <p:cNvPr id="17" name="TextBox 16"/>
+          <p:cNvSpPr txBox="1"/>
+          <p:nvPr/>
+        </p:nvSpPr>
+        <p:spPr>
+          <a:xfrm>
+            <a:off x="868680" y="4773168"/>
+            <a:ext cx="10881360" cy="365760"/>
+          </a:xfrm>
+          <a:prstGeom prst="rect">
+            <a:avLst/>
+          </a:prstGeom>
+          <a:noFill/>
+        </p:spPr>
+        <p:txBody>
+          <a:bodyPr wrap="square" lIns="36576" rIns="36576" tIns="0" bIns="0">
+            <a:spAutoFit/>
+          </a:bodyPr>
+          <a:lstStyle/>
+          <a:p>
+            <a:pPr algn="l">
+              <a:spcAft>
+                <a:spcPts val="400"/>
+              </a:spcAft>
+            </a:pPr>
+            <a:r>
+              <a:rPr sz="1150" b="0" i="0">
+                <a:solidFill>
+                  <a:srgbClr val="1C2833"/>
+                </a:solidFill>
+                <a:latin typeface="Malgun Gothic"/>
+              </a:rPr>
+              <a:t>①  측정 수단이 먼저다 — 테스트 0건 상태에서 안전 로직을 분해하면, 회귀를 현장에서 발견하는 방식이 그대로 남는다</a:t>
+            </a:r>
+          </a:p>
+        </p:txBody>
+      </p:sp>
+      <p:sp>
+        <p:nvSpPr>
+          <p:cNvPr id="18" name="TextBox 17"/>
+          <p:cNvSpPr txBox="1"/>
+          <p:nvPr/>
+        </p:nvSpPr>
+        <p:spPr>
+          <a:xfrm>
+            <a:off x="868680" y="5157216"/>
+            <a:ext cx="10881360" cy="365760"/>
+          </a:xfrm>
+          <a:prstGeom prst="rect">
+            <a:avLst/>
+          </a:prstGeom>
+          <a:noFill/>
+        </p:spPr>
+        <p:txBody>
+          <a:bodyPr wrap="square" lIns="36576" rIns="36576" tIns="0" bIns="0">
+            <a:spAutoFit/>
+          </a:bodyPr>
+          <a:lstStyle/>
+          <a:p>
+            <a:pPr algn="l">
+              <a:spcAft>
+                <a:spcPts val="400"/>
+              </a:spcAft>
+            </a:pPr>
+            <a:r>
+              <a:rPr sz="1150" b="0" i="0">
+                <a:solidFill>
+                  <a:srgbClr val="1C2833"/>
+                </a:solidFill>
+                <a:latin typeface="Malgun Gothic"/>
+              </a:rPr>
+              <a:t>②  단계마다 단독 배포한다 — 변경을 섞어 내보내면 현장에서 회귀가 나도 어느 변경 탓인지 특정할 수 없다</a:t>
+            </a:r>
+          </a:p>
+        </p:txBody>
+      </p:sp>
+      <p:sp>
+        <p:nvSpPr>
+          <p:cNvPr id="19" name="TextBox 18"/>
+          <p:cNvSpPr txBox="1"/>
+          <p:nvPr/>
+        </p:nvSpPr>
+        <p:spPr>
+          <a:xfrm>
+            <a:off x="640080" y="5687568"/>
+            <a:ext cx="10908792" cy="384048"/>
+          </a:xfrm>
+          <a:prstGeom prst="rect">
+            <a:avLst/>
+          </a:prstGeom>
+          <a:noFill/>
+        </p:spPr>
+        <p:txBody>
+          <a:bodyPr wrap="square" lIns="36576" rIns="36576" tIns="0" bIns="0">
+            <a:spAutoFit/>
+          </a:bodyPr>
+          <a:lstStyle/>
+          <a:p>
+            <a:pPr algn="ctr"/>
+            <a:r>
+              <a:rPr sz="1500" b="1" i="0">
+                <a:solidFill>
+                  <a:srgbClr val="C0392B"/>
+                </a:solidFill>
+                <a:latin typeface="Malgun Gothic"/>
+              </a:rPr>
+              <a:t>1. </a:t>
+            </a:r>
+            <a:r>
+              <a:rPr sz="1500" b="1" i="0">
+                <a:solidFill>
+                  <a:srgbClr val="1C2833"/>
+                </a:solidFill>
+                <a:latin typeface="Malgun Gothic"/>
+              </a:rPr>
+              <a:t>완료 1 / 5      </a:t>
+            </a:r>
+            <a:r>
+              <a:rPr sz="1500" b="1" i="0">
+                <a:solidFill>
+                  <a:srgbClr val="C0392B"/>
+                </a:solidFill>
+                <a:latin typeface="Malgun Gothic"/>
+              </a:rPr>
+              <a:t>2. </a:t>
+            </a:r>
+            <a:r>
+              <a:rPr sz="1500" b="1" i="0">
+                <a:solidFill>
+                  <a:srgbClr val="1C2833"/>
+                </a:solidFill>
+                <a:latin typeface="Malgun Gothic"/>
+              </a:rPr>
+              <a:t>전 단계 출하 가능      </a:t>
+            </a:r>
+            <a:r>
+              <a:rPr sz="1500" b="1" i="0">
+                <a:solidFill>
+                  <a:srgbClr val="C0392B"/>
+                </a:solidFill>
+                <a:latin typeface="Malgun Gothic"/>
+              </a:rPr>
+              <a:t>3. </a:t>
+            </a:r>
+            <a:r>
+              <a:rPr sz="1500" b="1" i="0">
+                <a:solidFill>
+                  <a:srgbClr val="1C2833"/>
+                </a:solidFill>
+                <a:latin typeface="Malgun Gothic"/>
+              </a:rPr>
+              <a:t>현장 확인은 단계당 1건</a:t>
+            </a:r>
+          </a:p>
+        </p:txBody>
+      </p:sp>
+    </p:spTree>
+    <p:extLst>
+      <p:ext uri="{BB962C8B-B14F-4D97-AF65-F5344CB8AC3E}">
+        <p14:creationId xmlns:p14="http://schemas.microsoft.com/office/powerpoint/2010/main" val="3987384774"/>
+      </p:ext>
+    </p:extLst>
+  </p:cSld>
+  <p:clrMapOvr>
+    <a:masterClrMapping/>
+  </p:clrMapOvr>
+</p:sld>
+</file>
+
+<file path=ppt/slides/slide9.xml><?xml version="1.0" encoding="utf-8"?>
+<p:sld xmlns:a="http://schemas.openxmlformats.org/drawingml/2006/main" xmlns:r="http://schemas.openxmlformats.org/officeDocument/2006/relationships" xmlns:p="http://schemas.openxmlformats.org/presentationml/2006/main">
+  <p:cSld>
+    <p:spTree>
+      <p:nvGrpSpPr>
+        <p:cNvPr id="1" name="">
+          <a:extLst>
+            <a:ext uri="{FF2B5EF4-FFF2-40B4-BE49-F238E27FC236}">
+              <a16:creationId xmlns:a16="http://schemas.microsoft.com/office/drawing/2014/main" id="{E4EFD6F4-EBDD-9AC2-DC28-2DDF0C04A565}"/>
+            </a:ext>
+          </a:extLst>
+        </p:cNvPr>
+        <p:cNvGrpSpPr/>
+        <p:nvPr/>
+      </p:nvGrpSpPr>
+      <p:grpSpPr>
+        <a:xfrm>
+          <a:off x="0" y="0"/>
+          <a:ext cx="0" cy="0"/>
+          <a:chOff x="0" y="0"/>
+          <a:chExt cx="0" cy="0"/>
+        </a:xfrm>
+      </p:grpSpPr>
+      <p:sp>
+        <p:nvSpPr>
+          <p:cNvPr id="5" name="제목 1">
+            <a:extLst>
+              <a:ext uri="{FF2B5EF4-FFF2-40B4-BE49-F238E27FC236}">
+                <a16:creationId xmlns:a16="http://schemas.microsoft.com/office/drawing/2014/main" id="{3462F1EA-748D-175E-1C14-5E9984552716}"/>
+              </a:ext>
+            </a:extLst>
+          </p:cNvPr>
+          <p:cNvSpPr txBox="1">
+            <a:spLocks/>
+          </p:cNvSpPr>
+          <p:nvPr/>
+        </p:nvSpPr>
+        <p:spPr>
+          <a:xfrm>
+            <a:off x="636390" y="928122"/>
+            <a:ext cx="11342595" cy="3980770"/>
+          </a:xfrm>
+          <a:prstGeom prst="rect">
+            <a:avLst/>
+          </a:prstGeom>
+          <a:noFill/>
+        </p:spPr>
+        <p:txBody>
+          <a:bodyPr vert="horz" wrap="square" lIns="91440" tIns="45720" rIns="91440" bIns="45720" rtlCol="0" anchor="t">
+            <a:spAutoFit/>
+          </a:bodyPr>
+          <a:lstStyle>
+            <a:lvl1pPr marL="0" indent="0" algn="l" defTabSz="914400" rtl="0" eaLnBrk="1" latinLnBrk="1" hangingPunct="1">
+              <a:lnSpc>
+                <a:spcPct val="100000"/>
+              </a:lnSpc>
+              <a:spcBef>
+                <a:spcPct val="0"/>
+              </a:spcBef>
+              <a:buNone/>
+              <a:defRPr lang="en-US" sz="1600" b="1" kern="1200" dirty="0">
+                <a:solidFill>
+                  <a:srgbClr val="560000"/>
+                </a:solidFill>
+                <a:latin typeface="+mj-ea"/>
+                <a:ea typeface="+mj-ea"/>
+                <a:cs typeface="+mn-cs"/>
+              </a:defRPr>
+            </a:lvl1pPr>
+          </a:lstStyle>
+          <a:p>
+            <a:pPr>
+              <a:lnSpc>
+                <a:spcPct val="150000"/>
+              </a:lnSpc>
+            </a:pPr>
+            <a:endParaRPr lang="en-US" altLang="ko-KR" sz="1400" dirty="0">
+              <a:solidFill>
+                <a:schemeClr val="tx1"/>
+              </a:solidFill>
+              <a:latin typeface="+mn-ea"/>
+              <a:ea typeface="+mn-ea"/>
+            </a:endParaRPr>
+          </a:p>
+        </p:txBody>
+      </p:sp>
+      <p:sp>
+        <p:nvSpPr>
+          <p:cNvPr id="2" name="제목 1">
+            <a:extLst>
+              <a:ext uri="{FF2B5EF4-FFF2-40B4-BE49-F238E27FC236}">
+                <a16:creationId xmlns:a16="http://schemas.microsoft.com/office/drawing/2014/main" id="{54B5B938-7AFE-1302-EB19-024D633AA023}"/>
+              </a:ext>
+            </a:extLst>
+          </p:cNvPr>
+          <p:cNvSpPr>
+            <a:spLocks noGrp="1"/>
+          </p:cNvSpPr>
+          <p:nvPr>
+            <p:ph type="title"/>
+          </p:nvPr>
+        </p:nvSpPr>
+        <p:spPr>
+          <a:xfrm>
+            <a:off x="636391" y="595686"/>
+            <a:ext cx="11293263" cy="338554"/>
+          </a:xfrm>
+        </p:spPr>
+        <p:txBody>
+          <a:bodyPr/>
+          <a:lstStyle/>
+          <a:p>
+            <a:r>
+              <a:rPr lang="en-US" altLang="ko-KR" dirty="0">
+                <a:latin typeface="맑은 고딕" panose="020B0503020000020004" pitchFamily="50" charset="-127"/>
+                <a:ea typeface="맑은 고딕" panose="020B0503020000020004" pitchFamily="50" charset="-127"/>
+              </a:rPr>
+              <a:t>7. Andon — 중단 · 롤백 기준</a:t>
+            </a:r>
+            <a:endParaRPr lang="ko-KR" altLang="en-US" dirty="0"/>
+          </a:p>
+        </p:txBody>
+      </p:sp>
+      <p:sp>
+        <p:nvSpPr>
+          <p:cNvPr id="12" name="슬라이드 번호 개체 틀 11">
+            <a:extLst>
+              <a:ext uri="{FF2B5EF4-FFF2-40B4-BE49-F238E27FC236}">
+                <a16:creationId xmlns:a16="http://schemas.microsoft.com/office/drawing/2014/main" id="{B7184ABC-D9FC-E120-072A-5615A9569176}"/>
+              </a:ext>
+            </a:extLst>
+          </p:cNvPr>
+          <p:cNvSpPr>
+            <a:spLocks noGrp="1"/>
+          </p:cNvSpPr>
+          <p:nvPr>
+            <p:ph type="sldNum" sz="quarter" idx="12"/>
+          </p:nvPr>
+        </p:nvSpPr>
+        <p:spPr/>
+        <p:txBody>
+          <a:bodyPr/>
+          <a:lstStyle/>
+          <a:p>
+            <a:fld id="{A2CF8A37-2FCE-495B-9275-FE23C56C2D36}" type="slidenum">
+              <a:rPr lang="ko-KR" altLang="en-US" smtClean="0"/>
+              <a:pPr/>
+              <a:t>4</a:t>
+            </a:fld>
+            <a:endParaRPr lang="ko-KR" altLang="en-US" dirty="0"/>
+          </a:p>
+        </p:txBody>
+      </p:sp>
+      <p:sp>
+        <p:nvSpPr>
+          <p:cNvPr id="13" name="Rectangle 12"/>
+          <p:cNvSpPr/>
+          <p:nvPr/>
+        </p:nvSpPr>
+        <p:spPr>
+          <a:xfrm>
+            <a:off x="640080" y="1024128"/>
+            <a:ext cx="1371600" cy="301752"/>
+          </a:xfrm>
+          <a:prstGeom prst="rect">
+            <a:avLst/>
+          </a:prstGeom>
+          <a:solidFill>
+            <a:srgbClr val="8C8C8C"/>
+          </a:solidFill>
+          <a:ln>
+            <a:noFill/>
+          </a:ln>
+          <a:effectLst/>
+        </p:spPr>
+        <p:style>
+          <a:lnRef idx="1">
+            <a:schemeClr val="accent1"/>
+          </a:lnRef>
+          <a:fillRef idx="3">
+            <a:schemeClr val="accent1"/>
+          </a:fillRef>
+          <a:effectRef idx="2">
+            <a:schemeClr val="accent1"/>
+          </a:effectRef>
+          <a:fontRef idx="minor">
+            <a:schemeClr val="lt1"/>
+          </a:fontRef>
+        </p:style>
+        <p:txBody>
+          <a:bodyPr rtlCol="0" anchor="ctr" wrap="square" lIns="36576" rIns="36576" tIns="0" bIns="0"/>
+          <a:lstStyle/>
+          <a:p>
+            <a:pPr algn="ctr"/>
+            <a:r>
+              <a:rPr sz="1100" b="1" i="0">
+                <a:solidFill>
+                  <a:srgbClr val="FFFFFF"/>
+                </a:solidFill>
+                <a:latin typeface="Malgun Gothic"/>
+              </a:rPr>
+              <a:t>Andon 기준</a:t>
+            </a:r>
+          </a:p>
+        </p:txBody>
+      </p:sp>
+      <p:sp>
+        <p:nvSpPr>
+          <p:cNvPr id="14" name="Rectangle 13"/>
+          <p:cNvSpPr/>
+          <p:nvPr/>
+        </p:nvSpPr>
+        <p:spPr>
+          <a:xfrm>
+            <a:off x="6355080" y="1024128"/>
+            <a:ext cx="1371600" cy="301752"/>
+          </a:xfrm>
+          <a:prstGeom prst="rect">
+            <a:avLst/>
+          </a:prstGeom>
+          <a:solidFill>
+            <a:srgbClr val="8C8C8C"/>
+          </a:solidFill>
+          <a:ln>
+            <a:noFill/>
+          </a:ln>
+          <a:effectLst/>
+        </p:spPr>
+        <p:style>
+          <a:lnRef idx="1">
+            <a:schemeClr val="accent1"/>
+          </a:lnRef>
+          <a:fillRef idx="3">
+            <a:schemeClr val="accent1"/>
+          </a:fillRef>
+          <a:effectRef idx="2">
+            <a:schemeClr val="accent1"/>
+          </a:effectRef>
+          <a:fontRef idx="minor">
+            <a:schemeClr val="lt1"/>
+          </a:fontRef>
+        </p:style>
+        <p:txBody>
+          <a:bodyPr rtlCol="0" anchor="ctr" wrap="square" lIns="36576" rIns="36576" tIns="0" bIns="0"/>
+          <a:lstStyle/>
+          <a:p>
+            <a:pPr algn="ctr"/>
+            <a:r>
+              <a:rPr sz="1100" b="1" i="0">
+                <a:solidFill>
+                  <a:srgbClr val="FFFFFF"/>
+                </a:solidFill>
+                <a:latin typeface="Malgun Gothic"/>
+              </a:rPr>
+              <a:t>조치 방법</a:t>
+            </a:r>
+          </a:p>
+        </p:txBody>
+      </p:sp>
+      <p:sp>
+        <p:nvSpPr>
+          <p:cNvPr id="15" name="TextBox 14"/>
+          <p:cNvSpPr txBox="1"/>
+          <p:nvPr/>
+        </p:nvSpPr>
+        <p:spPr>
+          <a:xfrm>
+            <a:off x="822960" y="1517904"/>
+            <a:ext cx="5120640" cy="1005840"/>
+          </a:xfrm>
+          <a:prstGeom prst="rect">
+            <a:avLst/>
+          </a:prstGeom>
+          <a:noFill/>
+        </p:spPr>
+        <p:txBody>
+          <a:bodyPr wrap="square" lIns="36576" rIns="36576" tIns="0" bIns="0">
+            <a:spAutoFit/>
+          </a:bodyPr>
+          <a:lstStyle/>
+          <a:p>
+            <a:pPr algn="l">
+              <a:spcAft>
+                <a:spcPts val="300"/>
+              </a:spcAft>
+            </a:pPr>
+            <a:r>
+              <a:rPr sz="1300" b="1" i="0">
+                <a:solidFill>
+                  <a:srgbClr val="C0392B"/>
+                </a:solidFill>
+                <a:latin typeface="Malgun Gothic"/>
+              </a:rPr>
+              <a:t>동작 보존 실패</a:t>
+            </a:r>
+          </a:p>
+          <a:p>
+            <a:pPr algn="l">
+              <a:spcAft>
+                <a:spcPts val="300"/>
+              </a:spcAft>
+            </a:pPr>
+            <a:r>
+              <a:rPr sz="1150" b="0" i="0">
+                <a:solidFill>
+                  <a:srgbClr val="5D6D7E"/>
+                </a:solidFill>
+                <a:latin typeface="Malgun Gothic"/>
+              </a:rPr>
+              <a:t>분해 전후로 골든 테스트 기대값이 한 건이라도 바뀌면
+그 단계는 통과가 아니다 (Phase 3 수용 게이트)</a:t>
+            </a:r>
+          </a:p>
+        </p:txBody>
+      </p:sp>
+      <p:sp>
+        <p:nvSpPr>
+          <p:cNvPr id="16" name="TextBox 15"/>
+          <p:cNvSpPr txBox="1"/>
+          <p:nvPr/>
+        </p:nvSpPr>
+        <p:spPr>
+          <a:xfrm>
+            <a:off x="6537960" y="1517904"/>
+            <a:ext cx="5120640" cy="1005840"/>
+          </a:xfrm>
+          <a:prstGeom prst="rect">
+            <a:avLst/>
+          </a:prstGeom>
+          <a:noFill/>
+        </p:spPr>
+        <p:txBody>
+          <a:bodyPr wrap="square" lIns="36576" rIns="36576" tIns="0" bIns="0">
+            <a:spAutoFit/>
+          </a:bodyPr>
+          <a:lstStyle/>
+          <a:p>
+            <a:pPr algn="l">
+              <a:spcAft>
+                <a:spcPts val="300"/>
+              </a:spcAft>
+            </a:pPr>
+            <a:r>
+              <a:rPr sz="1300" b="1" i="0">
+                <a:solidFill>
+                  <a:srgbClr val="1C2833"/>
+                </a:solidFill>
+                <a:latin typeface="Malgun Gothic"/>
+              </a:rPr>
+              <a:t>즉시 롤백</a:t>
+            </a:r>
+          </a:p>
+          <a:p>
+            <a:pPr algn="l">
+              <a:spcAft>
+                <a:spcPts val="300"/>
+              </a:spcAft>
+            </a:pPr>
+            <a:r>
+              <a:rPr sz="1150" b="0" i="0">
+                <a:solidFill>
+                  <a:srgbClr val="5D6D7E"/>
+                </a:solidFill>
+                <a:latin typeface="Malgun Gothic"/>
+              </a:rPr>
+              <a:t>직전 태그 APK 로 되돌린다. 자동 업데이트 경로가 있어
+현장 재설치 없이 배포된다</a:t>
+            </a:r>
+          </a:p>
+        </p:txBody>
+      </p:sp>
+      <p:sp>
+        <p:nvSpPr>
+          <p:cNvPr id="17" name="TextBox 16"/>
+          <p:cNvSpPr txBox="1"/>
+          <p:nvPr/>
+        </p:nvSpPr>
+        <p:spPr>
+          <a:xfrm>
+            <a:off x="822960" y="2651760"/>
+            <a:ext cx="5120640" cy="1005840"/>
+          </a:xfrm>
+          <a:prstGeom prst="rect">
+            <a:avLst/>
+          </a:prstGeom>
+          <a:noFill/>
+        </p:spPr>
+        <p:txBody>
+          <a:bodyPr wrap="square" lIns="36576" rIns="36576" tIns="0" bIns="0">
+            <a:spAutoFit/>
+          </a:bodyPr>
+          <a:lstStyle/>
+          <a:p>
+            <a:pPr algn="l">
+              <a:spcAft>
+                <a:spcPts val="300"/>
+              </a:spcAft>
+            </a:pPr>
+            <a:r>
+              <a:rPr sz="1300" b="1" i="0">
+                <a:solidFill>
+                  <a:srgbClr val="C0392B"/>
+                </a:solidFill>
+                <a:latin typeface="Malgun Gothic"/>
+              </a:rPr>
+              <a:t>현장 회귀 재발</a:t>
+            </a:r>
+          </a:p>
+          <a:p>
+            <a:pPr algn="l">
+              <a:spcAft>
+                <a:spcPts val="300"/>
+              </a:spcAft>
+            </a:pPr>
+            <a:r>
+              <a:rPr sz="1150" b="0" i="0">
+                <a:solidFill>
+                  <a:srgbClr val="5D6D7E"/>
+                </a:solidFill>
+                <a:latin typeface="Malgun Gothic"/>
+              </a:rPr>
+              <a:t>이전에 고친 증상(미발령 · 상시 경보 · 사이렌 반복)이
+다시 관측되면 그 단계를 중단한다</a:t>
+            </a:r>
+          </a:p>
+        </p:txBody>
+      </p:sp>
+      <p:sp>
+        <p:nvSpPr>
+          <p:cNvPr id="18" name="TextBox 17"/>
+          <p:cNvSpPr txBox="1"/>
+          <p:nvPr/>
+        </p:nvSpPr>
+        <p:spPr>
+          <a:xfrm>
+            <a:off x="6537960" y="2651760"/>
+            <a:ext cx="5120640" cy="1005840"/>
+          </a:xfrm>
+          <a:prstGeom prst="rect">
+            <a:avLst/>
+          </a:prstGeom>
+          <a:noFill/>
+        </p:spPr>
+        <p:txBody>
+          <a:bodyPr wrap="square" lIns="36576" rIns="36576" tIns="0" bIns="0">
+            <a:spAutoFit/>
+          </a:bodyPr>
+          <a:lstStyle/>
+          <a:p>
+            <a:pPr algn="l">
+              <a:spcAft>
+                <a:spcPts val="300"/>
+              </a:spcAft>
+            </a:pPr>
+            <a:r>
+              <a:rPr sz="1300" b="1" i="0">
+                <a:solidFill>
+                  <a:srgbClr val="1C2833"/>
+                </a:solidFill>
+                <a:latin typeface="Malgun Gothic"/>
+              </a:rPr>
+              <a:t>원인 귀속</a:t>
+            </a:r>
+          </a:p>
+          <a:p>
+            <a:pPr algn="l">
+              <a:spcAft>
+                <a:spcPts val="300"/>
+              </a:spcAft>
+            </a:pPr>
+            <a:r>
+              <a:rPr sz="1150" b="0" i="0">
+                <a:solidFill>
+                  <a:srgbClr val="5D6D7E"/>
+                </a:solidFill>
+                <a:latin typeface="Malgun Gothic"/>
+              </a:rPr>
+              <a:t>단계를 단독 배포하기 때문에 회귀가 나면 어느 변경
+탓인지 특정된다</a:t>
+            </a:r>
+          </a:p>
+        </p:txBody>
+      </p:sp>
+      <p:sp>
+        <p:nvSpPr>
+          <p:cNvPr id="19" name="TextBox 18"/>
+          <p:cNvSpPr txBox="1"/>
+          <p:nvPr/>
+        </p:nvSpPr>
+        <p:spPr>
+          <a:xfrm>
+            <a:off x="822960" y="3785615"/>
+            <a:ext cx="5120640" cy="1005840"/>
+          </a:xfrm>
+          <a:prstGeom prst="rect">
+            <a:avLst/>
+          </a:prstGeom>
+          <a:noFill/>
+        </p:spPr>
+        <p:txBody>
+          <a:bodyPr wrap="square" lIns="36576" rIns="36576" tIns="0" bIns="0">
+            <a:spAutoFit/>
+          </a:bodyPr>
+          <a:lstStyle/>
+          <a:p>
+            <a:pPr algn="l">
+              <a:spcAft>
+                <a:spcPts val="300"/>
+              </a:spcAft>
+            </a:pPr>
+            <a:r>
+              <a:rPr sz="1300" b="1" i="0">
+                <a:solidFill>
+                  <a:srgbClr val="C0392B"/>
+                </a:solidFill>
+                <a:latin typeface="Malgun Gothic"/>
+              </a:rPr>
+              <a:t>CI 게이트 적색</a:t>
+            </a:r>
+          </a:p>
+          <a:p>
+            <a:pPr algn="l">
+              <a:spcAft>
+                <a:spcPts val="300"/>
+              </a:spcAft>
+            </a:pPr>
+            <a:r>
+              <a:rPr sz="1150" b="0" i="0">
+                <a:solidFill>
+                  <a:srgbClr val="5D6D7E"/>
+                </a:solidFill>
+                <a:latin typeface="Malgun Gothic"/>
+              </a:rPr>
+              <a:t>골든 테스트가 실패하면 APK 릴리스가 자동 차단된다
+— 이미 동작 중인 장치다</a:t>
+            </a:r>
+          </a:p>
+        </p:txBody>
+      </p:sp>
+      <p:sp>
+        <p:nvSpPr>
+          <p:cNvPr id="20" name="TextBox 19"/>
+          <p:cNvSpPr txBox="1"/>
+          <p:nvPr/>
+        </p:nvSpPr>
+        <p:spPr>
+          <a:xfrm>
+            <a:off x="6537960" y="3785615"/>
+            <a:ext cx="5120640" cy="1005840"/>
+          </a:xfrm>
+          <a:prstGeom prst="rect">
+            <a:avLst/>
+          </a:prstGeom>
+          <a:noFill/>
+        </p:spPr>
+        <p:txBody>
+          <a:bodyPr wrap="square" lIns="36576" rIns="36576" tIns="0" bIns="0">
+            <a:spAutoFit/>
+          </a:bodyPr>
+          <a:lstStyle/>
+          <a:p>
+            <a:pPr algn="l">
+              <a:spcAft>
+                <a:spcPts val="300"/>
+              </a:spcAft>
+            </a:pPr>
+            <a:r>
+              <a:rPr sz="1300" b="1" i="0">
+                <a:solidFill>
+                  <a:srgbClr val="1C2833"/>
+                </a:solidFill>
+                <a:latin typeface="Malgun Gothic"/>
+              </a:rPr>
+              <a:t>재개 조건</a:t>
+            </a:r>
+          </a:p>
+          <a:p>
+            <a:pPr algn="l">
+              <a:spcAft>
+                <a:spcPts val="300"/>
+              </a:spcAft>
+            </a:pPr>
+            <a:r>
+              <a:rPr sz="1150" b="0" i="0">
+                <a:solidFill>
+                  <a:srgbClr val="5D6D7E"/>
+                </a:solidFill>
+                <a:latin typeface="Malgun Gothic"/>
+              </a:rPr>
+              <a:t>실패한 상황을 테스트로 고정한 뒤에만 다음 단계로
+넘어간다 — 같은 증상이 두 번 돌아오지 않게</a:t>
+            </a:r>
+          </a:p>
+        </p:txBody>
+      </p:sp>
+      <p:sp>
+        <p:nvSpPr>
+          <p:cNvPr id="21" name="TextBox 20"/>
+          <p:cNvSpPr txBox="1"/>
+          <p:nvPr/>
+        </p:nvSpPr>
+        <p:spPr>
+          <a:xfrm>
+            <a:off x="822960" y="4919472"/>
+            <a:ext cx="5120640" cy="1005840"/>
+          </a:xfrm>
+          <a:prstGeom prst="rect">
+            <a:avLst/>
+          </a:prstGeom>
+          <a:noFill/>
+        </p:spPr>
+        <p:txBody>
+          <a:bodyPr wrap="square" lIns="36576" rIns="36576" tIns="0" bIns="0">
+            <a:spAutoFit/>
+          </a:bodyPr>
+          <a:lstStyle/>
+          <a:p>
+            <a:pPr algn="l">
+              <a:spcAft>
+                <a:spcPts val="300"/>
+              </a:spcAft>
+            </a:pPr>
+            <a:r>
+              <a:rPr sz="1300" b="1" i="0">
+                <a:solidFill>
+                  <a:srgbClr val="C0392B"/>
+                </a:solidFill>
+                <a:latin typeface="Malgun Gothic"/>
+              </a:rPr>
+              <a:t>UWB 의존 파손</a:t>
+            </a:r>
+          </a:p>
+          <a:p>
+            <a:pPr algn="l">
+              <a:spcAft>
+                <a:spcPts val="300"/>
+              </a:spcAft>
+            </a:pPr>
+            <a:r>
+              <a:rPr sz="1150" b="0" i="0">
+                <a:solidFill>
+                  <a:srgbClr val="5D6D7E"/>
+                </a:solidFill>
+                <a:latin typeface="Malgun Gothic"/>
+              </a:rPr>
+              <a:t>프리릴리스 UWB API 의 파괴 변경으로 경로가 깨지면
+UWB 를 끄고 BLE 단독으로 내린다</a:t>
+            </a:r>
+          </a:p>
+        </p:txBody>
+      </p:sp>
+      <p:sp>
+        <p:nvSpPr>
+          <p:cNvPr id="22" name="TextBox 21"/>
+          <p:cNvSpPr txBox="1"/>
+          <p:nvPr/>
+        </p:nvSpPr>
+        <p:spPr>
+          <a:xfrm>
+            <a:off x="6537960" y="4919472"/>
+            <a:ext cx="5120640" cy="1005840"/>
+          </a:xfrm>
+          <a:prstGeom prst="rect">
+            <a:avLst/>
+          </a:prstGeom>
+          <a:noFill/>
+        </p:spPr>
+        <p:txBody>
+          <a:bodyPr wrap="square" lIns="36576" rIns="36576" tIns="0" bIns="0">
+            <a:spAutoFit/>
+          </a:bodyPr>
+          <a:lstStyle/>
+          <a:p>
+            <a:pPr algn="l">
+              <a:spcAft>
+                <a:spcPts val="300"/>
+              </a:spcAft>
+            </a:pPr>
+            <a:r>
+              <a:rPr sz="1300" b="1" i="0">
+                <a:solidFill>
+                  <a:srgbClr val="1C2833"/>
+                </a:solidFill>
+                <a:latin typeface="Malgun Gothic"/>
+              </a:rPr>
+              <a:t>현장 부담</a:t>
+            </a:r>
+          </a:p>
+          <a:p>
+            <a:pPr algn="l">
+              <a:spcAft>
+                <a:spcPts val="300"/>
+              </a:spcAft>
+            </a:pPr>
+            <a:r>
+              <a:rPr sz="1150" b="0" i="0">
+                <a:solidFill>
+                  <a:srgbClr val="5D6D7E"/>
+                </a:solidFill>
+                <a:latin typeface="Malgun Gothic"/>
+              </a:rPr>
+              <a:t>확인 항목은 단계당 1건으로 제한한다. 검증 사이클이
+현장 가용 시간에 묶여 있다</a:t>
+            </a:r>
+          </a:p>
+        </p:txBody>
+      </p:sp>
+      <p:sp>
+        <p:nvSpPr>
+          <p:cNvPr id="23" name="TextBox 22"/>
+          <p:cNvSpPr txBox="1"/>
+          <p:nvPr/>
+        </p:nvSpPr>
+        <p:spPr>
+          <a:xfrm>
+            <a:off x="640080" y="6053328"/>
+            <a:ext cx="7680960" cy="365760"/>
+          </a:xfrm>
+          <a:prstGeom prst="rect">
+            <a:avLst/>
+          </a:prstGeom>
+          <a:noFill/>
+        </p:spPr>
+        <p:txBody>
+          <a:bodyPr wrap="square" lIns="36576" rIns="36576" tIns="0" bIns="0">
+            <a:spAutoFit/>
+          </a:bodyPr>
+          <a:lstStyle/>
+          <a:p>
+            <a:pPr algn="ctr"/>
+            <a:r>
+              <a:rPr sz="1150" b="0" i="1">
+                <a:solidFill>
+                  <a:srgbClr val="5D6D7E"/>
+                </a:solidFill>
+                <a:latin typeface="Malgun Gothic"/>
+              </a:rPr>
+              <a:t>“멈출 기준을 먼저 정해 두는 것이, 멈추지 않고 밀어붙이는 것보다 빠릅니다.”</a:t>
+            </a:r>
+          </a:p>
+        </p:txBody>
+      </p:sp>
+    </p:spTree>
+    <p:extLst>
+      <p:ext uri="{BB962C8B-B14F-4D97-AF65-F5344CB8AC3E}">
+        <p14:creationId xmlns:p14="http://schemas.microsoft.com/office/powerpoint/2010/main" val="3987384774"/>
+      </p:ext>
+    </p:extLst>
+  </p:cSld>
+  <p:clrMapOvr>
+    <a:masterClrMapping/>
+  </p:clrMapOvr>
 </p:sld>
 </file>
 

--- a/docs/presentation/company_form/SafeAlert_보고_2026.08.pptx
+++ b/docs/presentation/company_form/SafeAlert_보고_2026.08.pptx
@@ -6100,8 +6100,8 @@
         </p:nvSpPr>
         <p:spPr>
           <a:xfrm>
-            <a:off x="777240" y="1481328"/>
-            <a:ext cx="4160520" cy="822960"/>
+            <a:off x="777240" y="1389888"/>
+            <a:ext cx="4389120" cy="777240"/>
           </a:xfrm>
           <a:prstGeom prst="rect">
             <a:avLst/>
@@ -6116,7 +6116,7 @@
           <a:p>
             <a:pPr algn="l">
               <a:spcAft>
-                <a:spcPts val="300"/>
+                <a:spcPts val="200"/>
               </a:spcAft>
             </a:pPr>
             <a:r>
@@ -6132,7 +6132,7 @@
           <a:p>
             <a:pPr algn="l">
               <a:spcAft>
-                <a:spcPts val="300"/>
+                <a:spcPts val="200"/>
               </a:spcAft>
             </a:pPr>
             <a:r>
@@ -6155,8 +6155,8 @@
         </p:nvSpPr>
         <p:spPr>
           <a:xfrm>
-            <a:off x="5138928" y="1609344"/>
-            <a:ext cx="777240" cy="347472"/>
+            <a:off x="5266944" y="1499616"/>
+            <a:ext cx="713232" cy="329184"/>
           </a:xfrm>
           <a:prstGeom prst="rightArrow">
             <a:avLst/>
@@ -6199,8 +6199,8 @@
         </p:nvSpPr>
         <p:spPr>
           <a:xfrm>
-            <a:off x="6144768" y="1499616"/>
-            <a:ext cx="5623560" cy="822960"/>
+            <a:off x="6144768" y="1408176"/>
+            <a:ext cx="5623560" cy="777240"/>
           </a:xfrm>
           <a:prstGeom prst="rect">
             <a:avLst/>
@@ -6239,8 +6239,8 @@
         </p:nvSpPr>
         <p:spPr>
           <a:xfrm>
-            <a:off x="777240" y="2487168"/>
-            <a:ext cx="4160520" cy="822960"/>
+            <a:off x="777240" y="2231136"/>
+            <a:ext cx="4389120" cy="777240"/>
           </a:xfrm>
           <a:prstGeom prst="rect">
             <a:avLst/>
@@ -6255,7 +6255,7 @@
           <a:p>
             <a:pPr algn="l">
               <a:spcAft>
-                <a:spcPts val="300"/>
+                <a:spcPts val="200"/>
               </a:spcAft>
             </a:pPr>
             <a:r>
@@ -6271,7 +6271,7 @@
           <a:p>
             <a:pPr algn="l">
               <a:spcAft>
-                <a:spcPts val="300"/>
+                <a:spcPts val="200"/>
               </a:spcAft>
             </a:pPr>
             <a:r>
@@ -6294,8 +6294,8 @@
         </p:nvSpPr>
         <p:spPr>
           <a:xfrm>
-            <a:off x="5138928" y="2615184"/>
-            <a:ext cx="777240" cy="347472"/>
+            <a:off x="5266944" y="2340864"/>
+            <a:ext cx="713232" cy="329184"/>
           </a:xfrm>
           <a:prstGeom prst="rightArrow">
             <a:avLst/>
@@ -6338,8 +6338,8 @@
         </p:nvSpPr>
         <p:spPr>
           <a:xfrm>
-            <a:off x="6144768" y="2505456"/>
-            <a:ext cx="5623560" cy="822960"/>
+            <a:off x="6144768" y="2249424"/>
+            <a:ext cx="5623560" cy="777240"/>
           </a:xfrm>
           <a:prstGeom prst="rect">
             <a:avLst/>
@@ -6378,8 +6378,8 @@
         </p:nvSpPr>
         <p:spPr>
           <a:xfrm>
-            <a:off x="777240" y="3493008"/>
-            <a:ext cx="4160520" cy="822960"/>
+            <a:off x="777240" y="3072384"/>
+            <a:ext cx="4389120" cy="777240"/>
           </a:xfrm>
           <a:prstGeom prst="rect">
             <a:avLst/>
@@ -6394,7 +6394,7 @@
           <a:p>
             <a:pPr algn="l">
               <a:spcAft>
-                <a:spcPts val="300"/>
+                <a:spcPts val="200"/>
               </a:spcAft>
             </a:pPr>
             <a:r>
@@ -6410,7 +6410,7 @@
           <a:p>
             <a:pPr algn="l">
               <a:spcAft>
-                <a:spcPts val="300"/>
+                <a:spcPts val="200"/>
               </a:spcAft>
             </a:pPr>
             <a:r>
@@ -6433,8 +6433,8 @@
         </p:nvSpPr>
         <p:spPr>
           <a:xfrm>
-            <a:off x="5138928" y="3621024"/>
-            <a:ext cx="777240" cy="347472"/>
+            <a:off x="5266944" y="3182112"/>
+            <a:ext cx="713232" cy="329184"/>
           </a:xfrm>
           <a:prstGeom prst="rightArrow">
             <a:avLst/>
@@ -6477,8 +6477,8 @@
         </p:nvSpPr>
         <p:spPr>
           <a:xfrm>
-            <a:off x="6144768" y="3511296"/>
-            <a:ext cx="5623560" cy="822960"/>
+            <a:off x="6144768" y="3090672"/>
+            <a:ext cx="5623560" cy="777240"/>
           </a:xfrm>
           <a:prstGeom prst="rect">
             <a:avLst/>
@@ -6511,20 +6511,75 @@
       </p:sp>
       <p:sp>
         <p:nvSpPr>
-          <p:cNvPr id="23" name="Rectangle 22"/>
-          <p:cNvSpPr/>
+          <p:cNvPr id="23" name="TextBox 22"/>
+          <p:cNvSpPr txBox="1"/>
           <p:nvPr/>
         </p:nvSpPr>
         <p:spPr>
           <a:xfrm>
-            <a:off x="640080" y="4553712"/>
-            <a:ext cx="1234440" cy="301752"/>
+            <a:off x="777240" y="3913632"/>
+            <a:ext cx="4389120" cy="777240"/>
           </a:xfrm>
           <a:prstGeom prst="rect">
             <a:avLst/>
           </a:prstGeom>
+          <a:noFill/>
+        </p:spPr>
+        <p:txBody>
+          <a:bodyPr wrap="square" lIns="36576" rIns="36576" tIns="0" bIns="0">
+            <a:spAutoFit/>
+          </a:bodyPr>
+          <a:lstStyle/>
+          <a:p>
+            <a:pPr algn="l">
+              <a:spcAft>
+                <a:spcPts val="200"/>
+              </a:spcAft>
+            </a:pPr>
+            <a:r>
+              <a:rPr sz="1250" b="1" i="0">
+                <a:solidFill>
+                  <a:srgbClr val="1C2833"/>
+                </a:solidFill>
+                <a:latin typeface="Malgun Gothic"/>
+              </a:rPr>
+              <a:t>전 기종 지원 vs. 백그라운드 상시 동작</a:t>
+            </a:r>
+          </a:p>
+          <a:p>
+            <a:pPr algn="l">
+              <a:spcAft>
+                <a:spcPts val="200"/>
+              </a:spcAft>
+            </a:pPr>
+            <a:r>
+              <a:rPr sz="1150" b="1" i="0">
+                <a:solidFill>
+                  <a:srgbClr val="C0392B"/>
+                </a:solidFill>
+                <a:latin typeface="Malgun Gothic"/>
+              </a:rPr>
+              <a:t>안드로이드 전용 → 화면이 꺼져도 도는 쪽 우선</a:t>
+            </a:r>
+          </a:p>
+        </p:txBody>
+      </p:sp>
+      <p:sp>
+        <p:nvSpPr>
+          <p:cNvPr id="24" name="Right Arrow 23"/>
+          <p:cNvSpPr/>
+          <p:nvPr/>
+        </p:nvSpPr>
+        <p:spPr>
+          <a:xfrm>
+            <a:off x="5266944" y="4023360"/>
+            <a:ext cx="713232" cy="329184"/>
+          </a:xfrm>
+          <a:prstGeom prst="rightArrow">
+            <a:avLst/>
+          </a:prstGeom>
           <a:solidFill>
-            <a:srgbClr val="8C8C8C"/>
+            <a:srgbClr val="C7CCD1"/>
           </a:solidFill>
           <a:ln>
             <a:noFill/>
@@ -6546,32 +6601,23 @@
           </a:fontRef>
         </p:style>
         <p:txBody>
-          <a:bodyPr rtlCol="0" anchor="ctr" wrap="square" lIns="36576" rIns="36576" tIns="0" bIns="0"/>
+          <a:bodyPr rtlCol="0" anchor="ctr"/>
           <a:lstStyle/>
           <a:p>
             <a:pPr algn="ctr"/>
-            <a:r>
-              <a:rPr sz="1100" b="1" i="0">
-                <a:solidFill>
-                  <a:srgbClr val="FFFFFF"/>
-                </a:solidFill>
-                <a:latin typeface="Malgun Gothic"/>
-              </a:rPr>
-              <a:t>남는 한계</a:t>
-            </a:r>
-          </a:p>
-        </p:txBody>
-      </p:sp>
-      <p:sp>
-        <p:nvSpPr>
-          <p:cNvPr id="24" name="TextBox 23"/>
+          </a:p>
+        </p:txBody>
+      </p:sp>
+      <p:sp>
+        <p:nvSpPr>
+          <p:cNvPr id="25" name="TextBox 24"/>
           <p:cNvSpPr txBox="1"/>
           <p:nvPr/>
         </p:nvSpPr>
         <p:spPr>
           <a:xfrm>
-            <a:off x="868680" y="5010912"/>
-            <a:ext cx="7223760" cy="310896"/>
+            <a:off x="6144768" y="3931920"/>
+            <a:ext cx="5623560" cy="777240"/>
           </a:xfrm>
           <a:prstGeom prst="rect">
             <a:avLst/>
@@ -6590,27 +6636,81 @@
               </a:spcAft>
             </a:pPr>
             <a:r>
-              <a:rPr sz="1200" b="0" i="0">
-                <a:solidFill>
-                  <a:srgbClr val="1C2833"/>
+              <a:rPr sz="1150" b="0" i="0">
+                <a:solidFill>
+                  <a:srgbClr val="5D6D7E"/>
                 </a:solidFill>
                 <a:latin typeface="Malgun Gothic"/>
               </a:rPr>
-              <a:t>①  앱이 설치된 기기끼리만 감지 — 미설치 인원 · 장비는 보이지 않음</a:t>
-            </a:r>
-          </a:p>
-        </p:txBody>
-      </p:sp>
-      <p:sp>
-        <p:nvSpPr>
-          <p:cNvPr id="25" name="TextBox 24"/>
+              <a:t>iOS 는 백그라운드에서 역할 · 상태를 실은 광고를 보내지 못한다.
+대응 — iOS 인원에게 BLE 태그를 지급한다. 등록 비콘 스캔 경로가 이미 있다.</a:t>
+            </a:r>
+          </a:p>
+        </p:txBody>
+      </p:sp>
+      <p:sp>
+        <p:nvSpPr>
+          <p:cNvPr id="26" name="Rectangle 25"/>
+          <p:cNvSpPr/>
+          <p:nvPr/>
+        </p:nvSpPr>
+        <p:spPr>
+          <a:xfrm>
+            <a:off x="640080" y="4846320"/>
+            <a:ext cx="1234440" cy="301752"/>
+          </a:xfrm>
+          <a:prstGeom prst="rect">
+            <a:avLst/>
+          </a:prstGeom>
+          <a:solidFill>
+            <a:srgbClr val="8C8C8C"/>
+          </a:solidFill>
+          <a:ln>
+            <a:noFill/>
+          </a:ln>
+          <a:effectLst/>
+        </p:spPr>
+        <p:style>
+          <a:lnRef idx="1">
+            <a:schemeClr val="accent1"/>
+          </a:lnRef>
+          <a:fillRef idx="3">
+            <a:schemeClr val="accent1"/>
+          </a:fillRef>
+          <a:effectRef idx="2">
+            <a:schemeClr val="accent1"/>
+          </a:effectRef>
+          <a:fontRef idx="minor">
+            <a:schemeClr val="lt1"/>
+          </a:fontRef>
+        </p:style>
+        <p:txBody>
+          <a:bodyPr rtlCol="0" anchor="ctr" wrap="square" lIns="36576" rIns="36576" tIns="0" bIns="0"/>
+          <a:lstStyle/>
+          <a:p>
+            <a:pPr algn="ctr"/>
+            <a:r>
+              <a:rPr sz="1100" b="1" i="0">
+                <a:solidFill>
+                  <a:srgbClr val="FFFFFF"/>
+                </a:solidFill>
+                <a:latin typeface="Malgun Gothic"/>
+              </a:rPr>
+              <a:t>남는 한계</a:t>
+            </a:r>
+          </a:p>
+        </p:txBody>
+      </p:sp>
+      <p:sp>
+        <p:nvSpPr>
+          <p:cNvPr id="27" name="TextBox 26"/>
           <p:cNvSpPr txBox="1"/>
           <p:nvPr/>
         </p:nvSpPr>
         <p:spPr>
           <a:xfrm>
-            <a:off x="868680" y="5340096"/>
-            <a:ext cx="7223760" cy="310896"/>
+            <a:off x="868680" y="5266944"/>
+            <a:ext cx="7223760" cy="292608"/>
           </a:xfrm>
           <a:prstGeom prst="rect">
             <a:avLst/>
@@ -6629,7 +6729,46 @@
               </a:spcAft>
             </a:pPr>
             <a:r>
-              <a:rPr sz="1200" b="0" i="0">
+              <a:rPr sz="1150" b="0" i="0">
+                <a:solidFill>
+                  <a:srgbClr val="1C2833"/>
+                </a:solidFill>
+                <a:latin typeface="Malgun Gothic"/>
+              </a:rPr>
+              <a:t>①  앱이 설치된 기기끼리만 감지 — 미설치 인원 · 장비는 보이지 않음</a:t>
+            </a:r>
+          </a:p>
+        </p:txBody>
+      </p:sp>
+      <p:sp>
+        <p:nvSpPr>
+          <p:cNvPr id="28" name="TextBox 27"/>
+          <p:cNvSpPr txBox="1"/>
+          <p:nvPr/>
+        </p:nvSpPr>
+        <p:spPr>
+          <a:xfrm>
+            <a:off x="868680" y="5577840"/>
+            <a:ext cx="7223760" cy="292608"/>
+          </a:xfrm>
+          <a:prstGeom prst="rect">
+            <a:avLst/>
+          </a:prstGeom>
+          <a:noFill/>
+        </p:spPr>
+        <p:txBody>
+          <a:bodyPr wrap="square" lIns="36576" rIns="36576" tIns="0" bIns="0">
+            <a:spAutoFit/>
+          </a:bodyPr>
+          <a:lstStyle/>
+          <a:p>
+            <a:pPr algn="l">
+              <a:spcAft>
+                <a:spcPts val="400"/>
+              </a:spcAft>
+            </a:pPr>
+            <a:r>
+              <a:rPr sz="1150" b="0" i="0">
                 <a:solidFill>
                   <a:srgbClr val="1C2833"/>
                 </a:solidFill>
@@ -6640,9 +6779,48 @@
           </a:p>
         </p:txBody>
       </p:sp>
+      <p:sp>
+        <p:nvSpPr>
+          <p:cNvPr id="29" name="TextBox 28"/>
+          <p:cNvSpPr txBox="1"/>
+          <p:nvPr/>
+        </p:nvSpPr>
+        <p:spPr>
+          <a:xfrm>
+            <a:off x="868680" y="5888736"/>
+            <a:ext cx="7223760" cy="292608"/>
+          </a:xfrm>
+          <a:prstGeom prst="rect">
+            <a:avLst/>
+          </a:prstGeom>
+          <a:noFill/>
+        </p:spPr>
+        <p:txBody>
+          <a:bodyPr wrap="square" lIns="36576" rIns="36576" tIns="0" bIns="0">
+            <a:spAutoFit/>
+          </a:bodyPr>
+          <a:lstStyle/>
+          <a:p>
+            <a:pPr algn="l">
+              <a:spcAft>
+                <a:spcPts val="400"/>
+              </a:spcAft>
+            </a:pPr>
+            <a:r>
+              <a:rPr sz="1150" b="0" i="0">
+                <a:solidFill>
+                  <a:srgbClr val="1C2833"/>
+                </a:solidFill>
+                <a:latin typeface="Malgun Gothic"/>
+              </a:rPr>
+              <a:t>③  안드로이드 8.0 이상에서만 설치된다</a:t>
+            </a:r>
+          </a:p>
+        </p:txBody>
+      </p:sp>
       <p:pic>
         <p:nvPicPr>
-          <p:cNvPr id="26" name="Picture 25" descr="fig_radius.png"/>
+          <p:cNvPr id="30" name="Picture 29" descr="fig_radius.png"/>
           <p:cNvPicPr>
             <a:picLocks noChangeAspect="1"/>
           </p:cNvPicPr>
@@ -6656,8 +6834,8 @@
         </p:blipFill>
         <p:spPr>
           <a:xfrm>
-            <a:off x="8549640" y="4370832"/>
-            <a:ext cx="2834640" cy="1566051"/>
+            <a:off x="8778240" y="4535424"/>
+            <a:ext cx="2468880" cy="1363980"/>
           </a:xfrm>
           <a:prstGeom prst="rect">
             <a:avLst/>

--- a/docs/presentation/company_form/SafeAlert_보고_2026.08.pptx
+++ b/docs/presentation/company_form/SafeAlert_보고_2026.08.pptx
@@ -10622,7 +10622,7 @@
                 <a:latin typeface="맑은 고딕" panose="020B0503020000020004" pitchFamily="50" charset="-127"/>
                 <a:ea typeface="맑은 고딕" panose="020B0503020000020004" pitchFamily="50" charset="-127"/>
               </a:rPr>
-              <a:t>7. Andon — 중단 · 롤백 기준</a:t>
+              <a:t>7. Andon — 이럴 때 멈춘다</a:t>
             </a:r>
             <a:endParaRPr lang="ko-KR" altLang="en-US" dirty="0"/>
           </a:p>
@@ -10667,7 +10667,7 @@
         <p:spPr>
           <a:xfrm>
             <a:off x="640080" y="1024128"/>
-            <a:ext cx="1371600" cy="301752"/>
+            <a:ext cx="1508760" cy="301752"/>
           </a:xfrm>
           <a:prstGeom prst="rect">
             <a:avLst/>
@@ -10706,7 +10706,7 @@
                 </a:solidFill>
                 <a:latin typeface="Malgun Gothic"/>
               </a:rPr>
-              <a:t>Andon 기준</a:t>
+              <a:t>현장 운영 중</a:t>
             </a:r>
           </a:p>
         </p:txBody>
@@ -10720,7 +10720,7 @@
         <p:spPr>
           <a:xfrm>
             <a:off x="6355080" y="1024128"/>
-            <a:ext cx="1371600" cy="301752"/>
+            <a:ext cx="1965960" cy="301752"/>
           </a:xfrm>
           <a:prstGeom prst="rect">
             <a:avLst/>
@@ -10759,7 +10759,7 @@
                 </a:solidFill>
                 <a:latin typeface="Malgun Gothic"/>
               </a:rPr>
-              <a:t>조치 방법</a:t>
+              <a:t>업데이트 · 수정 중</a:t>
             </a:r>
           </a:p>
         </p:txBody>
@@ -10772,8 +10772,8 @@
         </p:nvSpPr>
         <p:spPr>
           <a:xfrm>
-            <a:off x="822960" y="1517904"/>
-            <a:ext cx="5120640" cy="1005840"/>
+            <a:off x="822960" y="1481328"/>
+            <a:ext cx="5029200" cy="713232"/>
           </a:xfrm>
           <a:prstGeom prst="rect">
             <a:avLst/>
@@ -10788,23 +10788,32 @@
           <a:p>
             <a:pPr algn="l">
               <a:spcAft>
-                <a:spcPts val="300"/>
+                <a:spcPts val="200"/>
               </a:spcAft>
             </a:pPr>
             <a:r>
-              <a:rPr sz="1300" b="1" i="0">
+              <a:rPr sz="1250" b="1" i="0">
                 <a:solidFill>
                   <a:srgbClr val="C0392B"/>
                 </a:solidFill>
                 <a:latin typeface="Malgun Gothic"/>
               </a:rPr>
-              <a:t>동작 보존 실패</a:t>
+              <a:t>미발령</a:t>
+            </a:r>
+            <a:r>
+              <a:rPr sz="1000" b="0" i="0">
+                <a:solidFill>
+                  <a:srgbClr val="8A949E"/>
+                </a:solidFill>
+                <a:latin typeface="Malgun Gothic"/>
+              </a:rPr>
+              <a:t>   즉시 중단</a:t>
             </a:r>
           </a:p>
           <a:p>
             <a:pPr algn="l">
               <a:spcAft>
-                <a:spcPts val="300"/>
+                <a:spcPts val="200"/>
               </a:spcAft>
             </a:pPr>
             <a:r>
@@ -10814,8 +10823,7 @@
                 </a:solidFill>
                 <a:latin typeface="Malgun Gothic"/>
               </a:rPr>
-              <a:t>분해 전후로 골든 테스트 기대값이 한 건이라도 바뀌면
-그 단계는 통과가 아니다 (Phase 3 수용 게이트)</a:t>
+              <a:t>접근했는데 경보가 뜨지 않은 사례 1건이라도</a:t>
             </a:r>
           </a:p>
         </p:txBody>
@@ -10828,8 +10836,8 @@
         </p:nvSpPr>
         <p:spPr>
           <a:xfrm>
-            <a:off x="6537960" y="1517904"/>
-            <a:ext cx="5120640" cy="1005840"/>
+            <a:off x="6537960" y="1481328"/>
+            <a:ext cx="5120640" cy="713232"/>
           </a:xfrm>
           <a:prstGeom prst="rect">
             <a:avLst/>
@@ -10844,23 +10852,32 @@
           <a:p>
             <a:pPr algn="l">
               <a:spcAft>
-                <a:spcPts val="300"/>
+                <a:spcPts val="200"/>
               </a:spcAft>
             </a:pPr>
             <a:r>
-              <a:rPr sz="1300" b="1" i="0">
-                <a:solidFill>
-                  <a:srgbClr val="1C2833"/>
+              <a:rPr sz="1250" b="1" i="0">
+                <a:solidFill>
+                  <a:srgbClr val="C0392B"/>
                 </a:solidFill>
                 <a:latin typeface="Malgun Gothic"/>
               </a:rPr>
-              <a:t>즉시 롤백</a:t>
+              <a:t>버전 혼재</a:t>
+            </a:r>
+            <a:r>
+              <a:rPr sz="1000" b="0" i="0">
+                <a:solidFill>
+                  <a:srgbClr val="8A949E"/>
+                </a:solidFill>
+                <a:latin typeface="Malgun Gothic"/>
+              </a:rPr>
+              <a:t>   즉시 중단</a:t>
             </a:r>
           </a:p>
           <a:p>
             <a:pPr algn="l">
               <a:spcAft>
-                <a:spcPts val="300"/>
+                <a:spcPts val="200"/>
               </a:spcAft>
             </a:pPr>
             <a:r>
@@ -10870,8 +10887,7 @@
                 </a:solidFill>
                 <a:latin typeface="Malgun Gothic"/>
               </a:rPr>
-              <a:t>직전 태그 APK 로 되돌린다. 자동 업데이트 경로가 있어
-현장 재설치 없이 배포된다</a:t>
+              <a:t>구버전 단말이 신버전을 감지하지 못함</a:t>
             </a:r>
           </a:p>
         </p:txBody>
@@ -10884,8 +10900,8 @@
         </p:nvSpPr>
         <p:spPr>
           <a:xfrm>
-            <a:off x="822960" y="2651760"/>
-            <a:ext cx="5120640" cy="1005840"/>
+            <a:off x="822960" y="2249424"/>
+            <a:ext cx="5029200" cy="713232"/>
           </a:xfrm>
           <a:prstGeom prst="rect">
             <a:avLst/>
@@ -10900,23 +10916,32 @@
           <a:p>
             <a:pPr algn="l">
               <a:spcAft>
-                <a:spcPts val="300"/>
+                <a:spcPts val="200"/>
               </a:spcAft>
             </a:pPr>
             <a:r>
-              <a:rPr sz="1300" b="1" i="0">
+              <a:rPr sz="1250" b="1" i="0">
                 <a:solidFill>
                   <a:srgbClr val="C0392B"/>
                 </a:solidFill>
                 <a:latin typeface="Malgun Gothic"/>
               </a:rPr>
-              <a:t>현장 회귀 재발</a:t>
+              <a:t>오발령 지속</a:t>
+            </a:r>
+            <a:r>
+              <a:rPr sz="1000" b="0" i="0">
+                <a:solidFill>
+                  <a:srgbClr val="8A949E"/>
+                </a:solidFill>
+                <a:latin typeface="Malgun Gothic"/>
+              </a:rPr>
+              <a:t>   즉시 중단</a:t>
             </a:r>
           </a:p>
           <a:p>
             <a:pPr algn="l">
               <a:spcAft>
-                <a:spcPts val="300"/>
+                <a:spcPts val="200"/>
               </a:spcAft>
             </a:pPr>
             <a:r>
@@ -10926,8 +10951,7 @@
                 </a:solidFill>
                 <a:latin typeface="Malgun Gothic"/>
               </a:rPr>
-              <a:t>이전에 고친 증상(미발령 · 상시 경보 · 사이렌 반복)이
-다시 관측되면 그 단계를 중단한다</a:t>
+              <a:t>정지 중 계속 울림 · 이탈 후 다시 울림이 반복</a:t>
             </a:r>
           </a:p>
         </p:txBody>
@@ -10940,8 +10964,8 @@
         </p:nvSpPr>
         <p:spPr>
           <a:xfrm>
-            <a:off x="6537960" y="2651760"/>
-            <a:ext cx="5120640" cy="1005840"/>
+            <a:off x="6537960" y="2249424"/>
+            <a:ext cx="5120640" cy="713232"/>
           </a:xfrm>
           <a:prstGeom prst="rect">
             <a:avLst/>
@@ -10956,23 +10980,32 @@
           <a:p>
             <a:pPr algn="l">
               <a:spcAft>
-                <a:spcPts val="300"/>
+                <a:spcPts val="200"/>
               </a:spcAft>
             </a:pPr>
             <a:r>
-              <a:rPr sz="1300" b="1" i="0">
+              <a:rPr sz="1250" b="1" i="0">
                 <a:solidFill>
                   <a:srgbClr val="1C2833"/>
                 </a:solidFill>
                 <a:latin typeface="Malgun Gothic"/>
               </a:rPr>
-              <a:t>원인 귀속</a:t>
+              <a:t>보호 공백</a:t>
+            </a:r>
+            <a:r>
+              <a:rPr sz="1000" b="0" i="0">
+                <a:solidFill>
+                  <a:srgbClr val="8A949E"/>
+                </a:solidFill>
+                <a:latin typeface="Malgun Gothic"/>
+              </a:rPr>
+              <a:t>   관측 시 판단</a:t>
             </a:r>
           </a:p>
           <a:p>
             <a:pPr algn="l">
               <a:spcAft>
-                <a:spcPts val="300"/>
+                <a:spcPts val="200"/>
               </a:spcAft>
             </a:pPr>
             <a:r>
@@ -10982,8 +11015,7 @@
                 </a:solidFill>
                 <a:latin typeface="Malgun Gothic"/>
               </a:rPr>
-              <a:t>단계를 단독 배포하기 때문에 회귀가 나면 어느 변경
-탓인지 특정된다</a:t>
+              <a:t>작업 시간 중 일괄 업데이트 금지 — 교대 전환 때만</a:t>
             </a:r>
           </a:p>
         </p:txBody>
@@ -10996,8 +11028,8 @@
         </p:nvSpPr>
         <p:spPr>
           <a:xfrm>
-            <a:off x="822960" y="3785615"/>
-            <a:ext cx="5120640" cy="1005840"/>
+            <a:off x="822960" y="3017520"/>
+            <a:ext cx="5029200" cy="713232"/>
           </a:xfrm>
           <a:prstGeom prst="rect">
             <a:avLst/>
@@ -11012,23 +11044,32 @@
           <a:p>
             <a:pPr algn="l">
               <a:spcAft>
-                <a:spcPts val="300"/>
+                <a:spcPts val="200"/>
               </a:spcAft>
             </a:pPr>
             <a:r>
-              <a:rPr sz="1300" b="1" i="0">
-                <a:solidFill>
-                  <a:srgbClr val="C0392B"/>
+              <a:rPr sz="1250" b="1" i="0">
+                <a:solidFill>
+                  <a:srgbClr val="1C2833"/>
                 </a:solidFill>
                 <a:latin typeface="Malgun Gothic"/>
               </a:rPr>
-              <a:t>CI 게이트 적색</a:t>
+              <a:t>감지 중단</a:t>
+            </a:r>
+            <a:r>
+              <a:rPr sz="1000" b="0" i="0">
+                <a:solidFill>
+                  <a:srgbClr val="8A949E"/>
+                </a:solidFill>
+                <a:latin typeface="Malgun Gothic"/>
+              </a:rPr>
+              <a:t>   관측 시 판단</a:t>
             </a:r>
           </a:p>
           <a:p>
             <a:pPr algn="l">
               <a:spcAft>
-                <a:spcPts val="300"/>
+                <a:spcPts val="200"/>
               </a:spcAft>
             </a:pPr>
             <a:r>
@@ -11038,8 +11079,7 @@
                 </a:solidFill>
                 <a:latin typeface="Malgun Gothic"/>
               </a:rPr>
-              <a:t>골든 테스트가 실패하면 APK 릴리스가 자동 차단된다
-— 이미 동작 중인 장치다</a:t>
+              <a:t>상시 알림이 ‘이상’ 으로 바뀌거나 사라짐</a:t>
             </a:r>
           </a:p>
         </p:txBody>
@@ -11052,8 +11092,8 @@
         </p:nvSpPr>
         <p:spPr>
           <a:xfrm>
-            <a:off x="6537960" y="3785615"/>
-            <a:ext cx="5120640" cy="1005840"/>
+            <a:off x="6537960" y="3017520"/>
+            <a:ext cx="5120640" cy="713232"/>
           </a:xfrm>
           <a:prstGeom prst="rect">
             <a:avLst/>
@@ -11068,23 +11108,32 @@
           <a:p>
             <a:pPr algn="l">
               <a:spcAft>
-                <a:spcPts val="300"/>
+                <a:spcPts val="200"/>
               </a:spcAft>
             </a:pPr>
             <a:r>
-              <a:rPr sz="1300" b="1" i="0">
+              <a:rPr sz="1250" b="1" i="0">
                 <a:solidFill>
                   <a:srgbClr val="1C2833"/>
                 </a:solidFill>
                 <a:latin typeface="Malgun Gothic"/>
               </a:rPr>
-              <a:t>재개 조건</a:t>
+              <a:t>서비스 미기동</a:t>
+            </a:r>
+            <a:r>
+              <a:rPr sz="1000" b="0" i="0">
+                <a:solidFill>
+                  <a:srgbClr val="8A949E"/>
+                </a:solidFill>
+                <a:latin typeface="Malgun Gothic"/>
+              </a:rPr>
+              <a:t>   관측 시 판단</a:t>
             </a:r>
           </a:p>
           <a:p>
             <a:pPr algn="l">
               <a:spcAft>
-                <a:spcPts val="300"/>
+                <a:spcPts val="200"/>
               </a:spcAft>
             </a:pPr>
             <a:r>
@@ -11094,8 +11143,7 @@
                 </a:solidFill>
                 <a:latin typeface="Malgun Gothic"/>
               </a:rPr>
-              <a:t>실패한 상황을 테스트로 고정한 뒤에만 다음 단계로
-넘어간다 — 같은 증상이 두 번 돌아오지 않게</a:t>
+              <a:t>업데이트 · 역할 전환 후 백그라운드 실행 미복구</a:t>
             </a:r>
           </a:p>
         </p:txBody>
@@ -11108,8 +11156,8 @@
         </p:nvSpPr>
         <p:spPr>
           <a:xfrm>
-            <a:off x="822960" y="4919472"/>
-            <a:ext cx="5120640" cy="1005840"/>
+            <a:off x="822960" y="3785616"/>
+            <a:ext cx="5029200" cy="713232"/>
           </a:xfrm>
           <a:prstGeom prst="rect">
             <a:avLst/>
@@ -11124,23 +11172,32 @@
           <a:p>
             <a:pPr algn="l">
               <a:spcAft>
-                <a:spcPts val="300"/>
+                <a:spcPts val="200"/>
               </a:spcAft>
             </a:pPr>
             <a:r>
-              <a:rPr sz="1300" b="1" i="0">
-                <a:solidFill>
-                  <a:srgbClr val="C0392B"/>
+              <a:rPr sz="1250" b="1" i="0">
+                <a:solidFill>
+                  <a:srgbClr val="1C2833"/>
                 </a:solidFill>
                 <a:latin typeface="Malgun Gothic"/>
               </a:rPr>
-              <a:t>UWB 의존 파손</a:t>
+              <a:t>경보 피로</a:t>
+            </a:r>
+            <a:r>
+              <a:rPr sz="1000" b="0" i="0">
+                <a:solidFill>
+                  <a:srgbClr val="8A949E"/>
+                </a:solidFill>
+                <a:latin typeface="Malgun Gothic"/>
+              </a:rPr>
+              <a:t>   관측 시 판단</a:t>
             </a:r>
           </a:p>
           <a:p>
             <a:pPr algn="l">
               <a:spcAft>
-                <a:spcPts val="300"/>
+                <a:spcPts val="200"/>
               </a:spcAft>
             </a:pPr>
             <a:r>
@@ -11150,8 +11207,7 @@
                 </a:solidFill>
                 <a:latin typeface="Malgun Gothic"/>
               </a:rPr>
-              <a:t>프리릴리스 UWB API 의 파괴 변경으로 경로가 깨지면
-UWB 를 끄고 BLE 단독으로 내린다</a:t>
+              <a:t>무음으로 두거나 앱을 꺼 둔 단말이 늘어남</a:t>
             </a:r>
           </a:p>
         </p:txBody>
@@ -11164,8 +11220,8 @@
         </p:nvSpPr>
         <p:spPr>
           <a:xfrm>
-            <a:off x="6537960" y="4919472"/>
-            <a:ext cx="5120640" cy="1005840"/>
+            <a:off x="6537960" y="3785616"/>
+            <a:ext cx="5120640" cy="713232"/>
           </a:xfrm>
           <a:prstGeom prst="rect">
             <a:avLst/>
@@ -11180,23 +11236,32 @@
           <a:p>
             <a:pPr algn="l">
               <a:spcAft>
-                <a:spcPts val="300"/>
+                <a:spcPts val="200"/>
               </a:spcAft>
             </a:pPr>
             <a:r>
-              <a:rPr sz="1300" b="1" i="0">
-                <a:solidFill>
-                  <a:srgbClr val="1C2833"/>
+              <a:rPr sz="1250" b="1" i="0">
+                <a:solidFill>
+                  <a:srgbClr val="C0392B"/>
                 </a:solidFill>
                 <a:latin typeface="Malgun Gothic"/>
               </a:rPr>
-              <a:t>현장 부담</a:t>
+              <a:t>회귀 재발</a:t>
+            </a:r>
+            <a:r>
+              <a:rPr sz="1000" b="0" i="0">
+                <a:solidFill>
+                  <a:srgbClr val="8A949E"/>
+                </a:solidFill>
+                <a:latin typeface="Malgun Gothic"/>
+              </a:rPr>
+              <a:t>   즉시 중단</a:t>
             </a:r>
           </a:p>
           <a:p>
             <a:pPr algn="l">
               <a:spcAft>
-                <a:spcPts val="300"/>
+                <a:spcPts val="200"/>
               </a:spcAft>
             </a:pPr>
             <a:r>
@@ -11206,21 +11271,313 @@
                 </a:solidFill>
                 <a:latin typeface="Malgun Gothic"/>
               </a:rPr>
-              <a:t>확인 항목은 단계당 1건으로 제한한다. 검증 사이클이
-현장 가용 시간에 묶여 있다</a:t>
-            </a:r>
-          </a:p>
-        </p:txBody>
-      </p:sp>
-      <p:sp>
-        <p:nvSpPr>
-          <p:cNvPr id="23" name="TextBox 22"/>
+              <a:t>이전에 고친 증상이 다시 관측됨</a:t>
+            </a:r>
+          </a:p>
+        </p:txBody>
+      </p:sp>
+      <p:sp>
+        <p:nvSpPr>
+          <p:cNvPr id="23" name="Rectangle 22"/>
+          <p:cNvSpPr/>
+          <p:nvPr/>
+        </p:nvSpPr>
+        <p:spPr>
+          <a:xfrm>
+            <a:off x="640080" y="4553712"/>
+            <a:ext cx="1280160" cy="301752"/>
+          </a:xfrm>
+          <a:prstGeom prst="rect">
+            <a:avLst/>
+          </a:prstGeom>
+          <a:solidFill>
+            <a:srgbClr val="8C8C8C"/>
+          </a:solidFill>
+          <a:ln>
+            <a:noFill/>
+          </a:ln>
+          <a:effectLst/>
+        </p:spPr>
+        <p:style>
+          <a:lnRef idx="1">
+            <a:schemeClr val="accent1"/>
+          </a:lnRef>
+          <a:fillRef idx="3">
+            <a:schemeClr val="accent1"/>
+          </a:fillRef>
+          <a:effectRef idx="2">
+            <a:schemeClr val="accent1"/>
+          </a:effectRef>
+          <a:fontRef idx="minor">
+            <a:schemeClr val="lt1"/>
+          </a:fontRef>
+        </p:style>
+        <p:txBody>
+          <a:bodyPr rtlCol="0" anchor="ctr" wrap="square" lIns="36576" rIns="36576" tIns="0" bIns="0"/>
+          <a:lstStyle/>
+          <a:p>
+            <a:pPr algn="ctr"/>
+            <a:r>
+              <a:rPr sz="1100" b="1" i="0">
+                <a:solidFill>
+                  <a:srgbClr val="FFFFFF"/>
+                </a:solidFill>
+                <a:latin typeface="Malgun Gothic"/>
+              </a:rPr>
+              <a:t>공통 조치</a:t>
+            </a:r>
+          </a:p>
+        </p:txBody>
+      </p:sp>
+      <p:sp>
+        <p:nvSpPr>
+          <p:cNvPr id="24" name="TextBox 23"/>
           <p:cNvSpPr txBox="1"/>
           <p:nvPr/>
         </p:nvSpPr>
         <p:spPr>
           <a:xfrm>
-            <a:off x="640080" y="6053328"/>
+            <a:off x="868680" y="4974336"/>
+            <a:ext cx="5394960" cy="301752"/>
+          </a:xfrm>
+          <a:prstGeom prst="rect">
+            <a:avLst/>
+          </a:prstGeom>
+          <a:noFill/>
+        </p:spPr>
+        <p:txBody>
+          <a:bodyPr wrap="square" lIns="36576" rIns="36576" tIns="0" bIns="0">
+            <a:spAutoFit/>
+          </a:bodyPr>
+          <a:lstStyle/>
+          <a:p>
+            <a:pPr algn="l">
+              <a:spcAft>
+                <a:spcPts val="400"/>
+              </a:spcAft>
+            </a:pPr>
+            <a:r>
+              <a:rPr sz="1150" b="1" i="0">
+                <a:solidFill>
+                  <a:srgbClr val="1C2833"/>
+                </a:solidFill>
+                <a:latin typeface="Malgun Gothic"/>
+              </a:rPr>
+              <a:t>즉시 롤백  —  </a:t>
+            </a:r>
+            <a:r>
+              <a:rPr sz="1150" b="0" i="0">
+                <a:solidFill>
+                  <a:srgbClr val="5D6D7E"/>
+                </a:solidFill>
+                <a:latin typeface="Malgun Gothic"/>
+              </a:rPr>
+              <a:t>직전 태그 APK 로 되돌린다 — 현장 재설치 없이 배포된다</a:t>
+            </a:r>
+          </a:p>
+        </p:txBody>
+      </p:sp>
+      <p:sp>
+        <p:nvSpPr>
+          <p:cNvPr id="25" name="TextBox 24"/>
+          <p:cNvSpPr txBox="1"/>
+          <p:nvPr/>
+        </p:nvSpPr>
+        <p:spPr>
+          <a:xfrm>
+            <a:off x="868680" y="5294376"/>
+            <a:ext cx="5394960" cy="301752"/>
+          </a:xfrm>
+          <a:prstGeom prst="rect">
+            <a:avLst/>
+          </a:prstGeom>
+          <a:noFill/>
+        </p:spPr>
+        <p:txBody>
+          <a:bodyPr wrap="square" lIns="36576" rIns="36576" tIns="0" bIns="0">
+            <a:spAutoFit/>
+          </a:bodyPr>
+          <a:lstStyle/>
+          <a:p>
+            <a:pPr algn="l">
+              <a:spcAft>
+                <a:spcPts val="400"/>
+              </a:spcAft>
+            </a:pPr>
+            <a:r>
+              <a:rPr sz="1150" b="1" i="0">
+                <a:solidFill>
+                  <a:srgbClr val="1C2833"/>
+                </a:solidFill>
+                <a:latin typeface="Malgun Gothic"/>
+              </a:rPr>
+              <a:t>선행 확인  —  </a:t>
+            </a:r>
+            <a:r>
+              <a:rPr sz="1150" b="0" i="0">
+                <a:solidFill>
+                  <a:srgbClr val="5D6D7E"/>
+                </a:solidFill>
+                <a:latin typeface="Malgun Gothic"/>
+              </a:rPr>
+              <a:t>전 단말 배포 전 1대에서 먼저 확인한다</a:t>
+            </a:r>
+          </a:p>
+        </p:txBody>
+      </p:sp>
+      <p:sp>
+        <p:nvSpPr>
+          <p:cNvPr id="26" name="TextBox 25"/>
+          <p:cNvSpPr txBox="1"/>
+          <p:nvPr/>
+        </p:nvSpPr>
+        <p:spPr>
+          <a:xfrm>
+            <a:off x="868680" y="5614416"/>
+            <a:ext cx="5394960" cy="301752"/>
+          </a:xfrm>
+          <a:prstGeom prst="rect">
+            <a:avLst/>
+          </a:prstGeom>
+          <a:noFill/>
+        </p:spPr>
+        <p:txBody>
+          <a:bodyPr wrap="square" lIns="36576" rIns="36576" tIns="0" bIns="0">
+            <a:spAutoFit/>
+          </a:bodyPr>
+          <a:lstStyle/>
+          <a:p>
+            <a:pPr algn="l">
+              <a:spcAft>
+                <a:spcPts val="400"/>
+              </a:spcAft>
+            </a:pPr>
+            <a:r>
+              <a:rPr sz="1150" b="1" i="0">
+                <a:solidFill>
+                  <a:srgbClr val="1C2833"/>
+                </a:solidFill>
+                <a:latin typeface="Malgun Gothic"/>
+              </a:rPr>
+              <a:t>빌드 차단  —  </a:t>
+            </a:r>
+            <a:r>
+              <a:rPr sz="1150" b="0" i="0">
+                <a:solidFill>
+                  <a:srgbClr val="5D6D7E"/>
+                </a:solidFill>
+                <a:latin typeface="Malgun Gothic"/>
+              </a:rPr>
+              <a:t>골든 테스트가 실패하면 릴리스가 자동 차단된다 (동작 중)</a:t>
+            </a:r>
+          </a:p>
+        </p:txBody>
+      </p:sp>
+      <p:sp>
+        <p:nvSpPr>
+          <p:cNvPr id="27" name="TextBox 26"/>
+          <p:cNvSpPr txBox="1"/>
+          <p:nvPr/>
+        </p:nvSpPr>
+        <p:spPr>
+          <a:xfrm>
+            <a:off x="6583680" y="4974336"/>
+            <a:ext cx="5394960" cy="301752"/>
+          </a:xfrm>
+          <a:prstGeom prst="rect">
+            <a:avLst/>
+          </a:prstGeom>
+          <a:noFill/>
+        </p:spPr>
+        <p:txBody>
+          <a:bodyPr wrap="square" lIns="36576" rIns="36576" tIns="0" bIns="0">
+            <a:spAutoFit/>
+          </a:bodyPr>
+          <a:lstStyle/>
+          <a:p>
+            <a:pPr algn="l">
+              <a:spcAft>
+                <a:spcPts val="400"/>
+              </a:spcAft>
+            </a:pPr>
+            <a:r>
+              <a:rPr sz="1150" b="1" i="0">
+                <a:solidFill>
+                  <a:srgbClr val="1C2833"/>
+                </a:solidFill>
+                <a:latin typeface="Malgun Gothic"/>
+              </a:rPr>
+              <a:t>원인 귀속  —  </a:t>
+            </a:r>
+            <a:r>
+              <a:rPr sz="1150" b="0" i="0">
+                <a:solidFill>
+                  <a:srgbClr val="5D6D7E"/>
+                </a:solidFill>
+                <a:latin typeface="Malgun Gothic"/>
+              </a:rPr>
+              <a:t>단계를 단독 배포하므로 어느 변경 탓인지 특정된다</a:t>
+            </a:r>
+          </a:p>
+        </p:txBody>
+      </p:sp>
+      <p:sp>
+        <p:nvSpPr>
+          <p:cNvPr id="28" name="TextBox 27"/>
+          <p:cNvSpPr txBox="1"/>
+          <p:nvPr/>
+        </p:nvSpPr>
+        <p:spPr>
+          <a:xfrm>
+            <a:off x="6583680" y="5294376"/>
+            <a:ext cx="5394960" cy="301752"/>
+          </a:xfrm>
+          <a:prstGeom prst="rect">
+            <a:avLst/>
+          </a:prstGeom>
+          <a:noFill/>
+        </p:spPr>
+        <p:txBody>
+          <a:bodyPr wrap="square" lIns="36576" rIns="36576" tIns="0" bIns="0">
+            <a:spAutoFit/>
+          </a:bodyPr>
+          <a:lstStyle/>
+          <a:p>
+            <a:pPr algn="l">
+              <a:spcAft>
+                <a:spcPts val="400"/>
+              </a:spcAft>
+            </a:pPr>
+            <a:r>
+              <a:rPr sz="1150" b="1" i="0">
+                <a:solidFill>
+                  <a:srgbClr val="1C2833"/>
+                </a:solidFill>
+                <a:latin typeface="Malgun Gothic"/>
+              </a:rPr>
+              <a:t>재개 조건  —  </a:t>
+            </a:r>
+            <a:r>
+              <a:rPr sz="1150" b="0" i="0">
+                <a:solidFill>
+                  <a:srgbClr val="5D6D7E"/>
+                </a:solidFill>
+                <a:latin typeface="Malgun Gothic"/>
+              </a:rPr>
+              <a:t>실패한 상황을 테스트로 고정한 뒤에만 다음 단계로</a:t>
+            </a:r>
+          </a:p>
+        </p:txBody>
+      </p:sp>
+      <p:sp>
+        <p:nvSpPr>
+          <p:cNvPr id="29" name="TextBox 28"/>
+          <p:cNvSpPr txBox="1"/>
+          <p:nvPr/>
+        </p:nvSpPr>
+        <p:spPr>
+          <a:xfrm>
+            <a:off x="640080" y="5998464"/>
             <a:ext cx="7680960" cy="365760"/>
           </a:xfrm>
           <a:prstGeom prst="rect">

--- a/docs/presentation/company_form/SafeAlert_보고_2026.08.pptx
+++ b/docs/presentation/company_form/SafeAlert_보고_2026.08.pptx
@@ -11,6 +11,8 @@
     <p:sldId id="256" r:id="rId6"/>
     <p:sldId id="342" r:id="rId7"/>
     <p:sldId id="394" r:id="rId9"/>
+    <p:sldId id="402" r:id="rId35"/>
+    <p:sldId id="401" r:id="rId34"/>
     <p:sldId id="400" r:id="rId33"/>
     <p:sldId id="399" r:id="rId32"/>
     <p:sldId id="398" r:id="rId31"/>
@@ -3586,6 +3588,2224 @@
 </p:sld>
 </file>
 
+<file path=ppt/slides/slide10.xml><?xml version="1.0" encoding="utf-8"?>
+<p:sld xmlns:a="http://schemas.openxmlformats.org/drawingml/2006/main" xmlns:r="http://schemas.openxmlformats.org/officeDocument/2006/relationships" xmlns:p="http://schemas.openxmlformats.org/presentationml/2006/main">
+  <p:cSld>
+    <p:spTree>
+      <p:nvGrpSpPr>
+        <p:cNvPr id="1" name="">
+          <a:extLst>
+            <a:ext uri="{FF2B5EF4-FFF2-40B4-BE49-F238E27FC236}">
+              <a16:creationId xmlns:a16="http://schemas.microsoft.com/office/drawing/2014/main" id="{E4EFD6F4-EBDD-9AC2-DC28-2DDF0C04A565}"/>
+            </a:ext>
+          </a:extLst>
+        </p:cNvPr>
+        <p:cNvGrpSpPr/>
+        <p:nvPr/>
+      </p:nvGrpSpPr>
+      <p:grpSpPr>
+        <a:xfrm>
+          <a:off x="0" y="0"/>
+          <a:ext cx="0" cy="0"/>
+          <a:chOff x="0" y="0"/>
+          <a:chExt cx="0" cy="0"/>
+        </a:xfrm>
+      </p:grpSpPr>
+      <p:sp>
+        <p:nvSpPr>
+          <p:cNvPr id="5" name="제목 1">
+            <a:extLst>
+              <a:ext uri="{FF2B5EF4-FFF2-40B4-BE49-F238E27FC236}">
+                <a16:creationId xmlns:a16="http://schemas.microsoft.com/office/drawing/2014/main" id="{3462F1EA-748D-175E-1C14-5E9984552716}"/>
+              </a:ext>
+            </a:extLst>
+          </p:cNvPr>
+          <p:cNvSpPr txBox="1">
+            <a:spLocks/>
+          </p:cNvSpPr>
+          <p:nvPr/>
+        </p:nvSpPr>
+        <p:spPr>
+          <a:xfrm>
+            <a:off x="636390" y="928122"/>
+            <a:ext cx="11342595" cy="3980770"/>
+          </a:xfrm>
+          <a:prstGeom prst="rect">
+            <a:avLst/>
+          </a:prstGeom>
+          <a:noFill/>
+        </p:spPr>
+        <p:txBody>
+          <a:bodyPr vert="horz" wrap="square" lIns="91440" tIns="45720" rIns="91440" bIns="45720" rtlCol="0" anchor="t">
+            <a:spAutoFit/>
+          </a:bodyPr>
+          <a:lstStyle>
+            <a:lvl1pPr marL="0" indent="0" algn="l" defTabSz="914400" rtl="0" eaLnBrk="1" latinLnBrk="1" hangingPunct="1">
+              <a:lnSpc>
+                <a:spcPct val="100000"/>
+              </a:lnSpc>
+              <a:spcBef>
+                <a:spcPct val="0"/>
+              </a:spcBef>
+              <a:buNone/>
+              <a:defRPr lang="en-US" sz="1600" b="1" kern="1200" dirty="0">
+                <a:solidFill>
+                  <a:srgbClr val="560000"/>
+                </a:solidFill>
+                <a:latin typeface="+mj-ea"/>
+                <a:ea typeface="+mj-ea"/>
+                <a:cs typeface="+mn-cs"/>
+              </a:defRPr>
+            </a:lvl1pPr>
+          </a:lstStyle>
+          <a:p>
+            <a:pPr>
+              <a:lnSpc>
+                <a:spcPct val="150000"/>
+              </a:lnSpc>
+            </a:pPr>
+            <a:endParaRPr lang="en-US" altLang="ko-KR" sz="1400" dirty="0">
+              <a:solidFill>
+                <a:schemeClr val="tx1"/>
+              </a:solidFill>
+              <a:latin typeface="+mn-ea"/>
+              <a:ea typeface="+mn-ea"/>
+            </a:endParaRPr>
+          </a:p>
+        </p:txBody>
+      </p:sp>
+      <p:sp>
+        <p:nvSpPr>
+          <p:cNvPr id="2" name="제목 1">
+            <a:extLst>
+              <a:ext uri="{FF2B5EF4-FFF2-40B4-BE49-F238E27FC236}">
+                <a16:creationId xmlns:a16="http://schemas.microsoft.com/office/drawing/2014/main" id="{54B5B938-7AFE-1302-EB19-024D633AA023}"/>
+              </a:ext>
+            </a:extLst>
+          </p:cNvPr>
+          <p:cNvSpPr>
+            <a:spLocks noGrp="1"/>
+          </p:cNvSpPr>
+          <p:nvPr>
+            <p:ph type="title"/>
+          </p:nvPr>
+        </p:nvSpPr>
+        <p:spPr>
+          <a:xfrm>
+            <a:off x="636391" y="595686"/>
+            <a:ext cx="11293263" cy="338554"/>
+          </a:xfrm>
+        </p:spPr>
+        <p:txBody>
+          <a:bodyPr/>
+          <a:lstStyle/>
+          <a:p>
+            <a:r>
+              <a:rPr lang="en-US" altLang="ko-KR" dirty="0">
+                <a:latin typeface="맑은 고딕" panose="020B0503020000020004" pitchFamily="50" charset="-127"/>
+                <a:ea typeface="맑은 고딕" panose="020B0503020000020004" pitchFamily="50" charset="-127"/>
+              </a:rPr>
+              <a:t>7. Andon — 이럴 때 멈춘다</a:t>
+            </a:r>
+            <a:endParaRPr lang="ko-KR" altLang="en-US" dirty="0"/>
+          </a:p>
+        </p:txBody>
+      </p:sp>
+      <p:sp>
+        <p:nvSpPr>
+          <p:cNvPr id="12" name="슬라이드 번호 개체 틀 11">
+            <a:extLst>
+              <a:ext uri="{FF2B5EF4-FFF2-40B4-BE49-F238E27FC236}">
+                <a16:creationId xmlns:a16="http://schemas.microsoft.com/office/drawing/2014/main" id="{B7184ABC-D9FC-E120-072A-5615A9569176}"/>
+              </a:ext>
+            </a:extLst>
+          </p:cNvPr>
+          <p:cNvSpPr>
+            <a:spLocks noGrp="1"/>
+          </p:cNvSpPr>
+          <p:nvPr>
+            <p:ph type="sldNum" sz="quarter" idx="12"/>
+          </p:nvPr>
+        </p:nvSpPr>
+        <p:spPr/>
+        <p:txBody>
+          <a:bodyPr/>
+          <a:lstStyle/>
+          <a:p>
+            <a:fld id="{A2CF8A37-2FCE-495B-9275-FE23C56C2D36}" type="slidenum">
+              <a:rPr lang="ko-KR" altLang="en-US" smtClean="0"/>
+              <a:pPr/>
+              <a:t>4</a:t>
+            </a:fld>
+            <a:endParaRPr lang="ko-KR" altLang="en-US" dirty="0"/>
+          </a:p>
+        </p:txBody>
+      </p:sp>
+      <p:sp>
+        <p:nvSpPr>
+          <p:cNvPr id="13" name="Rectangle 12"/>
+          <p:cNvSpPr/>
+          <p:nvPr/>
+        </p:nvSpPr>
+        <p:spPr>
+          <a:xfrm>
+            <a:off x="640080" y="1024128"/>
+            <a:ext cx="1508760" cy="301752"/>
+          </a:xfrm>
+          <a:prstGeom prst="rect">
+            <a:avLst/>
+          </a:prstGeom>
+          <a:solidFill>
+            <a:srgbClr val="8C8C8C"/>
+          </a:solidFill>
+          <a:ln>
+            <a:noFill/>
+          </a:ln>
+          <a:effectLst/>
+        </p:spPr>
+        <p:style>
+          <a:lnRef idx="1">
+            <a:schemeClr val="accent1"/>
+          </a:lnRef>
+          <a:fillRef idx="3">
+            <a:schemeClr val="accent1"/>
+          </a:fillRef>
+          <a:effectRef idx="2">
+            <a:schemeClr val="accent1"/>
+          </a:effectRef>
+          <a:fontRef idx="minor">
+            <a:schemeClr val="lt1"/>
+          </a:fontRef>
+        </p:style>
+        <p:txBody>
+          <a:bodyPr rtlCol="0" anchor="ctr" wrap="square" lIns="36576" rIns="36576" tIns="0" bIns="0"/>
+          <a:lstStyle/>
+          <a:p>
+            <a:pPr algn="ctr"/>
+            <a:r>
+              <a:rPr sz="1100" b="1" i="0">
+                <a:solidFill>
+                  <a:srgbClr val="FFFFFF"/>
+                </a:solidFill>
+                <a:latin typeface="Malgun Gothic"/>
+              </a:rPr>
+              <a:t>현장 운영 중</a:t>
+            </a:r>
+          </a:p>
+        </p:txBody>
+      </p:sp>
+      <p:sp>
+        <p:nvSpPr>
+          <p:cNvPr id="14" name="Rectangle 13"/>
+          <p:cNvSpPr/>
+          <p:nvPr/>
+        </p:nvSpPr>
+        <p:spPr>
+          <a:xfrm>
+            <a:off x="6355080" y="1024128"/>
+            <a:ext cx="1965960" cy="301752"/>
+          </a:xfrm>
+          <a:prstGeom prst="rect">
+            <a:avLst/>
+          </a:prstGeom>
+          <a:solidFill>
+            <a:srgbClr val="8C8C8C"/>
+          </a:solidFill>
+          <a:ln>
+            <a:noFill/>
+          </a:ln>
+          <a:effectLst/>
+        </p:spPr>
+        <p:style>
+          <a:lnRef idx="1">
+            <a:schemeClr val="accent1"/>
+          </a:lnRef>
+          <a:fillRef idx="3">
+            <a:schemeClr val="accent1"/>
+          </a:fillRef>
+          <a:effectRef idx="2">
+            <a:schemeClr val="accent1"/>
+          </a:effectRef>
+          <a:fontRef idx="minor">
+            <a:schemeClr val="lt1"/>
+          </a:fontRef>
+        </p:style>
+        <p:txBody>
+          <a:bodyPr rtlCol="0" anchor="ctr" wrap="square" lIns="36576" rIns="36576" tIns="0" bIns="0"/>
+          <a:lstStyle/>
+          <a:p>
+            <a:pPr algn="ctr"/>
+            <a:r>
+              <a:rPr sz="1100" b="1" i="0">
+                <a:solidFill>
+                  <a:srgbClr val="FFFFFF"/>
+                </a:solidFill>
+                <a:latin typeface="Malgun Gothic"/>
+              </a:rPr>
+              <a:t>업데이트 · 수정 중</a:t>
+            </a:r>
+          </a:p>
+        </p:txBody>
+      </p:sp>
+      <p:sp>
+        <p:nvSpPr>
+          <p:cNvPr id="15" name="TextBox 14"/>
+          <p:cNvSpPr txBox="1"/>
+          <p:nvPr/>
+        </p:nvSpPr>
+        <p:spPr>
+          <a:xfrm>
+            <a:off x="822960" y="1481328"/>
+            <a:ext cx="5029200" cy="713232"/>
+          </a:xfrm>
+          <a:prstGeom prst="rect">
+            <a:avLst/>
+          </a:prstGeom>
+          <a:noFill/>
+        </p:spPr>
+        <p:txBody>
+          <a:bodyPr wrap="square" lIns="36576" rIns="36576" tIns="0" bIns="0">
+            <a:spAutoFit/>
+          </a:bodyPr>
+          <a:lstStyle/>
+          <a:p>
+            <a:pPr algn="l">
+              <a:spcAft>
+                <a:spcPts val="200"/>
+              </a:spcAft>
+            </a:pPr>
+            <a:r>
+              <a:rPr sz="1250" b="1" i="0">
+                <a:solidFill>
+                  <a:srgbClr val="C0392B"/>
+                </a:solidFill>
+                <a:latin typeface="Malgun Gothic"/>
+              </a:rPr>
+              <a:t>미발령</a:t>
+            </a:r>
+            <a:r>
+              <a:rPr sz="1000" b="0" i="0">
+                <a:solidFill>
+                  <a:srgbClr val="8A949E"/>
+                </a:solidFill>
+                <a:latin typeface="Malgun Gothic"/>
+              </a:rPr>
+              <a:t>   즉시 중단</a:t>
+            </a:r>
+          </a:p>
+          <a:p>
+            <a:pPr algn="l">
+              <a:spcAft>
+                <a:spcPts val="200"/>
+              </a:spcAft>
+            </a:pPr>
+            <a:r>
+              <a:rPr sz="1150" b="0" i="0">
+                <a:solidFill>
+                  <a:srgbClr val="5D6D7E"/>
+                </a:solidFill>
+                <a:latin typeface="Malgun Gothic"/>
+              </a:rPr>
+              <a:t>접근했는데 경보가 뜨지 않은 사례 1건이라도</a:t>
+            </a:r>
+          </a:p>
+        </p:txBody>
+      </p:sp>
+      <p:sp>
+        <p:nvSpPr>
+          <p:cNvPr id="16" name="TextBox 15"/>
+          <p:cNvSpPr txBox="1"/>
+          <p:nvPr/>
+        </p:nvSpPr>
+        <p:spPr>
+          <a:xfrm>
+            <a:off x="6537960" y="1481328"/>
+            <a:ext cx="5120640" cy="713232"/>
+          </a:xfrm>
+          <a:prstGeom prst="rect">
+            <a:avLst/>
+          </a:prstGeom>
+          <a:noFill/>
+        </p:spPr>
+        <p:txBody>
+          <a:bodyPr wrap="square" lIns="36576" rIns="36576" tIns="0" bIns="0">
+            <a:spAutoFit/>
+          </a:bodyPr>
+          <a:lstStyle/>
+          <a:p>
+            <a:pPr algn="l">
+              <a:spcAft>
+                <a:spcPts val="200"/>
+              </a:spcAft>
+            </a:pPr>
+            <a:r>
+              <a:rPr sz="1250" b="1" i="0">
+                <a:solidFill>
+                  <a:srgbClr val="C0392B"/>
+                </a:solidFill>
+                <a:latin typeface="Malgun Gothic"/>
+              </a:rPr>
+              <a:t>버전 혼재</a:t>
+            </a:r>
+            <a:r>
+              <a:rPr sz="1000" b="0" i="0">
+                <a:solidFill>
+                  <a:srgbClr val="8A949E"/>
+                </a:solidFill>
+                <a:latin typeface="Malgun Gothic"/>
+              </a:rPr>
+              <a:t>   즉시 중단</a:t>
+            </a:r>
+          </a:p>
+          <a:p>
+            <a:pPr algn="l">
+              <a:spcAft>
+                <a:spcPts val="200"/>
+              </a:spcAft>
+            </a:pPr>
+            <a:r>
+              <a:rPr sz="1150" b="0" i="0">
+                <a:solidFill>
+                  <a:srgbClr val="5D6D7E"/>
+                </a:solidFill>
+                <a:latin typeface="Malgun Gothic"/>
+              </a:rPr>
+              <a:t>구버전 단말이 신버전을 감지하지 못함</a:t>
+            </a:r>
+          </a:p>
+        </p:txBody>
+      </p:sp>
+      <p:sp>
+        <p:nvSpPr>
+          <p:cNvPr id="17" name="TextBox 16"/>
+          <p:cNvSpPr txBox="1"/>
+          <p:nvPr/>
+        </p:nvSpPr>
+        <p:spPr>
+          <a:xfrm>
+            <a:off x="822960" y="2249424"/>
+            <a:ext cx="5029200" cy="713232"/>
+          </a:xfrm>
+          <a:prstGeom prst="rect">
+            <a:avLst/>
+          </a:prstGeom>
+          <a:noFill/>
+        </p:spPr>
+        <p:txBody>
+          <a:bodyPr wrap="square" lIns="36576" rIns="36576" tIns="0" bIns="0">
+            <a:spAutoFit/>
+          </a:bodyPr>
+          <a:lstStyle/>
+          <a:p>
+            <a:pPr algn="l">
+              <a:spcAft>
+                <a:spcPts val="200"/>
+              </a:spcAft>
+            </a:pPr>
+            <a:r>
+              <a:rPr sz="1250" b="1" i="0">
+                <a:solidFill>
+                  <a:srgbClr val="C0392B"/>
+                </a:solidFill>
+                <a:latin typeface="Malgun Gothic"/>
+              </a:rPr>
+              <a:t>오발령 지속</a:t>
+            </a:r>
+            <a:r>
+              <a:rPr sz="1000" b="0" i="0">
+                <a:solidFill>
+                  <a:srgbClr val="8A949E"/>
+                </a:solidFill>
+                <a:latin typeface="Malgun Gothic"/>
+              </a:rPr>
+              <a:t>   즉시 중단</a:t>
+            </a:r>
+          </a:p>
+          <a:p>
+            <a:pPr algn="l">
+              <a:spcAft>
+                <a:spcPts val="200"/>
+              </a:spcAft>
+            </a:pPr>
+            <a:r>
+              <a:rPr sz="1150" b="0" i="0">
+                <a:solidFill>
+                  <a:srgbClr val="5D6D7E"/>
+                </a:solidFill>
+                <a:latin typeface="Malgun Gothic"/>
+              </a:rPr>
+              <a:t>정지 중 계속 울림 · 이탈 후 다시 울림이 반복</a:t>
+            </a:r>
+          </a:p>
+        </p:txBody>
+      </p:sp>
+      <p:sp>
+        <p:nvSpPr>
+          <p:cNvPr id="18" name="TextBox 17"/>
+          <p:cNvSpPr txBox="1"/>
+          <p:nvPr/>
+        </p:nvSpPr>
+        <p:spPr>
+          <a:xfrm>
+            <a:off x="6537960" y="2249424"/>
+            <a:ext cx="5120640" cy="713232"/>
+          </a:xfrm>
+          <a:prstGeom prst="rect">
+            <a:avLst/>
+          </a:prstGeom>
+          <a:noFill/>
+        </p:spPr>
+        <p:txBody>
+          <a:bodyPr wrap="square" lIns="36576" rIns="36576" tIns="0" bIns="0">
+            <a:spAutoFit/>
+          </a:bodyPr>
+          <a:lstStyle/>
+          <a:p>
+            <a:pPr algn="l">
+              <a:spcAft>
+                <a:spcPts val="200"/>
+              </a:spcAft>
+            </a:pPr>
+            <a:r>
+              <a:rPr sz="1250" b="1" i="0">
+                <a:solidFill>
+                  <a:srgbClr val="1C2833"/>
+                </a:solidFill>
+                <a:latin typeface="Malgun Gothic"/>
+              </a:rPr>
+              <a:t>보호 공백</a:t>
+            </a:r>
+            <a:r>
+              <a:rPr sz="1000" b="0" i="0">
+                <a:solidFill>
+                  <a:srgbClr val="8A949E"/>
+                </a:solidFill>
+                <a:latin typeface="Malgun Gothic"/>
+              </a:rPr>
+              <a:t>   관측 시 판단</a:t>
+            </a:r>
+          </a:p>
+          <a:p>
+            <a:pPr algn="l">
+              <a:spcAft>
+                <a:spcPts val="200"/>
+              </a:spcAft>
+            </a:pPr>
+            <a:r>
+              <a:rPr sz="1150" b="0" i="0">
+                <a:solidFill>
+                  <a:srgbClr val="5D6D7E"/>
+                </a:solidFill>
+                <a:latin typeface="Malgun Gothic"/>
+              </a:rPr>
+              <a:t>작업 시간 중 일괄 업데이트 금지 — 교대 전환 때만</a:t>
+            </a:r>
+          </a:p>
+        </p:txBody>
+      </p:sp>
+      <p:sp>
+        <p:nvSpPr>
+          <p:cNvPr id="19" name="TextBox 18"/>
+          <p:cNvSpPr txBox="1"/>
+          <p:nvPr/>
+        </p:nvSpPr>
+        <p:spPr>
+          <a:xfrm>
+            <a:off x="822960" y="3017520"/>
+            <a:ext cx="5029200" cy="713232"/>
+          </a:xfrm>
+          <a:prstGeom prst="rect">
+            <a:avLst/>
+          </a:prstGeom>
+          <a:noFill/>
+        </p:spPr>
+        <p:txBody>
+          <a:bodyPr wrap="square" lIns="36576" rIns="36576" tIns="0" bIns="0">
+            <a:spAutoFit/>
+          </a:bodyPr>
+          <a:lstStyle/>
+          <a:p>
+            <a:pPr algn="l">
+              <a:spcAft>
+                <a:spcPts val="200"/>
+              </a:spcAft>
+            </a:pPr>
+            <a:r>
+              <a:rPr sz="1250" b="1" i="0">
+                <a:solidFill>
+                  <a:srgbClr val="1C2833"/>
+                </a:solidFill>
+                <a:latin typeface="Malgun Gothic"/>
+              </a:rPr>
+              <a:t>감지 중단</a:t>
+            </a:r>
+            <a:r>
+              <a:rPr sz="1000" b="0" i="0">
+                <a:solidFill>
+                  <a:srgbClr val="8A949E"/>
+                </a:solidFill>
+                <a:latin typeface="Malgun Gothic"/>
+              </a:rPr>
+              <a:t>   관측 시 판단</a:t>
+            </a:r>
+          </a:p>
+          <a:p>
+            <a:pPr algn="l">
+              <a:spcAft>
+                <a:spcPts val="200"/>
+              </a:spcAft>
+            </a:pPr>
+            <a:r>
+              <a:rPr sz="1150" b="0" i="0">
+                <a:solidFill>
+                  <a:srgbClr val="5D6D7E"/>
+                </a:solidFill>
+                <a:latin typeface="Malgun Gothic"/>
+              </a:rPr>
+              <a:t>상시 알림이 ‘이상’ 으로 바뀌거나 사라짐</a:t>
+            </a:r>
+          </a:p>
+        </p:txBody>
+      </p:sp>
+      <p:sp>
+        <p:nvSpPr>
+          <p:cNvPr id="20" name="TextBox 19"/>
+          <p:cNvSpPr txBox="1"/>
+          <p:nvPr/>
+        </p:nvSpPr>
+        <p:spPr>
+          <a:xfrm>
+            <a:off x="6537960" y="3017520"/>
+            <a:ext cx="5120640" cy="713232"/>
+          </a:xfrm>
+          <a:prstGeom prst="rect">
+            <a:avLst/>
+          </a:prstGeom>
+          <a:noFill/>
+        </p:spPr>
+        <p:txBody>
+          <a:bodyPr wrap="square" lIns="36576" rIns="36576" tIns="0" bIns="0">
+            <a:spAutoFit/>
+          </a:bodyPr>
+          <a:lstStyle/>
+          <a:p>
+            <a:pPr algn="l">
+              <a:spcAft>
+                <a:spcPts val="200"/>
+              </a:spcAft>
+            </a:pPr>
+            <a:r>
+              <a:rPr sz="1250" b="1" i="0">
+                <a:solidFill>
+                  <a:srgbClr val="1C2833"/>
+                </a:solidFill>
+                <a:latin typeface="Malgun Gothic"/>
+              </a:rPr>
+              <a:t>서비스 미기동</a:t>
+            </a:r>
+            <a:r>
+              <a:rPr sz="1000" b="0" i="0">
+                <a:solidFill>
+                  <a:srgbClr val="8A949E"/>
+                </a:solidFill>
+                <a:latin typeface="Malgun Gothic"/>
+              </a:rPr>
+              <a:t>   관측 시 판단</a:t>
+            </a:r>
+          </a:p>
+          <a:p>
+            <a:pPr algn="l">
+              <a:spcAft>
+                <a:spcPts val="200"/>
+              </a:spcAft>
+            </a:pPr>
+            <a:r>
+              <a:rPr sz="1150" b="0" i="0">
+                <a:solidFill>
+                  <a:srgbClr val="5D6D7E"/>
+                </a:solidFill>
+                <a:latin typeface="Malgun Gothic"/>
+              </a:rPr>
+              <a:t>업데이트 · 역할 전환 후 백그라운드 실행 미복구</a:t>
+            </a:r>
+          </a:p>
+        </p:txBody>
+      </p:sp>
+      <p:sp>
+        <p:nvSpPr>
+          <p:cNvPr id="21" name="TextBox 20"/>
+          <p:cNvSpPr txBox="1"/>
+          <p:nvPr/>
+        </p:nvSpPr>
+        <p:spPr>
+          <a:xfrm>
+            <a:off x="822960" y="3785616"/>
+            <a:ext cx="5029200" cy="713232"/>
+          </a:xfrm>
+          <a:prstGeom prst="rect">
+            <a:avLst/>
+          </a:prstGeom>
+          <a:noFill/>
+        </p:spPr>
+        <p:txBody>
+          <a:bodyPr wrap="square" lIns="36576" rIns="36576" tIns="0" bIns="0">
+            <a:spAutoFit/>
+          </a:bodyPr>
+          <a:lstStyle/>
+          <a:p>
+            <a:pPr algn="l">
+              <a:spcAft>
+                <a:spcPts val="200"/>
+              </a:spcAft>
+            </a:pPr>
+            <a:r>
+              <a:rPr sz="1250" b="1" i="0">
+                <a:solidFill>
+                  <a:srgbClr val="1C2833"/>
+                </a:solidFill>
+                <a:latin typeface="Malgun Gothic"/>
+              </a:rPr>
+              <a:t>경보 피로</a:t>
+            </a:r>
+            <a:r>
+              <a:rPr sz="1000" b="0" i="0">
+                <a:solidFill>
+                  <a:srgbClr val="8A949E"/>
+                </a:solidFill>
+                <a:latin typeface="Malgun Gothic"/>
+              </a:rPr>
+              <a:t>   관측 시 판단</a:t>
+            </a:r>
+          </a:p>
+          <a:p>
+            <a:pPr algn="l">
+              <a:spcAft>
+                <a:spcPts val="200"/>
+              </a:spcAft>
+            </a:pPr>
+            <a:r>
+              <a:rPr sz="1150" b="0" i="0">
+                <a:solidFill>
+                  <a:srgbClr val="5D6D7E"/>
+                </a:solidFill>
+                <a:latin typeface="Malgun Gothic"/>
+              </a:rPr>
+              <a:t>무음으로 두거나 앱을 꺼 둔 단말이 늘어남</a:t>
+            </a:r>
+          </a:p>
+        </p:txBody>
+      </p:sp>
+      <p:sp>
+        <p:nvSpPr>
+          <p:cNvPr id="22" name="TextBox 21"/>
+          <p:cNvSpPr txBox="1"/>
+          <p:nvPr/>
+        </p:nvSpPr>
+        <p:spPr>
+          <a:xfrm>
+            <a:off x="6537960" y="3785616"/>
+            <a:ext cx="5120640" cy="713232"/>
+          </a:xfrm>
+          <a:prstGeom prst="rect">
+            <a:avLst/>
+          </a:prstGeom>
+          <a:noFill/>
+        </p:spPr>
+        <p:txBody>
+          <a:bodyPr wrap="square" lIns="36576" rIns="36576" tIns="0" bIns="0">
+            <a:spAutoFit/>
+          </a:bodyPr>
+          <a:lstStyle/>
+          <a:p>
+            <a:pPr algn="l">
+              <a:spcAft>
+                <a:spcPts val="200"/>
+              </a:spcAft>
+            </a:pPr>
+            <a:r>
+              <a:rPr sz="1250" b="1" i="0">
+                <a:solidFill>
+                  <a:srgbClr val="C0392B"/>
+                </a:solidFill>
+                <a:latin typeface="Malgun Gothic"/>
+              </a:rPr>
+              <a:t>회귀 재발</a:t>
+            </a:r>
+            <a:r>
+              <a:rPr sz="1000" b="0" i="0">
+                <a:solidFill>
+                  <a:srgbClr val="8A949E"/>
+                </a:solidFill>
+                <a:latin typeface="Malgun Gothic"/>
+              </a:rPr>
+              <a:t>   즉시 중단</a:t>
+            </a:r>
+          </a:p>
+          <a:p>
+            <a:pPr algn="l">
+              <a:spcAft>
+                <a:spcPts val="200"/>
+              </a:spcAft>
+            </a:pPr>
+            <a:r>
+              <a:rPr sz="1150" b="0" i="0">
+                <a:solidFill>
+                  <a:srgbClr val="5D6D7E"/>
+                </a:solidFill>
+                <a:latin typeface="Malgun Gothic"/>
+              </a:rPr>
+              <a:t>이전에 고친 증상이 다시 관측됨</a:t>
+            </a:r>
+          </a:p>
+        </p:txBody>
+      </p:sp>
+      <p:sp>
+        <p:nvSpPr>
+          <p:cNvPr id="23" name="Rectangle 22"/>
+          <p:cNvSpPr/>
+          <p:nvPr/>
+        </p:nvSpPr>
+        <p:spPr>
+          <a:xfrm>
+            <a:off x="640080" y="4553712"/>
+            <a:ext cx="1280160" cy="301752"/>
+          </a:xfrm>
+          <a:prstGeom prst="rect">
+            <a:avLst/>
+          </a:prstGeom>
+          <a:solidFill>
+            <a:srgbClr val="8C8C8C"/>
+          </a:solidFill>
+          <a:ln>
+            <a:noFill/>
+          </a:ln>
+          <a:effectLst/>
+        </p:spPr>
+        <p:style>
+          <a:lnRef idx="1">
+            <a:schemeClr val="accent1"/>
+          </a:lnRef>
+          <a:fillRef idx="3">
+            <a:schemeClr val="accent1"/>
+          </a:fillRef>
+          <a:effectRef idx="2">
+            <a:schemeClr val="accent1"/>
+          </a:effectRef>
+          <a:fontRef idx="minor">
+            <a:schemeClr val="lt1"/>
+          </a:fontRef>
+        </p:style>
+        <p:txBody>
+          <a:bodyPr rtlCol="0" anchor="ctr" wrap="square" lIns="36576" rIns="36576" tIns="0" bIns="0"/>
+          <a:lstStyle/>
+          <a:p>
+            <a:pPr algn="ctr"/>
+            <a:r>
+              <a:rPr sz="1100" b="1" i="0">
+                <a:solidFill>
+                  <a:srgbClr val="FFFFFF"/>
+                </a:solidFill>
+                <a:latin typeface="Malgun Gothic"/>
+              </a:rPr>
+              <a:t>공통 조치</a:t>
+            </a:r>
+          </a:p>
+        </p:txBody>
+      </p:sp>
+      <p:sp>
+        <p:nvSpPr>
+          <p:cNvPr id="24" name="TextBox 23"/>
+          <p:cNvSpPr txBox="1"/>
+          <p:nvPr/>
+        </p:nvSpPr>
+        <p:spPr>
+          <a:xfrm>
+            <a:off x="868680" y="4974336"/>
+            <a:ext cx="5394960" cy="301752"/>
+          </a:xfrm>
+          <a:prstGeom prst="rect">
+            <a:avLst/>
+          </a:prstGeom>
+          <a:noFill/>
+        </p:spPr>
+        <p:txBody>
+          <a:bodyPr wrap="square" lIns="36576" rIns="36576" tIns="0" bIns="0">
+            <a:spAutoFit/>
+          </a:bodyPr>
+          <a:lstStyle/>
+          <a:p>
+            <a:pPr algn="l">
+              <a:spcAft>
+                <a:spcPts val="400"/>
+              </a:spcAft>
+            </a:pPr>
+            <a:r>
+              <a:rPr sz="1150" b="1" i="0">
+                <a:solidFill>
+                  <a:srgbClr val="1C2833"/>
+                </a:solidFill>
+                <a:latin typeface="Malgun Gothic"/>
+              </a:rPr>
+              <a:t>즉시 롤백  —  </a:t>
+            </a:r>
+            <a:r>
+              <a:rPr sz="1150" b="0" i="0">
+                <a:solidFill>
+                  <a:srgbClr val="5D6D7E"/>
+                </a:solidFill>
+                <a:latin typeface="Malgun Gothic"/>
+              </a:rPr>
+              <a:t>직전 태그 APK 로 되돌린다 — 현장 재설치 없이 배포된다</a:t>
+            </a:r>
+          </a:p>
+        </p:txBody>
+      </p:sp>
+      <p:sp>
+        <p:nvSpPr>
+          <p:cNvPr id="25" name="TextBox 24"/>
+          <p:cNvSpPr txBox="1"/>
+          <p:nvPr/>
+        </p:nvSpPr>
+        <p:spPr>
+          <a:xfrm>
+            <a:off x="868680" y="5294376"/>
+            <a:ext cx="5394960" cy="301752"/>
+          </a:xfrm>
+          <a:prstGeom prst="rect">
+            <a:avLst/>
+          </a:prstGeom>
+          <a:noFill/>
+        </p:spPr>
+        <p:txBody>
+          <a:bodyPr wrap="square" lIns="36576" rIns="36576" tIns="0" bIns="0">
+            <a:spAutoFit/>
+          </a:bodyPr>
+          <a:lstStyle/>
+          <a:p>
+            <a:pPr algn="l">
+              <a:spcAft>
+                <a:spcPts val="400"/>
+              </a:spcAft>
+            </a:pPr>
+            <a:r>
+              <a:rPr sz="1150" b="1" i="0">
+                <a:solidFill>
+                  <a:srgbClr val="1C2833"/>
+                </a:solidFill>
+                <a:latin typeface="Malgun Gothic"/>
+              </a:rPr>
+              <a:t>선행 확인  —  </a:t>
+            </a:r>
+            <a:r>
+              <a:rPr sz="1150" b="0" i="0">
+                <a:solidFill>
+                  <a:srgbClr val="5D6D7E"/>
+                </a:solidFill>
+                <a:latin typeface="Malgun Gothic"/>
+              </a:rPr>
+              <a:t>전 단말 배포 전 1대에서 먼저 확인한다</a:t>
+            </a:r>
+          </a:p>
+        </p:txBody>
+      </p:sp>
+      <p:sp>
+        <p:nvSpPr>
+          <p:cNvPr id="26" name="TextBox 25"/>
+          <p:cNvSpPr txBox="1"/>
+          <p:nvPr/>
+        </p:nvSpPr>
+        <p:spPr>
+          <a:xfrm>
+            <a:off x="868680" y="5614416"/>
+            <a:ext cx="5394960" cy="301752"/>
+          </a:xfrm>
+          <a:prstGeom prst="rect">
+            <a:avLst/>
+          </a:prstGeom>
+          <a:noFill/>
+        </p:spPr>
+        <p:txBody>
+          <a:bodyPr wrap="square" lIns="36576" rIns="36576" tIns="0" bIns="0">
+            <a:spAutoFit/>
+          </a:bodyPr>
+          <a:lstStyle/>
+          <a:p>
+            <a:pPr algn="l">
+              <a:spcAft>
+                <a:spcPts val="400"/>
+              </a:spcAft>
+            </a:pPr>
+            <a:r>
+              <a:rPr sz="1150" b="1" i="0">
+                <a:solidFill>
+                  <a:srgbClr val="1C2833"/>
+                </a:solidFill>
+                <a:latin typeface="Malgun Gothic"/>
+              </a:rPr>
+              <a:t>빌드 차단  —  </a:t>
+            </a:r>
+            <a:r>
+              <a:rPr sz="1150" b="0" i="0">
+                <a:solidFill>
+                  <a:srgbClr val="5D6D7E"/>
+                </a:solidFill>
+                <a:latin typeface="Malgun Gothic"/>
+              </a:rPr>
+              <a:t>골든 테스트가 실패하면 릴리스가 자동 차단된다 (동작 중)</a:t>
+            </a:r>
+          </a:p>
+        </p:txBody>
+      </p:sp>
+      <p:sp>
+        <p:nvSpPr>
+          <p:cNvPr id="27" name="TextBox 26"/>
+          <p:cNvSpPr txBox="1"/>
+          <p:nvPr/>
+        </p:nvSpPr>
+        <p:spPr>
+          <a:xfrm>
+            <a:off x="6583680" y="4974336"/>
+            <a:ext cx="5394960" cy="301752"/>
+          </a:xfrm>
+          <a:prstGeom prst="rect">
+            <a:avLst/>
+          </a:prstGeom>
+          <a:noFill/>
+        </p:spPr>
+        <p:txBody>
+          <a:bodyPr wrap="square" lIns="36576" rIns="36576" tIns="0" bIns="0">
+            <a:spAutoFit/>
+          </a:bodyPr>
+          <a:lstStyle/>
+          <a:p>
+            <a:pPr algn="l">
+              <a:spcAft>
+                <a:spcPts val="400"/>
+              </a:spcAft>
+            </a:pPr>
+            <a:r>
+              <a:rPr sz="1150" b="1" i="0">
+                <a:solidFill>
+                  <a:srgbClr val="1C2833"/>
+                </a:solidFill>
+                <a:latin typeface="Malgun Gothic"/>
+              </a:rPr>
+              <a:t>원인 귀속  —  </a:t>
+            </a:r>
+            <a:r>
+              <a:rPr sz="1150" b="0" i="0">
+                <a:solidFill>
+                  <a:srgbClr val="5D6D7E"/>
+                </a:solidFill>
+                <a:latin typeface="Malgun Gothic"/>
+              </a:rPr>
+              <a:t>단계를 단독 배포하므로 어느 변경 탓인지 특정된다</a:t>
+            </a:r>
+          </a:p>
+        </p:txBody>
+      </p:sp>
+      <p:sp>
+        <p:nvSpPr>
+          <p:cNvPr id="28" name="TextBox 27"/>
+          <p:cNvSpPr txBox="1"/>
+          <p:nvPr/>
+        </p:nvSpPr>
+        <p:spPr>
+          <a:xfrm>
+            <a:off x="6583680" y="5294376"/>
+            <a:ext cx="5394960" cy="301752"/>
+          </a:xfrm>
+          <a:prstGeom prst="rect">
+            <a:avLst/>
+          </a:prstGeom>
+          <a:noFill/>
+        </p:spPr>
+        <p:txBody>
+          <a:bodyPr wrap="square" lIns="36576" rIns="36576" tIns="0" bIns="0">
+            <a:spAutoFit/>
+          </a:bodyPr>
+          <a:lstStyle/>
+          <a:p>
+            <a:pPr algn="l">
+              <a:spcAft>
+                <a:spcPts val="400"/>
+              </a:spcAft>
+            </a:pPr>
+            <a:r>
+              <a:rPr sz="1150" b="1" i="0">
+                <a:solidFill>
+                  <a:srgbClr val="1C2833"/>
+                </a:solidFill>
+                <a:latin typeface="Malgun Gothic"/>
+              </a:rPr>
+              <a:t>재개 조건  —  </a:t>
+            </a:r>
+            <a:r>
+              <a:rPr sz="1150" b="0" i="0">
+                <a:solidFill>
+                  <a:srgbClr val="5D6D7E"/>
+                </a:solidFill>
+                <a:latin typeface="Malgun Gothic"/>
+              </a:rPr>
+              <a:t>실패한 상황을 테스트로 고정한 뒤에만 다음 단계로</a:t>
+            </a:r>
+          </a:p>
+        </p:txBody>
+      </p:sp>
+      <p:sp>
+        <p:nvSpPr>
+          <p:cNvPr id="29" name="TextBox 28"/>
+          <p:cNvSpPr txBox="1"/>
+          <p:nvPr/>
+        </p:nvSpPr>
+        <p:spPr>
+          <a:xfrm>
+            <a:off x="640080" y="5998464"/>
+            <a:ext cx="7680960" cy="365760"/>
+          </a:xfrm>
+          <a:prstGeom prst="rect">
+            <a:avLst/>
+          </a:prstGeom>
+          <a:noFill/>
+        </p:spPr>
+        <p:txBody>
+          <a:bodyPr wrap="square" lIns="36576" rIns="36576" tIns="0" bIns="0">
+            <a:spAutoFit/>
+          </a:bodyPr>
+          <a:lstStyle/>
+          <a:p>
+            <a:pPr algn="ctr"/>
+            <a:r>
+              <a:rPr sz="1150" b="0" i="1">
+                <a:solidFill>
+                  <a:srgbClr val="5D6D7E"/>
+                </a:solidFill>
+                <a:latin typeface="Malgun Gothic"/>
+              </a:rPr>
+              <a:t>“멈출 기준을 먼저 정해 두는 것이, 멈추지 않고 밀어붙이는 것보다 빠릅니다.”</a:t>
+            </a:r>
+          </a:p>
+        </p:txBody>
+      </p:sp>
+    </p:spTree>
+    <p:extLst>
+      <p:ext uri="{BB962C8B-B14F-4D97-AF65-F5344CB8AC3E}">
+        <p14:creationId xmlns:p14="http://schemas.microsoft.com/office/powerpoint/2010/main" val="3987384774"/>
+      </p:ext>
+    </p:extLst>
+  </p:cSld>
+  <p:clrMapOvr>
+    <a:masterClrMapping/>
+  </p:clrMapOvr>
+</p:sld>
+</file>
+
+<file path=ppt/slides/slide11.xml><?xml version="1.0" encoding="utf-8"?>
+<p:sld xmlns:a="http://schemas.openxmlformats.org/drawingml/2006/main" xmlns:r="http://schemas.openxmlformats.org/officeDocument/2006/relationships" xmlns:p="http://schemas.openxmlformats.org/presentationml/2006/main">
+  <p:cSld>
+    <p:spTree>
+      <p:nvGrpSpPr>
+        <p:cNvPr id="1" name="">
+          <a:extLst>
+            <a:ext uri="{FF2B5EF4-FFF2-40B4-BE49-F238E27FC236}">
+              <a16:creationId xmlns:a16="http://schemas.microsoft.com/office/drawing/2014/main" id="{E4EFD6F4-EBDD-9AC2-DC28-2DDF0C04A565}"/>
+            </a:ext>
+          </a:extLst>
+        </p:cNvPr>
+        <p:cNvGrpSpPr/>
+        <p:nvPr/>
+      </p:nvGrpSpPr>
+      <p:grpSpPr>
+        <a:xfrm>
+          <a:off x="0" y="0"/>
+          <a:ext cx="0" cy="0"/>
+          <a:chOff x="0" y="0"/>
+          <a:chExt cx="0" cy="0"/>
+        </a:xfrm>
+      </p:grpSpPr>
+      <p:sp>
+        <p:nvSpPr>
+          <p:cNvPr id="5" name="제목 1">
+            <a:extLst>
+              <a:ext uri="{FF2B5EF4-FFF2-40B4-BE49-F238E27FC236}">
+                <a16:creationId xmlns:a16="http://schemas.microsoft.com/office/drawing/2014/main" id="{3462F1EA-748D-175E-1C14-5E9984552716}"/>
+              </a:ext>
+            </a:extLst>
+          </p:cNvPr>
+          <p:cNvSpPr txBox="1">
+            <a:spLocks/>
+          </p:cNvSpPr>
+          <p:nvPr/>
+        </p:nvSpPr>
+        <p:spPr>
+          <a:xfrm>
+            <a:off x="636390" y="928122"/>
+            <a:ext cx="11342595" cy="3980770"/>
+          </a:xfrm>
+          <a:prstGeom prst="rect">
+            <a:avLst/>
+          </a:prstGeom>
+          <a:noFill/>
+        </p:spPr>
+        <p:txBody>
+          <a:bodyPr vert="horz" wrap="square" lIns="91440" tIns="45720" rIns="91440" bIns="45720" rtlCol="0" anchor="t">
+            <a:spAutoFit/>
+          </a:bodyPr>
+          <a:lstStyle>
+            <a:lvl1pPr marL="0" indent="0" algn="l" defTabSz="914400" rtl="0" eaLnBrk="1" latinLnBrk="1" hangingPunct="1">
+              <a:lnSpc>
+                <a:spcPct val="100000"/>
+              </a:lnSpc>
+              <a:spcBef>
+                <a:spcPct val="0"/>
+              </a:spcBef>
+              <a:buNone/>
+              <a:defRPr lang="en-US" sz="1600" b="1" kern="1200" dirty="0">
+                <a:solidFill>
+                  <a:srgbClr val="560000"/>
+                </a:solidFill>
+                <a:latin typeface="+mj-ea"/>
+                <a:ea typeface="+mj-ea"/>
+                <a:cs typeface="+mn-cs"/>
+              </a:defRPr>
+            </a:lvl1pPr>
+          </a:lstStyle>
+          <a:p>
+            <a:pPr>
+              <a:lnSpc>
+                <a:spcPct val="150000"/>
+              </a:lnSpc>
+            </a:pPr>
+            <a:endParaRPr lang="en-US" altLang="ko-KR" sz="1400" dirty="0">
+              <a:solidFill>
+                <a:schemeClr val="tx1"/>
+              </a:solidFill>
+              <a:latin typeface="+mn-ea"/>
+              <a:ea typeface="+mn-ea"/>
+            </a:endParaRPr>
+          </a:p>
+        </p:txBody>
+      </p:sp>
+      <p:sp>
+        <p:nvSpPr>
+          <p:cNvPr id="2" name="제목 1">
+            <a:extLst>
+              <a:ext uri="{FF2B5EF4-FFF2-40B4-BE49-F238E27FC236}">
+                <a16:creationId xmlns:a16="http://schemas.microsoft.com/office/drawing/2014/main" id="{54B5B938-7AFE-1302-EB19-024D633AA023}"/>
+              </a:ext>
+            </a:extLst>
+          </p:cNvPr>
+          <p:cNvSpPr>
+            <a:spLocks noGrp="1"/>
+          </p:cNvSpPr>
+          <p:nvPr>
+            <p:ph type="title"/>
+          </p:nvPr>
+        </p:nvSpPr>
+        <p:spPr>
+          <a:xfrm>
+            <a:off x="636391" y="595686"/>
+            <a:ext cx="11293263" cy="338554"/>
+          </a:xfrm>
+        </p:spPr>
+        <p:txBody>
+          <a:bodyPr/>
+          <a:lstStyle/>
+          <a:p>
+            <a:r>
+              <a:rPr lang="en-US" altLang="ko-KR" dirty="0">
+                <a:latin typeface="맑은 고딕" panose="020B0503020000020004" pitchFamily="50" charset="-127"/>
+                <a:ea typeface="맑은 고딕" panose="020B0503020000020004" pitchFamily="50" charset="-127"/>
+              </a:rPr>
+              <a:t>8. 요청 사항</a:t>
+            </a:r>
+            <a:endParaRPr lang="ko-KR" altLang="en-US" dirty="0"/>
+          </a:p>
+        </p:txBody>
+      </p:sp>
+      <p:sp>
+        <p:nvSpPr>
+          <p:cNvPr id="12" name="슬라이드 번호 개체 틀 11">
+            <a:extLst>
+              <a:ext uri="{FF2B5EF4-FFF2-40B4-BE49-F238E27FC236}">
+                <a16:creationId xmlns:a16="http://schemas.microsoft.com/office/drawing/2014/main" id="{B7184ABC-D9FC-E120-072A-5615A9569176}"/>
+              </a:ext>
+            </a:extLst>
+          </p:cNvPr>
+          <p:cNvSpPr>
+            <a:spLocks noGrp="1"/>
+          </p:cNvSpPr>
+          <p:nvPr>
+            <p:ph type="sldNum" sz="quarter" idx="12"/>
+          </p:nvPr>
+        </p:nvSpPr>
+        <p:spPr/>
+        <p:txBody>
+          <a:bodyPr/>
+          <a:lstStyle/>
+          <a:p>
+            <a:fld id="{A2CF8A37-2FCE-495B-9275-FE23C56C2D36}" type="slidenum">
+              <a:rPr lang="ko-KR" altLang="en-US" smtClean="0"/>
+              <a:pPr/>
+              <a:t>4</a:t>
+            </a:fld>
+            <a:endParaRPr lang="ko-KR" altLang="en-US" dirty="0"/>
+          </a:p>
+        </p:txBody>
+      </p:sp>
+      <p:sp>
+        <p:nvSpPr>
+          <p:cNvPr id="13" name="Rectangle 12"/>
+          <p:cNvSpPr/>
+          <p:nvPr/>
+        </p:nvSpPr>
+        <p:spPr>
+          <a:xfrm>
+            <a:off x="640080" y="1024128"/>
+            <a:ext cx="1005840" cy="301752"/>
+          </a:xfrm>
+          <a:prstGeom prst="rect">
+            <a:avLst/>
+          </a:prstGeom>
+          <a:solidFill>
+            <a:srgbClr val="8C8C8C"/>
+          </a:solidFill>
+          <a:ln>
+            <a:noFill/>
+          </a:ln>
+          <a:effectLst/>
+        </p:spPr>
+        <p:style>
+          <a:lnRef idx="1">
+            <a:schemeClr val="accent1"/>
+          </a:lnRef>
+          <a:fillRef idx="3">
+            <a:schemeClr val="accent1"/>
+          </a:fillRef>
+          <a:effectRef idx="2">
+            <a:schemeClr val="accent1"/>
+          </a:effectRef>
+          <a:fontRef idx="minor">
+            <a:schemeClr val="lt1"/>
+          </a:fontRef>
+        </p:style>
+        <p:txBody>
+          <a:bodyPr rtlCol="0" anchor="ctr" wrap="square" lIns="36576" rIns="36576" tIns="0" bIns="0"/>
+          <a:lstStyle/>
+          <a:p>
+            <a:pPr algn="ctr"/>
+            <a:r>
+              <a:rPr sz="1100" b="1" i="0">
+                <a:solidFill>
+                  <a:srgbClr val="FFFFFF"/>
+                </a:solidFill>
+                <a:latin typeface="Malgun Gothic"/>
+              </a:rPr>
+              <a:t>요청</a:t>
+            </a:r>
+          </a:p>
+        </p:txBody>
+      </p:sp>
+      <p:sp>
+        <p:nvSpPr>
+          <p:cNvPr id="14" name="TextBox 13"/>
+          <p:cNvSpPr txBox="1"/>
+          <p:nvPr/>
+        </p:nvSpPr>
+        <p:spPr>
+          <a:xfrm>
+            <a:off x="1828800" y="1051560"/>
+            <a:ext cx="9875520" cy="329184"/>
+          </a:xfrm>
+          <a:prstGeom prst="rect">
+            <a:avLst/>
+          </a:prstGeom>
+          <a:noFill/>
+        </p:spPr>
+        <p:txBody>
+          <a:bodyPr wrap="square" lIns="36576" rIns="36576" tIns="0" bIns="0">
+            <a:spAutoFit/>
+          </a:bodyPr>
+          <a:lstStyle/>
+          <a:p>
+            <a:pPr algn="l">
+              <a:spcAft>
+                <a:spcPts val="400"/>
+              </a:spcAft>
+            </a:pPr>
+            <a:r>
+              <a:rPr sz="1400" b="1" i="0">
+                <a:solidFill>
+                  <a:srgbClr val="1C2833"/>
+                </a:solidFill>
+                <a:latin typeface="Malgun Gothic"/>
+              </a:rPr>
+              <a:t>SafeAlert 를 정식 과제로 등록하고, 유지 · 검증에 필요한 리소스를 배정해 주십시오.</a:t>
+            </a:r>
+          </a:p>
+        </p:txBody>
+      </p:sp>
+      <p:graphicFrame>
+        <p:nvGraphicFramePr>
+          <p:cNvPr id="15" name="Table 14"/>
+          <p:cNvGraphicFramePr>
+            <a:graphicFrameLocks noGrp="1"/>
+          </p:cNvGraphicFramePr>
+          <p:nvPr/>
+        </p:nvGraphicFramePr>
+        <p:xfrm>
+          <a:off x="658368" y="1572768"/>
+          <a:ext cx="11064239" cy="2523744"/>
+        </p:xfrm>
+        <a:graphic>
+          <a:graphicData uri="http://schemas.openxmlformats.org/drawingml/2006/table">
+            <a:tbl>
+              <a:tblPr firstRow="1" bandRow="0">
+                <a:tableStyleId>{5C22544A-7EE6-4342-B048-85BDC9FD1C3A}</a:tableStyleId>
+              </a:tblPr>
+              <a:tblGrid>
+                <a:gridCol w="2103120"/>
+                <a:gridCol w="5212080"/>
+                <a:gridCol w="3749039"/>
+              </a:tblGrid>
+              <a:tr h="329184">
+                <a:tc>
+                  <a:txBody>
+                    <a:bodyPr/>
+                    <a:lstStyle/>
+                    <a:p>
+                      <a:pPr algn="ctr"/>
+                      <a:r>
+                        <a:rPr sz="1100" b="1" i="0">
+                          <a:solidFill>
+                            <a:srgbClr val="FFFFFF"/>
+                          </a:solidFill>
+                          <a:latin typeface="Malgun Gothic"/>
+                        </a:rPr>
+                        <a:t>무엇을</a:t>
+                      </a:r>
+                    </a:p>
+                  </a:txBody>
+                  <a:tcPr marL="73152" marR="73152" marT="0" marB="0" anchor="ctr">
+                    <a:lnB w="9525" cap="flat" cmpd="sng" algn="ctr">
+                      <a:solidFill>
+                        <a:srgbClr val="333B45"/>
+                      </a:solidFill>
+                    </a:lnB>
+                    <a:lnT w="9525" cap="flat" cmpd="sng" algn="ctr">
+                      <a:solidFill>
+                        <a:srgbClr val="333B45"/>
+                      </a:solidFill>
+                    </a:lnT>
+                    <a:lnR w="9525" cap="flat" cmpd="sng" algn="ctr">
+                      <a:solidFill>
+                        <a:srgbClr val="333B45"/>
+                      </a:solidFill>
+                    </a:lnR>
+                    <a:lnL w="9525" cap="flat" cmpd="sng" algn="ctr">
+                      <a:solidFill>
+                        <a:srgbClr val="333B45"/>
+                      </a:solidFill>
+                    </a:lnL>
+                    <a:solidFill>
+                      <a:srgbClr val="333B45"/>
+                    </a:solidFill>
+                  </a:tcPr>
+                </a:tc>
+                <a:tc>
+                  <a:txBody>
+                    <a:bodyPr/>
+                    <a:lstStyle/>
+                    <a:p>
+                      <a:pPr algn="ctr"/>
+                      <a:r>
+                        <a:rPr sz="1100" b="1" i="0">
+                          <a:solidFill>
+                            <a:srgbClr val="FFFFFF"/>
+                          </a:solidFill>
+                          <a:latin typeface="Malgun Gothic"/>
+                        </a:rPr>
+                        <a:t>왜 필요한가</a:t>
+                      </a:r>
+                    </a:p>
+                  </a:txBody>
+                  <a:tcPr marL="73152" marR="73152" marT="0" marB="0" anchor="ctr">
+                    <a:lnB w="9525" cap="flat" cmpd="sng" algn="ctr">
+                      <a:solidFill>
+                        <a:srgbClr val="333B45"/>
+                      </a:solidFill>
+                    </a:lnB>
+                    <a:lnT w="9525" cap="flat" cmpd="sng" algn="ctr">
+                      <a:solidFill>
+                        <a:srgbClr val="333B45"/>
+                      </a:solidFill>
+                    </a:lnT>
+                    <a:lnR w="9525" cap="flat" cmpd="sng" algn="ctr">
+                      <a:solidFill>
+                        <a:srgbClr val="333B45"/>
+                      </a:solidFill>
+                    </a:lnR>
+                    <a:lnL w="9525" cap="flat" cmpd="sng" algn="ctr">
+                      <a:solidFill>
+                        <a:srgbClr val="333B45"/>
+                      </a:solidFill>
+                    </a:lnL>
+                    <a:solidFill>
+                      <a:srgbClr val="333B45"/>
+                    </a:solidFill>
+                  </a:tcPr>
+                </a:tc>
+                <a:tc>
+                  <a:txBody>
+                    <a:bodyPr/>
+                    <a:lstStyle/>
+                    <a:p>
+                      <a:pPr algn="ctr"/>
+                      <a:r>
+                        <a:rPr sz="1100" b="1" i="0">
+                          <a:solidFill>
+                            <a:srgbClr val="FFFFFF"/>
+                          </a:solidFill>
+                          <a:latin typeface="Malgun Gothic"/>
+                        </a:rPr>
+                        <a:t>없으면</a:t>
+                      </a:r>
+                    </a:p>
+                  </a:txBody>
+                  <a:tcPr marL="73152" marR="73152" marT="0" marB="0" anchor="ctr">
+                    <a:lnB w="9525" cap="flat" cmpd="sng" algn="ctr">
+                      <a:solidFill>
+                        <a:srgbClr val="333B45"/>
+                      </a:solidFill>
+                    </a:lnB>
+                    <a:lnT w="9525" cap="flat" cmpd="sng" algn="ctr">
+                      <a:solidFill>
+                        <a:srgbClr val="333B45"/>
+                      </a:solidFill>
+                    </a:lnT>
+                    <a:lnR w="9525" cap="flat" cmpd="sng" algn="ctr">
+                      <a:solidFill>
+                        <a:srgbClr val="333B45"/>
+                      </a:solidFill>
+                    </a:lnR>
+                    <a:lnL w="9525" cap="flat" cmpd="sng" algn="ctr">
+                      <a:solidFill>
+                        <a:srgbClr val="333B45"/>
+                      </a:solidFill>
+                    </a:lnL>
+                    <a:solidFill>
+                      <a:srgbClr val="333B45"/>
+                    </a:solidFill>
+                  </a:tcPr>
+                </a:tc>
+              </a:tr>
+              <a:tr h="548640">
+                <a:tc>
+                  <a:txBody>
+                    <a:bodyPr/>
+                    <a:lstStyle/>
+                    <a:p>
+                      <a:pPr algn="l"/>
+                      <a:r>
+                        <a:rPr sz="1150" b="1" i="0">
+                          <a:solidFill>
+                            <a:srgbClr val="1C2833"/>
+                          </a:solidFill>
+                          <a:latin typeface="Malgun Gothic"/>
+                        </a:rPr>
+                        <a:t>정식 과제 등록</a:t>
+                      </a:r>
+                    </a:p>
+                  </a:txBody>
+                  <a:tcPr marL="73152" marR="73152" marT="18288" marB="18288" anchor="ctr">
+                    <a:lnB w="9525" cap="flat" cmpd="sng" algn="ctr">
+                      <a:solidFill>
+                        <a:srgbClr val="D5DBDB"/>
+                      </a:solidFill>
+                    </a:lnB>
+                    <a:lnT w="9525" cap="flat" cmpd="sng" algn="ctr">
+                      <a:solidFill>
+                        <a:srgbClr val="FFFFFF"/>
+                      </a:solidFill>
+                    </a:lnT>
+                    <a:lnR w="9525" cap="flat" cmpd="sng" algn="ctr">
+                      <a:solidFill>
+                        <a:srgbClr val="FFFFFF"/>
+                      </a:solidFill>
+                    </a:lnR>
+                    <a:lnL w="9525" cap="flat" cmpd="sng" algn="ctr">
+                      <a:solidFill>
+                        <a:srgbClr val="FFFFFF"/>
+                      </a:solidFill>
+                    </a:lnL>
+                    <a:solidFill>
+                      <a:srgbClr val="FFFFFF"/>
+                    </a:solidFill>
+                  </a:tcPr>
+                </a:tc>
+                <a:tc>
+                  <a:txBody>
+                    <a:bodyPr/>
+                    <a:lstStyle/>
+                    <a:p>
+                      <a:pPr algn="l"/>
+                      <a:r>
+                        <a:rPr sz="1150" b="0" i="0">
+                          <a:solidFill>
+                            <a:srgbClr val="1C2833"/>
+                          </a:solidFill>
+                          <a:latin typeface="Malgun Gothic"/>
+                        </a:rPr>
+                        <a:t>지금은 개인 작업물이다. 유지보수 주체가 지정돼 있지 않다</a:t>
+                      </a:r>
+                    </a:p>
+                  </a:txBody>
+                  <a:tcPr marL="73152" marR="73152" marT="18288" marB="18288" anchor="ctr">
+                    <a:lnB w="9525" cap="flat" cmpd="sng" algn="ctr">
+                      <a:solidFill>
+                        <a:srgbClr val="D5DBDB"/>
+                      </a:solidFill>
+                    </a:lnB>
+                    <a:lnT w="9525" cap="flat" cmpd="sng" algn="ctr">
+                      <a:solidFill>
+                        <a:srgbClr val="FFFFFF"/>
+                      </a:solidFill>
+                    </a:lnT>
+                    <a:lnR w="9525" cap="flat" cmpd="sng" algn="ctr">
+                      <a:solidFill>
+                        <a:srgbClr val="FFFFFF"/>
+                      </a:solidFill>
+                    </a:lnR>
+                    <a:lnL w="9525" cap="flat" cmpd="sng" algn="ctr">
+                      <a:solidFill>
+                        <a:srgbClr val="FFFFFF"/>
+                      </a:solidFill>
+                    </a:lnL>
+                    <a:solidFill>
+                      <a:srgbClr val="FFFFFF"/>
+                    </a:solidFill>
+                  </a:tcPr>
+                </a:tc>
+                <a:tc>
+                  <a:txBody>
+                    <a:bodyPr/>
+                    <a:lstStyle/>
+                    <a:p>
+                      <a:pPr algn="l"/>
+                      <a:r>
+                        <a:rPr sz="1150" b="0" i="0">
+                          <a:solidFill>
+                            <a:srgbClr val="1C2833"/>
+                          </a:solidFill>
+                          <a:latin typeface="Malgun Gothic"/>
+                        </a:rPr>
+                        <a:t>만든 사람이 빠지면 멈춘다</a:t>
+                      </a:r>
+                    </a:p>
+                  </a:txBody>
+                  <a:tcPr marL="73152" marR="73152" marT="18288" marB="18288" anchor="ctr">
+                    <a:lnB w="9525" cap="flat" cmpd="sng" algn="ctr">
+                      <a:solidFill>
+                        <a:srgbClr val="D5DBDB"/>
+                      </a:solidFill>
+                    </a:lnB>
+                    <a:lnT w="9525" cap="flat" cmpd="sng" algn="ctr">
+                      <a:solidFill>
+                        <a:srgbClr val="FFFFFF"/>
+                      </a:solidFill>
+                    </a:lnT>
+                    <a:lnR w="9525" cap="flat" cmpd="sng" algn="ctr">
+                      <a:solidFill>
+                        <a:srgbClr val="FFFFFF"/>
+                      </a:solidFill>
+                    </a:lnR>
+                    <a:lnL w="9525" cap="flat" cmpd="sng" algn="ctr">
+                      <a:solidFill>
+                        <a:srgbClr val="FFFFFF"/>
+                      </a:solidFill>
+                    </a:lnL>
+                    <a:solidFill>
+                      <a:srgbClr val="FFFFFF"/>
+                    </a:solidFill>
+                  </a:tcPr>
+                </a:tc>
+              </a:tr>
+              <a:tr h="548640">
+                <a:tc>
+                  <a:txBody>
+                    <a:bodyPr/>
+                    <a:lstStyle/>
+                    <a:p>
+                      <a:pPr algn="l"/>
+                      <a:r>
+                        <a:rPr sz="1150" b="1" i="0">
+                          <a:solidFill>
+                            <a:srgbClr val="1C2833"/>
+                          </a:solidFill>
+                          <a:latin typeface="Malgun Gothic"/>
+                        </a:rPr>
+                        <a:t>개발 시간 배정</a:t>
+                      </a:r>
+                    </a:p>
+                  </a:txBody>
+                  <a:tcPr marL="73152" marR="73152" marT="18288" marB="18288" anchor="ctr">
+                    <a:lnB w="9525" cap="flat" cmpd="sng" algn="ctr">
+                      <a:solidFill>
+                        <a:srgbClr val="D5DBDB"/>
+                      </a:solidFill>
+                    </a:lnB>
+                    <a:lnT w="9525" cap="flat" cmpd="sng" algn="ctr">
+                      <a:solidFill>
+                        <a:srgbClr val="FFFFFF"/>
+                      </a:solidFill>
+                    </a:lnT>
+                    <a:lnR w="9525" cap="flat" cmpd="sng" algn="ctr">
+                      <a:solidFill>
+                        <a:srgbClr val="FFFFFF"/>
+                      </a:solidFill>
+                    </a:lnR>
+                    <a:lnL w="9525" cap="flat" cmpd="sng" algn="ctr">
+                      <a:solidFill>
+                        <a:srgbClr val="FFFFFF"/>
+                      </a:solidFill>
+                    </a:lnL>
+                    <a:solidFill>
+                      <a:srgbClr val="FFFFFF"/>
+                    </a:solidFill>
+                  </a:tcPr>
+                </a:tc>
+                <a:tc>
+                  <a:txBody>
+                    <a:bodyPr/>
+                    <a:lstStyle/>
+                    <a:p>
+                      <a:pPr algn="l"/>
+                      <a:r>
+                        <a:rPr sz="1150" b="0" i="0">
+                          <a:solidFill>
+                            <a:srgbClr val="1C2833"/>
+                          </a:solidFill>
+                          <a:latin typeface="Malgun Gothic"/>
+                        </a:rPr>
+                        <a:t>Phase 2~5 는 기능 추가가 아니라 판정 재현성 확보다</a:t>
+                      </a:r>
+                    </a:p>
+                  </a:txBody>
+                  <a:tcPr marL="73152" marR="73152" marT="18288" marB="18288" anchor="ctr">
+                    <a:lnB w="9525" cap="flat" cmpd="sng" algn="ctr">
+                      <a:solidFill>
+                        <a:srgbClr val="D5DBDB"/>
+                      </a:solidFill>
+                    </a:lnB>
+                    <a:lnT w="9525" cap="flat" cmpd="sng" algn="ctr">
+                      <a:solidFill>
+                        <a:srgbClr val="FFFFFF"/>
+                      </a:solidFill>
+                    </a:lnT>
+                    <a:lnR w="9525" cap="flat" cmpd="sng" algn="ctr">
+                      <a:solidFill>
+                        <a:srgbClr val="FFFFFF"/>
+                      </a:solidFill>
+                    </a:lnR>
+                    <a:lnL w="9525" cap="flat" cmpd="sng" algn="ctr">
+                      <a:solidFill>
+                        <a:srgbClr val="FFFFFF"/>
+                      </a:solidFill>
+                    </a:lnL>
+                    <a:solidFill>
+                      <a:srgbClr val="FFFFFF"/>
+                    </a:solidFill>
+                  </a:tcPr>
+                </a:tc>
+                <a:tc>
+                  <a:txBody>
+                    <a:bodyPr/>
+                    <a:lstStyle/>
+                    <a:p>
+                      <a:pPr algn="l"/>
+                      <a:r>
+                        <a:rPr sz="1150" b="0" i="0">
+                          <a:solidFill>
+                            <a:srgbClr val="1C2833"/>
+                          </a:solidFill>
+                          <a:latin typeface="Malgun Gothic"/>
+                        </a:rPr>
+                        <a:t>고친 증상이 다시 돌아온다</a:t>
+                      </a:r>
+                    </a:p>
+                  </a:txBody>
+                  <a:tcPr marL="73152" marR="73152" marT="18288" marB="18288" anchor="ctr">
+                    <a:lnB w="9525" cap="flat" cmpd="sng" algn="ctr">
+                      <a:solidFill>
+                        <a:srgbClr val="D5DBDB"/>
+                      </a:solidFill>
+                    </a:lnB>
+                    <a:lnT w="9525" cap="flat" cmpd="sng" algn="ctr">
+                      <a:solidFill>
+                        <a:srgbClr val="FFFFFF"/>
+                      </a:solidFill>
+                    </a:lnT>
+                    <a:lnR w="9525" cap="flat" cmpd="sng" algn="ctr">
+                      <a:solidFill>
+                        <a:srgbClr val="FFFFFF"/>
+                      </a:solidFill>
+                    </a:lnR>
+                    <a:lnL w="9525" cap="flat" cmpd="sng" algn="ctr">
+                      <a:solidFill>
+                        <a:srgbClr val="FFFFFF"/>
+                      </a:solidFill>
+                    </a:lnL>
+                    <a:solidFill>
+                      <a:srgbClr val="FFFFFF"/>
+                    </a:solidFill>
+                  </a:tcPr>
+                </a:tc>
+              </a:tr>
+              <a:tr h="548640">
+                <a:tc>
+                  <a:txBody>
+                    <a:bodyPr/>
+                    <a:lstStyle/>
+                    <a:p>
+                      <a:pPr algn="l"/>
+                      <a:r>
+                        <a:rPr sz="1150" b="1" i="0">
+                          <a:solidFill>
+                            <a:srgbClr val="1C2833"/>
+                          </a:solidFill>
+                          <a:latin typeface="Malgun Gothic"/>
+                        </a:rPr>
+                        <a:t>현장 검증 슬롯</a:t>
+                      </a:r>
+                    </a:p>
+                  </a:txBody>
+                  <a:tcPr marL="73152" marR="73152" marT="18288" marB="18288" anchor="ctr">
+                    <a:lnB w="9525" cap="flat" cmpd="sng" algn="ctr">
+                      <a:solidFill>
+                        <a:srgbClr val="D5DBDB"/>
+                      </a:solidFill>
+                    </a:lnB>
+                    <a:lnT w="9525" cap="flat" cmpd="sng" algn="ctr">
+                      <a:solidFill>
+                        <a:srgbClr val="FFFFFF"/>
+                      </a:solidFill>
+                    </a:lnT>
+                    <a:lnR w="9525" cap="flat" cmpd="sng" algn="ctr">
+                      <a:solidFill>
+                        <a:srgbClr val="FFFFFF"/>
+                      </a:solidFill>
+                    </a:lnR>
+                    <a:lnL w="9525" cap="flat" cmpd="sng" algn="ctr">
+                      <a:solidFill>
+                        <a:srgbClr val="FFFFFF"/>
+                      </a:solidFill>
+                    </a:lnL>
+                    <a:solidFill>
+                      <a:srgbClr val="FFFFFF"/>
+                    </a:solidFill>
+                  </a:tcPr>
+                </a:tc>
+                <a:tc>
+                  <a:txBody>
+                    <a:bodyPr/>
+                    <a:lstStyle/>
+                    <a:p>
+                      <a:pPr algn="l"/>
+                      <a:r>
+                        <a:rPr sz="1150" b="0" i="0">
+                          <a:solidFill>
+                            <a:srgbClr val="1C2833"/>
+                          </a:solidFill>
+                          <a:latin typeface="Malgun Gothic"/>
+                        </a:rPr>
+                        <a:t>실기 검증이 유일한 회귀 확인 수단 — 단계당 확인 항목 1건</a:t>
+                      </a:r>
+                    </a:p>
+                  </a:txBody>
+                  <a:tcPr marL="73152" marR="73152" marT="18288" marB="18288" anchor="ctr">
+                    <a:lnB w="9525" cap="flat" cmpd="sng" algn="ctr">
+                      <a:solidFill>
+                        <a:srgbClr val="D5DBDB"/>
+                      </a:solidFill>
+                    </a:lnB>
+                    <a:lnT w="9525" cap="flat" cmpd="sng" algn="ctr">
+                      <a:solidFill>
+                        <a:srgbClr val="FFFFFF"/>
+                      </a:solidFill>
+                    </a:lnT>
+                    <a:lnR w="9525" cap="flat" cmpd="sng" algn="ctr">
+                      <a:solidFill>
+                        <a:srgbClr val="FFFFFF"/>
+                      </a:solidFill>
+                    </a:lnR>
+                    <a:lnL w="9525" cap="flat" cmpd="sng" algn="ctr">
+                      <a:solidFill>
+                        <a:srgbClr val="FFFFFF"/>
+                      </a:solidFill>
+                    </a:lnL>
+                    <a:solidFill>
+                      <a:srgbClr val="FFFFFF"/>
+                    </a:solidFill>
+                  </a:tcPr>
+                </a:tc>
+                <a:tc>
+                  <a:txBody>
+                    <a:bodyPr/>
+                    <a:lstStyle/>
+                    <a:p>
+                      <a:pPr algn="l"/>
+                      <a:r>
+                        <a:rPr sz="1150" b="0" i="0">
+                          <a:solidFill>
+                            <a:srgbClr val="1C2833"/>
+                          </a:solidFill>
+                          <a:latin typeface="Malgun Gothic"/>
+                        </a:rPr>
+                        <a:t>검증 없이 배포하거나 배포가 멈춘다</a:t>
+                      </a:r>
+                    </a:p>
+                  </a:txBody>
+                  <a:tcPr marL="73152" marR="73152" marT="18288" marB="18288" anchor="ctr">
+                    <a:lnB w="9525" cap="flat" cmpd="sng" algn="ctr">
+                      <a:solidFill>
+                        <a:srgbClr val="D5DBDB"/>
+                      </a:solidFill>
+                    </a:lnB>
+                    <a:lnT w="9525" cap="flat" cmpd="sng" algn="ctr">
+                      <a:solidFill>
+                        <a:srgbClr val="FFFFFF"/>
+                      </a:solidFill>
+                    </a:lnT>
+                    <a:lnR w="9525" cap="flat" cmpd="sng" algn="ctr">
+                      <a:solidFill>
+                        <a:srgbClr val="FFFFFF"/>
+                      </a:solidFill>
+                    </a:lnR>
+                    <a:lnL w="9525" cap="flat" cmpd="sng" algn="ctr">
+                      <a:solidFill>
+                        <a:srgbClr val="FFFFFF"/>
+                      </a:solidFill>
+                    </a:lnL>
+                    <a:solidFill>
+                      <a:srgbClr val="FFFFFF"/>
+                    </a:solidFill>
+                  </a:tcPr>
+                </a:tc>
+              </a:tr>
+              <a:tr h="548640">
+                <a:tc>
+                  <a:txBody>
+                    <a:bodyPr/>
+                    <a:lstStyle/>
+                    <a:p>
+                      <a:pPr algn="l"/>
+                      <a:r>
+                        <a:rPr sz="1150" b="1" i="0">
+                          <a:solidFill>
+                            <a:srgbClr val="1C2833"/>
+                          </a:solidFill>
+                          <a:latin typeface="Malgun Gothic"/>
+                        </a:rPr>
+                        <a:t>보안 검토</a:t>
+                      </a:r>
+                    </a:p>
+                  </a:txBody>
+                  <a:tcPr marL="73152" marR="73152" marT="18288" marB="18288" anchor="ctr">
+                    <a:lnB w="9525" cap="flat" cmpd="sng" algn="ctr">
+                      <a:solidFill>
+                        <a:srgbClr val="D5DBDB"/>
+                      </a:solidFill>
+                    </a:lnB>
+                    <a:lnT w="9525" cap="flat" cmpd="sng" algn="ctr">
+                      <a:solidFill>
+                        <a:srgbClr val="FFFFFF"/>
+                      </a:solidFill>
+                    </a:lnT>
+                    <a:lnR w="9525" cap="flat" cmpd="sng" algn="ctr">
+                      <a:solidFill>
+                        <a:srgbClr val="FFFFFF"/>
+                      </a:solidFill>
+                    </a:lnR>
+                    <a:lnL w="9525" cap="flat" cmpd="sng" algn="ctr">
+                      <a:solidFill>
+                        <a:srgbClr val="FFFFFF"/>
+                      </a:solidFill>
+                    </a:lnL>
+                    <a:solidFill>
+                      <a:srgbClr val="FFFFFF"/>
+                    </a:solidFill>
+                  </a:tcPr>
+                </a:tc>
+                <a:tc>
+                  <a:txBody>
+                    <a:bodyPr/>
+                    <a:lstStyle/>
+                    <a:p>
+                      <a:pPr algn="l"/>
+                      <a:r>
+                        <a:rPr sz="1150" b="0" i="0">
+                          <a:solidFill>
+                            <a:srgbClr val="1C2833"/>
+                          </a:solidFill>
+                          <a:latin typeface="Malgun Gothic"/>
+                        </a:rPr>
+                        <a:t>릴리스 빌드 난독화 미적용 · 경보 이력 평문 저장</a:t>
+                      </a:r>
+                    </a:p>
+                  </a:txBody>
+                  <a:tcPr marL="73152" marR="73152" marT="18288" marB="18288" anchor="ctr">
+                    <a:lnB w="9525" cap="flat" cmpd="sng" algn="ctr">
+                      <a:solidFill>
+                        <a:srgbClr val="D5DBDB"/>
+                      </a:solidFill>
+                    </a:lnB>
+                    <a:lnT w="9525" cap="flat" cmpd="sng" algn="ctr">
+                      <a:solidFill>
+                        <a:srgbClr val="FFFFFF"/>
+                      </a:solidFill>
+                    </a:lnT>
+                    <a:lnR w="9525" cap="flat" cmpd="sng" algn="ctr">
+                      <a:solidFill>
+                        <a:srgbClr val="FFFFFF"/>
+                      </a:solidFill>
+                    </a:lnR>
+                    <a:lnL w="9525" cap="flat" cmpd="sng" algn="ctr">
+                      <a:solidFill>
+                        <a:srgbClr val="FFFFFF"/>
+                      </a:solidFill>
+                    </a:lnL>
+                    <a:solidFill>
+                      <a:srgbClr val="FFFFFF"/>
+                    </a:solidFill>
+                  </a:tcPr>
+                </a:tc>
+                <a:tc>
+                  <a:txBody>
+                    <a:bodyPr/>
+                    <a:lstStyle/>
+                    <a:p>
+                      <a:pPr algn="l"/>
+                      <a:r>
+                        <a:rPr sz="1150" b="0" i="0">
+                          <a:solidFill>
+                            <a:srgbClr val="1C2833"/>
+                          </a:solidFill>
+                          <a:latin typeface="Malgun Gothic"/>
+                        </a:rPr>
+                        <a:t>확산할수록 리스크가 커진다</a:t>
+                      </a:r>
+                    </a:p>
+                  </a:txBody>
+                  <a:tcPr marL="73152" marR="73152" marT="18288" marB="18288" anchor="ctr">
+                    <a:lnB w="9525" cap="flat" cmpd="sng" algn="ctr">
+                      <a:solidFill>
+                        <a:srgbClr val="D5DBDB"/>
+                      </a:solidFill>
+                    </a:lnB>
+                    <a:lnT w="9525" cap="flat" cmpd="sng" algn="ctr">
+                      <a:solidFill>
+                        <a:srgbClr val="FFFFFF"/>
+                      </a:solidFill>
+                    </a:lnT>
+                    <a:lnR w="9525" cap="flat" cmpd="sng" algn="ctr">
+                      <a:solidFill>
+                        <a:srgbClr val="FFFFFF"/>
+                      </a:solidFill>
+                    </a:lnR>
+                    <a:lnL w="9525" cap="flat" cmpd="sng" algn="ctr">
+                      <a:solidFill>
+                        <a:srgbClr val="FFFFFF"/>
+                      </a:solidFill>
+                    </a:lnL>
+                    <a:solidFill>
+                      <a:srgbClr val="FFFFFF"/>
+                    </a:solidFill>
+                  </a:tcPr>
+                </a:tc>
+              </a:tr>
+            </a:tbl>
+          </a:graphicData>
+        </a:graphic>
+      </p:graphicFrame>
+      <p:sp>
+        <p:nvSpPr>
+          <p:cNvPr id="16" name="Rectangle 15"/>
+          <p:cNvSpPr/>
+          <p:nvPr/>
+        </p:nvSpPr>
+        <p:spPr>
+          <a:xfrm>
+            <a:off x="640080" y="4498848"/>
+            <a:ext cx="1280160" cy="301752"/>
+          </a:xfrm>
+          <a:prstGeom prst="rect">
+            <a:avLst/>
+          </a:prstGeom>
+          <a:solidFill>
+            <a:srgbClr val="8C8C8C"/>
+          </a:solidFill>
+          <a:ln>
+            <a:noFill/>
+          </a:ln>
+          <a:effectLst/>
+        </p:spPr>
+        <p:style>
+          <a:lnRef idx="1">
+            <a:schemeClr val="accent1"/>
+          </a:lnRef>
+          <a:fillRef idx="3">
+            <a:schemeClr val="accent1"/>
+          </a:fillRef>
+          <a:effectRef idx="2">
+            <a:schemeClr val="accent1"/>
+          </a:effectRef>
+          <a:fontRef idx="minor">
+            <a:schemeClr val="lt1"/>
+          </a:fontRef>
+        </p:style>
+        <p:txBody>
+          <a:bodyPr rtlCol="0" anchor="ctr" wrap="square" lIns="36576" rIns="36576" tIns="0" bIns="0"/>
+          <a:lstStyle/>
+          <a:p>
+            <a:pPr algn="ctr"/>
+            <a:r>
+              <a:rPr sz="1100" b="1" i="0">
+                <a:solidFill>
+                  <a:srgbClr val="FFFFFF"/>
+                </a:solidFill>
+                <a:latin typeface="Malgun Gothic"/>
+              </a:rPr>
+              <a:t>지금 상태</a:t>
+            </a:r>
+          </a:p>
+        </p:txBody>
+      </p:sp>
+      <p:sp>
+        <p:nvSpPr>
+          <p:cNvPr id="17" name="TextBox 16"/>
+          <p:cNvSpPr txBox="1"/>
+          <p:nvPr/>
+        </p:nvSpPr>
+        <p:spPr>
+          <a:xfrm>
+            <a:off x="868680" y="4937760"/>
+            <a:ext cx="10881360" cy="329184"/>
+          </a:xfrm>
+          <a:prstGeom prst="rect">
+            <a:avLst/>
+          </a:prstGeom>
+          <a:noFill/>
+        </p:spPr>
+        <p:txBody>
+          <a:bodyPr wrap="square" lIns="36576" rIns="36576" tIns="0" bIns="0">
+            <a:spAutoFit/>
+          </a:bodyPr>
+          <a:lstStyle/>
+          <a:p>
+            <a:pPr algn="l">
+              <a:spcAft>
+                <a:spcPts val="400"/>
+              </a:spcAft>
+            </a:pPr>
+            <a:r>
+              <a:rPr sz="1200" b="0" i="0">
+                <a:solidFill>
+                  <a:srgbClr val="1C2833"/>
+                </a:solidFill>
+                <a:latin typeface="Malgun Gothic"/>
+              </a:rPr>
+              <a:t>①  v1.1.70 이 현장에서 운영 중이다 — 결정이 늦어도 보호가 멈추지는 않는다</a:t>
+            </a:r>
+          </a:p>
+        </p:txBody>
+      </p:sp>
+      <p:sp>
+        <p:nvSpPr>
+          <p:cNvPr id="18" name="TextBox 17"/>
+          <p:cNvSpPr txBox="1"/>
+          <p:nvPr/>
+        </p:nvSpPr>
+        <p:spPr>
+          <a:xfrm>
+            <a:off x="868680" y="5285232"/>
+            <a:ext cx="10881360" cy="329184"/>
+          </a:xfrm>
+          <a:prstGeom prst="rect">
+            <a:avLst/>
+          </a:prstGeom>
+          <a:noFill/>
+        </p:spPr>
+        <p:txBody>
+          <a:bodyPr wrap="square" lIns="36576" rIns="36576" tIns="0" bIns="0">
+            <a:spAutoFit/>
+          </a:bodyPr>
+          <a:lstStyle/>
+          <a:p>
+            <a:pPr algn="l">
+              <a:spcAft>
+                <a:spcPts val="400"/>
+              </a:spcAft>
+            </a:pPr>
+            <a:r>
+              <a:rPr sz="1200" b="0" i="0">
+                <a:solidFill>
+                  <a:srgbClr val="1C2833"/>
+                </a:solidFill>
+                <a:latin typeface="Malgun Gothic"/>
+              </a:rPr>
+              <a:t>②  다만 신뢰성 로드맵은 1 / 5 에서 멈춰 있고, 남은 네 단계가 재발 고리를 끊는 작업이다</a:t>
+            </a:r>
+          </a:p>
+        </p:txBody>
+      </p:sp>
+      <p:sp>
+        <p:nvSpPr>
+          <p:cNvPr id="19" name="TextBox 18"/>
+          <p:cNvSpPr txBox="1"/>
+          <p:nvPr/>
+        </p:nvSpPr>
+        <p:spPr>
+          <a:xfrm>
+            <a:off x="640080" y="5797296"/>
+            <a:ext cx="7680960" cy="365760"/>
+          </a:xfrm>
+          <a:prstGeom prst="rect">
+            <a:avLst/>
+          </a:prstGeom>
+          <a:noFill/>
+        </p:spPr>
+        <p:txBody>
+          <a:bodyPr wrap="square" lIns="36576" rIns="36576" tIns="0" bIns="0">
+            <a:spAutoFit/>
+          </a:bodyPr>
+          <a:lstStyle/>
+          <a:p>
+            <a:pPr algn="ctr"/>
+            <a:r>
+              <a:rPr sz="1150" b="0" i="1">
+                <a:solidFill>
+                  <a:srgbClr val="5D6D7E"/>
+                </a:solidFill>
+                <a:latin typeface="Malgun Gothic"/>
+              </a:rPr>
+              <a:t>“지금 필요한 것은 새 기능이 아니라, 이미 도는 것을 믿을 수 있게 만드는 시간입니다.”</a:t>
+            </a:r>
+          </a:p>
+        </p:txBody>
+      </p:sp>
+    </p:spTree>
+    <p:extLst>
+      <p:ext uri="{BB962C8B-B14F-4D97-AF65-F5344CB8AC3E}">
+        <p14:creationId xmlns:p14="http://schemas.microsoft.com/office/powerpoint/2010/main" val="3987384774"/>
+      </p:ext>
+    </p:extLst>
+  </p:cSld>
+  <p:clrMapOvr>
+    <a:masterClrMapping/>
+  </p:clrMapOvr>
+</p:sld>
+</file>
+
 <file path=ppt/slides/slide2.xml><?xml version="1.0" encoding="utf-8"?>
 <p:sld xmlns:a="http://schemas.openxmlformats.org/drawingml/2006/main" xmlns:r="http://schemas.openxmlformats.org/officeDocument/2006/relationships" xmlns:p="http://schemas.openxmlformats.org/presentationml/2006/main">
   <p:cSld>
@@ -3712,21 +5932,9 @@
           <a:p>
             <a:r>
               <a:rPr lang="en-US" altLang="ko-KR" dirty="0"/>
-              <a:t xml:space="preserve">1. 개발 배경</a:t>
+              <a:t xml:space="preserve">한 장 요약</a:t>
             </a:r>
             <a:endParaRPr lang="en-US" altLang="ko-KR" dirty="0"/>
-          </a:p>
-          <a:p>
-            <a:r>
-              <a:rPr lang="en-US" altLang="ko-KR" sz="1400" b="0" dirty="0"/>
-              <a:t xml:space="preserve">  1) 문제의 배경 · 현재 상황</a:t>
-            </a:r>
-          </a:p>
-          <a:p>
-            <a:r>
-              <a:rPr lang="en-US" altLang="ko-KR" sz="1400" b="0" dirty="0"/>
-              <a:t xml:space="preserve">  2) 왜 앱으로 만들었나</a:t>
-            </a:r>
           </a:p>
           <a:p>
             <a:r>
@@ -3738,6 +5946,19 @@
           <a:p>
             <a:r>
               <a:rPr lang="en-US" altLang="ko-KR" dirty="0"/>
+              <a:t xml:space="preserve">1. 개발 배경</a:t>
+            </a:r>
+            <a:endParaRPr lang="en-US" altLang="ko-KR" dirty="0"/>
+          </a:p>
+          <a:p>
+            <a:r>
+              <a:rPr lang="en-US" altLang="ko-KR" sz="1400" b="0" dirty="0"/>
+              <a:t xml:space="preserve">  1) 문제의 배경 · 현재 상황     2) 왜 앱으로 만들었나</a:t>
+            </a:r>
+          </a:p>
+          <a:p>
+            <a:r>
+              <a:rPr lang="en-US" altLang="ko-KR" dirty="0"/>
               <a:t xml:space="preserve">2. 기대효과</a:t>
             </a:r>
             <a:endParaRPr lang="en-US" altLang="ko-KR" dirty="0"/>
@@ -3751,28 +5972,55 @@
           <a:p>
             <a:r>
               <a:rPr lang="en-US" altLang="ko-KR" dirty="0"/>
-              <a:t xml:space="preserve"> </a:t>
+              <a:t xml:space="preserve">3. 장단점</a:t>
             </a:r>
             <a:endParaRPr lang="en-US" altLang="ko-KR" dirty="0"/>
           </a:p>
           <a:p>
             <a:r>
+              <a:rPr lang="en-US" altLang="ko-KR" sz="1400" b="0" dirty="0"/>
+              <a:t xml:space="preserve">  1) Tradeoffs     2) 남는 한계</a:t>
+            </a:r>
+          </a:p>
+          <a:p>
+            <a:r>
               <a:rPr lang="en-US" altLang="ko-KR" dirty="0"/>
-              <a:t xml:space="preserve">3. 장단점</a:t>
+              <a:t xml:space="preserve">4. 사용자 피드백</a:t>
             </a:r>
             <a:endParaRPr lang="en-US" altLang="ko-KR" dirty="0"/>
           </a:p>
           <a:p>
             <a:r>
               <a:rPr lang="en-US" altLang="ko-KR" sz="1400" b="0" dirty="0"/>
-              <a:t xml:space="preserve">  1) Tradeoffs — 무엇을 얻고 무엇을 내줬나</a:t>
-            </a:r>
+              <a:t xml:space="preserve">  1) 오더십 리뷰 반영     2) 현장 요구 반영 (Before / After)</a:t>
+            </a:r>
+          </a:p>
+          <a:p>
+            <a:r>
+              <a:rPr lang="en-US" altLang="ko-KR" dirty="0"/>
+              <a:t xml:space="preserve">5. 시연</a:t>
+            </a:r>
+            <a:endParaRPr lang="en-US" altLang="ko-KR" dirty="0"/>
           </a:p>
           <a:p>
             <a:r>
               <a:rPr lang="en-US" altLang="ko-KR" sz="1400" b="0" dirty="0"/>
-              <a:t xml:space="preserve">  2) 남는 한계</a:t>
-            </a:r>
+              <a:t xml:space="preserve">  1) 동작 화면 · 설정 화면     2) 시연 영상 · 판정 시뮬레이터</a:t>
+            </a:r>
+          </a:p>
+          <a:p>
+            <a:r>
+              <a:rPr lang="en-US" altLang="ko-KR" dirty="0"/>
+              <a:t xml:space="preserve">6. 진행 단계 (Phase 1 ~ 5)</a:t>
+            </a:r>
+            <a:endParaRPr lang="en-US" altLang="ko-KR" dirty="0"/>
+          </a:p>
+          <a:p>
+            <a:r>
+              <a:rPr lang="en-US" altLang="ko-KR" dirty="0"/>
+              <a:t xml:space="preserve">7. Andon — 현장 · 배포 중 중단 기준</a:t>
+            </a:r>
+            <a:endParaRPr lang="en-US" altLang="ko-KR" dirty="0"/>
           </a:p>
           <a:p>
             <a:r>
@@ -3784,75 +6032,15 @@
           <a:p>
             <a:r>
               <a:rPr lang="en-US" altLang="ko-KR" dirty="0"/>
-              <a:t xml:space="preserve">4. 사용자 피드백</a:t>
+              <a:t xml:space="preserve">8. 요청 사항</a:t>
             </a:r>
             <a:endParaRPr lang="en-US" altLang="ko-KR" dirty="0"/>
           </a:p>
           <a:p>
             <a:r>
               <a:rPr lang="en-US" altLang="ko-KR" sz="1400" b="0" dirty="0"/>
-              <a:t xml:space="preserve">  1) 오더십 리뷰 반영</a:t>
-            </a:r>
-          </a:p>
-          <a:p>
-            <a:r>
-              <a:rPr lang="en-US" altLang="ko-KR" sz="1400" b="0" dirty="0"/>
-              <a:t xml:space="preserve">  2) 현장 요구 반영 (Before / After)</a:t>
-            </a:r>
-          </a:p>
-          <a:p>
-            <a:r>
-              <a:rPr lang="en-US" altLang="ko-KR" dirty="0"/>
-              <a:t xml:space="preserve"> </a:t>
-            </a:r>
-            <a:endParaRPr lang="en-US" altLang="ko-KR" dirty="0"/>
-          </a:p>
-          <a:p>
-            <a:r>
-              <a:rPr lang="en-US" altLang="ko-KR" dirty="0"/>
-              <a:t xml:space="preserve">5. 시연</a:t>
-            </a:r>
-            <a:endParaRPr lang="en-US" altLang="ko-KR" dirty="0"/>
-          </a:p>
-          <a:p>
-            <a:r>
-              <a:rPr lang="en-US" altLang="ko-KR" sz="1400" b="0" dirty="0"/>
-              <a:t xml:space="preserve">  1) 동작 화면 · 설정 화면</a:t>
-            </a:r>
-          </a:p>
-          <a:p>
-            <a:r>
-              <a:rPr lang="en-US" altLang="ko-KR" sz="1400" b="0" dirty="0"/>
-              <a:t xml:space="preserve">  2) 시연 영상 · 판정 시뮬레이터</a:t>
-            </a:r>
-          </a:p>
-          <a:p>
-            <a:r>
-              <a:rPr lang="en-US" altLang="ko-KR" dirty="0"/>
-              <a:t xml:space="preserve"> </a:t>
-            </a:r>
-            <a:endParaRPr lang="en-US" altLang="ko-KR" dirty="0"/>
-          </a:p>
-          <a:p>
-            <a:r>
-              <a:rPr lang="en-US" altLang="ko-KR" dirty="0"/>
-              <a:t xml:space="preserve">6. 진행 단계 (Phase 1 ~ 5)</a:t>
-            </a:r>
-            <a:endParaRPr lang="en-US" altLang="ko-KR" dirty="0"/>
-          </a:p>
-          <a:p>
-            <a:r>
-              <a:rPr lang="en-US" altLang="ko-KR" dirty="0"/>
-              <a:t xml:space="preserve"> </a:t>
-            </a:r>
-            <a:endParaRPr lang="en-US" altLang="ko-KR" dirty="0"/>
-          </a:p>
-          <a:p>
-            <a:r>
-              <a:rPr lang="en-US" altLang="ko-KR" dirty="0"/>
-              <a:t xml:space="preserve">7. Andon — 중단 · 롤백 기준</a:t>
-            </a:r>
-            <a:endParaRPr lang="en-US" altLang="ko-KR" dirty="0"/>
+              <a:t xml:space="preserve">  정식 과제 등록과 리소스 배정</a:t>
+            </a:r>
           </a:p>
         </p:txBody>
       </p:sp>
@@ -3986,7 +6174,7 @@
                 <a:latin typeface="맑은 고딕" panose="020B0503020000020004" pitchFamily="50" charset="-127"/>
                 <a:ea typeface="맑은 고딕" panose="020B0503020000020004" pitchFamily="50" charset="-127"/>
               </a:rPr>
-              <a:t>1. 개발 배경</a:t>
+              <a:t>한 장 요약</a:t>
             </a:r>
             <a:endParaRPr lang="ko-KR" altLang="en-US" dirty="0"/>
           </a:p>
@@ -4022,40 +6210,16 @@
           </a:p>
         </p:txBody>
       </p:sp>
-      <p:pic>
-        <p:nvPicPr>
-          <p:cNvPr id="13" name="Picture 12" descr="fig_aisle.jpg"/>
-          <p:cNvPicPr>
-            <a:picLocks noChangeAspect="1"/>
-          </p:cNvPicPr>
-          <p:nvPr/>
-        </p:nvPicPr>
-        <p:blipFill>
-          <a:blip r:embed="rId3"/>
-          <a:stretch>
-            <a:fillRect/>
-          </a:stretch>
-        </p:blipFill>
-        <p:spPr>
-          <a:xfrm>
-            <a:off x="7882127" y="1024128"/>
-            <a:ext cx="3913632" cy="2446020"/>
-          </a:xfrm>
-          <a:prstGeom prst="rect">
-            <a:avLst/>
-          </a:prstGeom>
-        </p:spPr>
-      </p:pic>
-      <p:sp>
-        <p:nvSpPr>
-          <p:cNvPr id="14" name="TextBox 13"/>
+      <p:sp>
+        <p:nvSpPr>
+          <p:cNvPr id="13" name="TextBox 12"/>
           <p:cNvSpPr txBox="1"/>
           <p:nvPr/>
         </p:nvSpPr>
         <p:spPr>
           <a:xfrm>
-            <a:off x="7882127" y="3561588"/>
-            <a:ext cx="3913632" cy="274320"/>
+            <a:off x="640080" y="1024128"/>
+            <a:ext cx="10908792" cy="548640"/>
           </a:xfrm>
           <a:prstGeom prst="rect">
             <a:avLst/>
@@ -4068,42 +6232,395 @@
           </a:bodyPr>
           <a:lstStyle/>
           <a:p>
-            <a:pPr algn="ctr">
+            <a:pPr algn="l">
               <a:spcAft>
                 <a:spcPts val="400"/>
               </a:spcAft>
             </a:pPr>
             <a:r>
-              <a:rPr sz="1000" b="0" i="0">
+              <a:rPr sz="2700" b="1" i="0">
+                <a:solidFill>
+                  <a:srgbClr val="1C2833"/>
+                </a:solidFill>
+                <a:latin typeface="Malgun Gothic"/>
+              </a:rPr>
+              <a:t>사각지대를 사람의 주의력에 맡기지 않는다</a:t>
+            </a:r>
+          </a:p>
+        </p:txBody>
+      </p:sp>
+      <p:sp>
+        <p:nvSpPr>
+          <p:cNvPr id="14" name="TextBox 13"/>
+          <p:cNvSpPr txBox="1"/>
+          <p:nvPr/>
+        </p:nvSpPr>
+        <p:spPr>
+          <a:xfrm>
+            <a:off x="640080" y="1645920"/>
+            <a:ext cx="10908792" cy="329184"/>
+          </a:xfrm>
+          <a:prstGeom prst="rect">
+            <a:avLst/>
+          </a:prstGeom>
+          <a:noFill/>
+        </p:spPr>
+        <p:txBody>
+          <a:bodyPr wrap="square" lIns="36576" rIns="36576" tIns="0" bIns="0">
+            <a:spAutoFit/>
+          </a:bodyPr>
+          <a:lstStyle/>
+          <a:p>
+            <a:pPr algn="l">
+              <a:spcAft>
+                <a:spcPts val="400"/>
+              </a:spcAft>
+            </a:pPr>
+            <a:r>
+              <a:rPr sz="1300" b="0" i="0">
                 <a:solidFill>
                   <a:srgbClr val="5D6D7E"/>
                 </a:solidFill>
                 <a:latin typeface="Malgun Gothic"/>
               </a:rPr>
-              <a:t>3m 렉 사이 통로 — 교차 구간에서 서로 보이지 않는다</a:t>
-            </a:r>
-          </a:p>
-        </p:txBody>
-      </p:sp>
-      <p:sp>
-        <p:nvSpPr>
-          <p:cNvPr id="15" name="Rectangle 14"/>
+              <a:t>3m 렉 사이에서 서로 보이지 않는 구간을, 이미 지급된 단말끼리 신호를 주고받아 메운다</a:t>
+            </a:r>
+          </a:p>
+        </p:txBody>
+      </p:sp>
+      <p:sp>
+        <p:nvSpPr>
+          <p:cNvPr id="15" name="TextBox 14"/>
+          <p:cNvSpPr txBox="1"/>
+          <p:nvPr/>
+        </p:nvSpPr>
+        <p:spPr>
+          <a:xfrm>
+            <a:off x="777240" y="2212848"/>
+            <a:ext cx="2651760" cy="384048"/>
+          </a:xfrm>
+          <a:prstGeom prst="rect">
+            <a:avLst/>
+          </a:prstGeom>
+          <a:noFill/>
+        </p:spPr>
+        <p:txBody>
+          <a:bodyPr wrap="square" lIns="36576" rIns="36576" tIns="0" bIns="0">
+            <a:spAutoFit/>
+          </a:bodyPr>
+          <a:lstStyle/>
+          <a:p>
+            <a:pPr algn="l">
+              <a:spcAft>
+                <a:spcPts val="400"/>
+              </a:spcAft>
+            </a:pPr>
+            <a:r>
+              <a:rPr sz="1800" b="1" i="0">
+                <a:solidFill>
+                  <a:srgbClr val="C0392B"/>
+                </a:solidFill>
+                <a:latin typeface="Malgun Gothic"/>
+              </a:rPr>
+              <a:t>3개월 · 70회+</a:t>
+            </a:r>
+          </a:p>
+        </p:txBody>
+      </p:sp>
+      <p:sp>
+        <p:nvSpPr>
+          <p:cNvPr id="16" name="TextBox 15"/>
+          <p:cNvSpPr txBox="1"/>
+          <p:nvPr/>
+        </p:nvSpPr>
+        <p:spPr>
+          <a:xfrm>
+            <a:off x="777240" y="2633472"/>
+            <a:ext cx="2651760" cy="310896"/>
+          </a:xfrm>
+          <a:prstGeom prst="rect">
+            <a:avLst/>
+          </a:prstGeom>
+          <a:noFill/>
+        </p:spPr>
+        <p:txBody>
+          <a:bodyPr wrap="square" lIns="36576" rIns="36576" tIns="0" bIns="0">
+            <a:spAutoFit/>
+          </a:bodyPr>
+          <a:lstStyle/>
+          <a:p>
+            <a:pPr algn="l">
+              <a:spcAft>
+                <a:spcPts val="400"/>
+              </a:spcAft>
+            </a:pPr>
+            <a:r>
+              <a:rPr sz="1100" b="0" i="0">
+                <a:solidFill>
+                  <a:srgbClr val="5D6D7E"/>
+                </a:solidFill>
+                <a:latin typeface="Malgun Gothic"/>
+              </a:rPr>
+              <a:t>현장에 배포하며 다듬은 기간</a:t>
+            </a:r>
+          </a:p>
+        </p:txBody>
+      </p:sp>
+      <p:sp>
+        <p:nvSpPr>
+          <p:cNvPr id="17" name="TextBox 16"/>
+          <p:cNvSpPr txBox="1"/>
+          <p:nvPr/>
+        </p:nvSpPr>
+        <p:spPr>
+          <a:xfrm>
+            <a:off x="3520440" y="2212848"/>
+            <a:ext cx="2651760" cy="384048"/>
+          </a:xfrm>
+          <a:prstGeom prst="rect">
+            <a:avLst/>
+          </a:prstGeom>
+          <a:noFill/>
+        </p:spPr>
+        <p:txBody>
+          <a:bodyPr wrap="square" lIns="36576" rIns="36576" tIns="0" bIns="0">
+            <a:spAutoFit/>
+          </a:bodyPr>
+          <a:lstStyle/>
+          <a:p>
+            <a:pPr algn="l">
+              <a:spcAft>
+                <a:spcPts val="400"/>
+              </a:spcAft>
+            </a:pPr>
+            <a:r>
+              <a:rPr sz="1800" b="1" i="0">
+                <a:solidFill>
+                  <a:srgbClr val="C0392B"/>
+                </a:solidFill>
+                <a:latin typeface="Malgun Gothic"/>
+              </a:rPr>
+              <a:t>인프라 0</a:t>
+            </a:r>
+          </a:p>
+        </p:txBody>
+      </p:sp>
+      <p:sp>
+        <p:nvSpPr>
+          <p:cNvPr id="18" name="TextBox 17"/>
+          <p:cNvSpPr txBox="1"/>
+          <p:nvPr/>
+        </p:nvSpPr>
+        <p:spPr>
+          <a:xfrm>
+            <a:off x="3520440" y="2633472"/>
+            <a:ext cx="2651760" cy="310896"/>
+          </a:xfrm>
+          <a:prstGeom prst="rect">
+            <a:avLst/>
+          </a:prstGeom>
+          <a:noFill/>
+        </p:spPr>
+        <p:txBody>
+          <a:bodyPr wrap="square" lIns="36576" rIns="36576" tIns="0" bIns="0">
+            <a:spAutoFit/>
+          </a:bodyPr>
+          <a:lstStyle/>
+          <a:p>
+            <a:pPr algn="l">
+              <a:spcAft>
+                <a:spcPts val="400"/>
+              </a:spcAft>
+            </a:pPr>
+            <a:r>
+              <a:rPr sz="1100" b="0" i="0">
+                <a:solidFill>
+                  <a:srgbClr val="5D6D7E"/>
+                </a:solidFill>
+                <a:latin typeface="Malgun Gothic"/>
+              </a:rPr>
+              <a:t>앵커 · 배선 · 서버 없이 앱 설치만</a:t>
+            </a:r>
+          </a:p>
+        </p:txBody>
+      </p:sp>
+      <p:sp>
+        <p:nvSpPr>
+          <p:cNvPr id="19" name="TextBox 18"/>
+          <p:cNvSpPr txBox="1"/>
+          <p:nvPr/>
+        </p:nvSpPr>
+        <p:spPr>
+          <a:xfrm>
+            <a:off x="6263640" y="2212848"/>
+            <a:ext cx="2651760" cy="384048"/>
+          </a:xfrm>
+          <a:prstGeom prst="rect">
+            <a:avLst/>
+          </a:prstGeom>
+          <a:noFill/>
+        </p:spPr>
+        <p:txBody>
+          <a:bodyPr wrap="square" lIns="36576" rIns="36576" tIns="0" bIns="0">
+            <a:spAutoFit/>
+          </a:bodyPr>
+          <a:lstStyle/>
+          <a:p>
+            <a:pPr algn="l">
+              <a:spcAft>
+                <a:spcPts val="400"/>
+              </a:spcAft>
+            </a:pPr>
+            <a:r>
+              <a:rPr sz="1800" b="1" i="0">
+                <a:solidFill>
+                  <a:srgbClr val="C0392B"/>
+                </a:solidFill>
+                <a:latin typeface="Malgun Gothic"/>
+              </a:rPr>
+              <a:t>리뷰 3차 · 요구 4건</a:t>
+            </a:r>
+          </a:p>
+        </p:txBody>
+      </p:sp>
+      <p:sp>
+        <p:nvSpPr>
+          <p:cNvPr id="20" name="TextBox 19"/>
+          <p:cNvSpPr txBox="1"/>
+          <p:nvPr/>
+        </p:nvSpPr>
+        <p:spPr>
+          <a:xfrm>
+            <a:off x="6263640" y="2633472"/>
+            <a:ext cx="2651760" cy="310896"/>
+          </a:xfrm>
+          <a:prstGeom prst="rect">
+            <a:avLst/>
+          </a:prstGeom>
+          <a:noFill/>
+        </p:spPr>
+        <p:txBody>
+          <a:bodyPr wrap="square" lIns="36576" rIns="36576" tIns="0" bIns="0">
+            <a:spAutoFit/>
+          </a:bodyPr>
+          <a:lstStyle/>
+          <a:p>
+            <a:pPr algn="l">
+              <a:spcAft>
+                <a:spcPts val="400"/>
+              </a:spcAft>
+            </a:pPr>
+            <a:r>
+              <a:rPr sz="1100" b="0" i="0">
+                <a:solidFill>
+                  <a:srgbClr val="5D6D7E"/>
+                </a:solidFill>
+                <a:latin typeface="Malgun Gothic"/>
+              </a:rPr>
+              <a:t>오더십과 현장 지적 반영 완료</a:t>
+            </a:r>
+          </a:p>
+        </p:txBody>
+      </p:sp>
+      <p:sp>
+        <p:nvSpPr>
+          <p:cNvPr id="21" name="TextBox 20"/>
+          <p:cNvSpPr txBox="1"/>
+          <p:nvPr/>
+        </p:nvSpPr>
+        <p:spPr>
+          <a:xfrm>
+            <a:off x="9006840" y="2212848"/>
+            <a:ext cx="2651760" cy="384048"/>
+          </a:xfrm>
+          <a:prstGeom prst="rect">
+            <a:avLst/>
+          </a:prstGeom>
+          <a:noFill/>
+        </p:spPr>
+        <p:txBody>
+          <a:bodyPr wrap="square" lIns="36576" rIns="36576" tIns="0" bIns="0">
+            <a:spAutoFit/>
+          </a:bodyPr>
+          <a:lstStyle/>
+          <a:p>
+            <a:pPr algn="l">
+              <a:spcAft>
+                <a:spcPts val="400"/>
+              </a:spcAft>
+            </a:pPr>
+            <a:r>
+              <a:rPr sz="1800" b="1" i="0">
+                <a:solidFill>
+                  <a:srgbClr val="C0392B"/>
+                </a:solidFill>
+                <a:latin typeface="Malgun Gothic"/>
+              </a:rPr>
+              <a:t>로드맵 1 / 5</a:t>
+            </a:r>
+          </a:p>
+        </p:txBody>
+      </p:sp>
+      <p:sp>
+        <p:nvSpPr>
+          <p:cNvPr id="22" name="TextBox 21"/>
+          <p:cNvSpPr txBox="1"/>
+          <p:nvPr/>
+        </p:nvSpPr>
+        <p:spPr>
+          <a:xfrm>
+            <a:off x="9006840" y="2633472"/>
+            <a:ext cx="2651760" cy="310896"/>
+          </a:xfrm>
+          <a:prstGeom prst="rect">
+            <a:avLst/>
+          </a:prstGeom>
+          <a:noFill/>
+        </p:spPr>
+        <p:txBody>
+          <a:bodyPr wrap="square" lIns="36576" rIns="36576" tIns="0" bIns="0">
+            <a:spAutoFit/>
+          </a:bodyPr>
+          <a:lstStyle/>
+          <a:p>
+            <a:pPr algn="l">
+              <a:spcAft>
+                <a:spcPts val="400"/>
+              </a:spcAft>
+            </a:pPr>
+            <a:r>
+              <a:rPr sz="1100" b="0" i="0">
+                <a:solidFill>
+                  <a:srgbClr val="5D6D7E"/>
+                </a:solidFill>
+                <a:latin typeface="Malgun Gothic"/>
+              </a:rPr>
+              <a:t>신뢰성 확보 단계 · 전 단계 출하 가능</a:t>
+            </a:r>
+          </a:p>
+        </p:txBody>
+      </p:sp>
+      <p:sp>
+        <p:nvSpPr>
+          <p:cNvPr id="23" name="Rectangle 22"/>
           <p:cNvSpPr/>
           <p:nvPr/>
         </p:nvSpPr>
         <p:spPr>
           <a:xfrm>
-            <a:off x="640080" y="1024128"/>
-            <a:ext cx="1417320" cy="301752"/>
+            <a:off x="640080" y="3310128"/>
+            <a:ext cx="10908792" cy="2395728"/>
           </a:xfrm>
           <a:prstGeom prst="rect">
             <a:avLst/>
           </a:prstGeom>
           <a:solidFill>
-            <a:srgbClr val="8C8C8C"/>
+            <a:srgbClr val="F7F8F9"/>
           </a:solidFill>
-          <a:ln>
-            <a:noFill/>
+          <a:ln w="12700">
+            <a:solidFill>
+              <a:srgbClr val="D5DBDB"/>
+            </a:solidFill>
           </a:ln>
           <a:effectLst/>
         </p:spPr>
@@ -4122,32 +6639,21 @@
           </a:fontRef>
         </p:style>
         <p:txBody>
-          <a:bodyPr rtlCol="0" anchor="ctr" wrap="square" lIns="36576" rIns="36576" tIns="0" bIns="0"/>
+          <a:bodyPr rtlCol="0" anchor="ctr"/>
           <a:lstStyle/>
-          <a:p>
-            <a:pPr algn="ctr"/>
-            <a:r>
-              <a:rPr sz="1100" b="1" i="0">
-                <a:solidFill>
-                  <a:srgbClr val="FFFFFF"/>
-                </a:solidFill>
-                <a:latin typeface="Malgun Gothic"/>
-              </a:rPr>
-              <a:t>문제의 배경</a:t>
-            </a:r>
-          </a:p>
-        </p:txBody>
-      </p:sp>
-      <p:sp>
-        <p:nvSpPr>
-          <p:cNvPr id="16" name="TextBox 15"/>
+          <a:p/>
+        </p:txBody>
+      </p:sp>
+      <p:sp>
+        <p:nvSpPr>
+          <p:cNvPr id="24" name="TextBox 23"/>
           <p:cNvSpPr txBox="1"/>
           <p:nvPr/>
         </p:nvSpPr>
         <p:spPr>
           <a:xfrm>
-            <a:off x="868680" y="1499616"/>
-            <a:ext cx="6858000" cy="310896"/>
+            <a:off x="960120" y="3547872"/>
+            <a:ext cx="10241280" cy="384048"/>
           </a:xfrm>
           <a:prstGeom prst="rect">
             <a:avLst/>
@@ -4166,36 +6672,36 @@
               </a:spcAft>
             </a:pPr>
             <a:r>
-              <a:rPr sz="1200" b="1" i="0">
+              <a:rPr sz="1500" b="1" i="0">
+                <a:solidFill>
+                  <a:srgbClr val="C0392B"/>
+                </a:solidFill>
+                <a:latin typeface="Malgun Gothic"/>
+              </a:rPr>
+              <a:t>요청  —  </a:t>
+            </a:r>
+            <a:r>
+              <a:rPr sz="1500" b="1" i="0">
                 <a:solidFill>
                   <a:srgbClr val="1C2833"/>
                 </a:solidFill>
                 <a:latin typeface="Malgun Gothic"/>
               </a:rPr>
-              <a:t>AS-IS : </a:t>
-            </a:r>
-            <a:r>
-              <a:rPr sz="1200" b="0" i="0">
-                <a:solidFill>
-                  <a:srgbClr val="1C2833"/>
-                </a:solidFill>
-                <a:latin typeface="Malgun Gothic"/>
-              </a:rPr>
-              <a:t>3m 높이 철제 렉 사이 통로에서 지게차와 보행자가 서로를 볼 수 없음</a:t>
-            </a:r>
-          </a:p>
-        </p:txBody>
-      </p:sp>
-      <p:sp>
-        <p:nvSpPr>
-          <p:cNvPr id="17" name="TextBox 16"/>
+              <a:t>SafeAlert 를 정식 과제로 등록하고, 유지 · 검증에 필요한 리소스를 배정해 주십시오</a:t>
+            </a:r>
+          </a:p>
+        </p:txBody>
+      </p:sp>
+      <p:sp>
+        <p:nvSpPr>
+          <p:cNvPr id="25" name="TextBox 24"/>
           <p:cNvSpPr txBox="1"/>
           <p:nvPr/>
         </p:nvSpPr>
         <p:spPr>
           <a:xfrm>
-            <a:off x="868680" y="1810512"/>
-            <a:ext cx="6858000" cy="310896"/>
+            <a:off x="1051560" y="4069080"/>
+            <a:ext cx="10058400" cy="329184"/>
           </a:xfrm>
           <a:prstGeom prst="rect">
             <a:avLst/>
@@ -4214,14 +6720,44 @@
               </a:spcAft>
             </a:pPr>
             <a:r>
-              <a:rPr sz="1200" b="1" i="0">
+              <a:rPr sz="1200" b="0" i="0">
                 <a:solidFill>
                   <a:srgbClr val="1C2833"/>
                 </a:solidFill>
                 <a:latin typeface="Malgun Gothic"/>
               </a:rPr>
-              <a:t>Pain Point : </a:t>
-            </a:r>
+              <a:t>①  유지보수 주체 지정 — 지금은 개인 작업물이라 승계 경로가 없다</a:t>
+            </a:r>
+          </a:p>
+        </p:txBody>
+      </p:sp>
+      <p:sp>
+        <p:nvSpPr>
+          <p:cNvPr id="26" name="TextBox 25"/>
+          <p:cNvSpPr txBox="1"/>
+          <p:nvPr/>
+        </p:nvSpPr>
+        <p:spPr>
+          <a:xfrm>
+            <a:off x="1051560" y="4416552"/>
+            <a:ext cx="10058400" cy="329184"/>
+          </a:xfrm>
+          <a:prstGeom prst="rect">
+            <a:avLst/>
+          </a:prstGeom>
+          <a:noFill/>
+        </p:spPr>
+        <p:txBody>
+          <a:bodyPr wrap="square" lIns="36576" rIns="36576" tIns="0" bIns="0">
+            <a:spAutoFit/>
+          </a:bodyPr>
+          <a:lstStyle/>
+          <a:p>
+            <a:pPr algn="l">
+              <a:spcAft>
+                <a:spcPts val="400"/>
+              </a:spcAft>
+            </a:pPr>
             <a:r>
               <a:rPr sz="1200" b="0" i="0">
                 <a:solidFill>
@@ -4229,20 +6765,366 @@
                 </a:solidFill>
                 <a:latin typeface="Malgun Gothic"/>
               </a:rPr>
-              <a:t>적재 파렛트가 2.4GHz 전파를 흡수하고, 장비 소음으로 경적 인지도 늦음</a:t>
-            </a:r>
-          </a:p>
-        </p:txBody>
-      </p:sp>
-      <p:sp>
-        <p:nvSpPr>
-          <p:cNvPr id="18" name="Rectangle 17"/>
+              <a:t>②  개발 시간 배정 — Phase 2~5 는 기능 추가가 아니라 판정 재현성 확보다</a:t>
+            </a:r>
+          </a:p>
+        </p:txBody>
+      </p:sp>
+      <p:sp>
+        <p:nvSpPr>
+          <p:cNvPr id="27" name="TextBox 26"/>
+          <p:cNvSpPr txBox="1"/>
+          <p:nvPr/>
+        </p:nvSpPr>
+        <p:spPr>
+          <a:xfrm>
+            <a:off x="1051560" y="4764024"/>
+            <a:ext cx="10058400" cy="329184"/>
+          </a:xfrm>
+          <a:prstGeom prst="rect">
+            <a:avLst/>
+          </a:prstGeom>
+          <a:noFill/>
+        </p:spPr>
+        <p:txBody>
+          <a:bodyPr wrap="square" lIns="36576" rIns="36576" tIns="0" bIns="0">
+            <a:spAutoFit/>
+          </a:bodyPr>
+          <a:lstStyle/>
+          <a:p>
+            <a:pPr algn="l">
+              <a:spcAft>
+                <a:spcPts val="400"/>
+              </a:spcAft>
+            </a:pPr>
+            <a:r>
+              <a:rPr sz="1200" b="0" i="0">
+                <a:solidFill>
+                  <a:srgbClr val="1C2833"/>
+                </a:solidFill>
+                <a:latin typeface="Malgun Gothic"/>
+              </a:rPr>
+              <a:t>③  현장 검증 슬롯 — 실기 검증이 유일한 회귀 확인 수단, 단계당 확인 1건</a:t>
+            </a:r>
+          </a:p>
+        </p:txBody>
+      </p:sp>
+      <p:sp>
+        <p:nvSpPr>
+          <p:cNvPr id="28" name="TextBox 27"/>
+          <p:cNvSpPr txBox="1"/>
+          <p:nvPr/>
+        </p:nvSpPr>
+        <p:spPr>
+          <a:xfrm>
+            <a:off x="1051560" y="5111496"/>
+            <a:ext cx="10058400" cy="329184"/>
+          </a:xfrm>
+          <a:prstGeom prst="rect">
+            <a:avLst/>
+          </a:prstGeom>
+          <a:noFill/>
+        </p:spPr>
+        <p:txBody>
+          <a:bodyPr wrap="square" lIns="36576" rIns="36576" tIns="0" bIns="0">
+            <a:spAutoFit/>
+          </a:bodyPr>
+          <a:lstStyle/>
+          <a:p>
+            <a:pPr algn="l">
+              <a:spcAft>
+                <a:spcPts val="400"/>
+              </a:spcAft>
+            </a:pPr>
+            <a:r>
+              <a:rPr sz="1200" b="0" i="0">
+                <a:solidFill>
+                  <a:srgbClr val="1C2833"/>
+                </a:solidFill>
+                <a:latin typeface="Malgun Gothic"/>
+              </a:rPr>
+              <a:t>④  보안 검토 — 릴리스 난독화 미적용 · 경보 이력 평문 저장 (확산 전 선행)</a:t>
+            </a:r>
+          </a:p>
+        </p:txBody>
+      </p:sp>
+      <p:sp>
+        <p:nvSpPr>
+          <p:cNvPr id="29" name="TextBox 28"/>
+          <p:cNvSpPr txBox="1"/>
+          <p:nvPr/>
+        </p:nvSpPr>
+        <p:spPr>
+          <a:xfrm>
+            <a:off x="960120" y="5870448"/>
+            <a:ext cx="10241280" cy="310896"/>
+          </a:xfrm>
+          <a:prstGeom prst="rect">
+            <a:avLst/>
+          </a:prstGeom>
+          <a:noFill/>
+        </p:spPr>
+        <p:txBody>
+          <a:bodyPr wrap="square" lIns="36576" rIns="36576" tIns="0" bIns="0">
+            <a:spAutoFit/>
+          </a:bodyPr>
+          <a:lstStyle/>
+          <a:p>
+            <a:pPr algn="l">
+              <a:spcAft>
+                <a:spcPts val="400"/>
+              </a:spcAft>
+            </a:pPr>
+            <a:r>
+              <a:rPr sz="1150" b="0" i="1">
+                <a:solidFill>
+                  <a:srgbClr val="5D6D7E"/>
+                </a:solidFill>
+                <a:latin typeface="Malgun Gothic"/>
+              </a:rPr>
+              <a:t>결정이 필요한 시점 — Phase 2 착수 전.  그때까지는 현재 버전이 현장에서 그대로 운영된다.</a:t>
+            </a:r>
+          </a:p>
+        </p:txBody>
+      </p:sp>
+    </p:spTree>
+    <p:extLst>
+      <p:ext uri="{BB962C8B-B14F-4D97-AF65-F5344CB8AC3E}">
+        <p14:creationId xmlns:p14="http://schemas.microsoft.com/office/powerpoint/2010/main" val="3987384774"/>
+      </p:ext>
+    </p:extLst>
+  </p:cSld>
+  <p:clrMapOvr>
+    <a:masterClrMapping/>
+  </p:clrMapOvr>
+</p:sld>
+</file>
+
+<file path=ppt/slides/slide4.xml><?xml version="1.0" encoding="utf-8"?>
+<p:sld xmlns:a="http://schemas.openxmlformats.org/drawingml/2006/main" xmlns:r="http://schemas.openxmlformats.org/officeDocument/2006/relationships" xmlns:p="http://schemas.openxmlformats.org/presentationml/2006/main">
+  <p:cSld>
+    <p:spTree>
+      <p:nvGrpSpPr>
+        <p:cNvPr id="1" name="">
+          <a:extLst>
+            <a:ext uri="{FF2B5EF4-FFF2-40B4-BE49-F238E27FC236}">
+              <a16:creationId xmlns:a16="http://schemas.microsoft.com/office/drawing/2014/main" id="{E4EFD6F4-EBDD-9AC2-DC28-2DDF0C04A565}"/>
+            </a:ext>
+          </a:extLst>
+        </p:cNvPr>
+        <p:cNvGrpSpPr/>
+        <p:nvPr/>
+      </p:nvGrpSpPr>
+      <p:grpSpPr>
+        <a:xfrm>
+          <a:off x="0" y="0"/>
+          <a:ext cx="0" cy="0"/>
+          <a:chOff x="0" y="0"/>
+          <a:chExt cx="0" cy="0"/>
+        </a:xfrm>
+      </p:grpSpPr>
+      <p:sp>
+        <p:nvSpPr>
+          <p:cNvPr id="5" name="제목 1">
+            <a:extLst>
+              <a:ext uri="{FF2B5EF4-FFF2-40B4-BE49-F238E27FC236}">
+                <a16:creationId xmlns:a16="http://schemas.microsoft.com/office/drawing/2014/main" id="{3462F1EA-748D-175E-1C14-5E9984552716}"/>
+              </a:ext>
+            </a:extLst>
+          </p:cNvPr>
+          <p:cNvSpPr txBox="1">
+            <a:spLocks/>
+          </p:cNvSpPr>
+          <p:nvPr/>
+        </p:nvSpPr>
+        <p:spPr>
+          <a:xfrm>
+            <a:off x="636390" y="928122"/>
+            <a:ext cx="11342595" cy="3980770"/>
+          </a:xfrm>
+          <a:prstGeom prst="rect">
+            <a:avLst/>
+          </a:prstGeom>
+          <a:noFill/>
+        </p:spPr>
+        <p:txBody>
+          <a:bodyPr vert="horz" wrap="square" lIns="91440" tIns="45720" rIns="91440" bIns="45720" rtlCol="0" anchor="t">
+            <a:spAutoFit/>
+          </a:bodyPr>
+          <a:lstStyle>
+            <a:lvl1pPr marL="0" indent="0" algn="l" defTabSz="914400" rtl="0" eaLnBrk="1" latinLnBrk="1" hangingPunct="1">
+              <a:lnSpc>
+                <a:spcPct val="100000"/>
+              </a:lnSpc>
+              <a:spcBef>
+                <a:spcPct val="0"/>
+              </a:spcBef>
+              <a:buNone/>
+              <a:defRPr lang="en-US" sz="1600" b="1" kern="1200" dirty="0">
+                <a:solidFill>
+                  <a:srgbClr val="560000"/>
+                </a:solidFill>
+                <a:latin typeface="+mj-ea"/>
+                <a:ea typeface="+mj-ea"/>
+                <a:cs typeface="+mn-cs"/>
+              </a:defRPr>
+            </a:lvl1pPr>
+          </a:lstStyle>
+          <a:p>
+            <a:pPr>
+              <a:lnSpc>
+                <a:spcPct val="150000"/>
+              </a:lnSpc>
+            </a:pPr>
+            <a:endParaRPr lang="en-US" altLang="ko-KR" sz="1400" dirty="0">
+              <a:solidFill>
+                <a:schemeClr val="tx1"/>
+              </a:solidFill>
+              <a:latin typeface="+mn-ea"/>
+              <a:ea typeface="+mn-ea"/>
+            </a:endParaRPr>
+          </a:p>
+        </p:txBody>
+      </p:sp>
+      <p:sp>
+        <p:nvSpPr>
+          <p:cNvPr id="2" name="제목 1">
+            <a:extLst>
+              <a:ext uri="{FF2B5EF4-FFF2-40B4-BE49-F238E27FC236}">
+                <a16:creationId xmlns:a16="http://schemas.microsoft.com/office/drawing/2014/main" id="{54B5B938-7AFE-1302-EB19-024D633AA023}"/>
+              </a:ext>
+            </a:extLst>
+          </p:cNvPr>
+          <p:cNvSpPr>
+            <a:spLocks noGrp="1"/>
+          </p:cNvSpPr>
+          <p:nvPr>
+            <p:ph type="title"/>
+          </p:nvPr>
+        </p:nvSpPr>
+        <p:spPr>
+          <a:xfrm>
+            <a:off x="636391" y="595686"/>
+            <a:ext cx="11293263" cy="338554"/>
+          </a:xfrm>
+        </p:spPr>
+        <p:txBody>
+          <a:bodyPr/>
+          <a:lstStyle/>
+          <a:p>
+            <a:r>
+              <a:rPr lang="en-US" altLang="ko-KR" dirty="0">
+                <a:latin typeface="맑은 고딕" panose="020B0503020000020004" pitchFamily="50" charset="-127"/>
+                <a:ea typeface="맑은 고딕" panose="020B0503020000020004" pitchFamily="50" charset="-127"/>
+              </a:rPr>
+              <a:t>1. 개발 배경</a:t>
+            </a:r>
+            <a:endParaRPr lang="ko-KR" altLang="en-US" dirty="0"/>
+          </a:p>
+        </p:txBody>
+      </p:sp>
+      <p:sp>
+        <p:nvSpPr>
+          <p:cNvPr id="12" name="슬라이드 번호 개체 틀 11">
+            <a:extLst>
+              <a:ext uri="{FF2B5EF4-FFF2-40B4-BE49-F238E27FC236}">
+                <a16:creationId xmlns:a16="http://schemas.microsoft.com/office/drawing/2014/main" id="{B7184ABC-D9FC-E120-072A-5615A9569176}"/>
+              </a:ext>
+            </a:extLst>
+          </p:cNvPr>
+          <p:cNvSpPr>
+            <a:spLocks noGrp="1"/>
+          </p:cNvSpPr>
+          <p:nvPr>
+            <p:ph type="sldNum" sz="quarter" idx="12"/>
+          </p:nvPr>
+        </p:nvSpPr>
+        <p:spPr/>
+        <p:txBody>
+          <a:bodyPr/>
+          <a:lstStyle/>
+          <a:p>
+            <a:fld id="{A2CF8A37-2FCE-495B-9275-FE23C56C2D36}" type="slidenum">
+              <a:rPr lang="ko-KR" altLang="en-US" smtClean="0"/>
+              <a:pPr/>
+              <a:t>4</a:t>
+            </a:fld>
+            <a:endParaRPr lang="ko-KR" altLang="en-US" dirty="0"/>
+          </a:p>
+        </p:txBody>
+      </p:sp>
+      <p:pic>
+        <p:nvPicPr>
+          <p:cNvPr id="13" name="Picture 12" descr="fig_aisle.jpg"/>
+          <p:cNvPicPr>
+            <a:picLocks noChangeAspect="1"/>
+          </p:cNvPicPr>
+          <p:nvPr/>
+        </p:nvPicPr>
+        <p:blipFill>
+          <a:blip r:embed="rId2"/>
+          <a:stretch>
+            <a:fillRect/>
+          </a:stretch>
+        </p:blipFill>
+        <p:spPr>
+          <a:xfrm>
+            <a:off x="7882127" y="1024128"/>
+            <a:ext cx="3913632" cy="2446020"/>
+          </a:xfrm>
+          <a:prstGeom prst="rect">
+            <a:avLst/>
+          </a:prstGeom>
+        </p:spPr>
+      </p:pic>
+      <p:sp>
+        <p:nvSpPr>
+          <p:cNvPr id="14" name="TextBox 13"/>
+          <p:cNvSpPr txBox="1"/>
+          <p:nvPr/>
+        </p:nvSpPr>
+        <p:spPr>
+          <a:xfrm>
+            <a:off x="7882127" y="3561588"/>
+            <a:ext cx="3913632" cy="274320"/>
+          </a:xfrm>
+          <a:prstGeom prst="rect">
+            <a:avLst/>
+          </a:prstGeom>
+          <a:noFill/>
+        </p:spPr>
+        <p:txBody>
+          <a:bodyPr wrap="square" lIns="36576" rIns="36576" tIns="0" bIns="0">
+            <a:spAutoFit/>
+          </a:bodyPr>
+          <a:lstStyle/>
+          <a:p>
+            <a:pPr algn="ctr">
+              <a:spcAft>
+                <a:spcPts val="400"/>
+              </a:spcAft>
+            </a:pPr>
+            <a:r>
+              <a:rPr sz="1000" b="0" i="0">
+                <a:solidFill>
+                  <a:srgbClr val="5D6D7E"/>
+                </a:solidFill>
+                <a:latin typeface="Malgun Gothic"/>
+              </a:rPr>
+              <a:t>3m 렉 사이 통로 — 교차 구간에서 서로 보이지 않는다</a:t>
+            </a:r>
+          </a:p>
+        </p:txBody>
+      </p:sp>
+      <p:sp>
+        <p:nvSpPr>
+          <p:cNvPr id="15" name="Rectangle 14"/>
           <p:cNvSpPr/>
           <p:nvPr/>
         </p:nvSpPr>
         <p:spPr>
           <a:xfrm>
-            <a:off x="640080" y="2304288"/>
+            <a:off x="640080" y="1024128"/>
             <a:ext cx="1417320" cy="301752"/>
           </a:xfrm>
           <a:prstGeom prst="rect">
@@ -4282,20 +7164,20 @@
                 </a:solidFill>
                 <a:latin typeface="Malgun Gothic"/>
               </a:rPr>
-              <a:t>현재 상황</a:t>
-            </a:r>
-          </a:p>
-        </p:txBody>
-      </p:sp>
-      <p:sp>
-        <p:nvSpPr>
-          <p:cNvPr id="19" name="TextBox 18"/>
+              <a:t>문제의 배경</a:t>
+            </a:r>
+          </a:p>
+        </p:txBody>
+      </p:sp>
+      <p:sp>
+        <p:nvSpPr>
+          <p:cNvPr id="16" name="TextBox 15"/>
           <p:cNvSpPr txBox="1"/>
           <p:nvPr/>
         </p:nvSpPr>
         <p:spPr>
           <a:xfrm>
-            <a:off x="868680" y="2779776"/>
+            <a:off x="868680" y="1499616"/>
             <a:ext cx="6858000" cy="310896"/>
           </a:xfrm>
           <a:prstGeom prst="rect">
@@ -4321,7 +7203,7 @@
                 </a:solidFill>
                 <a:latin typeface="Malgun Gothic"/>
               </a:rPr>
-              <a:t>Data : </a:t>
+              <a:t>AS-IS : </a:t>
             </a:r>
             <a:r>
               <a:rPr sz="1200" b="0" i="0">
@@ -4330,20 +7212,20 @@
                 </a:solidFill>
                 <a:latin typeface="Malgun Gothic"/>
               </a:rPr>
-              <a:t>지게차 · 리치 · EPJ · 보행자가 같은 통로를 공유. 렉 사이 단독 작업 구간도 있음</a:t>
-            </a:r>
-          </a:p>
-        </p:txBody>
-      </p:sp>
-      <p:sp>
-        <p:nvSpPr>
-          <p:cNvPr id="20" name="TextBox 19"/>
+              <a:t>3m 높이 철제 렉 사이 통로에서 지게차와 보행자가 서로를 볼 수 없음</a:t>
+            </a:r>
+          </a:p>
+        </p:txBody>
+      </p:sp>
+      <p:sp>
+        <p:nvSpPr>
+          <p:cNvPr id="17" name="TextBox 16"/>
           <p:cNvSpPr txBox="1"/>
           <p:nvPr/>
         </p:nvSpPr>
         <p:spPr>
           <a:xfrm>
-            <a:off x="868680" y="3090672"/>
+            <a:off x="868680" y="1810512"/>
             <a:ext cx="6858000" cy="310896"/>
           </a:xfrm>
           <a:prstGeom prst="rect">
@@ -4369,7 +7251,7 @@
                 </a:solidFill>
                 <a:latin typeface="Malgun Gothic"/>
               </a:rPr>
-              <a:t>Issue : </a:t>
+              <a:t>Pain Point : </a:t>
             </a:r>
             <a:r>
               <a:rPr sz="1200" b="0" i="0">
@@ -4378,21 +7260,21 @@
                 </a:solidFill>
                 <a:latin typeface="Malgun Gothic"/>
               </a:rPr>
-              <a:t>사각지대를 사람의 주의력에만 맡기고 있어, 보이지 않는 구간은 대책이 없음</a:t>
-            </a:r>
-          </a:p>
-        </p:txBody>
-      </p:sp>
-      <p:sp>
-        <p:nvSpPr>
-          <p:cNvPr id="21" name="Rectangle 20"/>
+              <a:t>적재 파렛트가 2.4GHz 전파를 흡수하고, 장비 소음으로 경적 인지도 늦음</a:t>
+            </a:r>
+          </a:p>
+        </p:txBody>
+      </p:sp>
+      <p:sp>
+        <p:nvSpPr>
+          <p:cNvPr id="18" name="Rectangle 17"/>
           <p:cNvSpPr/>
           <p:nvPr/>
         </p:nvSpPr>
         <p:spPr>
           <a:xfrm>
-            <a:off x="640080" y="3675887"/>
-            <a:ext cx="1874519" cy="301752"/>
+            <a:off x="640080" y="2304288"/>
+            <a:ext cx="1417320" cy="301752"/>
           </a:xfrm>
           <a:prstGeom prst="rect">
             <a:avLst/>
@@ -4431,6 +7313,155 @@
                 </a:solidFill>
                 <a:latin typeface="Malgun Gothic"/>
               </a:rPr>
+              <a:t>현재 상황</a:t>
+            </a:r>
+          </a:p>
+        </p:txBody>
+      </p:sp>
+      <p:sp>
+        <p:nvSpPr>
+          <p:cNvPr id="19" name="TextBox 18"/>
+          <p:cNvSpPr txBox="1"/>
+          <p:nvPr/>
+        </p:nvSpPr>
+        <p:spPr>
+          <a:xfrm>
+            <a:off x="868680" y="2779776"/>
+            <a:ext cx="6858000" cy="310896"/>
+          </a:xfrm>
+          <a:prstGeom prst="rect">
+            <a:avLst/>
+          </a:prstGeom>
+          <a:noFill/>
+        </p:spPr>
+        <p:txBody>
+          <a:bodyPr wrap="square" lIns="36576" rIns="36576" tIns="0" bIns="0">
+            <a:spAutoFit/>
+          </a:bodyPr>
+          <a:lstStyle/>
+          <a:p>
+            <a:pPr algn="l">
+              <a:spcAft>
+                <a:spcPts val="400"/>
+              </a:spcAft>
+            </a:pPr>
+            <a:r>
+              <a:rPr sz="1200" b="1" i="0">
+                <a:solidFill>
+                  <a:srgbClr val="1C2833"/>
+                </a:solidFill>
+                <a:latin typeface="Malgun Gothic"/>
+              </a:rPr>
+              <a:t>Data : </a:t>
+            </a:r>
+            <a:r>
+              <a:rPr sz="1200" b="0" i="0">
+                <a:solidFill>
+                  <a:srgbClr val="1C2833"/>
+                </a:solidFill>
+                <a:latin typeface="Malgun Gothic"/>
+              </a:rPr>
+              <a:t>지게차 · 리치 · EPJ · 보행자가 같은 통로를 공유. 렉 사이 단독 작업 구간도 있음</a:t>
+            </a:r>
+          </a:p>
+        </p:txBody>
+      </p:sp>
+      <p:sp>
+        <p:nvSpPr>
+          <p:cNvPr id="20" name="TextBox 19"/>
+          <p:cNvSpPr txBox="1"/>
+          <p:nvPr/>
+        </p:nvSpPr>
+        <p:spPr>
+          <a:xfrm>
+            <a:off x="868680" y="3090672"/>
+            <a:ext cx="6858000" cy="310896"/>
+          </a:xfrm>
+          <a:prstGeom prst="rect">
+            <a:avLst/>
+          </a:prstGeom>
+          <a:noFill/>
+        </p:spPr>
+        <p:txBody>
+          <a:bodyPr wrap="square" lIns="36576" rIns="36576" tIns="0" bIns="0">
+            <a:spAutoFit/>
+          </a:bodyPr>
+          <a:lstStyle/>
+          <a:p>
+            <a:pPr algn="l">
+              <a:spcAft>
+                <a:spcPts val="400"/>
+              </a:spcAft>
+            </a:pPr>
+            <a:r>
+              <a:rPr sz="1200" b="1" i="0">
+                <a:solidFill>
+                  <a:srgbClr val="1C2833"/>
+                </a:solidFill>
+                <a:latin typeface="Malgun Gothic"/>
+              </a:rPr>
+              <a:t>Issue : </a:t>
+            </a:r>
+            <a:r>
+              <a:rPr sz="1200" b="0" i="0">
+                <a:solidFill>
+                  <a:srgbClr val="1C2833"/>
+                </a:solidFill>
+                <a:latin typeface="Malgun Gothic"/>
+              </a:rPr>
+              <a:t>사각지대를 사람의 주의력에만 맡기고 있어, 보이지 않는 구간은 대책이 없음</a:t>
+            </a:r>
+          </a:p>
+        </p:txBody>
+      </p:sp>
+      <p:sp>
+        <p:nvSpPr>
+          <p:cNvPr id="21" name="Rectangle 20"/>
+          <p:cNvSpPr/>
+          <p:nvPr/>
+        </p:nvSpPr>
+        <p:spPr>
+          <a:xfrm>
+            <a:off x="640080" y="3675887"/>
+            <a:ext cx="1874519" cy="301752"/>
+          </a:xfrm>
+          <a:prstGeom prst="rect">
+            <a:avLst/>
+          </a:prstGeom>
+          <a:solidFill>
+            <a:srgbClr val="8C8C8C"/>
+          </a:solidFill>
+          <a:ln>
+            <a:noFill/>
+          </a:ln>
+          <a:effectLst/>
+        </p:spPr>
+        <p:style>
+          <a:lnRef idx="1">
+            <a:schemeClr val="accent1"/>
+          </a:lnRef>
+          <a:fillRef idx="3">
+            <a:schemeClr val="accent1"/>
+          </a:fillRef>
+          <a:effectRef idx="2">
+            <a:schemeClr val="accent1"/>
+          </a:effectRef>
+          <a:fontRef idx="minor">
+            <a:schemeClr val="lt1"/>
+          </a:fontRef>
+        </p:style>
+        <p:txBody>
+          <a:bodyPr rtlCol="0" anchor="ctr" wrap="square" lIns="36576" rIns="36576" tIns="0" bIns="0"/>
+          <a:lstStyle/>
+          <a:p>
+            <a:pPr algn="ctr"/>
+            <a:r>
+              <a:rPr sz="1100" b="1" i="0">
+                <a:solidFill>
+                  <a:srgbClr val="FFFFFF"/>
+                </a:solidFill>
+                <a:latin typeface="Malgun Gothic"/>
+              </a:rPr>
               <a:t>왜 앱으로 만들었나</a:t>
             </a:r>
           </a:p>
@@ -4699,7 +7730,7 @@
 </p:sld>
 </file>
 
-<file path=ppt/slides/slide4.xml><?xml version="1.0" encoding="utf-8"?>
+<file path=ppt/slides/slide5.xml><?xml version="1.0" encoding="utf-8"?>
 <p:sld xmlns:a="http://schemas.openxmlformats.org/drawingml/2006/main" xmlns:r="http://schemas.openxmlformats.org/officeDocument/2006/relationships" xmlns:p="http://schemas.openxmlformats.org/presentationml/2006/main">
   <p:cSld>
     <p:spTree>
@@ -5886,7 +8917,7 @@
 </p:sld>
 </file>
 
-<file path=ppt/slides/slide5.xml><?xml version="1.0" encoding="utf-8"?>
+<file path=ppt/slides/slide6.xml><?xml version="1.0" encoding="utf-8"?>
 <p:sld xmlns:a="http://schemas.openxmlformats.org/drawingml/2006/main" xmlns:r="http://schemas.openxmlformats.org/officeDocument/2006/relationships" xmlns:p="http://schemas.openxmlformats.org/presentationml/2006/main">
   <p:cSld>
     <p:spTree>
@@ -6100,6 +9131,45 @@
         </p:nvSpPr>
         <p:spPr>
           <a:xfrm>
+            <a:off x="2057400" y="1051560"/>
+            <a:ext cx="9509760" cy="274320"/>
+          </a:xfrm>
+          <a:prstGeom prst="rect">
+            <a:avLst/>
+          </a:prstGeom>
+          <a:noFill/>
+        </p:spPr>
+        <p:txBody>
+          <a:bodyPr wrap="square" lIns="36576" rIns="36576" tIns="0" bIns="0">
+            <a:spAutoFit/>
+          </a:bodyPr>
+          <a:lstStyle/>
+          <a:p>
+            <a:pPr algn="l">
+              <a:spcAft>
+                <a:spcPts val="400"/>
+              </a:spcAft>
+            </a:pPr>
+            <a:r>
+              <a:rPr sz="1200" b="0" i="0">
+                <a:solidFill>
+                  <a:srgbClr val="5D6D7E"/>
+                </a:solidFill>
+                <a:latin typeface="Malgun Gothic"/>
+              </a:rPr>
+              <a:t>넷 다 의도한 선택이다. 무엇을 얻으려고 무엇을 내줬는지로 적는다.</a:t>
+            </a:r>
+          </a:p>
+        </p:txBody>
+      </p:sp>
+      <p:sp>
+        <p:nvSpPr>
+          <p:cNvPr id="15" name="TextBox 14"/>
+          <p:cNvSpPr txBox="1"/>
+          <p:nvPr/>
+        </p:nvSpPr>
+        <p:spPr>
+          <a:xfrm>
             <a:off x="777240" y="1389888"/>
             <a:ext cx="4389120" cy="777240"/>
           </a:xfrm>
@@ -6149,7 +9219,7 @@
       </p:sp>
       <p:sp>
         <p:nvSpPr>
-          <p:cNvPr id="15" name="Right Arrow 14"/>
+          <p:cNvPr id="16" name="Right Arrow 15"/>
           <p:cNvSpPr/>
           <p:nvPr/>
         </p:nvSpPr>
@@ -6193,7 +9263,7 @@
       </p:sp>
       <p:sp>
         <p:nvSpPr>
-          <p:cNvPr id="16" name="TextBox 15"/>
+          <p:cNvPr id="17" name="TextBox 16"/>
           <p:cNvSpPr txBox="1"/>
           <p:nvPr/>
         </p:nvSpPr>
@@ -6233,7 +9303,7 @@
       </p:sp>
       <p:sp>
         <p:nvSpPr>
-          <p:cNvPr id="17" name="TextBox 16"/>
+          <p:cNvPr id="18" name="TextBox 17"/>
           <p:cNvSpPr txBox="1"/>
           <p:nvPr/>
         </p:nvSpPr>
@@ -6288,7 +9358,7 @@
       </p:sp>
       <p:sp>
         <p:nvSpPr>
-          <p:cNvPr id="18" name="Right Arrow 17"/>
+          <p:cNvPr id="19" name="Right Arrow 18"/>
           <p:cNvSpPr/>
           <p:nvPr/>
         </p:nvSpPr>
@@ -6332,7 +9402,7 @@
       </p:sp>
       <p:sp>
         <p:nvSpPr>
-          <p:cNvPr id="19" name="TextBox 18"/>
+          <p:cNvPr id="20" name="TextBox 19"/>
           <p:cNvSpPr txBox="1"/>
           <p:nvPr/>
         </p:nvSpPr>
@@ -6372,7 +9442,7 @@
       </p:sp>
       <p:sp>
         <p:nvSpPr>
-          <p:cNvPr id="20" name="TextBox 19"/>
+          <p:cNvPr id="21" name="TextBox 20"/>
           <p:cNvSpPr txBox="1"/>
           <p:nvPr/>
         </p:nvSpPr>
@@ -6427,7 +9497,7 @@
       </p:sp>
       <p:sp>
         <p:nvSpPr>
-          <p:cNvPr id="21" name="Right Arrow 20"/>
+          <p:cNvPr id="22" name="Right Arrow 21"/>
           <p:cNvSpPr/>
           <p:nvPr/>
         </p:nvSpPr>
@@ -6471,7 +9541,7 @@
       </p:sp>
       <p:sp>
         <p:nvSpPr>
-          <p:cNvPr id="22" name="TextBox 21"/>
+          <p:cNvPr id="23" name="TextBox 22"/>
           <p:cNvSpPr txBox="1"/>
           <p:nvPr/>
         </p:nvSpPr>
@@ -6511,7 +9581,7 @@
       </p:sp>
       <p:sp>
         <p:nvSpPr>
-          <p:cNvPr id="23" name="TextBox 22"/>
+          <p:cNvPr id="24" name="TextBox 23"/>
           <p:cNvSpPr txBox="1"/>
           <p:nvPr/>
         </p:nvSpPr>
@@ -6566,7 +9636,7 @@
       </p:sp>
       <p:sp>
         <p:nvSpPr>
-          <p:cNvPr id="24" name="Right Arrow 23"/>
+          <p:cNvPr id="25" name="Right Arrow 24"/>
           <p:cNvSpPr/>
           <p:nvPr/>
         </p:nvSpPr>
@@ -6610,7 +9680,7 @@
       </p:sp>
       <p:sp>
         <p:nvSpPr>
-          <p:cNvPr id="25" name="TextBox 24"/>
+          <p:cNvPr id="26" name="TextBox 25"/>
           <p:cNvSpPr txBox="1"/>
           <p:nvPr/>
         </p:nvSpPr>
@@ -6650,7 +9720,7 @@
       </p:sp>
       <p:sp>
         <p:nvSpPr>
-          <p:cNvPr id="26" name="Rectangle 25"/>
+          <p:cNvPr id="27" name="Rectangle 26"/>
           <p:cNvSpPr/>
           <p:nvPr/>
         </p:nvSpPr>
@@ -6703,7 +9773,7 @@
       </p:sp>
       <p:sp>
         <p:nvSpPr>
-          <p:cNvPr id="27" name="TextBox 26"/>
+          <p:cNvPr id="28" name="TextBox 27"/>
           <p:cNvSpPr txBox="1"/>
           <p:nvPr/>
         </p:nvSpPr>
@@ -6742,7 +9812,7 @@
       </p:sp>
       <p:sp>
         <p:nvSpPr>
-          <p:cNvPr id="28" name="TextBox 27"/>
+          <p:cNvPr id="29" name="TextBox 28"/>
           <p:cNvSpPr txBox="1"/>
           <p:nvPr/>
         </p:nvSpPr>
@@ -6781,7 +9851,7 @@
       </p:sp>
       <p:sp>
         <p:nvSpPr>
-          <p:cNvPr id="29" name="TextBox 28"/>
+          <p:cNvPr id="30" name="TextBox 29"/>
           <p:cNvSpPr txBox="1"/>
           <p:nvPr/>
         </p:nvSpPr>
@@ -6820,7 +9890,7 @@
       </p:sp>
       <p:pic>
         <p:nvPicPr>
-          <p:cNvPr id="30" name="Picture 29" descr="fig_radius.png"/>
+          <p:cNvPr id="31" name="Picture 30" descr="fig_radius.png"/>
           <p:cNvPicPr>
             <a:picLocks noChangeAspect="1"/>
           </p:cNvPicPr>
@@ -6855,7 +9925,7 @@
 </p:sld>
 </file>
 
-<file path=ppt/slides/slide6.xml><?xml version="1.0" encoding="utf-8"?>
+<file path=ppt/slides/slide7.xml><?xml version="1.0" encoding="utf-8"?>
 <p:sld xmlns:a="http://schemas.openxmlformats.org/drawingml/2006/main" xmlns:r="http://schemas.openxmlformats.org/officeDocument/2006/relationships" xmlns:p="http://schemas.openxmlformats.org/presentationml/2006/main">
   <p:cSld>
     <p:spTree>
@@ -8384,7 +11454,7 @@
 </p:sld>
 </file>
 
-<file path=ppt/slides/slide7.xml><?xml version="1.0" encoding="utf-8"?>
+<file path=ppt/slides/slide8.xml><?xml version="1.0" encoding="utf-8"?>
 <p:sld xmlns:a="http://schemas.openxmlformats.org/drawingml/2006/main" xmlns:r="http://schemas.openxmlformats.org/officeDocument/2006/relationships" xmlns:p="http://schemas.openxmlformats.org/presentationml/2006/main">
   <p:cSld>
     <p:spTree>
@@ -8964,7 +12034,7 @@
 </p:sld>
 </file>
 
-<file path=ppt/slides/slide8.xml><?xml version="1.0" encoding="utf-8"?>
+<file path=ppt/slides/slide9.xml><?xml version="1.0" encoding="utf-8"?>
 <p:sld xmlns:a="http://schemas.openxmlformats.org/drawingml/2006/main" xmlns:r="http://schemas.openxmlformats.org/officeDocument/2006/relationships" xmlns:p="http://schemas.openxmlformats.org/presentationml/2006/main">
   <p:cSld>
     <p:spTree>
@@ -10488,1118 +13558,6 @@
                 <a:latin typeface="Malgun Gothic"/>
               </a:rPr>
               <a:t>현장 확인은 단계당 1건</a:t>
-            </a:r>
-          </a:p>
-        </p:txBody>
-      </p:sp>
-    </p:spTree>
-    <p:extLst>
-      <p:ext uri="{BB962C8B-B14F-4D97-AF65-F5344CB8AC3E}">
-        <p14:creationId xmlns:p14="http://schemas.microsoft.com/office/powerpoint/2010/main" val="3987384774"/>
-      </p:ext>
-    </p:extLst>
-  </p:cSld>
-  <p:clrMapOvr>
-    <a:masterClrMapping/>
-  </p:clrMapOvr>
-</p:sld>
-</file>
-
-<file path=ppt/slides/slide9.xml><?xml version="1.0" encoding="utf-8"?>
-<p:sld xmlns:a="http://schemas.openxmlformats.org/drawingml/2006/main" xmlns:r="http://schemas.openxmlformats.org/officeDocument/2006/relationships" xmlns:p="http://schemas.openxmlformats.org/presentationml/2006/main">
-  <p:cSld>
-    <p:spTree>
-      <p:nvGrpSpPr>
-        <p:cNvPr id="1" name="">
-          <a:extLst>
-            <a:ext uri="{FF2B5EF4-FFF2-40B4-BE49-F238E27FC236}">
-              <a16:creationId xmlns:a16="http://schemas.microsoft.com/office/drawing/2014/main" id="{E4EFD6F4-EBDD-9AC2-DC28-2DDF0C04A565}"/>
-            </a:ext>
-          </a:extLst>
-        </p:cNvPr>
-        <p:cNvGrpSpPr/>
-        <p:nvPr/>
-      </p:nvGrpSpPr>
-      <p:grpSpPr>
-        <a:xfrm>
-          <a:off x="0" y="0"/>
-          <a:ext cx="0" cy="0"/>
-          <a:chOff x="0" y="0"/>
-          <a:chExt cx="0" cy="0"/>
-        </a:xfrm>
-      </p:grpSpPr>
-      <p:sp>
-        <p:nvSpPr>
-          <p:cNvPr id="5" name="제목 1">
-            <a:extLst>
-              <a:ext uri="{FF2B5EF4-FFF2-40B4-BE49-F238E27FC236}">
-                <a16:creationId xmlns:a16="http://schemas.microsoft.com/office/drawing/2014/main" id="{3462F1EA-748D-175E-1C14-5E9984552716}"/>
-              </a:ext>
-            </a:extLst>
-          </p:cNvPr>
-          <p:cNvSpPr txBox="1">
-            <a:spLocks/>
-          </p:cNvSpPr>
-          <p:nvPr/>
-        </p:nvSpPr>
-        <p:spPr>
-          <a:xfrm>
-            <a:off x="636390" y="928122"/>
-            <a:ext cx="11342595" cy="3980770"/>
-          </a:xfrm>
-          <a:prstGeom prst="rect">
-            <a:avLst/>
-          </a:prstGeom>
-          <a:noFill/>
-        </p:spPr>
-        <p:txBody>
-          <a:bodyPr vert="horz" wrap="square" lIns="91440" tIns="45720" rIns="91440" bIns="45720" rtlCol="0" anchor="t">
-            <a:spAutoFit/>
-          </a:bodyPr>
-          <a:lstStyle>
-            <a:lvl1pPr marL="0" indent="0" algn="l" defTabSz="914400" rtl="0" eaLnBrk="1" latinLnBrk="1" hangingPunct="1">
-              <a:lnSpc>
-                <a:spcPct val="100000"/>
-              </a:lnSpc>
-              <a:spcBef>
-                <a:spcPct val="0"/>
-              </a:spcBef>
-              <a:buNone/>
-              <a:defRPr lang="en-US" sz="1600" b="1" kern="1200" dirty="0">
-                <a:solidFill>
-                  <a:srgbClr val="560000"/>
-                </a:solidFill>
-                <a:latin typeface="+mj-ea"/>
-                <a:ea typeface="+mj-ea"/>
-                <a:cs typeface="+mn-cs"/>
-              </a:defRPr>
-            </a:lvl1pPr>
-          </a:lstStyle>
-          <a:p>
-            <a:pPr>
-              <a:lnSpc>
-                <a:spcPct val="150000"/>
-              </a:lnSpc>
-            </a:pPr>
-            <a:endParaRPr lang="en-US" altLang="ko-KR" sz="1400" dirty="0">
-              <a:solidFill>
-                <a:schemeClr val="tx1"/>
-              </a:solidFill>
-              <a:latin typeface="+mn-ea"/>
-              <a:ea typeface="+mn-ea"/>
-            </a:endParaRPr>
-          </a:p>
-        </p:txBody>
-      </p:sp>
-      <p:sp>
-        <p:nvSpPr>
-          <p:cNvPr id="2" name="제목 1">
-            <a:extLst>
-              <a:ext uri="{FF2B5EF4-FFF2-40B4-BE49-F238E27FC236}">
-                <a16:creationId xmlns:a16="http://schemas.microsoft.com/office/drawing/2014/main" id="{54B5B938-7AFE-1302-EB19-024D633AA023}"/>
-              </a:ext>
-            </a:extLst>
-          </p:cNvPr>
-          <p:cNvSpPr>
-            <a:spLocks noGrp="1"/>
-          </p:cNvSpPr>
-          <p:nvPr>
-            <p:ph type="title"/>
-          </p:nvPr>
-        </p:nvSpPr>
-        <p:spPr>
-          <a:xfrm>
-            <a:off x="636391" y="595686"/>
-            <a:ext cx="11293263" cy="338554"/>
-          </a:xfrm>
-        </p:spPr>
-        <p:txBody>
-          <a:bodyPr/>
-          <a:lstStyle/>
-          <a:p>
-            <a:r>
-              <a:rPr lang="en-US" altLang="ko-KR" dirty="0">
-                <a:latin typeface="맑은 고딕" panose="020B0503020000020004" pitchFamily="50" charset="-127"/>
-                <a:ea typeface="맑은 고딕" panose="020B0503020000020004" pitchFamily="50" charset="-127"/>
-              </a:rPr>
-              <a:t>7. Andon — 이럴 때 멈춘다</a:t>
-            </a:r>
-            <a:endParaRPr lang="ko-KR" altLang="en-US" dirty="0"/>
-          </a:p>
-        </p:txBody>
-      </p:sp>
-      <p:sp>
-        <p:nvSpPr>
-          <p:cNvPr id="12" name="슬라이드 번호 개체 틀 11">
-            <a:extLst>
-              <a:ext uri="{FF2B5EF4-FFF2-40B4-BE49-F238E27FC236}">
-                <a16:creationId xmlns:a16="http://schemas.microsoft.com/office/drawing/2014/main" id="{B7184ABC-D9FC-E120-072A-5615A9569176}"/>
-              </a:ext>
-            </a:extLst>
-          </p:cNvPr>
-          <p:cNvSpPr>
-            <a:spLocks noGrp="1"/>
-          </p:cNvSpPr>
-          <p:nvPr>
-            <p:ph type="sldNum" sz="quarter" idx="12"/>
-          </p:nvPr>
-        </p:nvSpPr>
-        <p:spPr/>
-        <p:txBody>
-          <a:bodyPr/>
-          <a:lstStyle/>
-          <a:p>
-            <a:fld id="{A2CF8A37-2FCE-495B-9275-FE23C56C2D36}" type="slidenum">
-              <a:rPr lang="ko-KR" altLang="en-US" smtClean="0"/>
-              <a:pPr/>
-              <a:t>4</a:t>
-            </a:fld>
-            <a:endParaRPr lang="ko-KR" altLang="en-US" dirty="0"/>
-          </a:p>
-        </p:txBody>
-      </p:sp>
-      <p:sp>
-        <p:nvSpPr>
-          <p:cNvPr id="13" name="Rectangle 12"/>
-          <p:cNvSpPr/>
-          <p:nvPr/>
-        </p:nvSpPr>
-        <p:spPr>
-          <a:xfrm>
-            <a:off x="640080" y="1024128"/>
-            <a:ext cx="1508760" cy="301752"/>
-          </a:xfrm>
-          <a:prstGeom prst="rect">
-            <a:avLst/>
-          </a:prstGeom>
-          <a:solidFill>
-            <a:srgbClr val="8C8C8C"/>
-          </a:solidFill>
-          <a:ln>
-            <a:noFill/>
-          </a:ln>
-          <a:effectLst/>
-        </p:spPr>
-        <p:style>
-          <a:lnRef idx="1">
-            <a:schemeClr val="accent1"/>
-          </a:lnRef>
-          <a:fillRef idx="3">
-            <a:schemeClr val="accent1"/>
-          </a:fillRef>
-          <a:effectRef idx="2">
-            <a:schemeClr val="accent1"/>
-          </a:effectRef>
-          <a:fontRef idx="minor">
-            <a:schemeClr val="lt1"/>
-          </a:fontRef>
-        </p:style>
-        <p:txBody>
-          <a:bodyPr rtlCol="0" anchor="ctr" wrap="square" lIns="36576" rIns="36576" tIns="0" bIns="0"/>
-          <a:lstStyle/>
-          <a:p>
-            <a:pPr algn="ctr"/>
-            <a:r>
-              <a:rPr sz="1100" b="1" i="0">
-                <a:solidFill>
-                  <a:srgbClr val="FFFFFF"/>
-                </a:solidFill>
-                <a:latin typeface="Malgun Gothic"/>
-              </a:rPr>
-              <a:t>현장 운영 중</a:t>
-            </a:r>
-          </a:p>
-        </p:txBody>
-      </p:sp>
-      <p:sp>
-        <p:nvSpPr>
-          <p:cNvPr id="14" name="Rectangle 13"/>
-          <p:cNvSpPr/>
-          <p:nvPr/>
-        </p:nvSpPr>
-        <p:spPr>
-          <a:xfrm>
-            <a:off x="6355080" y="1024128"/>
-            <a:ext cx="1965960" cy="301752"/>
-          </a:xfrm>
-          <a:prstGeom prst="rect">
-            <a:avLst/>
-          </a:prstGeom>
-          <a:solidFill>
-            <a:srgbClr val="8C8C8C"/>
-          </a:solidFill>
-          <a:ln>
-            <a:noFill/>
-          </a:ln>
-          <a:effectLst/>
-        </p:spPr>
-        <p:style>
-          <a:lnRef idx="1">
-            <a:schemeClr val="accent1"/>
-          </a:lnRef>
-          <a:fillRef idx="3">
-            <a:schemeClr val="accent1"/>
-          </a:fillRef>
-          <a:effectRef idx="2">
-            <a:schemeClr val="accent1"/>
-          </a:effectRef>
-          <a:fontRef idx="minor">
-            <a:schemeClr val="lt1"/>
-          </a:fontRef>
-        </p:style>
-        <p:txBody>
-          <a:bodyPr rtlCol="0" anchor="ctr" wrap="square" lIns="36576" rIns="36576" tIns="0" bIns="0"/>
-          <a:lstStyle/>
-          <a:p>
-            <a:pPr algn="ctr"/>
-            <a:r>
-              <a:rPr sz="1100" b="1" i="0">
-                <a:solidFill>
-                  <a:srgbClr val="FFFFFF"/>
-                </a:solidFill>
-                <a:latin typeface="Malgun Gothic"/>
-              </a:rPr>
-              <a:t>업데이트 · 수정 중</a:t>
-            </a:r>
-          </a:p>
-        </p:txBody>
-      </p:sp>
-      <p:sp>
-        <p:nvSpPr>
-          <p:cNvPr id="15" name="TextBox 14"/>
-          <p:cNvSpPr txBox="1"/>
-          <p:nvPr/>
-        </p:nvSpPr>
-        <p:spPr>
-          <a:xfrm>
-            <a:off x="822960" y="1481328"/>
-            <a:ext cx="5029200" cy="713232"/>
-          </a:xfrm>
-          <a:prstGeom prst="rect">
-            <a:avLst/>
-          </a:prstGeom>
-          <a:noFill/>
-        </p:spPr>
-        <p:txBody>
-          <a:bodyPr wrap="square" lIns="36576" rIns="36576" tIns="0" bIns="0">
-            <a:spAutoFit/>
-          </a:bodyPr>
-          <a:lstStyle/>
-          <a:p>
-            <a:pPr algn="l">
-              <a:spcAft>
-                <a:spcPts val="200"/>
-              </a:spcAft>
-            </a:pPr>
-            <a:r>
-              <a:rPr sz="1250" b="1" i="0">
-                <a:solidFill>
-                  <a:srgbClr val="C0392B"/>
-                </a:solidFill>
-                <a:latin typeface="Malgun Gothic"/>
-              </a:rPr>
-              <a:t>미발령</a:t>
-            </a:r>
-            <a:r>
-              <a:rPr sz="1000" b="0" i="0">
-                <a:solidFill>
-                  <a:srgbClr val="8A949E"/>
-                </a:solidFill>
-                <a:latin typeface="Malgun Gothic"/>
-              </a:rPr>
-              <a:t>   즉시 중단</a:t>
-            </a:r>
-          </a:p>
-          <a:p>
-            <a:pPr algn="l">
-              <a:spcAft>
-                <a:spcPts val="200"/>
-              </a:spcAft>
-            </a:pPr>
-            <a:r>
-              <a:rPr sz="1150" b="0" i="0">
-                <a:solidFill>
-                  <a:srgbClr val="5D6D7E"/>
-                </a:solidFill>
-                <a:latin typeface="Malgun Gothic"/>
-              </a:rPr>
-              <a:t>접근했는데 경보가 뜨지 않은 사례 1건이라도</a:t>
-            </a:r>
-          </a:p>
-        </p:txBody>
-      </p:sp>
-      <p:sp>
-        <p:nvSpPr>
-          <p:cNvPr id="16" name="TextBox 15"/>
-          <p:cNvSpPr txBox="1"/>
-          <p:nvPr/>
-        </p:nvSpPr>
-        <p:spPr>
-          <a:xfrm>
-            <a:off x="6537960" y="1481328"/>
-            <a:ext cx="5120640" cy="713232"/>
-          </a:xfrm>
-          <a:prstGeom prst="rect">
-            <a:avLst/>
-          </a:prstGeom>
-          <a:noFill/>
-        </p:spPr>
-        <p:txBody>
-          <a:bodyPr wrap="square" lIns="36576" rIns="36576" tIns="0" bIns="0">
-            <a:spAutoFit/>
-          </a:bodyPr>
-          <a:lstStyle/>
-          <a:p>
-            <a:pPr algn="l">
-              <a:spcAft>
-                <a:spcPts val="200"/>
-              </a:spcAft>
-            </a:pPr>
-            <a:r>
-              <a:rPr sz="1250" b="1" i="0">
-                <a:solidFill>
-                  <a:srgbClr val="C0392B"/>
-                </a:solidFill>
-                <a:latin typeface="Malgun Gothic"/>
-              </a:rPr>
-              <a:t>버전 혼재</a:t>
-            </a:r>
-            <a:r>
-              <a:rPr sz="1000" b="0" i="0">
-                <a:solidFill>
-                  <a:srgbClr val="8A949E"/>
-                </a:solidFill>
-                <a:latin typeface="Malgun Gothic"/>
-              </a:rPr>
-              <a:t>   즉시 중단</a:t>
-            </a:r>
-          </a:p>
-          <a:p>
-            <a:pPr algn="l">
-              <a:spcAft>
-                <a:spcPts val="200"/>
-              </a:spcAft>
-            </a:pPr>
-            <a:r>
-              <a:rPr sz="1150" b="0" i="0">
-                <a:solidFill>
-                  <a:srgbClr val="5D6D7E"/>
-                </a:solidFill>
-                <a:latin typeface="Malgun Gothic"/>
-              </a:rPr>
-              <a:t>구버전 단말이 신버전을 감지하지 못함</a:t>
-            </a:r>
-          </a:p>
-        </p:txBody>
-      </p:sp>
-      <p:sp>
-        <p:nvSpPr>
-          <p:cNvPr id="17" name="TextBox 16"/>
-          <p:cNvSpPr txBox="1"/>
-          <p:nvPr/>
-        </p:nvSpPr>
-        <p:spPr>
-          <a:xfrm>
-            <a:off x="822960" y="2249424"/>
-            <a:ext cx="5029200" cy="713232"/>
-          </a:xfrm>
-          <a:prstGeom prst="rect">
-            <a:avLst/>
-          </a:prstGeom>
-          <a:noFill/>
-        </p:spPr>
-        <p:txBody>
-          <a:bodyPr wrap="square" lIns="36576" rIns="36576" tIns="0" bIns="0">
-            <a:spAutoFit/>
-          </a:bodyPr>
-          <a:lstStyle/>
-          <a:p>
-            <a:pPr algn="l">
-              <a:spcAft>
-                <a:spcPts val="200"/>
-              </a:spcAft>
-            </a:pPr>
-            <a:r>
-              <a:rPr sz="1250" b="1" i="0">
-                <a:solidFill>
-                  <a:srgbClr val="C0392B"/>
-                </a:solidFill>
-                <a:latin typeface="Malgun Gothic"/>
-              </a:rPr>
-              <a:t>오발령 지속</a:t>
-            </a:r>
-            <a:r>
-              <a:rPr sz="1000" b="0" i="0">
-                <a:solidFill>
-                  <a:srgbClr val="8A949E"/>
-                </a:solidFill>
-                <a:latin typeface="Malgun Gothic"/>
-              </a:rPr>
-              <a:t>   즉시 중단</a:t>
-            </a:r>
-          </a:p>
-          <a:p>
-            <a:pPr algn="l">
-              <a:spcAft>
-                <a:spcPts val="200"/>
-              </a:spcAft>
-            </a:pPr>
-            <a:r>
-              <a:rPr sz="1150" b="0" i="0">
-                <a:solidFill>
-                  <a:srgbClr val="5D6D7E"/>
-                </a:solidFill>
-                <a:latin typeface="Malgun Gothic"/>
-              </a:rPr>
-              <a:t>정지 중 계속 울림 · 이탈 후 다시 울림이 반복</a:t>
-            </a:r>
-          </a:p>
-        </p:txBody>
-      </p:sp>
-      <p:sp>
-        <p:nvSpPr>
-          <p:cNvPr id="18" name="TextBox 17"/>
-          <p:cNvSpPr txBox="1"/>
-          <p:nvPr/>
-        </p:nvSpPr>
-        <p:spPr>
-          <a:xfrm>
-            <a:off x="6537960" y="2249424"/>
-            <a:ext cx="5120640" cy="713232"/>
-          </a:xfrm>
-          <a:prstGeom prst="rect">
-            <a:avLst/>
-          </a:prstGeom>
-          <a:noFill/>
-        </p:spPr>
-        <p:txBody>
-          <a:bodyPr wrap="square" lIns="36576" rIns="36576" tIns="0" bIns="0">
-            <a:spAutoFit/>
-          </a:bodyPr>
-          <a:lstStyle/>
-          <a:p>
-            <a:pPr algn="l">
-              <a:spcAft>
-                <a:spcPts val="200"/>
-              </a:spcAft>
-            </a:pPr>
-            <a:r>
-              <a:rPr sz="1250" b="1" i="0">
-                <a:solidFill>
-                  <a:srgbClr val="1C2833"/>
-                </a:solidFill>
-                <a:latin typeface="Malgun Gothic"/>
-              </a:rPr>
-              <a:t>보호 공백</a:t>
-            </a:r>
-            <a:r>
-              <a:rPr sz="1000" b="0" i="0">
-                <a:solidFill>
-                  <a:srgbClr val="8A949E"/>
-                </a:solidFill>
-                <a:latin typeface="Malgun Gothic"/>
-              </a:rPr>
-              <a:t>   관측 시 판단</a:t>
-            </a:r>
-          </a:p>
-          <a:p>
-            <a:pPr algn="l">
-              <a:spcAft>
-                <a:spcPts val="200"/>
-              </a:spcAft>
-            </a:pPr>
-            <a:r>
-              <a:rPr sz="1150" b="0" i="0">
-                <a:solidFill>
-                  <a:srgbClr val="5D6D7E"/>
-                </a:solidFill>
-                <a:latin typeface="Malgun Gothic"/>
-              </a:rPr>
-              <a:t>작업 시간 중 일괄 업데이트 금지 — 교대 전환 때만</a:t>
-            </a:r>
-          </a:p>
-        </p:txBody>
-      </p:sp>
-      <p:sp>
-        <p:nvSpPr>
-          <p:cNvPr id="19" name="TextBox 18"/>
-          <p:cNvSpPr txBox="1"/>
-          <p:nvPr/>
-        </p:nvSpPr>
-        <p:spPr>
-          <a:xfrm>
-            <a:off x="822960" y="3017520"/>
-            <a:ext cx="5029200" cy="713232"/>
-          </a:xfrm>
-          <a:prstGeom prst="rect">
-            <a:avLst/>
-          </a:prstGeom>
-          <a:noFill/>
-        </p:spPr>
-        <p:txBody>
-          <a:bodyPr wrap="square" lIns="36576" rIns="36576" tIns="0" bIns="0">
-            <a:spAutoFit/>
-          </a:bodyPr>
-          <a:lstStyle/>
-          <a:p>
-            <a:pPr algn="l">
-              <a:spcAft>
-                <a:spcPts val="200"/>
-              </a:spcAft>
-            </a:pPr>
-            <a:r>
-              <a:rPr sz="1250" b="1" i="0">
-                <a:solidFill>
-                  <a:srgbClr val="1C2833"/>
-                </a:solidFill>
-                <a:latin typeface="Malgun Gothic"/>
-              </a:rPr>
-              <a:t>감지 중단</a:t>
-            </a:r>
-            <a:r>
-              <a:rPr sz="1000" b="0" i="0">
-                <a:solidFill>
-                  <a:srgbClr val="8A949E"/>
-                </a:solidFill>
-                <a:latin typeface="Malgun Gothic"/>
-              </a:rPr>
-              <a:t>   관측 시 판단</a:t>
-            </a:r>
-          </a:p>
-          <a:p>
-            <a:pPr algn="l">
-              <a:spcAft>
-                <a:spcPts val="200"/>
-              </a:spcAft>
-            </a:pPr>
-            <a:r>
-              <a:rPr sz="1150" b="0" i="0">
-                <a:solidFill>
-                  <a:srgbClr val="5D6D7E"/>
-                </a:solidFill>
-                <a:latin typeface="Malgun Gothic"/>
-              </a:rPr>
-              <a:t>상시 알림이 ‘이상’ 으로 바뀌거나 사라짐</a:t>
-            </a:r>
-          </a:p>
-        </p:txBody>
-      </p:sp>
-      <p:sp>
-        <p:nvSpPr>
-          <p:cNvPr id="20" name="TextBox 19"/>
-          <p:cNvSpPr txBox="1"/>
-          <p:nvPr/>
-        </p:nvSpPr>
-        <p:spPr>
-          <a:xfrm>
-            <a:off x="6537960" y="3017520"/>
-            <a:ext cx="5120640" cy="713232"/>
-          </a:xfrm>
-          <a:prstGeom prst="rect">
-            <a:avLst/>
-          </a:prstGeom>
-          <a:noFill/>
-        </p:spPr>
-        <p:txBody>
-          <a:bodyPr wrap="square" lIns="36576" rIns="36576" tIns="0" bIns="0">
-            <a:spAutoFit/>
-          </a:bodyPr>
-          <a:lstStyle/>
-          <a:p>
-            <a:pPr algn="l">
-              <a:spcAft>
-                <a:spcPts val="200"/>
-              </a:spcAft>
-            </a:pPr>
-            <a:r>
-              <a:rPr sz="1250" b="1" i="0">
-                <a:solidFill>
-                  <a:srgbClr val="1C2833"/>
-                </a:solidFill>
-                <a:latin typeface="Malgun Gothic"/>
-              </a:rPr>
-              <a:t>서비스 미기동</a:t>
-            </a:r>
-            <a:r>
-              <a:rPr sz="1000" b="0" i="0">
-                <a:solidFill>
-                  <a:srgbClr val="8A949E"/>
-                </a:solidFill>
-                <a:latin typeface="Malgun Gothic"/>
-              </a:rPr>
-              <a:t>   관측 시 판단</a:t>
-            </a:r>
-          </a:p>
-          <a:p>
-            <a:pPr algn="l">
-              <a:spcAft>
-                <a:spcPts val="200"/>
-              </a:spcAft>
-            </a:pPr>
-            <a:r>
-              <a:rPr sz="1150" b="0" i="0">
-                <a:solidFill>
-                  <a:srgbClr val="5D6D7E"/>
-                </a:solidFill>
-                <a:latin typeface="Malgun Gothic"/>
-              </a:rPr>
-              <a:t>업데이트 · 역할 전환 후 백그라운드 실행 미복구</a:t>
-            </a:r>
-          </a:p>
-        </p:txBody>
-      </p:sp>
-      <p:sp>
-        <p:nvSpPr>
-          <p:cNvPr id="21" name="TextBox 20"/>
-          <p:cNvSpPr txBox="1"/>
-          <p:nvPr/>
-        </p:nvSpPr>
-        <p:spPr>
-          <a:xfrm>
-            <a:off x="822960" y="3785616"/>
-            <a:ext cx="5029200" cy="713232"/>
-          </a:xfrm>
-          <a:prstGeom prst="rect">
-            <a:avLst/>
-          </a:prstGeom>
-          <a:noFill/>
-        </p:spPr>
-        <p:txBody>
-          <a:bodyPr wrap="square" lIns="36576" rIns="36576" tIns="0" bIns="0">
-            <a:spAutoFit/>
-          </a:bodyPr>
-          <a:lstStyle/>
-          <a:p>
-            <a:pPr algn="l">
-              <a:spcAft>
-                <a:spcPts val="200"/>
-              </a:spcAft>
-            </a:pPr>
-            <a:r>
-              <a:rPr sz="1250" b="1" i="0">
-                <a:solidFill>
-                  <a:srgbClr val="1C2833"/>
-                </a:solidFill>
-                <a:latin typeface="Malgun Gothic"/>
-              </a:rPr>
-              <a:t>경보 피로</a:t>
-            </a:r>
-            <a:r>
-              <a:rPr sz="1000" b="0" i="0">
-                <a:solidFill>
-                  <a:srgbClr val="8A949E"/>
-                </a:solidFill>
-                <a:latin typeface="Malgun Gothic"/>
-              </a:rPr>
-              <a:t>   관측 시 판단</a:t>
-            </a:r>
-          </a:p>
-          <a:p>
-            <a:pPr algn="l">
-              <a:spcAft>
-                <a:spcPts val="200"/>
-              </a:spcAft>
-            </a:pPr>
-            <a:r>
-              <a:rPr sz="1150" b="0" i="0">
-                <a:solidFill>
-                  <a:srgbClr val="5D6D7E"/>
-                </a:solidFill>
-                <a:latin typeface="Malgun Gothic"/>
-              </a:rPr>
-              <a:t>무음으로 두거나 앱을 꺼 둔 단말이 늘어남</a:t>
-            </a:r>
-          </a:p>
-        </p:txBody>
-      </p:sp>
-      <p:sp>
-        <p:nvSpPr>
-          <p:cNvPr id="22" name="TextBox 21"/>
-          <p:cNvSpPr txBox="1"/>
-          <p:nvPr/>
-        </p:nvSpPr>
-        <p:spPr>
-          <a:xfrm>
-            <a:off x="6537960" y="3785616"/>
-            <a:ext cx="5120640" cy="713232"/>
-          </a:xfrm>
-          <a:prstGeom prst="rect">
-            <a:avLst/>
-          </a:prstGeom>
-          <a:noFill/>
-        </p:spPr>
-        <p:txBody>
-          <a:bodyPr wrap="square" lIns="36576" rIns="36576" tIns="0" bIns="0">
-            <a:spAutoFit/>
-          </a:bodyPr>
-          <a:lstStyle/>
-          <a:p>
-            <a:pPr algn="l">
-              <a:spcAft>
-                <a:spcPts val="200"/>
-              </a:spcAft>
-            </a:pPr>
-            <a:r>
-              <a:rPr sz="1250" b="1" i="0">
-                <a:solidFill>
-                  <a:srgbClr val="C0392B"/>
-                </a:solidFill>
-                <a:latin typeface="Malgun Gothic"/>
-              </a:rPr>
-              <a:t>회귀 재발</a:t>
-            </a:r>
-            <a:r>
-              <a:rPr sz="1000" b="0" i="0">
-                <a:solidFill>
-                  <a:srgbClr val="8A949E"/>
-                </a:solidFill>
-                <a:latin typeface="Malgun Gothic"/>
-              </a:rPr>
-              <a:t>   즉시 중단</a:t>
-            </a:r>
-          </a:p>
-          <a:p>
-            <a:pPr algn="l">
-              <a:spcAft>
-                <a:spcPts val="200"/>
-              </a:spcAft>
-            </a:pPr>
-            <a:r>
-              <a:rPr sz="1150" b="0" i="0">
-                <a:solidFill>
-                  <a:srgbClr val="5D6D7E"/>
-                </a:solidFill>
-                <a:latin typeface="Malgun Gothic"/>
-              </a:rPr>
-              <a:t>이전에 고친 증상이 다시 관측됨</a:t>
-            </a:r>
-          </a:p>
-        </p:txBody>
-      </p:sp>
-      <p:sp>
-        <p:nvSpPr>
-          <p:cNvPr id="23" name="Rectangle 22"/>
-          <p:cNvSpPr/>
-          <p:nvPr/>
-        </p:nvSpPr>
-        <p:spPr>
-          <a:xfrm>
-            <a:off x="640080" y="4553712"/>
-            <a:ext cx="1280160" cy="301752"/>
-          </a:xfrm>
-          <a:prstGeom prst="rect">
-            <a:avLst/>
-          </a:prstGeom>
-          <a:solidFill>
-            <a:srgbClr val="8C8C8C"/>
-          </a:solidFill>
-          <a:ln>
-            <a:noFill/>
-          </a:ln>
-          <a:effectLst/>
-        </p:spPr>
-        <p:style>
-          <a:lnRef idx="1">
-            <a:schemeClr val="accent1"/>
-          </a:lnRef>
-          <a:fillRef idx="3">
-            <a:schemeClr val="accent1"/>
-          </a:fillRef>
-          <a:effectRef idx="2">
-            <a:schemeClr val="accent1"/>
-          </a:effectRef>
-          <a:fontRef idx="minor">
-            <a:schemeClr val="lt1"/>
-          </a:fontRef>
-        </p:style>
-        <p:txBody>
-          <a:bodyPr rtlCol="0" anchor="ctr" wrap="square" lIns="36576" rIns="36576" tIns="0" bIns="0"/>
-          <a:lstStyle/>
-          <a:p>
-            <a:pPr algn="ctr"/>
-            <a:r>
-              <a:rPr sz="1100" b="1" i="0">
-                <a:solidFill>
-                  <a:srgbClr val="FFFFFF"/>
-                </a:solidFill>
-                <a:latin typeface="Malgun Gothic"/>
-              </a:rPr>
-              <a:t>공통 조치</a:t>
-            </a:r>
-          </a:p>
-        </p:txBody>
-      </p:sp>
-      <p:sp>
-        <p:nvSpPr>
-          <p:cNvPr id="24" name="TextBox 23"/>
-          <p:cNvSpPr txBox="1"/>
-          <p:nvPr/>
-        </p:nvSpPr>
-        <p:spPr>
-          <a:xfrm>
-            <a:off x="868680" y="4974336"/>
-            <a:ext cx="5394960" cy="301752"/>
-          </a:xfrm>
-          <a:prstGeom prst="rect">
-            <a:avLst/>
-          </a:prstGeom>
-          <a:noFill/>
-        </p:spPr>
-        <p:txBody>
-          <a:bodyPr wrap="square" lIns="36576" rIns="36576" tIns="0" bIns="0">
-            <a:spAutoFit/>
-          </a:bodyPr>
-          <a:lstStyle/>
-          <a:p>
-            <a:pPr algn="l">
-              <a:spcAft>
-                <a:spcPts val="400"/>
-              </a:spcAft>
-            </a:pPr>
-            <a:r>
-              <a:rPr sz="1150" b="1" i="0">
-                <a:solidFill>
-                  <a:srgbClr val="1C2833"/>
-                </a:solidFill>
-                <a:latin typeface="Malgun Gothic"/>
-              </a:rPr>
-              <a:t>즉시 롤백  —  </a:t>
-            </a:r>
-            <a:r>
-              <a:rPr sz="1150" b="0" i="0">
-                <a:solidFill>
-                  <a:srgbClr val="5D6D7E"/>
-                </a:solidFill>
-                <a:latin typeface="Malgun Gothic"/>
-              </a:rPr>
-              <a:t>직전 태그 APK 로 되돌린다 — 현장 재설치 없이 배포된다</a:t>
-            </a:r>
-          </a:p>
-        </p:txBody>
-      </p:sp>
-      <p:sp>
-        <p:nvSpPr>
-          <p:cNvPr id="25" name="TextBox 24"/>
-          <p:cNvSpPr txBox="1"/>
-          <p:nvPr/>
-        </p:nvSpPr>
-        <p:spPr>
-          <a:xfrm>
-            <a:off x="868680" y="5294376"/>
-            <a:ext cx="5394960" cy="301752"/>
-          </a:xfrm>
-          <a:prstGeom prst="rect">
-            <a:avLst/>
-          </a:prstGeom>
-          <a:noFill/>
-        </p:spPr>
-        <p:txBody>
-          <a:bodyPr wrap="square" lIns="36576" rIns="36576" tIns="0" bIns="0">
-            <a:spAutoFit/>
-          </a:bodyPr>
-          <a:lstStyle/>
-          <a:p>
-            <a:pPr algn="l">
-              <a:spcAft>
-                <a:spcPts val="400"/>
-              </a:spcAft>
-            </a:pPr>
-            <a:r>
-              <a:rPr sz="1150" b="1" i="0">
-                <a:solidFill>
-                  <a:srgbClr val="1C2833"/>
-                </a:solidFill>
-                <a:latin typeface="Malgun Gothic"/>
-              </a:rPr>
-              <a:t>선행 확인  —  </a:t>
-            </a:r>
-            <a:r>
-              <a:rPr sz="1150" b="0" i="0">
-                <a:solidFill>
-                  <a:srgbClr val="5D6D7E"/>
-                </a:solidFill>
-                <a:latin typeface="Malgun Gothic"/>
-              </a:rPr>
-              <a:t>전 단말 배포 전 1대에서 먼저 확인한다</a:t>
-            </a:r>
-          </a:p>
-        </p:txBody>
-      </p:sp>
-      <p:sp>
-        <p:nvSpPr>
-          <p:cNvPr id="26" name="TextBox 25"/>
-          <p:cNvSpPr txBox="1"/>
-          <p:nvPr/>
-        </p:nvSpPr>
-        <p:spPr>
-          <a:xfrm>
-            <a:off x="868680" y="5614416"/>
-            <a:ext cx="5394960" cy="301752"/>
-          </a:xfrm>
-          <a:prstGeom prst="rect">
-            <a:avLst/>
-          </a:prstGeom>
-          <a:noFill/>
-        </p:spPr>
-        <p:txBody>
-          <a:bodyPr wrap="square" lIns="36576" rIns="36576" tIns="0" bIns="0">
-            <a:spAutoFit/>
-          </a:bodyPr>
-          <a:lstStyle/>
-          <a:p>
-            <a:pPr algn="l">
-              <a:spcAft>
-                <a:spcPts val="400"/>
-              </a:spcAft>
-            </a:pPr>
-            <a:r>
-              <a:rPr sz="1150" b="1" i="0">
-                <a:solidFill>
-                  <a:srgbClr val="1C2833"/>
-                </a:solidFill>
-                <a:latin typeface="Malgun Gothic"/>
-              </a:rPr>
-              <a:t>빌드 차단  —  </a:t>
-            </a:r>
-            <a:r>
-              <a:rPr sz="1150" b="0" i="0">
-                <a:solidFill>
-                  <a:srgbClr val="5D6D7E"/>
-                </a:solidFill>
-                <a:latin typeface="Malgun Gothic"/>
-              </a:rPr>
-              <a:t>골든 테스트가 실패하면 릴리스가 자동 차단된다 (동작 중)</a:t>
-            </a:r>
-          </a:p>
-        </p:txBody>
-      </p:sp>
-      <p:sp>
-        <p:nvSpPr>
-          <p:cNvPr id="27" name="TextBox 26"/>
-          <p:cNvSpPr txBox="1"/>
-          <p:nvPr/>
-        </p:nvSpPr>
-        <p:spPr>
-          <a:xfrm>
-            <a:off x="6583680" y="4974336"/>
-            <a:ext cx="5394960" cy="301752"/>
-          </a:xfrm>
-          <a:prstGeom prst="rect">
-            <a:avLst/>
-          </a:prstGeom>
-          <a:noFill/>
-        </p:spPr>
-        <p:txBody>
-          <a:bodyPr wrap="square" lIns="36576" rIns="36576" tIns="0" bIns="0">
-            <a:spAutoFit/>
-          </a:bodyPr>
-          <a:lstStyle/>
-          <a:p>
-            <a:pPr algn="l">
-              <a:spcAft>
-                <a:spcPts val="400"/>
-              </a:spcAft>
-            </a:pPr>
-            <a:r>
-              <a:rPr sz="1150" b="1" i="0">
-                <a:solidFill>
-                  <a:srgbClr val="1C2833"/>
-                </a:solidFill>
-                <a:latin typeface="Malgun Gothic"/>
-              </a:rPr>
-              <a:t>원인 귀속  —  </a:t>
-            </a:r>
-            <a:r>
-              <a:rPr sz="1150" b="0" i="0">
-                <a:solidFill>
-                  <a:srgbClr val="5D6D7E"/>
-                </a:solidFill>
-                <a:latin typeface="Malgun Gothic"/>
-              </a:rPr>
-              <a:t>단계를 단독 배포하므로 어느 변경 탓인지 특정된다</a:t>
-            </a:r>
-          </a:p>
-        </p:txBody>
-      </p:sp>
-      <p:sp>
-        <p:nvSpPr>
-          <p:cNvPr id="28" name="TextBox 27"/>
-          <p:cNvSpPr txBox="1"/>
-          <p:nvPr/>
-        </p:nvSpPr>
-        <p:spPr>
-          <a:xfrm>
-            <a:off x="6583680" y="5294376"/>
-            <a:ext cx="5394960" cy="301752"/>
-          </a:xfrm>
-          <a:prstGeom prst="rect">
-            <a:avLst/>
-          </a:prstGeom>
-          <a:noFill/>
-        </p:spPr>
-        <p:txBody>
-          <a:bodyPr wrap="square" lIns="36576" rIns="36576" tIns="0" bIns="0">
-            <a:spAutoFit/>
-          </a:bodyPr>
-          <a:lstStyle/>
-          <a:p>
-            <a:pPr algn="l">
-              <a:spcAft>
-                <a:spcPts val="400"/>
-              </a:spcAft>
-            </a:pPr>
-            <a:r>
-              <a:rPr sz="1150" b="1" i="0">
-                <a:solidFill>
-                  <a:srgbClr val="1C2833"/>
-                </a:solidFill>
-                <a:latin typeface="Malgun Gothic"/>
-              </a:rPr>
-              <a:t>재개 조건  —  </a:t>
-            </a:r>
-            <a:r>
-              <a:rPr sz="1150" b="0" i="0">
-                <a:solidFill>
-                  <a:srgbClr val="5D6D7E"/>
-                </a:solidFill>
-                <a:latin typeface="Malgun Gothic"/>
-              </a:rPr>
-              <a:t>실패한 상황을 테스트로 고정한 뒤에만 다음 단계로</a:t>
-            </a:r>
-          </a:p>
-        </p:txBody>
-      </p:sp>
-      <p:sp>
-        <p:nvSpPr>
-          <p:cNvPr id="29" name="TextBox 28"/>
-          <p:cNvSpPr txBox="1"/>
-          <p:nvPr/>
-        </p:nvSpPr>
-        <p:spPr>
-          <a:xfrm>
-            <a:off x="640080" y="5998464"/>
-            <a:ext cx="7680960" cy="365760"/>
-          </a:xfrm>
-          <a:prstGeom prst="rect">
-            <a:avLst/>
-          </a:prstGeom>
-          <a:noFill/>
-        </p:spPr>
-        <p:txBody>
-          <a:bodyPr wrap="square" lIns="36576" rIns="36576" tIns="0" bIns="0">
-            <a:spAutoFit/>
-          </a:bodyPr>
-          <a:lstStyle/>
-          <a:p>
-            <a:pPr algn="ctr"/>
-            <a:r>
-              <a:rPr sz="1150" b="0" i="1">
-                <a:solidFill>
-                  <a:srgbClr val="5D6D7E"/>
-                </a:solidFill>
-                <a:latin typeface="Malgun Gothic"/>
-              </a:rPr>
-              <a:t>“멈출 기준을 먼저 정해 두는 것이, 멈추지 않고 밀어붙이는 것보다 빠릅니다.”</a:t>
             </a:r>
           </a:p>
         </p:txBody>

--- a/docs/presentation/company_form/SafeAlert_보고_2026.08.pptx
+++ b/docs/presentation/company_form/SafeAlert_보고_2026.08.pptx
@@ -11,6 +11,7 @@
     <p:sldId id="256" r:id="rId6"/>
     <p:sldId id="342" r:id="rId7"/>
     <p:sldId id="394" r:id="rId9"/>
+    <p:sldId id="404" r:id="rId37"/>
     <p:sldId id="403" r:id="rId36"/>
     <p:sldId id="402" r:id="rId35"/>
     <p:sldId id="401" r:id="rId34"/>
@@ -7348,6 +7349,1791 @@
 </p:sld>
 </file>
 
+<file path=ppt/slides/slide13.xml><?xml version="1.0" encoding="utf-8"?>
+<p:sld xmlns:a="http://schemas.openxmlformats.org/drawingml/2006/main" xmlns:r="http://schemas.openxmlformats.org/officeDocument/2006/relationships" xmlns:p="http://schemas.openxmlformats.org/presentationml/2006/main">
+  <p:cSld>
+    <p:spTree>
+      <p:nvGrpSpPr>
+        <p:cNvPr id="1" name="">
+          <a:extLst>
+            <a:ext uri="{FF2B5EF4-FFF2-40B4-BE49-F238E27FC236}">
+              <a16:creationId xmlns:a16="http://schemas.microsoft.com/office/drawing/2014/main" id="{E4EFD6F4-EBDD-9AC2-DC28-2DDF0C04A565}"/>
+            </a:ext>
+          </a:extLst>
+        </p:cNvPr>
+        <p:cNvGrpSpPr/>
+        <p:nvPr/>
+      </p:nvGrpSpPr>
+      <p:grpSpPr>
+        <a:xfrm>
+          <a:off x="0" y="0"/>
+          <a:ext cx="0" cy="0"/>
+          <a:chOff x="0" y="0"/>
+          <a:chExt cx="0" cy="0"/>
+        </a:xfrm>
+      </p:grpSpPr>
+      <p:sp>
+        <p:nvSpPr>
+          <p:cNvPr id="5" name="제목 1">
+            <a:extLst>
+              <a:ext uri="{FF2B5EF4-FFF2-40B4-BE49-F238E27FC236}">
+                <a16:creationId xmlns:a16="http://schemas.microsoft.com/office/drawing/2014/main" id="{3462F1EA-748D-175E-1C14-5E9984552716}"/>
+              </a:ext>
+            </a:extLst>
+          </p:cNvPr>
+          <p:cNvSpPr txBox="1">
+            <a:spLocks/>
+          </p:cNvSpPr>
+          <p:nvPr/>
+        </p:nvSpPr>
+        <p:spPr>
+          <a:xfrm>
+            <a:off x="636390" y="928122"/>
+            <a:ext cx="11342595" cy="3980770"/>
+          </a:xfrm>
+          <a:prstGeom prst="rect">
+            <a:avLst/>
+          </a:prstGeom>
+          <a:noFill/>
+        </p:spPr>
+        <p:txBody>
+          <a:bodyPr vert="horz" wrap="square" lIns="91440" tIns="45720" rIns="91440" bIns="45720" rtlCol="0" anchor="t">
+            <a:spAutoFit/>
+          </a:bodyPr>
+          <a:lstStyle>
+            <a:lvl1pPr marL="0" indent="0" algn="l" defTabSz="914400" rtl="0" eaLnBrk="1" latinLnBrk="1" hangingPunct="1">
+              <a:lnSpc>
+                <a:spcPct val="100000"/>
+              </a:lnSpc>
+              <a:spcBef>
+                <a:spcPct val="0"/>
+              </a:spcBef>
+              <a:buNone/>
+              <a:defRPr lang="en-US" sz="1600" b="1" kern="1200" dirty="0">
+                <a:solidFill>
+                  <a:srgbClr val="560000"/>
+                </a:solidFill>
+                <a:latin typeface="+mj-ea"/>
+                <a:ea typeface="+mj-ea"/>
+                <a:cs typeface="+mn-cs"/>
+              </a:defRPr>
+            </a:lvl1pPr>
+          </a:lstStyle>
+          <a:p>
+            <a:pPr>
+              <a:lnSpc>
+                <a:spcPct val="150000"/>
+              </a:lnSpc>
+            </a:pPr>
+            <a:endParaRPr lang="en-US" altLang="ko-KR" sz="1400" dirty="0">
+              <a:solidFill>
+                <a:schemeClr val="tx1"/>
+              </a:solidFill>
+              <a:latin typeface="+mn-ea"/>
+              <a:ea typeface="+mn-ea"/>
+            </a:endParaRPr>
+          </a:p>
+        </p:txBody>
+      </p:sp>
+      <p:sp>
+        <p:nvSpPr>
+          <p:cNvPr id="2" name="제목 1">
+            <a:extLst>
+              <a:ext uri="{FF2B5EF4-FFF2-40B4-BE49-F238E27FC236}">
+                <a16:creationId xmlns:a16="http://schemas.microsoft.com/office/drawing/2014/main" id="{54B5B938-7AFE-1302-EB19-024D633AA023}"/>
+              </a:ext>
+            </a:extLst>
+          </p:cNvPr>
+          <p:cNvSpPr>
+            <a:spLocks noGrp="1"/>
+          </p:cNvSpPr>
+          <p:nvPr>
+            <p:ph type="title"/>
+          </p:nvPr>
+        </p:nvSpPr>
+        <p:spPr>
+          <a:xfrm>
+            <a:off x="636391" y="595686"/>
+            <a:ext cx="11293263" cy="338554"/>
+          </a:xfrm>
+        </p:spPr>
+        <p:txBody>
+          <a:bodyPr/>
+          <a:lstStyle/>
+          <a:p>
+            <a:r>
+              <a:rPr lang="en-US" altLang="ko-KR" dirty="0">
+                <a:latin typeface="맑은 고딕" panose="020B0503020000020004" pitchFamily="50" charset="-127"/>
+                <a:ea typeface="맑은 고딕" panose="020B0503020000020004" pitchFamily="50" charset="-127"/>
+              </a:rPr>
+              <a:t>부록 — 산출 근거</a:t>
+            </a:r>
+            <a:endParaRPr lang="ko-KR" altLang="en-US" dirty="0"/>
+          </a:p>
+        </p:txBody>
+      </p:sp>
+      <p:sp>
+        <p:nvSpPr>
+          <p:cNvPr id="12" name="슬라이드 번호 개체 틀 11">
+            <a:extLst>
+              <a:ext uri="{FF2B5EF4-FFF2-40B4-BE49-F238E27FC236}">
+                <a16:creationId xmlns:a16="http://schemas.microsoft.com/office/drawing/2014/main" id="{B7184ABC-D9FC-E120-072A-5615A9569176}"/>
+              </a:ext>
+            </a:extLst>
+          </p:cNvPr>
+          <p:cNvSpPr>
+            <a:spLocks noGrp="1"/>
+          </p:cNvSpPr>
+          <p:nvPr>
+            <p:ph type="sldNum" sz="quarter" idx="12"/>
+          </p:nvPr>
+        </p:nvSpPr>
+        <p:spPr/>
+        <p:txBody>
+          <a:bodyPr/>
+          <a:lstStyle/>
+          <a:p>
+            <a:fld id="{A2CF8A37-2FCE-495B-9275-FE23C56C2D36}" type="slidenum">
+              <a:rPr lang="ko-KR" altLang="en-US" smtClean="0"/>
+              <a:pPr/>
+              <a:t>4</a:t>
+            </a:fld>
+            <a:endParaRPr lang="ko-KR" altLang="en-US" dirty="0"/>
+          </a:p>
+        </p:txBody>
+      </p:sp>
+      <p:sp>
+        <p:nvSpPr>
+          <p:cNvPr id="13" name="Rectangle 12"/>
+          <p:cNvSpPr/>
+          <p:nvPr/>
+        </p:nvSpPr>
+        <p:spPr>
+          <a:xfrm>
+            <a:off x="640080" y="1024128"/>
+            <a:ext cx="1600200" cy="301752"/>
+          </a:xfrm>
+          <a:prstGeom prst="rect">
+            <a:avLst/>
+          </a:prstGeom>
+          <a:solidFill>
+            <a:srgbClr val="8C8C8C"/>
+          </a:solidFill>
+          <a:ln>
+            <a:noFill/>
+          </a:ln>
+          <a:effectLst/>
+        </p:spPr>
+        <p:style>
+          <a:lnRef idx="1">
+            <a:schemeClr val="accent1"/>
+          </a:lnRef>
+          <a:fillRef idx="3">
+            <a:schemeClr val="accent1"/>
+          </a:fillRef>
+          <a:effectRef idx="2">
+            <a:schemeClr val="accent1"/>
+          </a:effectRef>
+          <a:fontRef idx="minor">
+            <a:schemeClr val="lt1"/>
+          </a:fontRef>
+        </p:style>
+        <p:txBody>
+          <a:bodyPr rtlCol="0" anchor="ctr" wrap="square" lIns="36576" rIns="36576" tIns="0" bIns="0"/>
+          <a:lstStyle/>
+          <a:p>
+            <a:pPr algn="ctr"/>
+            <a:r>
+              <a:rPr sz="1100" b="1" i="0">
+                <a:solidFill>
+                  <a:srgbClr val="FFFFFF"/>
+                </a:solidFill>
+                <a:latin typeface="Malgun Gothic"/>
+              </a:rPr>
+              <a:t>센터 1곳 기준</a:t>
+            </a:r>
+          </a:p>
+        </p:txBody>
+      </p:sp>
+      <p:sp>
+        <p:nvSpPr>
+          <p:cNvPr id="14" name="TextBox 13"/>
+          <p:cNvSpPr txBox="1"/>
+          <p:nvPr/>
+        </p:nvSpPr>
+        <p:spPr>
+          <a:xfrm>
+            <a:off x="2377440" y="1051560"/>
+            <a:ext cx="9326880" cy="274320"/>
+          </a:xfrm>
+          <a:prstGeom prst="rect">
+            <a:avLst/>
+          </a:prstGeom>
+          <a:noFill/>
+        </p:spPr>
+        <p:txBody>
+          <a:bodyPr wrap="square" lIns="36576" rIns="36576" tIns="0" bIns="0">
+            <a:spAutoFit/>
+          </a:bodyPr>
+          <a:lstStyle/>
+          <a:p>
+            <a:pPr algn="l">
+              <a:spcAft>
+                <a:spcPts val="400"/>
+              </a:spcAft>
+            </a:pPr>
+            <a:r>
+              <a:rPr sz="1200" b="0" i="0">
+                <a:solidFill>
+                  <a:srgbClr val="5D6D7E"/>
+                </a:solidFill>
+                <a:latin typeface="Malgun Gothic"/>
+              </a:rPr>
+              <a:t>일반 WF 센터 · PIT 장비 4대 · 상시 근무 3명 기준</a:t>
+            </a:r>
+          </a:p>
+        </p:txBody>
+      </p:sp>
+      <p:graphicFrame>
+        <p:nvGraphicFramePr>
+          <p:cNvPr id="15" name="Table 14"/>
+          <p:cNvGraphicFramePr>
+            <a:graphicFrameLocks noGrp="1"/>
+          </p:cNvGraphicFramePr>
+          <p:nvPr/>
+        </p:nvGraphicFramePr>
+        <p:xfrm>
+          <a:off x="658368" y="1463040"/>
+          <a:ext cx="11064240" cy="2157984"/>
+        </p:xfrm>
+        <a:graphic>
+          <a:graphicData uri="http://schemas.openxmlformats.org/drawingml/2006/table">
+            <a:tbl>
+              <a:tblPr firstRow="1" bandRow="0">
+                <a:tableStyleId>{5C22544A-7EE6-4342-B048-85BDC9FD1C3A}</a:tableStyleId>
+              </a:tblPr>
+              <a:tblGrid>
+                <a:gridCol w="3017520"/>
+                <a:gridCol w="2560320"/>
+                <a:gridCol w="2743200"/>
+                <a:gridCol w="2743200"/>
+              </a:tblGrid>
+              <a:tr h="329184">
+                <a:tc>
+                  <a:txBody>
+                    <a:bodyPr/>
+                    <a:lstStyle/>
+                    <a:p>
+                      <a:pPr algn="ctr"/>
+                      <a:r>
+                        <a:rPr sz="1100" b="1" i="0">
+                          <a:solidFill>
+                            <a:srgbClr val="FFFFFF"/>
+                          </a:solidFill>
+                          <a:latin typeface="Malgun Gothic"/>
+                        </a:rPr>
+                        <a:t>항목</a:t>
+                      </a:r>
+                    </a:p>
+                  </a:txBody>
+                  <a:tcPr marL="73152" marR="73152" marT="0" marB="0" anchor="ctr">
+                    <a:lnB w="9525" cap="flat" cmpd="sng" algn="ctr">
+                      <a:solidFill>
+                        <a:srgbClr val="333B45"/>
+                      </a:solidFill>
+                    </a:lnB>
+                    <a:lnT w="9525" cap="flat" cmpd="sng" algn="ctr">
+                      <a:solidFill>
+                        <a:srgbClr val="333B45"/>
+                      </a:solidFill>
+                    </a:lnT>
+                    <a:lnR w="9525" cap="flat" cmpd="sng" algn="ctr">
+                      <a:solidFill>
+                        <a:srgbClr val="333B45"/>
+                      </a:solidFill>
+                    </a:lnR>
+                    <a:lnL w="9525" cap="flat" cmpd="sng" algn="ctr">
+                      <a:solidFill>
+                        <a:srgbClr val="333B45"/>
+                      </a:solidFill>
+                    </a:lnL>
+                    <a:solidFill>
+                      <a:srgbClr val="333B45"/>
+                    </a:solidFill>
+                  </a:tcPr>
+                </a:tc>
+                <a:tc>
+                  <a:txBody>
+                    <a:bodyPr/>
+                    <a:lstStyle/>
+                    <a:p>
+                      <a:pPr algn="ctr"/>
+                      <a:r>
+                        <a:rPr sz="1100" b="1" i="0">
+                          <a:solidFill>
+                            <a:srgbClr val="FFFFFF"/>
+                          </a:solidFill>
+                          <a:latin typeface="Malgun Gothic"/>
+                        </a:rPr>
+                        <a:t>단가</a:t>
+                      </a:r>
+                    </a:p>
+                  </a:txBody>
+                  <a:tcPr marL="73152" marR="73152" marT="0" marB="0" anchor="ctr">
+                    <a:lnB w="9525" cap="flat" cmpd="sng" algn="ctr">
+                      <a:solidFill>
+                        <a:srgbClr val="333B45"/>
+                      </a:solidFill>
+                    </a:lnB>
+                    <a:lnT w="9525" cap="flat" cmpd="sng" algn="ctr">
+                      <a:solidFill>
+                        <a:srgbClr val="333B45"/>
+                      </a:solidFill>
+                    </a:lnT>
+                    <a:lnR w="9525" cap="flat" cmpd="sng" algn="ctr">
+                      <a:solidFill>
+                        <a:srgbClr val="333B45"/>
+                      </a:solidFill>
+                    </a:lnR>
+                    <a:lnL w="9525" cap="flat" cmpd="sng" algn="ctr">
+                      <a:solidFill>
+                        <a:srgbClr val="333B45"/>
+                      </a:solidFill>
+                    </a:lnL>
+                    <a:solidFill>
+                      <a:srgbClr val="333B45"/>
+                    </a:solidFill>
+                  </a:tcPr>
+                </a:tc>
+                <a:tc>
+                  <a:txBody>
+                    <a:bodyPr/>
+                    <a:lstStyle/>
+                    <a:p>
+                      <a:pPr algn="ctr"/>
+                      <a:r>
+                        <a:rPr sz="1100" b="1" i="0">
+                          <a:solidFill>
+                            <a:srgbClr val="FFFFFF"/>
+                          </a:solidFill>
+                          <a:latin typeface="Malgun Gothic"/>
+                        </a:rPr>
+                        <a:t>수량</a:t>
+                      </a:r>
+                    </a:p>
+                  </a:txBody>
+                  <a:tcPr marL="73152" marR="73152" marT="0" marB="0" anchor="ctr">
+                    <a:lnB w="9525" cap="flat" cmpd="sng" algn="ctr">
+                      <a:solidFill>
+                        <a:srgbClr val="333B45"/>
+                      </a:solidFill>
+                    </a:lnB>
+                    <a:lnT w="9525" cap="flat" cmpd="sng" algn="ctr">
+                      <a:solidFill>
+                        <a:srgbClr val="333B45"/>
+                      </a:solidFill>
+                    </a:lnT>
+                    <a:lnR w="9525" cap="flat" cmpd="sng" algn="ctr">
+                      <a:solidFill>
+                        <a:srgbClr val="333B45"/>
+                      </a:solidFill>
+                    </a:lnR>
+                    <a:lnL w="9525" cap="flat" cmpd="sng" algn="ctr">
+                      <a:solidFill>
+                        <a:srgbClr val="333B45"/>
+                      </a:solidFill>
+                    </a:lnL>
+                    <a:solidFill>
+                      <a:srgbClr val="333B45"/>
+                    </a:solidFill>
+                  </a:tcPr>
+                </a:tc>
+                <a:tc>
+                  <a:txBody>
+                    <a:bodyPr/>
+                    <a:lstStyle/>
+                    <a:p>
+                      <a:pPr algn="ctr"/>
+                      <a:r>
+                        <a:rPr sz="1100" b="1" i="0">
+                          <a:solidFill>
+                            <a:srgbClr val="FFFFFF"/>
+                          </a:solidFill>
+                          <a:latin typeface="Malgun Gothic"/>
+                        </a:rPr>
+                        <a:t>금액</a:t>
+                      </a:r>
+                    </a:p>
+                  </a:txBody>
+                  <a:tcPr marL="73152" marR="73152" marT="0" marB="0" anchor="ctr">
+                    <a:lnB w="9525" cap="flat" cmpd="sng" algn="ctr">
+                      <a:solidFill>
+                        <a:srgbClr val="333B45"/>
+                      </a:solidFill>
+                    </a:lnB>
+                    <a:lnT w="9525" cap="flat" cmpd="sng" algn="ctr">
+                      <a:solidFill>
+                        <a:srgbClr val="333B45"/>
+                      </a:solidFill>
+                    </a:lnT>
+                    <a:lnR w="9525" cap="flat" cmpd="sng" algn="ctr">
+                      <a:solidFill>
+                        <a:srgbClr val="333B45"/>
+                      </a:solidFill>
+                    </a:lnR>
+                    <a:lnL w="9525" cap="flat" cmpd="sng" algn="ctr">
+                      <a:solidFill>
+                        <a:srgbClr val="333B45"/>
+                      </a:solidFill>
+                    </a:lnL>
+                    <a:solidFill>
+                      <a:srgbClr val="333B45"/>
+                    </a:solidFill>
+                  </a:tcPr>
+                </a:tc>
+              </a:tr>
+              <a:tr h="457200">
+                <a:tc>
+                  <a:txBody>
+                    <a:bodyPr/>
+                    <a:lstStyle/>
+                    <a:p>
+                      <a:pPr algn="l"/>
+                      <a:r>
+                        <a:rPr sz="1150" b="1" i="0">
+                          <a:solidFill>
+                            <a:srgbClr val="1C2833"/>
+                          </a:solidFill>
+                          <a:latin typeface="Malgun Gothic"/>
+                        </a:rPr>
+                        <a:t>차량 태그</a:t>
+                      </a:r>
+                    </a:p>
+                  </a:txBody>
+                  <a:tcPr marL="73152" marR="73152" marT="18288" marB="18288" anchor="ctr">
+                    <a:lnB w="9525" cap="flat" cmpd="sng" algn="ctr">
+                      <a:solidFill>
+                        <a:srgbClr val="D5DBDB"/>
+                      </a:solidFill>
+                    </a:lnB>
+                    <a:lnT w="9525" cap="flat" cmpd="sng" algn="ctr">
+                      <a:solidFill>
+                        <a:srgbClr val="FFFFFF"/>
+                      </a:solidFill>
+                    </a:lnT>
+                    <a:lnR w="9525" cap="flat" cmpd="sng" algn="ctr">
+                      <a:solidFill>
+                        <a:srgbClr val="FFFFFF"/>
+                      </a:solidFill>
+                    </a:lnR>
+                    <a:lnL w="9525" cap="flat" cmpd="sng" algn="ctr">
+                      <a:solidFill>
+                        <a:srgbClr val="FFFFFF"/>
+                      </a:solidFill>
+                    </a:lnL>
+                    <a:solidFill>
+                      <a:srgbClr val="FFFFFF"/>
+                    </a:solidFill>
+                  </a:tcPr>
+                </a:tc>
+                <a:tc>
+                  <a:txBody>
+                    <a:bodyPr/>
+                    <a:lstStyle/>
+                    <a:p>
+                      <a:pPr algn="r"/>
+                      <a:r>
+                        <a:rPr sz="1150" b="0" i="0">
+                          <a:solidFill>
+                            <a:srgbClr val="1C2833"/>
+                          </a:solidFill>
+                          <a:latin typeface="Malgun Gothic"/>
+                        </a:rPr>
+                        <a:t>525,000원</a:t>
+                      </a:r>
+                    </a:p>
+                  </a:txBody>
+                  <a:tcPr marL="73152" marR="73152" marT="18288" marB="18288" anchor="ctr">
+                    <a:lnB w="9525" cap="flat" cmpd="sng" algn="ctr">
+                      <a:solidFill>
+                        <a:srgbClr val="D5DBDB"/>
+                      </a:solidFill>
+                    </a:lnB>
+                    <a:lnT w="9525" cap="flat" cmpd="sng" algn="ctr">
+                      <a:solidFill>
+                        <a:srgbClr val="FFFFFF"/>
+                      </a:solidFill>
+                    </a:lnT>
+                    <a:lnR w="9525" cap="flat" cmpd="sng" algn="ctr">
+                      <a:solidFill>
+                        <a:srgbClr val="FFFFFF"/>
+                      </a:solidFill>
+                    </a:lnR>
+                    <a:lnL w="9525" cap="flat" cmpd="sng" algn="ctr">
+                      <a:solidFill>
+                        <a:srgbClr val="FFFFFF"/>
+                      </a:solidFill>
+                    </a:lnL>
+                    <a:solidFill>
+                      <a:srgbClr val="FFFFFF"/>
+                    </a:solidFill>
+                  </a:tcPr>
+                </a:tc>
+                <a:tc>
+                  <a:txBody>
+                    <a:bodyPr/>
+                    <a:lstStyle/>
+                    <a:p>
+                      <a:pPr algn="ctr"/>
+                      <a:r>
+                        <a:rPr sz="1150" b="0" i="0">
+                          <a:solidFill>
+                            <a:srgbClr val="1C2833"/>
+                          </a:solidFill>
+                          <a:latin typeface="Malgun Gothic"/>
+                        </a:rPr>
+                        <a:t>PIT 4대</a:t>
+                      </a:r>
+                    </a:p>
+                  </a:txBody>
+                  <a:tcPr marL="73152" marR="73152" marT="18288" marB="18288" anchor="ctr">
+                    <a:lnB w="9525" cap="flat" cmpd="sng" algn="ctr">
+                      <a:solidFill>
+                        <a:srgbClr val="D5DBDB"/>
+                      </a:solidFill>
+                    </a:lnB>
+                    <a:lnT w="9525" cap="flat" cmpd="sng" algn="ctr">
+                      <a:solidFill>
+                        <a:srgbClr val="FFFFFF"/>
+                      </a:solidFill>
+                    </a:lnT>
+                    <a:lnR w="9525" cap="flat" cmpd="sng" algn="ctr">
+                      <a:solidFill>
+                        <a:srgbClr val="FFFFFF"/>
+                      </a:solidFill>
+                    </a:lnR>
+                    <a:lnL w="9525" cap="flat" cmpd="sng" algn="ctr">
+                      <a:solidFill>
+                        <a:srgbClr val="FFFFFF"/>
+                      </a:solidFill>
+                    </a:lnL>
+                    <a:solidFill>
+                      <a:srgbClr val="FFFFFF"/>
+                    </a:solidFill>
+                  </a:tcPr>
+                </a:tc>
+                <a:tc>
+                  <a:txBody>
+                    <a:bodyPr/>
+                    <a:lstStyle/>
+                    <a:p>
+                      <a:pPr algn="r"/>
+                      <a:r>
+                        <a:rPr sz="1150" b="0" i="0">
+                          <a:solidFill>
+                            <a:srgbClr val="1C2833"/>
+                          </a:solidFill>
+                          <a:latin typeface="Malgun Gothic"/>
+                        </a:rPr>
+                        <a:t>2,100,000원</a:t>
+                      </a:r>
+                    </a:p>
+                  </a:txBody>
+                  <a:tcPr marL="73152" marR="73152" marT="18288" marB="18288" anchor="ctr">
+                    <a:lnB w="9525" cap="flat" cmpd="sng" algn="ctr">
+                      <a:solidFill>
+                        <a:srgbClr val="D5DBDB"/>
+                      </a:solidFill>
+                    </a:lnB>
+                    <a:lnT w="9525" cap="flat" cmpd="sng" algn="ctr">
+                      <a:solidFill>
+                        <a:srgbClr val="FFFFFF"/>
+                      </a:solidFill>
+                    </a:lnT>
+                    <a:lnR w="9525" cap="flat" cmpd="sng" algn="ctr">
+                      <a:solidFill>
+                        <a:srgbClr val="FFFFFF"/>
+                      </a:solidFill>
+                    </a:lnR>
+                    <a:lnL w="9525" cap="flat" cmpd="sng" algn="ctr">
+                      <a:solidFill>
+                        <a:srgbClr val="FFFFFF"/>
+                      </a:solidFill>
+                    </a:lnL>
+                    <a:solidFill>
+                      <a:srgbClr val="FFFFFF"/>
+                    </a:solidFill>
+                  </a:tcPr>
+                </a:tc>
+              </a:tr>
+              <a:tr h="457200">
+                <a:tc>
+                  <a:txBody>
+                    <a:bodyPr/>
+                    <a:lstStyle/>
+                    <a:p>
+                      <a:pPr algn="l"/>
+                      <a:r>
+                        <a:rPr sz="1150" b="1" i="0">
+                          <a:solidFill>
+                            <a:srgbClr val="1C2833"/>
+                          </a:solidFill>
+                          <a:latin typeface="Malgun Gothic"/>
+                        </a:rPr>
+                        <a:t>보행자 태그</a:t>
+                      </a:r>
+                    </a:p>
+                  </a:txBody>
+                  <a:tcPr marL="73152" marR="73152" marT="18288" marB="18288" anchor="ctr">
+                    <a:lnB w="9525" cap="flat" cmpd="sng" algn="ctr">
+                      <a:solidFill>
+                        <a:srgbClr val="D5DBDB"/>
+                      </a:solidFill>
+                    </a:lnB>
+                    <a:lnT w="9525" cap="flat" cmpd="sng" algn="ctr">
+                      <a:solidFill>
+                        <a:srgbClr val="FFFFFF"/>
+                      </a:solidFill>
+                    </a:lnT>
+                    <a:lnR w="9525" cap="flat" cmpd="sng" algn="ctr">
+                      <a:solidFill>
+                        <a:srgbClr val="FFFFFF"/>
+                      </a:solidFill>
+                    </a:lnR>
+                    <a:lnL w="9525" cap="flat" cmpd="sng" algn="ctr">
+                      <a:solidFill>
+                        <a:srgbClr val="FFFFFF"/>
+                      </a:solidFill>
+                    </a:lnL>
+                    <a:solidFill>
+                      <a:srgbClr val="FFFFFF"/>
+                    </a:solidFill>
+                  </a:tcPr>
+                </a:tc>
+                <a:tc>
+                  <a:txBody>
+                    <a:bodyPr/>
+                    <a:lstStyle/>
+                    <a:p>
+                      <a:pPr algn="r"/>
+                      <a:r>
+                        <a:rPr sz="1150" b="0" i="0">
+                          <a:solidFill>
+                            <a:srgbClr val="1C2833"/>
+                          </a:solidFill>
+                          <a:latin typeface="Malgun Gothic"/>
+                        </a:rPr>
+                        <a:t>110,000원</a:t>
+                      </a:r>
+                    </a:p>
+                  </a:txBody>
+                  <a:tcPr marL="73152" marR="73152" marT="18288" marB="18288" anchor="ctr">
+                    <a:lnB w="9525" cap="flat" cmpd="sng" algn="ctr">
+                      <a:solidFill>
+                        <a:srgbClr val="D5DBDB"/>
+                      </a:solidFill>
+                    </a:lnB>
+                    <a:lnT w="9525" cap="flat" cmpd="sng" algn="ctr">
+                      <a:solidFill>
+                        <a:srgbClr val="FFFFFF"/>
+                      </a:solidFill>
+                    </a:lnT>
+                    <a:lnR w="9525" cap="flat" cmpd="sng" algn="ctr">
+                      <a:solidFill>
+                        <a:srgbClr val="FFFFFF"/>
+                      </a:solidFill>
+                    </a:lnR>
+                    <a:lnL w="9525" cap="flat" cmpd="sng" algn="ctr">
+                      <a:solidFill>
+                        <a:srgbClr val="FFFFFF"/>
+                      </a:solidFill>
+                    </a:lnL>
+                    <a:solidFill>
+                      <a:srgbClr val="FFFFFF"/>
+                    </a:solidFill>
+                  </a:tcPr>
+                </a:tc>
+                <a:tc>
+                  <a:txBody>
+                    <a:bodyPr/>
+                    <a:lstStyle/>
+                    <a:p>
+                      <a:pPr algn="ctr"/>
+                      <a:r>
+                        <a:rPr sz="1150" b="0" i="0">
+                          <a:solidFill>
+                            <a:srgbClr val="1C2833"/>
+                          </a:solidFill>
+                          <a:latin typeface="Malgun Gothic"/>
+                        </a:rPr>
+                        <a:t>상시 3명</a:t>
+                      </a:r>
+                    </a:p>
+                  </a:txBody>
+                  <a:tcPr marL="73152" marR="73152" marT="18288" marB="18288" anchor="ctr">
+                    <a:lnB w="9525" cap="flat" cmpd="sng" algn="ctr">
+                      <a:solidFill>
+                        <a:srgbClr val="D5DBDB"/>
+                      </a:solidFill>
+                    </a:lnB>
+                    <a:lnT w="9525" cap="flat" cmpd="sng" algn="ctr">
+                      <a:solidFill>
+                        <a:srgbClr val="FFFFFF"/>
+                      </a:solidFill>
+                    </a:lnT>
+                    <a:lnR w="9525" cap="flat" cmpd="sng" algn="ctr">
+                      <a:solidFill>
+                        <a:srgbClr val="FFFFFF"/>
+                      </a:solidFill>
+                    </a:lnR>
+                    <a:lnL w="9525" cap="flat" cmpd="sng" algn="ctr">
+                      <a:solidFill>
+                        <a:srgbClr val="FFFFFF"/>
+                      </a:solidFill>
+                    </a:lnL>
+                    <a:solidFill>
+                      <a:srgbClr val="FFFFFF"/>
+                    </a:solidFill>
+                  </a:tcPr>
+                </a:tc>
+                <a:tc>
+                  <a:txBody>
+                    <a:bodyPr/>
+                    <a:lstStyle/>
+                    <a:p>
+                      <a:pPr algn="r"/>
+                      <a:r>
+                        <a:rPr sz="1150" b="0" i="0">
+                          <a:solidFill>
+                            <a:srgbClr val="1C2833"/>
+                          </a:solidFill>
+                          <a:latin typeface="Malgun Gothic"/>
+                        </a:rPr>
+                        <a:t>330,000원</a:t>
+                      </a:r>
+                    </a:p>
+                  </a:txBody>
+                  <a:tcPr marL="73152" marR="73152" marT="18288" marB="18288" anchor="ctr">
+                    <a:lnB w="9525" cap="flat" cmpd="sng" algn="ctr">
+                      <a:solidFill>
+                        <a:srgbClr val="D5DBDB"/>
+                      </a:solidFill>
+                    </a:lnB>
+                    <a:lnT w="9525" cap="flat" cmpd="sng" algn="ctr">
+                      <a:solidFill>
+                        <a:srgbClr val="FFFFFF"/>
+                      </a:solidFill>
+                    </a:lnT>
+                    <a:lnR w="9525" cap="flat" cmpd="sng" algn="ctr">
+                      <a:solidFill>
+                        <a:srgbClr val="FFFFFF"/>
+                      </a:solidFill>
+                    </a:lnR>
+                    <a:lnL w="9525" cap="flat" cmpd="sng" algn="ctr">
+                      <a:solidFill>
+                        <a:srgbClr val="FFFFFF"/>
+                      </a:solidFill>
+                    </a:lnL>
+                    <a:solidFill>
+                      <a:srgbClr val="FFFFFF"/>
+                    </a:solidFill>
+                  </a:tcPr>
+                </a:tc>
+              </a:tr>
+              <a:tr h="457200">
+                <a:tc>
+                  <a:txBody>
+                    <a:bodyPr/>
+                    <a:lstStyle/>
+                    <a:p>
+                      <a:pPr algn="l"/>
+                      <a:r>
+                        <a:rPr sz="1150" b="1" i="0">
+                          <a:solidFill>
+                            <a:srgbClr val="1C2833"/>
+                          </a:solidFill>
+                          <a:latin typeface="Malgun Gothic"/>
+                        </a:rPr>
+                        <a:t>EOD</a:t>
+                      </a:r>
+                    </a:p>
+                  </a:txBody>
+                  <a:tcPr marL="73152" marR="73152" marT="18288" marB="18288" anchor="ctr">
+                    <a:lnB w="9525" cap="flat" cmpd="sng" algn="ctr">
+                      <a:solidFill>
+                        <a:srgbClr val="D5DBDB"/>
+                      </a:solidFill>
+                    </a:lnB>
+                    <a:lnT w="9525" cap="flat" cmpd="sng" algn="ctr">
+                      <a:solidFill>
+                        <a:srgbClr val="FFFFFF"/>
+                      </a:solidFill>
+                    </a:lnT>
+                    <a:lnR w="9525" cap="flat" cmpd="sng" algn="ctr">
+                      <a:solidFill>
+                        <a:srgbClr val="FFFFFF"/>
+                      </a:solidFill>
+                    </a:lnR>
+                    <a:lnL w="9525" cap="flat" cmpd="sng" algn="ctr">
+                      <a:solidFill>
+                        <a:srgbClr val="FFFFFF"/>
+                      </a:solidFill>
+                    </a:lnL>
+                    <a:solidFill>
+                      <a:srgbClr val="FFFFFF"/>
+                    </a:solidFill>
+                  </a:tcPr>
+                </a:tc>
+                <a:tc>
+                  <a:txBody>
+                    <a:bodyPr/>
+                    <a:lstStyle/>
+                    <a:p>
+                      <a:pPr algn="r"/>
+                      <a:r>
+                        <a:rPr sz="1150" b="0" i="0">
+                          <a:solidFill>
+                            <a:srgbClr val="1C2833"/>
+                          </a:solidFill>
+                          <a:latin typeface="Malgun Gothic"/>
+                        </a:rPr>
+                        <a:t>220,000원</a:t>
+                      </a:r>
+                    </a:p>
+                  </a:txBody>
+                  <a:tcPr marL="73152" marR="73152" marT="18288" marB="18288" anchor="ctr">
+                    <a:lnB w="9525" cap="flat" cmpd="sng" algn="ctr">
+                      <a:solidFill>
+                        <a:srgbClr val="D5DBDB"/>
+                      </a:solidFill>
+                    </a:lnB>
+                    <a:lnT w="9525" cap="flat" cmpd="sng" algn="ctr">
+                      <a:solidFill>
+                        <a:srgbClr val="FFFFFF"/>
+                      </a:solidFill>
+                    </a:lnT>
+                    <a:lnR w="9525" cap="flat" cmpd="sng" algn="ctr">
+                      <a:solidFill>
+                        <a:srgbClr val="FFFFFF"/>
+                      </a:solidFill>
+                    </a:lnR>
+                    <a:lnL w="9525" cap="flat" cmpd="sng" algn="ctr">
+                      <a:solidFill>
+                        <a:srgbClr val="FFFFFF"/>
+                      </a:solidFill>
+                    </a:lnL>
+                    <a:solidFill>
+                      <a:srgbClr val="FFFFFF"/>
+                    </a:solidFill>
+                  </a:tcPr>
+                </a:tc>
+                <a:tc>
+                  <a:txBody>
+                    <a:bodyPr/>
+                    <a:lstStyle/>
+                    <a:p>
+                      <a:pPr algn="ctr"/>
+                      <a:r>
+                        <a:rPr sz="1150" b="0" i="0">
+                          <a:solidFill>
+                            <a:srgbClr val="1C2833"/>
+                          </a:solidFill>
+                          <a:latin typeface="Malgun Gothic"/>
+                        </a:rPr>
+                        <a:t>수량 미확정</a:t>
+                      </a:r>
+                    </a:p>
+                  </a:txBody>
+                  <a:tcPr marL="73152" marR="73152" marT="18288" marB="18288" anchor="ctr">
+                    <a:lnB w="9525" cap="flat" cmpd="sng" algn="ctr">
+                      <a:solidFill>
+                        <a:srgbClr val="D5DBDB"/>
+                      </a:solidFill>
+                    </a:lnB>
+                    <a:lnT w="9525" cap="flat" cmpd="sng" algn="ctr">
+                      <a:solidFill>
+                        <a:srgbClr val="FFFFFF"/>
+                      </a:solidFill>
+                    </a:lnT>
+                    <a:lnR w="9525" cap="flat" cmpd="sng" algn="ctr">
+                      <a:solidFill>
+                        <a:srgbClr val="FFFFFF"/>
+                      </a:solidFill>
+                    </a:lnR>
+                    <a:lnL w="9525" cap="flat" cmpd="sng" algn="ctr">
+                      <a:solidFill>
+                        <a:srgbClr val="FFFFFF"/>
+                      </a:solidFill>
+                    </a:lnL>
+                    <a:solidFill>
+                      <a:srgbClr val="FFFFFF"/>
+                    </a:solidFill>
+                  </a:tcPr>
+                </a:tc>
+                <a:tc>
+                  <a:txBody>
+                    <a:bodyPr/>
+                    <a:lstStyle/>
+                    <a:p>
+                      <a:pPr algn="r"/>
+                      <a:r>
+                        <a:rPr sz="1150" b="0" i="0">
+                          <a:solidFill>
+                            <a:srgbClr val="1C2833"/>
+                          </a:solidFill>
+                          <a:latin typeface="Malgun Gothic"/>
+                        </a:rPr>
+                        <a:t>별도 산정</a:t>
+                      </a:r>
+                    </a:p>
+                  </a:txBody>
+                  <a:tcPr marL="73152" marR="73152" marT="18288" marB="18288" anchor="ctr">
+                    <a:lnB w="9525" cap="flat" cmpd="sng" algn="ctr">
+                      <a:solidFill>
+                        <a:srgbClr val="D5DBDB"/>
+                      </a:solidFill>
+                    </a:lnB>
+                    <a:lnT w="9525" cap="flat" cmpd="sng" algn="ctr">
+                      <a:solidFill>
+                        <a:srgbClr val="FFFFFF"/>
+                      </a:solidFill>
+                    </a:lnT>
+                    <a:lnR w="9525" cap="flat" cmpd="sng" algn="ctr">
+                      <a:solidFill>
+                        <a:srgbClr val="FFFFFF"/>
+                      </a:solidFill>
+                    </a:lnR>
+                    <a:lnL w="9525" cap="flat" cmpd="sng" algn="ctr">
+                      <a:solidFill>
+                        <a:srgbClr val="FFFFFF"/>
+                      </a:solidFill>
+                    </a:lnL>
+                    <a:solidFill>
+                      <a:srgbClr val="FFFFFF"/>
+                    </a:solidFill>
+                  </a:tcPr>
+                </a:tc>
+              </a:tr>
+              <a:tr h="457200">
+                <a:tc>
+                  <a:txBody>
+                    <a:bodyPr/>
+                    <a:lstStyle/>
+                    <a:p>
+                      <a:pPr algn="l"/>
+                      <a:r>
+                        <a:rPr sz="1150" b="1" i="0">
+                          <a:solidFill>
+                            <a:srgbClr val="1C2833"/>
+                          </a:solidFill>
+                          <a:latin typeface="Malgun Gothic"/>
+                        </a:rPr>
+                        <a:t>합계 (EOD 제외)</a:t>
+                      </a:r>
+                    </a:p>
+                  </a:txBody>
+                  <a:tcPr marL="73152" marR="73152" marT="18288" marB="18288" anchor="ctr">
+                    <a:lnB w="9525" cap="flat" cmpd="sng" algn="ctr">
+                      <a:solidFill>
+                        <a:srgbClr val="D5DBDB"/>
+                      </a:solidFill>
+                    </a:lnB>
+                    <a:lnT w="9525" cap="flat" cmpd="sng" algn="ctr">
+                      <a:solidFill>
+                        <a:srgbClr val="FFFFFF"/>
+                      </a:solidFill>
+                    </a:lnT>
+                    <a:lnR w="9525" cap="flat" cmpd="sng" algn="ctr">
+                      <a:solidFill>
+                        <a:srgbClr val="FFFFFF"/>
+                      </a:solidFill>
+                    </a:lnR>
+                    <a:lnL w="9525" cap="flat" cmpd="sng" algn="ctr">
+                      <a:solidFill>
+                        <a:srgbClr val="FFFFFF"/>
+                      </a:solidFill>
+                    </a:lnL>
+                    <a:solidFill>
+                      <a:srgbClr val="FFFFFF"/>
+                    </a:solidFill>
+                  </a:tcPr>
+                </a:tc>
+                <a:tc>
+                  <a:txBody>
+                    <a:bodyPr/>
+                    <a:lstStyle/>
+                    <a:p>
+                      <a:pPr algn="r"/>
+                      <a:r>
+                        <a:rPr sz="1150" b="0" i="0">
+                          <a:solidFill>
+                            <a:srgbClr val="1C2833"/>
+                          </a:solidFill>
+                          <a:latin typeface="Malgun Gothic"/>
+                        </a:rPr>
+                        <a:t/>
+                      </a:r>
+                    </a:p>
+                  </a:txBody>
+                  <a:tcPr marL="73152" marR="73152" marT="18288" marB="18288" anchor="ctr">
+                    <a:lnB w="9525" cap="flat" cmpd="sng" algn="ctr">
+                      <a:solidFill>
+                        <a:srgbClr val="D5DBDB"/>
+                      </a:solidFill>
+                    </a:lnB>
+                    <a:lnT w="9525" cap="flat" cmpd="sng" algn="ctr">
+                      <a:solidFill>
+                        <a:srgbClr val="FFFFFF"/>
+                      </a:solidFill>
+                    </a:lnT>
+                    <a:lnR w="9525" cap="flat" cmpd="sng" algn="ctr">
+                      <a:solidFill>
+                        <a:srgbClr val="FFFFFF"/>
+                      </a:solidFill>
+                    </a:lnR>
+                    <a:lnL w="9525" cap="flat" cmpd="sng" algn="ctr">
+                      <a:solidFill>
+                        <a:srgbClr val="FFFFFF"/>
+                      </a:solidFill>
+                    </a:lnL>
+                    <a:solidFill>
+                      <a:srgbClr val="FFFFFF"/>
+                    </a:solidFill>
+                  </a:tcPr>
+                </a:tc>
+                <a:tc>
+                  <a:txBody>
+                    <a:bodyPr/>
+                    <a:lstStyle/>
+                    <a:p>
+                      <a:pPr algn="ctr"/>
+                      <a:r>
+                        <a:rPr sz="1150" b="0" i="0">
+                          <a:solidFill>
+                            <a:srgbClr val="1C2833"/>
+                          </a:solidFill>
+                          <a:latin typeface="Malgun Gothic"/>
+                        </a:rPr>
+                        <a:t/>
+                      </a:r>
+                    </a:p>
+                  </a:txBody>
+                  <a:tcPr marL="73152" marR="73152" marT="18288" marB="18288" anchor="ctr">
+                    <a:lnB w="9525" cap="flat" cmpd="sng" algn="ctr">
+                      <a:solidFill>
+                        <a:srgbClr val="D5DBDB"/>
+                      </a:solidFill>
+                    </a:lnB>
+                    <a:lnT w="9525" cap="flat" cmpd="sng" algn="ctr">
+                      <a:solidFill>
+                        <a:srgbClr val="FFFFFF"/>
+                      </a:solidFill>
+                    </a:lnT>
+                    <a:lnR w="9525" cap="flat" cmpd="sng" algn="ctr">
+                      <a:solidFill>
+                        <a:srgbClr val="FFFFFF"/>
+                      </a:solidFill>
+                    </a:lnR>
+                    <a:lnL w="9525" cap="flat" cmpd="sng" algn="ctr">
+                      <a:solidFill>
+                        <a:srgbClr val="FFFFFF"/>
+                      </a:solidFill>
+                    </a:lnL>
+                    <a:solidFill>
+                      <a:srgbClr val="FFFFFF"/>
+                    </a:solidFill>
+                  </a:tcPr>
+                </a:tc>
+                <a:tc>
+                  <a:txBody>
+                    <a:bodyPr/>
+                    <a:lstStyle/>
+                    <a:p>
+                      <a:pPr algn="r"/>
+                      <a:r>
+                        <a:rPr sz="1150" b="0" i="0">
+                          <a:solidFill>
+                            <a:srgbClr val="1C2833"/>
+                          </a:solidFill>
+                          <a:latin typeface="Malgun Gothic"/>
+                        </a:rPr>
+                        <a:t>2,430,000원</a:t>
+                      </a:r>
+                    </a:p>
+                  </a:txBody>
+                  <a:tcPr marL="73152" marR="73152" marT="18288" marB="18288" anchor="ctr">
+                    <a:lnB w="9525" cap="flat" cmpd="sng" algn="ctr">
+                      <a:solidFill>
+                        <a:srgbClr val="D5DBDB"/>
+                      </a:solidFill>
+                    </a:lnB>
+                    <a:lnT w="9525" cap="flat" cmpd="sng" algn="ctr">
+                      <a:solidFill>
+                        <a:srgbClr val="FFFFFF"/>
+                      </a:solidFill>
+                    </a:lnT>
+                    <a:lnR w="9525" cap="flat" cmpd="sng" algn="ctr">
+                      <a:solidFill>
+                        <a:srgbClr val="FFFFFF"/>
+                      </a:solidFill>
+                    </a:lnR>
+                    <a:lnL w="9525" cap="flat" cmpd="sng" algn="ctr">
+                      <a:solidFill>
+                        <a:srgbClr val="FFFFFF"/>
+                      </a:solidFill>
+                    </a:lnL>
+                    <a:solidFill>
+                      <a:srgbClr val="FFFFFF"/>
+                    </a:solidFill>
+                  </a:tcPr>
+                </a:tc>
+              </a:tr>
+            </a:tbl>
+          </a:graphicData>
+        </a:graphic>
+      </p:graphicFrame>
+      <p:sp>
+        <p:nvSpPr>
+          <p:cNvPr id="16" name="TextBox 15"/>
+          <p:cNvSpPr txBox="1"/>
+          <p:nvPr/>
+        </p:nvSpPr>
+        <p:spPr>
+          <a:xfrm>
+            <a:off x="868680" y="3712463"/>
+            <a:ext cx="10881360" cy="292608"/>
+          </a:xfrm>
+          <a:prstGeom prst="rect">
+            <a:avLst/>
+          </a:prstGeom>
+          <a:noFill/>
+        </p:spPr>
+        <p:txBody>
+          <a:bodyPr wrap="square" lIns="36576" rIns="36576" tIns="0" bIns="0">
+            <a:spAutoFit/>
+          </a:bodyPr>
+          <a:lstStyle/>
+          <a:p>
+            <a:pPr algn="l">
+              <a:spcAft>
+                <a:spcPts val="400"/>
+              </a:spcAft>
+            </a:pPr>
+            <a:r>
+              <a:rPr sz="1200" b="0" i="0">
+                <a:solidFill>
+                  <a:srgbClr val="1C2833"/>
+                </a:solidFill>
+                <a:latin typeface="Malgun Gothic"/>
+              </a:rPr>
+              <a:t>상시 인원 5명 센터 — 2,100,000 + 550,000 = </a:t>
+            </a:r>
+            <a:r>
+              <a:rPr sz="1200" b="1" i="0">
+                <a:solidFill>
+                  <a:srgbClr val="C0392B"/>
+                </a:solidFill>
+                <a:latin typeface="Malgun Gothic"/>
+              </a:rPr>
+              <a:t>2,650,000원</a:t>
+            </a:r>
+          </a:p>
+        </p:txBody>
+      </p:sp>
+      <p:sp>
+        <p:nvSpPr>
+          <p:cNvPr id="17" name="Rectangle 16"/>
+          <p:cNvSpPr/>
+          <p:nvPr/>
+        </p:nvSpPr>
+        <p:spPr>
+          <a:xfrm>
+            <a:off x="640080" y="4169663"/>
+            <a:ext cx="1234440" cy="301752"/>
+          </a:xfrm>
+          <a:prstGeom prst="rect">
+            <a:avLst/>
+          </a:prstGeom>
+          <a:solidFill>
+            <a:srgbClr val="8C8C8C"/>
+          </a:solidFill>
+          <a:ln>
+            <a:noFill/>
+          </a:ln>
+          <a:effectLst/>
+        </p:spPr>
+        <p:style>
+          <a:lnRef idx="1">
+            <a:schemeClr val="accent1"/>
+          </a:lnRef>
+          <a:fillRef idx="3">
+            <a:schemeClr val="accent1"/>
+          </a:fillRef>
+          <a:effectRef idx="2">
+            <a:schemeClr val="accent1"/>
+          </a:effectRef>
+          <a:fontRef idx="minor">
+            <a:schemeClr val="lt1"/>
+          </a:fontRef>
+        </p:style>
+        <p:txBody>
+          <a:bodyPr rtlCol="0" anchor="ctr" wrap="square" lIns="36576" rIns="36576" tIns="0" bIns="0"/>
+          <a:lstStyle/>
+          <a:p>
+            <a:pPr algn="ctr"/>
+            <a:r>
+              <a:rPr sz="1100" b="1" i="0">
+                <a:solidFill>
+                  <a:srgbClr val="FFFFFF"/>
+                </a:solidFill>
+                <a:latin typeface="Malgun Gothic"/>
+              </a:rPr>
+              <a:t>확산 환산</a:t>
+            </a:r>
+          </a:p>
+        </p:txBody>
+      </p:sp>
+      <p:graphicFrame>
+        <p:nvGraphicFramePr>
+          <p:cNvPr id="18" name="Table 17"/>
+          <p:cNvGraphicFramePr>
+            <a:graphicFrameLocks noGrp="1"/>
+          </p:cNvGraphicFramePr>
+          <p:nvPr/>
+        </p:nvGraphicFramePr>
+        <p:xfrm>
+          <a:off x="658368" y="4608576"/>
+          <a:ext cx="11064240" cy="786384"/>
+        </p:xfrm>
+        <a:graphic>
+          <a:graphicData uri="http://schemas.openxmlformats.org/drawingml/2006/table">
+            <a:tbl>
+              <a:tblPr firstRow="1" bandRow="0">
+                <a:tableStyleId>{5C22544A-7EE6-4342-B048-85BDC9FD1C3A}</a:tableStyleId>
+              </a:tblPr>
+              <a:tblGrid>
+                <a:gridCol w="3931920"/>
+                <a:gridCol w="2377440"/>
+                <a:gridCol w="2377440"/>
+                <a:gridCol w="2377440"/>
+              </a:tblGrid>
+              <a:tr h="329184">
+                <a:tc>
+                  <a:txBody>
+                    <a:bodyPr/>
+                    <a:lstStyle/>
+                    <a:p>
+                      <a:pPr algn="ctr"/>
+                      <a:r>
+                        <a:rPr sz="1100" b="1" i="0">
+                          <a:solidFill>
+                            <a:srgbClr val="FFFFFF"/>
+                          </a:solidFill>
+                          <a:latin typeface="Malgun Gothic"/>
+                        </a:rPr>
+                        <a:t>센터 수</a:t>
+                      </a:r>
+                    </a:p>
+                  </a:txBody>
+                  <a:tcPr marL="73152" marR="73152" marT="0" marB="0" anchor="ctr">
+                    <a:lnB w="9525" cap="flat" cmpd="sng" algn="ctr">
+                      <a:solidFill>
+                        <a:srgbClr val="333B45"/>
+                      </a:solidFill>
+                    </a:lnB>
+                    <a:lnT w="9525" cap="flat" cmpd="sng" algn="ctr">
+                      <a:solidFill>
+                        <a:srgbClr val="333B45"/>
+                      </a:solidFill>
+                    </a:lnT>
+                    <a:lnR w="9525" cap="flat" cmpd="sng" algn="ctr">
+                      <a:solidFill>
+                        <a:srgbClr val="333B45"/>
+                      </a:solidFill>
+                    </a:lnR>
+                    <a:lnL w="9525" cap="flat" cmpd="sng" algn="ctr">
+                      <a:solidFill>
+                        <a:srgbClr val="333B45"/>
+                      </a:solidFill>
+                    </a:lnL>
+                    <a:solidFill>
+                      <a:srgbClr val="333B45"/>
+                    </a:solidFill>
+                  </a:tcPr>
+                </a:tc>
+                <a:tc>
+                  <a:txBody>
+                    <a:bodyPr/>
+                    <a:lstStyle/>
+                    <a:p>
+                      <a:pPr algn="ctr"/>
+                      <a:r>
+                        <a:rPr sz="1100" b="1" i="0">
+                          <a:solidFill>
+                            <a:srgbClr val="FFFFFF"/>
+                          </a:solidFill>
+                          <a:latin typeface="Malgun Gothic"/>
+                        </a:rPr>
+                        <a:t>5개</a:t>
+                      </a:r>
+                    </a:p>
+                  </a:txBody>
+                  <a:tcPr marL="73152" marR="73152" marT="0" marB="0" anchor="ctr">
+                    <a:lnB w="9525" cap="flat" cmpd="sng" algn="ctr">
+                      <a:solidFill>
+                        <a:srgbClr val="333B45"/>
+                      </a:solidFill>
+                    </a:lnB>
+                    <a:lnT w="9525" cap="flat" cmpd="sng" algn="ctr">
+                      <a:solidFill>
+                        <a:srgbClr val="333B45"/>
+                      </a:solidFill>
+                    </a:lnT>
+                    <a:lnR w="9525" cap="flat" cmpd="sng" algn="ctr">
+                      <a:solidFill>
+                        <a:srgbClr val="333B45"/>
+                      </a:solidFill>
+                    </a:lnR>
+                    <a:lnL w="9525" cap="flat" cmpd="sng" algn="ctr">
+                      <a:solidFill>
+                        <a:srgbClr val="333B45"/>
+                      </a:solidFill>
+                    </a:lnL>
+                    <a:solidFill>
+                      <a:srgbClr val="333B45"/>
+                    </a:solidFill>
+                  </a:tcPr>
+                </a:tc>
+                <a:tc>
+                  <a:txBody>
+                    <a:bodyPr/>
+                    <a:lstStyle/>
+                    <a:p>
+                      <a:pPr algn="ctr"/>
+                      <a:r>
+                        <a:rPr sz="1100" b="1" i="0">
+                          <a:solidFill>
+                            <a:srgbClr val="FFFFFF"/>
+                          </a:solidFill>
+                          <a:latin typeface="Malgun Gothic"/>
+                        </a:rPr>
+                        <a:t>10개</a:t>
+                      </a:r>
+                    </a:p>
+                  </a:txBody>
+                  <a:tcPr marL="73152" marR="73152" marT="0" marB="0" anchor="ctr">
+                    <a:lnB w="9525" cap="flat" cmpd="sng" algn="ctr">
+                      <a:solidFill>
+                        <a:srgbClr val="333B45"/>
+                      </a:solidFill>
+                    </a:lnB>
+                    <a:lnT w="9525" cap="flat" cmpd="sng" algn="ctr">
+                      <a:solidFill>
+                        <a:srgbClr val="333B45"/>
+                      </a:solidFill>
+                    </a:lnT>
+                    <a:lnR w="9525" cap="flat" cmpd="sng" algn="ctr">
+                      <a:solidFill>
+                        <a:srgbClr val="333B45"/>
+                      </a:solidFill>
+                    </a:lnR>
+                    <a:lnL w="9525" cap="flat" cmpd="sng" algn="ctr">
+                      <a:solidFill>
+                        <a:srgbClr val="333B45"/>
+                      </a:solidFill>
+                    </a:lnL>
+                    <a:solidFill>
+                      <a:srgbClr val="333B45"/>
+                    </a:solidFill>
+                  </a:tcPr>
+                </a:tc>
+                <a:tc>
+                  <a:txBody>
+                    <a:bodyPr/>
+                    <a:lstStyle/>
+                    <a:p>
+                      <a:pPr algn="ctr"/>
+                      <a:r>
+                        <a:rPr sz="1100" b="1" i="0">
+                          <a:solidFill>
+                            <a:srgbClr val="FFFFFF"/>
+                          </a:solidFill>
+                          <a:latin typeface="Malgun Gothic"/>
+                        </a:rPr>
+                        <a:t>15개 (FFWF 전체)</a:t>
+                      </a:r>
+                    </a:p>
+                  </a:txBody>
+                  <a:tcPr marL="73152" marR="73152" marT="0" marB="0" anchor="ctr">
+                    <a:lnB w="9525" cap="flat" cmpd="sng" algn="ctr">
+                      <a:solidFill>
+                        <a:srgbClr val="333B45"/>
+                      </a:solidFill>
+                    </a:lnB>
+                    <a:lnT w="9525" cap="flat" cmpd="sng" algn="ctr">
+                      <a:solidFill>
+                        <a:srgbClr val="333B45"/>
+                      </a:solidFill>
+                    </a:lnT>
+                    <a:lnR w="9525" cap="flat" cmpd="sng" algn="ctr">
+                      <a:solidFill>
+                        <a:srgbClr val="333B45"/>
+                      </a:solidFill>
+                    </a:lnR>
+                    <a:lnL w="9525" cap="flat" cmpd="sng" algn="ctr">
+                      <a:solidFill>
+                        <a:srgbClr val="333B45"/>
+                      </a:solidFill>
+                    </a:lnL>
+                    <a:solidFill>
+                      <a:srgbClr val="333B45"/>
+                    </a:solidFill>
+                  </a:tcPr>
+                </a:tc>
+              </a:tr>
+              <a:tr h="457200">
+                <a:tc>
+                  <a:txBody>
+                    <a:bodyPr/>
+                    <a:lstStyle/>
+                    <a:p>
+                      <a:pPr algn="l"/>
+                      <a:r>
+                        <a:rPr sz="1150" b="1" i="0">
+                          <a:solidFill>
+                            <a:srgbClr val="1C2833"/>
+                          </a:solidFill>
+                          <a:latin typeface="Malgun Gothic"/>
+                        </a:rPr>
+                        <a:t>같은 범위를 하드웨어로 덮을 때</a:t>
+                      </a:r>
+                    </a:p>
+                  </a:txBody>
+                  <a:tcPr marL="73152" marR="73152" marT="18288" marB="18288" anchor="ctr">
+                    <a:lnB w="9525" cap="flat" cmpd="sng" algn="ctr">
+                      <a:solidFill>
+                        <a:srgbClr val="D5DBDB"/>
+                      </a:solidFill>
+                    </a:lnB>
+                    <a:lnT w="9525" cap="flat" cmpd="sng" algn="ctr">
+                      <a:solidFill>
+                        <a:srgbClr val="FFFFFF"/>
+                      </a:solidFill>
+                    </a:lnT>
+                    <a:lnR w="9525" cap="flat" cmpd="sng" algn="ctr">
+                      <a:solidFill>
+                        <a:srgbClr val="FFFFFF"/>
+                      </a:solidFill>
+                    </a:lnR>
+                    <a:lnL w="9525" cap="flat" cmpd="sng" algn="ctr">
+                      <a:solidFill>
+                        <a:srgbClr val="FFFFFF"/>
+                      </a:solidFill>
+                    </a:lnL>
+                    <a:solidFill>
+                      <a:srgbClr val="FFFFFF"/>
+                    </a:solidFill>
+                  </a:tcPr>
+                </a:tc>
+                <a:tc>
+                  <a:txBody>
+                    <a:bodyPr/>
+                    <a:lstStyle/>
+                    <a:p>
+                      <a:pPr algn="r"/>
+                      <a:r>
+                        <a:rPr sz="1150" b="0" i="0">
+                          <a:solidFill>
+                            <a:srgbClr val="1C2833"/>
+                          </a:solidFill>
+                          <a:latin typeface="Malgun Gothic"/>
+                        </a:rPr>
+                        <a:t>12,150,000원</a:t>
+                      </a:r>
+                    </a:p>
+                  </a:txBody>
+                  <a:tcPr marL="73152" marR="73152" marT="18288" marB="18288" anchor="ctr">
+                    <a:lnB w="9525" cap="flat" cmpd="sng" algn="ctr">
+                      <a:solidFill>
+                        <a:srgbClr val="D5DBDB"/>
+                      </a:solidFill>
+                    </a:lnB>
+                    <a:lnT w="9525" cap="flat" cmpd="sng" algn="ctr">
+                      <a:solidFill>
+                        <a:srgbClr val="FFFFFF"/>
+                      </a:solidFill>
+                    </a:lnT>
+                    <a:lnR w="9525" cap="flat" cmpd="sng" algn="ctr">
+                      <a:solidFill>
+                        <a:srgbClr val="FFFFFF"/>
+                      </a:solidFill>
+                    </a:lnR>
+                    <a:lnL w="9525" cap="flat" cmpd="sng" algn="ctr">
+                      <a:solidFill>
+                        <a:srgbClr val="FFFFFF"/>
+                      </a:solidFill>
+                    </a:lnL>
+                    <a:solidFill>
+                      <a:srgbClr val="FFFFFF"/>
+                    </a:solidFill>
+                  </a:tcPr>
+                </a:tc>
+                <a:tc>
+                  <a:txBody>
+                    <a:bodyPr/>
+                    <a:lstStyle/>
+                    <a:p>
+                      <a:pPr algn="r"/>
+                      <a:r>
+                        <a:rPr sz="1150" b="0" i="0">
+                          <a:solidFill>
+                            <a:srgbClr val="1C2833"/>
+                          </a:solidFill>
+                          <a:latin typeface="Malgun Gothic"/>
+                        </a:rPr>
+                        <a:t>24,300,000원</a:t>
+                      </a:r>
+                    </a:p>
+                  </a:txBody>
+                  <a:tcPr marL="73152" marR="73152" marT="18288" marB="18288" anchor="ctr">
+                    <a:lnB w="9525" cap="flat" cmpd="sng" algn="ctr">
+                      <a:solidFill>
+                        <a:srgbClr val="D5DBDB"/>
+                      </a:solidFill>
+                    </a:lnB>
+                    <a:lnT w="9525" cap="flat" cmpd="sng" algn="ctr">
+                      <a:solidFill>
+                        <a:srgbClr val="FFFFFF"/>
+                      </a:solidFill>
+                    </a:lnT>
+                    <a:lnR w="9525" cap="flat" cmpd="sng" algn="ctr">
+                      <a:solidFill>
+                        <a:srgbClr val="FFFFFF"/>
+                      </a:solidFill>
+                    </a:lnR>
+                    <a:lnL w="9525" cap="flat" cmpd="sng" algn="ctr">
+                      <a:solidFill>
+                        <a:srgbClr val="FFFFFF"/>
+                      </a:solidFill>
+                    </a:lnL>
+                    <a:solidFill>
+                      <a:srgbClr val="FFFFFF"/>
+                    </a:solidFill>
+                  </a:tcPr>
+                </a:tc>
+                <a:tc>
+                  <a:txBody>
+                    <a:bodyPr/>
+                    <a:lstStyle/>
+                    <a:p>
+                      <a:pPr algn="r"/>
+                      <a:r>
+                        <a:rPr sz="1150" b="0" i="0">
+                          <a:solidFill>
+                            <a:srgbClr val="1C2833"/>
+                          </a:solidFill>
+                          <a:latin typeface="Malgun Gothic"/>
+                        </a:rPr>
+                        <a:t>36,450,000원</a:t>
+                      </a:r>
+                    </a:p>
+                  </a:txBody>
+                  <a:tcPr marL="73152" marR="73152" marT="18288" marB="18288" anchor="ctr">
+                    <a:lnB w="9525" cap="flat" cmpd="sng" algn="ctr">
+                      <a:solidFill>
+                        <a:srgbClr val="D5DBDB"/>
+                      </a:solidFill>
+                    </a:lnB>
+                    <a:lnT w="9525" cap="flat" cmpd="sng" algn="ctr">
+                      <a:solidFill>
+                        <a:srgbClr val="FFFFFF"/>
+                      </a:solidFill>
+                    </a:lnT>
+                    <a:lnR w="9525" cap="flat" cmpd="sng" algn="ctr">
+                      <a:solidFill>
+                        <a:srgbClr val="FFFFFF"/>
+                      </a:solidFill>
+                    </a:lnR>
+                    <a:lnL w="9525" cap="flat" cmpd="sng" algn="ctr">
+                      <a:solidFill>
+                        <a:srgbClr val="FFFFFF"/>
+                      </a:solidFill>
+                    </a:lnL>
+                    <a:solidFill>
+                      <a:srgbClr val="FFFFFF"/>
+                    </a:solidFill>
+                  </a:tcPr>
+                </a:tc>
+              </a:tr>
+            </a:tbl>
+          </a:graphicData>
+        </a:graphic>
+      </p:graphicFrame>
+      <p:sp>
+        <p:nvSpPr>
+          <p:cNvPr id="19" name="TextBox 18"/>
+          <p:cNvSpPr txBox="1"/>
+          <p:nvPr/>
+        </p:nvSpPr>
+        <p:spPr>
+          <a:xfrm>
+            <a:off x="868680" y="5541264"/>
+            <a:ext cx="10058400" cy="256032"/>
+          </a:xfrm>
+          <a:prstGeom prst="rect">
+            <a:avLst/>
+          </a:prstGeom>
+          <a:noFill/>
+        </p:spPr>
+        <p:txBody>
+          <a:bodyPr wrap="square" lIns="36576" rIns="36576" tIns="0" bIns="0">
+            <a:spAutoFit/>
+          </a:bodyPr>
+          <a:lstStyle/>
+          <a:p>
+            <a:pPr algn="l">
+              <a:spcAft>
+                <a:spcPts val="400"/>
+              </a:spcAft>
+            </a:pPr>
+            <a:r>
+              <a:rPr sz="1100" b="0" i="0">
+                <a:solidFill>
+                  <a:srgbClr val="5D6D7E"/>
+                </a:solidFill>
+                <a:latin typeface="Malgun Gothic"/>
+              </a:rPr>
+              <a:t>·  단가는 사용자 제공 (2026.08 기준). 계약 조건에 따라 달라질 수 있다.</a:t>
+            </a:r>
+          </a:p>
+        </p:txBody>
+      </p:sp>
+      <p:sp>
+        <p:nvSpPr>
+          <p:cNvPr id="20" name="TextBox 19"/>
+          <p:cNvSpPr txBox="1"/>
+          <p:nvPr/>
+        </p:nvSpPr>
+        <p:spPr>
+          <a:xfrm>
+            <a:off x="868680" y="5806440"/>
+            <a:ext cx="10058400" cy="256032"/>
+          </a:xfrm>
+          <a:prstGeom prst="rect">
+            <a:avLst/>
+          </a:prstGeom>
+          <a:noFill/>
+        </p:spPr>
+        <p:txBody>
+          <a:bodyPr wrap="square" lIns="36576" rIns="36576" tIns="0" bIns="0">
+            <a:spAutoFit/>
+          </a:bodyPr>
+          <a:lstStyle/>
+          <a:p>
+            <a:pPr algn="l">
+              <a:spcAft>
+                <a:spcPts val="400"/>
+              </a:spcAft>
+            </a:pPr>
+            <a:r>
+              <a:rPr sz="1100" b="0" i="0">
+                <a:solidFill>
+                  <a:srgbClr val="5D6D7E"/>
+                </a:solidFill>
+                <a:latin typeface="Malgun Gothic"/>
+              </a:rPr>
+              <a:t>·  SafeAlert 는 같은 대상(PIT 4대 + 상시 인원)을 이미 지급된 단말에 앱을 넣어 덮는다. 추가 하드웨어 0.</a:t>
+            </a:r>
+          </a:p>
+        </p:txBody>
+      </p:sp>
+      <p:sp>
+        <p:nvSpPr>
+          <p:cNvPr id="21" name="TextBox 20"/>
+          <p:cNvSpPr txBox="1"/>
+          <p:nvPr/>
+        </p:nvSpPr>
+        <p:spPr>
+          <a:xfrm>
+            <a:off x="868680" y="6071616"/>
+            <a:ext cx="10058400" cy="256032"/>
+          </a:xfrm>
+          <a:prstGeom prst="rect">
+            <a:avLst/>
+          </a:prstGeom>
+          <a:noFill/>
+        </p:spPr>
+        <p:txBody>
+          <a:bodyPr wrap="square" lIns="36576" rIns="36576" tIns="0" bIns="0">
+            <a:spAutoFit/>
+          </a:bodyPr>
+          <a:lstStyle/>
+          <a:p>
+            <a:pPr algn="l">
+              <a:spcAft>
+                <a:spcPts val="400"/>
+              </a:spcAft>
+            </a:pPr>
+            <a:r>
+              <a:rPr sz="1100" b="0" i="0">
+                <a:solidFill>
+                  <a:srgbClr val="5D6D7E"/>
+                </a:solidFill>
+                <a:latin typeface="Malgun Gothic"/>
+              </a:rPr>
+              <a:t>·  EOD 는 수량 기준이 확인되지 않아 합계에서 뺐다. 포함하면 금액은 더 커진다.</a:t>
+            </a:r>
+          </a:p>
+        </p:txBody>
+      </p:sp>
+      <p:sp>
+        <p:nvSpPr>
+          <p:cNvPr id="22" name="TextBox 21"/>
+          <p:cNvSpPr txBox="1"/>
+          <p:nvPr/>
+        </p:nvSpPr>
+        <p:spPr>
+          <a:xfrm>
+            <a:off x="640080" y="6327648"/>
+            <a:ext cx="7680960" cy="365760"/>
+          </a:xfrm>
+          <a:prstGeom prst="rect">
+            <a:avLst/>
+          </a:prstGeom>
+          <a:noFill/>
+        </p:spPr>
+        <p:txBody>
+          <a:bodyPr wrap="square" lIns="36576" rIns="36576" tIns="0" bIns="0">
+            <a:spAutoFit/>
+          </a:bodyPr>
+          <a:lstStyle/>
+          <a:p>
+            <a:pPr algn="ctr"/>
+            <a:r>
+              <a:rPr sz="1150" b="0" i="1">
+                <a:solidFill>
+                  <a:srgbClr val="5D6D7E"/>
+                </a:solidFill>
+                <a:latin typeface="Malgun Gothic"/>
+              </a:rPr>
+              <a:t>“실제 절감액이 아니라, 같은 범위를 하드웨어로 덮을 때의 금액 규모입니다.”</a:t>
+            </a:r>
+          </a:p>
+        </p:txBody>
+      </p:sp>
+    </p:spTree>
+    <p:extLst>
+      <p:ext uri="{BB962C8B-B14F-4D97-AF65-F5344CB8AC3E}">
+        <p14:creationId xmlns:p14="http://schemas.microsoft.com/office/powerpoint/2010/main" val="3987384774"/>
+      </p:ext>
+    </p:extLst>
+  </p:cSld>
+  <p:clrMapOvr>
+    <a:masterClrMapping/>
+  </p:clrMapOvr>
+</p:sld>
+</file>
+
 <file path=ppt/slides/slide2.xml><?xml version="1.0" encoding="utf-8"?>
 <p:sld xmlns:a="http://schemas.openxmlformats.org/drawingml/2006/main" xmlns:r="http://schemas.openxmlformats.org/officeDocument/2006/relationships" xmlns:p="http://schemas.openxmlformats.org/presentationml/2006/main">
   <p:cSld>
@@ -7596,6 +9382,20 @@
               <a:rPr lang="en-US" altLang="ko-KR" sz="1400" b="0" dirty="0"/>
               <a:t xml:space="preserve">  정식 과제 등록과 리소스 배정</a:t>
             </a:r>
+          </a:p>
+          <a:p>
+            <a:r>
+              <a:rPr lang="en-US" altLang="ko-KR" dirty="0"/>
+              <a:t xml:space="preserve"> </a:t>
+            </a:r>
+            <a:endParaRPr lang="en-US" altLang="ko-KR" dirty="0"/>
+          </a:p>
+          <a:p>
+            <a:r>
+              <a:rPr lang="en-US" altLang="ko-KR" dirty="0"/>
+              <a:t xml:space="preserve">부록 — 산출 근거</a:t>
+            </a:r>
+            <a:endParaRPr lang="en-US" altLang="ko-KR" dirty="0"/>
           </a:p>
         </p:txBody>
       </p:sp>
@@ -10726,8 +12526,8 @@
           <p:nvPr/>
         </p:nvGraphicFramePr>
         <p:xfrm>
-          <a:off x="658368" y="1481328"/>
-          <a:ext cx="11064240" cy="2706624"/>
+          <a:off x="658368" y="1444752"/>
+          <a:ext cx="11064240" cy="2615184"/>
         </p:xfrm>
         <a:graphic>
           <a:graphicData uri="http://schemas.openxmlformats.org/drawingml/2006/table">
@@ -10736,8 +12536,8 @@
                 <a:tableStyleId>{5C22544A-7EE6-4342-B048-85BDC9FD1C3A}</a:tableStyleId>
               </a:tblPr>
               <a:tblGrid>
-                <a:gridCol w="2377440"/>
-                <a:gridCol w="4206240"/>
+                <a:gridCol w="1737360"/>
+                <a:gridCol w="4846320"/>
                 <a:gridCol w="4480560"/>
               </a:tblGrid>
               <a:tr h="329184">
@@ -10871,7 +12671,7 @@
                   </a:tcPr>
                 </a:tc>
               </a:tr>
-              <a:tr h="475488">
+              <a:tr h="457200">
                 <a:tc>
                   <a:txBody>
                     <a:bodyPr/>
@@ -10885,7 +12685,7 @@
                           </a:solidFill>
                           <a:latin typeface="Malgun Gothic"/>
                         </a:rPr>
-                        <a:t>장비 · 비콘 · 거치대</a:t>
+                        <a:t>하드웨어</a:t>
                       </a:r>
                     </a:p>
                   </a:txBody>
@@ -10928,7 +12728,7 @@
                           </a:solidFill>
                           <a:latin typeface="Malgun Gothic"/>
                         </a:rPr>
-                        <a:t>1세트 약 54만원 (추정)</a:t>
+                        <a:t>차량 태그 52.5만 · 보행자 태그 11만 · EOD 22만</a:t>
                       </a:r>
                     </a:p>
                   </a:txBody>
@@ -11002,7 +12802,7 @@
                   </a:tcPr>
                 </a:tc>
               </a:tr>
-              <a:tr h="475488">
+              <a:tr h="457200">
                 <a:tc>
                   <a:txBody>
                     <a:bodyPr/>
@@ -11016,7 +12816,7 @@
                           </a:solidFill>
                           <a:latin typeface="Malgun Gothic"/>
                         </a:rPr>
-                        <a:t>설치 · 배선</a:t>
+                        <a:t>설치 · 거치</a:t>
                       </a:r>
                     </a:p>
                   </a:txBody>
@@ -11059,7 +12859,7 @@
                           </a:solidFill>
                           <a:latin typeface="Malgun Gothic"/>
                         </a:rPr>
-                        <a:t>장비별 장착 작업 필요</a:t>
+                        <a:t>장비별 장착과 거치대 작업 필요</a:t>
                       </a:r>
                     </a:p>
                   </a:txBody>
@@ -11133,7 +12933,7 @@
                   </a:tcPr>
                 </a:tc>
               </a:tr>
-              <a:tr h="475488">
+              <a:tr h="457200">
                 <a:tc>
                   <a:txBody>
                     <a:bodyPr/>
@@ -11190,7 +12990,7 @@
                           </a:solidFill>
                           <a:latin typeface="Malgun Gothic"/>
                         </a:rPr>
-                        <a:t>대수에 비례해 추가 (54만원 × n)</a:t>
+                        <a:t>사람 · 장비가 늘면 태그를 그만큼 더 산다</a:t>
                       </a:r>
                     </a:p>
                   </a:txBody>
@@ -11264,7 +13064,7 @@
                   </a:tcPr>
                 </a:tc>
               </a:tr>
-              <a:tr h="475488">
+              <a:tr h="457200">
                 <a:tc>
                   <a:txBody>
                     <a:bodyPr/>
@@ -11321,7 +13121,7 @@
                           </a:solidFill>
                           <a:latin typeface="Malgun Gothic"/>
                         </a:rPr>
-                        <a:t>장착한 장비</a:t>
+                        <a:t>태그를 단 장비와 사람</a:t>
                       </a:r>
                     </a:p>
                   </a:txBody>
@@ -11395,7 +13195,7 @@
                   </a:tcPr>
                 </a:tc>
               </a:tr>
-              <a:tr h="475488">
+              <a:tr h="457200">
                 <a:tc>
                   <a:txBody>
                     <a:bodyPr/>
@@ -11538,17 +13338,19 @@
         </p:nvSpPr>
         <p:spPr>
           <a:xfrm>
-            <a:off x="640080" y="4389120"/>
-            <a:ext cx="1737360" cy="301752"/>
+            <a:off x="658368" y="4187952"/>
+            <a:ext cx="11064240" cy="603504"/>
           </a:xfrm>
           <a:prstGeom prst="rect">
             <a:avLst/>
           </a:prstGeom>
           <a:solidFill>
-            <a:srgbClr val="8C8C8C"/>
+            <a:srgbClr val="F7F8F9"/>
           </a:solidFill>
-          <a:ln>
-            <a:noFill/>
+          <a:ln w="12700">
+            <a:solidFill>
+              <a:srgbClr val="D5DBDB"/>
+            </a:solidFill>
           </a:ln>
           <a:effectLst/>
         </p:spPr>
@@ -11567,20 +13369,9 @@
           </a:fontRef>
         </p:style>
         <p:txBody>
-          <a:bodyPr rtlCol="0" anchor="ctr" wrap="square" lIns="36576" rIns="36576" tIns="0" bIns="0"/>
+          <a:bodyPr rtlCol="0" anchor="ctr"/>
           <a:lstStyle/>
-          <a:p>
-            <a:pPr algn="ctr"/>
-            <a:r>
-              <a:rPr sz="1100" b="1" i="0">
-                <a:solidFill>
-                  <a:srgbClr val="FFFFFF"/>
-                </a:solidFill>
-                <a:latin typeface="Malgun Gothic"/>
-              </a:rPr>
-              <a:t>확산 규모 환산</a:t>
-            </a:r>
-          </a:p>
+          <a:p/>
         </p:txBody>
       </p:sp>
       <p:sp>
@@ -11591,8 +13382,8 @@
         </p:nvSpPr>
         <p:spPr>
           <a:xfrm>
-            <a:off x="1280160" y="4791456"/>
-            <a:ext cx="2743200" cy="347472"/>
+            <a:off x="914400" y="4334256"/>
+            <a:ext cx="10607040" cy="329184"/>
           </a:xfrm>
           <a:prstGeom prst="rect">
             <a:avLst/>
@@ -11613,34 +13404,96 @@
             <a:r>
               <a:rPr sz="1300" b="0" i="0">
                 <a:solidFill>
+                  <a:srgbClr val="1C2833"/>
+                </a:solidFill>
+                <a:latin typeface="Malgun Gothic"/>
+              </a:rPr>
+              <a:t>일반 WF 센터 1곳 — PIT 4대 × 52.5만 + 상시 3명 × 11만 =  </a:t>
+            </a:r>
+            <a:r>
+              <a:rPr sz="1600" b="1" i="0">
+                <a:solidFill>
+                  <a:srgbClr val="C0392B"/>
+                </a:solidFill>
+                <a:latin typeface="Malgun Gothic"/>
+              </a:rPr>
+              <a:t>243만원</a:t>
+            </a:r>
+            <a:r>
+              <a:rPr sz="1200" b="0" i="0">
+                <a:solidFill>
                   <a:srgbClr val="5D6D7E"/>
                 </a:solidFill>
                 <a:latin typeface="Malgun Gothic"/>
               </a:rPr>
-              <a:t>10대   </a:t>
-            </a:r>
-            <a:r>
-              <a:rPr sz="1900" b="1" i="0">
-                <a:solidFill>
-                  <a:srgbClr val="C0392B"/>
+              <a:t>    (EOD 별도 · 인원 5명 센터는 265만원)</a:t>
+            </a:r>
+          </a:p>
+        </p:txBody>
+      </p:sp>
+      <p:sp>
+        <p:nvSpPr>
+          <p:cNvPr id="18" name="Rectangle 17"/>
+          <p:cNvSpPr/>
+          <p:nvPr/>
+        </p:nvSpPr>
+        <p:spPr>
+          <a:xfrm>
+            <a:off x="640080" y="4956048"/>
+            <a:ext cx="1234440" cy="301752"/>
+          </a:xfrm>
+          <a:prstGeom prst="rect">
+            <a:avLst/>
+          </a:prstGeom>
+          <a:solidFill>
+            <a:srgbClr val="8C8C8C"/>
+          </a:solidFill>
+          <a:ln>
+            <a:noFill/>
+          </a:ln>
+          <a:effectLst/>
+        </p:spPr>
+        <p:style>
+          <a:lnRef idx="1">
+            <a:schemeClr val="accent1"/>
+          </a:lnRef>
+          <a:fillRef idx="3">
+            <a:schemeClr val="accent1"/>
+          </a:fillRef>
+          <a:effectRef idx="2">
+            <a:schemeClr val="accent1"/>
+          </a:effectRef>
+          <a:fontRef idx="minor">
+            <a:schemeClr val="lt1"/>
+          </a:fontRef>
+        </p:style>
+        <p:txBody>
+          <a:bodyPr rtlCol="0" anchor="ctr" wrap="square" lIns="36576" rIns="36576" tIns="0" bIns="0"/>
+          <a:lstStyle/>
+          <a:p>
+            <a:pPr algn="ctr"/>
+            <a:r>
+              <a:rPr sz="1100" b="1" i="0">
+                <a:solidFill>
+                  <a:srgbClr val="FFFFFF"/>
                 </a:solidFill>
                 <a:latin typeface="Malgun Gothic"/>
               </a:rPr>
-              <a:t>540만원</a:t>
-            </a:r>
-          </a:p>
-        </p:txBody>
-      </p:sp>
-      <p:sp>
-        <p:nvSpPr>
-          <p:cNvPr id="18" name="TextBox 17"/>
+              <a:t>확산 환산</a:t>
+            </a:r>
+          </a:p>
+        </p:txBody>
+      </p:sp>
+      <p:sp>
+        <p:nvSpPr>
+          <p:cNvPr id="19" name="TextBox 18"/>
           <p:cNvSpPr txBox="1"/>
           <p:nvPr/>
         </p:nvSpPr>
         <p:spPr>
           <a:xfrm>
-            <a:off x="4206240" y="4791456"/>
-            <a:ext cx="2743200" cy="347472"/>
+            <a:off x="2240280" y="4937760"/>
+            <a:ext cx="2926080" cy="347472"/>
           </a:xfrm>
           <a:prstGeom prst="rect">
             <a:avLst/>
@@ -11659,36 +13512,36 @@
               </a:spcAft>
             </a:pPr>
             <a:r>
-              <a:rPr sz="1300" b="0" i="0">
+              <a:rPr sz="1200" b="0" i="0">
                 <a:solidFill>
                   <a:srgbClr val="5D6D7E"/>
                 </a:solidFill>
                 <a:latin typeface="Malgun Gothic"/>
               </a:rPr>
-              <a:t>30대   </a:t>
-            </a:r>
-            <a:r>
-              <a:rPr sz="1900" b="1" i="0">
+              <a:t>5개 센터   </a:t>
+            </a:r>
+            <a:r>
+              <a:rPr sz="1800" b="1" i="0">
                 <a:solidFill>
                   <a:srgbClr val="C0392B"/>
                 </a:solidFill>
                 <a:latin typeface="Malgun Gothic"/>
               </a:rPr>
-              <a:t>1,620만원</a:t>
-            </a:r>
-          </a:p>
-        </p:txBody>
-      </p:sp>
-      <p:sp>
-        <p:nvSpPr>
-          <p:cNvPr id="19" name="TextBox 18"/>
+              <a:t>1,215만원</a:t>
+            </a:r>
+          </a:p>
+        </p:txBody>
+      </p:sp>
+      <p:sp>
+        <p:nvSpPr>
+          <p:cNvPr id="20" name="TextBox 19"/>
           <p:cNvSpPr txBox="1"/>
           <p:nvPr/>
         </p:nvSpPr>
         <p:spPr>
           <a:xfrm>
-            <a:off x="7132320" y="4791456"/>
-            <a:ext cx="2743200" cy="347472"/>
+            <a:off x="5303520" y="4937760"/>
+            <a:ext cx="2926080" cy="347472"/>
           </a:xfrm>
           <a:prstGeom prst="rect">
             <a:avLst/>
@@ -11707,36 +13560,36 @@
               </a:spcAft>
             </a:pPr>
             <a:r>
-              <a:rPr sz="1300" b="0" i="0">
+              <a:rPr sz="1200" b="0" i="0">
                 <a:solidFill>
                   <a:srgbClr val="5D6D7E"/>
                 </a:solidFill>
                 <a:latin typeface="Malgun Gothic"/>
               </a:rPr>
-              <a:t>50대   </a:t>
-            </a:r>
-            <a:r>
-              <a:rPr sz="1900" b="1" i="0">
+              <a:t>10개 센터   </a:t>
+            </a:r>
+            <a:r>
+              <a:rPr sz="1800" b="1" i="0">
                 <a:solidFill>
                   <a:srgbClr val="C0392B"/>
                 </a:solidFill>
                 <a:latin typeface="Malgun Gothic"/>
               </a:rPr>
-              <a:t>2,700만원</a:t>
-            </a:r>
-          </a:p>
-        </p:txBody>
-      </p:sp>
-      <p:sp>
-        <p:nvSpPr>
-          <p:cNvPr id="20" name="TextBox 19"/>
+              <a:t>2,430만원</a:t>
+            </a:r>
+          </a:p>
+        </p:txBody>
+      </p:sp>
+      <p:sp>
+        <p:nvSpPr>
+          <p:cNvPr id="21" name="TextBox 20"/>
           <p:cNvSpPr txBox="1"/>
           <p:nvPr/>
         </p:nvSpPr>
         <p:spPr>
           <a:xfrm>
-            <a:off x="10058400" y="4809744"/>
-            <a:ext cx="1737360" cy="457200"/>
+            <a:off x="8366760" y="4937760"/>
+            <a:ext cx="2926080" cy="347472"/>
           </a:xfrm>
           <a:prstGeom prst="rect">
             <a:avLst/>
@@ -11755,28 +13608,36 @@
               </a:spcAft>
             </a:pPr>
             <a:r>
-              <a:rPr sz="1100" b="0" i="0">
-                <a:solidFill>
-                  <a:srgbClr val="8A949E"/>
+              <a:rPr sz="1200" b="0" i="0">
+                <a:solidFill>
+                  <a:srgbClr val="5D6D7E"/>
                 </a:solidFill>
                 <a:latin typeface="Malgun Gothic"/>
               </a:rPr>
-              <a:t>같은 범위를
-하드웨어로 덮을 때</a:t>
-            </a:r>
-          </a:p>
-        </p:txBody>
-      </p:sp>
-      <p:sp>
-        <p:nvSpPr>
-          <p:cNvPr id="21" name="TextBox 20"/>
+              <a:t>15개 센터   </a:t>
+            </a:r>
+            <a:r>
+              <a:rPr sz="1800" b="1" i="0">
+                <a:solidFill>
+                  <a:srgbClr val="C0392B"/>
+                </a:solidFill>
+                <a:latin typeface="Malgun Gothic"/>
+              </a:rPr>
+              <a:t>3,645만원</a:t>
+            </a:r>
+          </a:p>
+        </p:txBody>
+      </p:sp>
+      <p:sp>
+        <p:nvSpPr>
+          <p:cNvPr id="22" name="TextBox 21"/>
           <p:cNvSpPr txBox="1"/>
           <p:nvPr/>
         </p:nvSpPr>
         <p:spPr>
           <a:xfrm>
-            <a:off x="868680" y="5394960"/>
-            <a:ext cx="10881360" cy="292608"/>
+            <a:off x="868680" y="5468112"/>
+            <a:ext cx="7955279" cy="256032"/>
           </a:xfrm>
           <a:prstGeom prst="rect">
             <a:avLst/>
@@ -11795,27 +13656,27 @@
               </a:spcAft>
             </a:pPr>
             <a:r>
-              <a:rPr sz="1150" b="0" i="0">
+              <a:rPr sz="1100" b="0" i="0">
                 <a:solidFill>
                   <a:srgbClr val="5D6D7E"/>
                 </a:solidFill>
                 <a:latin typeface="Malgun Gothic"/>
               </a:rPr>
-              <a:t>·  54만원은 확인이 필요한 추정 단가다. 실제 절감액이 아니라, 하드웨어로 같은 범위를 덮을 때의 금액 규모다.</a:t>
-            </a:r>
-          </a:p>
-        </p:txBody>
-      </p:sp>
-      <p:sp>
-        <p:nvSpPr>
-          <p:cNvPr id="22" name="TextBox 21"/>
+              <a:t>·  단가는 사용자 제공 기준. 절감액이 아니라 같은 범위를 하드웨어로 덮을 때의 금액이다.</a:t>
+            </a:r>
+          </a:p>
+        </p:txBody>
+      </p:sp>
+      <p:sp>
+        <p:nvSpPr>
+          <p:cNvPr id="23" name="TextBox 22"/>
           <p:cNvSpPr txBox="1"/>
           <p:nvPr/>
         </p:nvSpPr>
         <p:spPr>
           <a:xfrm>
-            <a:off x="868680" y="5705856"/>
-            <a:ext cx="10881360" cy="292608"/>
+            <a:off x="868680" y="5733288"/>
+            <a:ext cx="7955279" cy="256032"/>
           </a:xfrm>
           <a:prstGeom prst="rect">
             <a:avLst/>
@@ -11834,27 +13695,27 @@
               </a:spcAft>
             </a:pPr>
             <a:r>
-              <a:rPr sz="1150" b="0" i="0">
+              <a:rPr sz="1100" b="0" i="0">
                 <a:solidFill>
                   <a:srgbClr val="5D6D7E"/>
                 </a:solidFill>
                 <a:latin typeface="Malgun Gothic"/>
               </a:rPr>
-              <a:t>·  앱이 추가 비용 0인 것은 단말이 이미 지급돼 있기 때문이다. 미지급 인원에게는 BLE 태그 지급이 필요하다.</a:t>
-            </a:r>
-          </a:p>
-        </p:txBody>
-      </p:sp>
-      <p:sp>
-        <p:nvSpPr>
-          <p:cNvPr id="23" name="TextBox 22"/>
+              <a:t>·  앱이 0원인 것은 단말이 이미 지급돼 있기 때문이다 (미지급 인원은 BLE 태그 필요).</a:t>
+            </a:r>
+          </a:p>
+        </p:txBody>
+      </p:sp>
+      <p:sp>
+        <p:nvSpPr>
+          <p:cNvPr id="24" name="TextBox 23"/>
           <p:cNvSpPr txBox="1"/>
           <p:nvPr/>
         </p:nvSpPr>
         <p:spPr>
           <a:xfrm>
-            <a:off x="868680" y="6016752"/>
-            <a:ext cx="10881360" cy="292608"/>
+            <a:off x="868680" y="5998464"/>
+            <a:ext cx="7955279" cy="256032"/>
           </a:xfrm>
           <a:prstGeom prst="rect">
             <a:avLst/>
@@ -11873,13 +13734,13 @@
               </a:spcAft>
             </a:pPr>
             <a:r>
-              <a:rPr sz="1150" b="0" i="0">
+              <a:rPr sz="1100" b="0" i="0">
                 <a:solidFill>
                   <a:srgbClr val="5D6D7E"/>
                 </a:solidFill>
                 <a:latin typeface="Malgun Gothic"/>
               </a:rPr>
-              <a:t>·  대체 여부는 이번 요청 범위가 아니다 — 로드맵 완료와 현장 데이터 확보 후 재논의한다.</a:t>
+              <a:t>·  대체 여부는 이번 요청 범위 밖 — 로드맵 완료와 현장 데이터 확보 후 재논의한다.</a:t>
             </a:r>
           </a:p>
         </p:txBody>

--- a/docs/presentation/company_form/SafeAlert_보고_2026.08.pptx
+++ b/docs/presentation/company_form/SafeAlert_보고_2026.08.pptx
@@ -7980,6 +7980,180 @@
                           </a:solidFill>
                           <a:latin typeface="Malgun Gothic"/>
                         </a:rPr>
+                        <a:t>EOD (3m 자동 셧다운)</a:t>
+                      </a:r>
+                    </a:p>
+                  </a:txBody>
+                  <a:tcPr marL="73152" marR="73152" marT="18288" marB="18288" anchor="ctr">
+                    <a:lnB w="9525" cap="flat" cmpd="sng" algn="ctr">
+                      <a:solidFill>
+                        <a:srgbClr val="D5DBDB"/>
+                      </a:solidFill>
+                    </a:lnB>
+                    <a:lnT w="9525" cap="flat" cmpd="sng" algn="ctr">
+                      <a:solidFill>
+                        <a:srgbClr val="FFFFFF"/>
+                      </a:solidFill>
+                    </a:lnT>
+                    <a:lnR w="9525" cap="flat" cmpd="sng" algn="ctr">
+                      <a:solidFill>
+                        <a:srgbClr val="FFFFFF"/>
+                      </a:solidFill>
+                    </a:lnR>
+                    <a:lnL w="9525" cap="flat" cmpd="sng" algn="ctr">
+                      <a:solidFill>
+                        <a:srgbClr val="FFFFFF"/>
+                      </a:solidFill>
+                    </a:lnL>
+                    <a:solidFill>
+                      <a:srgbClr val="FFFFFF"/>
+                    </a:solidFill>
+                  </a:tcPr>
+                </a:tc>
+                <a:tc>
+                  <a:txBody>
+                    <a:bodyPr/>
+                    <a:lstStyle/>
+                    <a:p>
+                      <a:pPr algn="r"/>
+                      <a:r>
+                        <a:rPr sz="1150" b="0" i="0">
+                          <a:solidFill>
+                            <a:srgbClr val="1C2833"/>
+                          </a:solidFill>
+                          <a:latin typeface="Malgun Gothic"/>
+                        </a:rPr>
+                        <a:t>220,000원</a:t>
+                      </a:r>
+                    </a:p>
+                  </a:txBody>
+                  <a:tcPr marL="73152" marR="73152" marT="18288" marB="18288" anchor="ctr">
+                    <a:lnB w="9525" cap="flat" cmpd="sng" algn="ctr">
+                      <a:solidFill>
+                        <a:srgbClr val="D5DBDB"/>
+                      </a:solidFill>
+                    </a:lnB>
+                    <a:lnT w="9525" cap="flat" cmpd="sng" algn="ctr">
+                      <a:solidFill>
+                        <a:srgbClr val="FFFFFF"/>
+                      </a:solidFill>
+                    </a:lnT>
+                    <a:lnR w="9525" cap="flat" cmpd="sng" algn="ctr">
+                      <a:solidFill>
+                        <a:srgbClr val="FFFFFF"/>
+                      </a:solidFill>
+                    </a:lnR>
+                    <a:lnL w="9525" cap="flat" cmpd="sng" algn="ctr">
+                      <a:solidFill>
+                        <a:srgbClr val="FFFFFF"/>
+                      </a:solidFill>
+                    </a:lnL>
+                    <a:solidFill>
+                      <a:srgbClr val="FFFFFF"/>
+                    </a:solidFill>
+                  </a:tcPr>
+                </a:tc>
+                <a:tc>
+                  <a:txBody>
+                    <a:bodyPr/>
+                    <a:lstStyle/>
+                    <a:p>
+                      <a:pPr algn="ctr"/>
+                      <a:r>
+                        <a:rPr sz="1150" b="0" i="0">
+                          <a:solidFill>
+                            <a:srgbClr val="1C2833"/>
+                          </a:solidFill>
+                          <a:latin typeface="Malgun Gothic"/>
+                        </a:rPr>
+                        <a:t>PIT 4대 전량</a:t>
+                      </a:r>
+                    </a:p>
+                  </a:txBody>
+                  <a:tcPr marL="73152" marR="73152" marT="18288" marB="18288" anchor="ctr">
+                    <a:lnB w="9525" cap="flat" cmpd="sng" algn="ctr">
+                      <a:solidFill>
+                        <a:srgbClr val="D5DBDB"/>
+                      </a:solidFill>
+                    </a:lnB>
+                    <a:lnT w="9525" cap="flat" cmpd="sng" algn="ctr">
+                      <a:solidFill>
+                        <a:srgbClr val="FFFFFF"/>
+                      </a:solidFill>
+                    </a:lnT>
+                    <a:lnR w="9525" cap="flat" cmpd="sng" algn="ctr">
+                      <a:solidFill>
+                        <a:srgbClr val="FFFFFF"/>
+                      </a:solidFill>
+                    </a:lnR>
+                    <a:lnL w="9525" cap="flat" cmpd="sng" algn="ctr">
+                      <a:solidFill>
+                        <a:srgbClr val="FFFFFF"/>
+                      </a:solidFill>
+                    </a:lnL>
+                    <a:solidFill>
+                      <a:srgbClr val="FFFFFF"/>
+                    </a:solidFill>
+                  </a:tcPr>
+                </a:tc>
+                <a:tc>
+                  <a:txBody>
+                    <a:bodyPr/>
+                    <a:lstStyle/>
+                    <a:p>
+                      <a:pPr algn="r"/>
+                      <a:r>
+                        <a:rPr sz="1150" b="0" i="0">
+                          <a:solidFill>
+                            <a:srgbClr val="1C2833"/>
+                          </a:solidFill>
+                          <a:latin typeface="Malgun Gothic"/>
+                        </a:rPr>
+                        <a:t>880,000원</a:t>
+                      </a:r>
+                    </a:p>
+                  </a:txBody>
+                  <a:tcPr marL="73152" marR="73152" marT="18288" marB="18288" anchor="ctr">
+                    <a:lnB w="9525" cap="flat" cmpd="sng" algn="ctr">
+                      <a:solidFill>
+                        <a:srgbClr val="D5DBDB"/>
+                      </a:solidFill>
+                    </a:lnB>
+                    <a:lnT w="9525" cap="flat" cmpd="sng" algn="ctr">
+                      <a:solidFill>
+                        <a:srgbClr val="FFFFFF"/>
+                      </a:solidFill>
+                    </a:lnT>
+                    <a:lnR w="9525" cap="flat" cmpd="sng" algn="ctr">
+                      <a:solidFill>
+                        <a:srgbClr val="FFFFFF"/>
+                      </a:solidFill>
+                    </a:lnR>
+                    <a:lnL w="9525" cap="flat" cmpd="sng" algn="ctr">
+                      <a:solidFill>
+                        <a:srgbClr val="FFFFFF"/>
+                      </a:solidFill>
+                    </a:lnL>
+                    <a:solidFill>
+                      <a:srgbClr val="FFFFFF"/>
+                    </a:solidFill>
+                  </a:tcPr>
+                </a:tc>
+              </a:tr>
+              <a:tr h="457200">
+                <a:tc>
+                  <a:txBody>
+                    <a:bodyPr/>
+                    <a:lstStyle/>
+                    <a:p>
+                      <a:pPr algn="l"/>
+                      <a:r>
+                        <a:rPr sz="1150" b="1" i="0">
+                          <a:solidFill>
+                            <a:srgbClr val="1C2833"/>
+                          </a:solidFill>
+                          <a:latin typeface="Malgun Gothic"/>
+                        </a:rPr>
                         <a:t>보행자 태그</a:t>
                       </a:r>
                     </a:p>
@@ -8154,181 +8328,7 @@
                           </a:solidFill>
                           <a:latin typeface="Malgun Gothic"/>
                         </a:rPr>
-                        <a:t>EOD</a:t>
-                      </a:r>
-                    </a:p>
-                  </a:txBody>
-                  <a:tcPr marL="73152" marR="73152" marT="18288" marB="18288" anchor="ctr">
-                    <a:lnB w="9525" cap="flat" cmpd="sng" algn="ctr">
-                      <a:solidFill>
-                        <a:srgbClr val="D5DBDB"/>
-                      </a:solidFill>
-                    </a:lnB>
-                    <a:lnT w="9525" cap="flat" cmpd="sng" algn="ctr">
-                      <a:solidFill>
-                        <a:srgbClr val="FFFFFF"/>
-                      </a:solidFill>
-                    </a:lnT>
-                    <a:lnR w="9525" cap="flat" cmpd="sng" algn="ctr">
-                      <a:solidFill>
-                        <a:srgbClr val="FFFFFF"/>
-                      </a:solidFill>
-                    </a:lnR>
-                    <a:lnL w="9525" cap="flat" cmpd="sng" algn="ctr">
-                      <a:solidFill>
-                        <a:srgbClr val="FFFFFF"/>
-                      </a:solidFill>
-                    </a:lnL>
-                    <a:solidFill>
-                      <a:srgbClr val="FFFFFF"/>
-                    </a:solidFill>
-                  </a:tcPr>
-                </a:tc>
-                <a:tc>
-                  <a:txBody>
-                    <a:bodyPr/>
-                    <a:lstStyle/>
-                    <a:p>
-                      <a:pPr algn="r"/>
-                      <a:r>
-                        <a:rPr sz="1150" b="0" i="0">
-                          <a:solidFill>
-                            <a:srgbClr val="1C2833"/>
-                          </a:solidFill>
-                          <a:latin typeface="Malgun Gothic"/>
-                        </a:rPr>
-                        <a:t>220,000원</a:t>
-                      </a:r>
-                    </a:p>
-                  </a:txBody>
-                  <a:tcPr marL="73152" marR="73152" marT="18288" marB="18288" anchor="ctr">
-                    <a:lnB w="9525" cap="flat" cmpd="sng" algn="ctr">
-                      <a:solidFill>
-                        <a:srgbClr val="D5DBDB"/>
-                      </a:solidFill>
-                    </a:lnB>
-                    <a:lnT w="9525" cap="flat" cmpd="sng" algn="ctr">
-                      <a:solidFill>
-                        <a:srgbClr val="FFFFFF"/>
-                      </a:solidFill>
-                    </a:lnT>
-                    <a:lnR w="9525" cap="flat" cmpd="sng" algn="ctr">
-                      <a:solidFill>
-                        <a:srgbClr val="FFFFFF"/>
-                      </a:solidFill>
-                    </a:lnR>
-                    <a:lnL w="9525" cap="flat" cmpd="sng" algn="ctr">
-                      <a:solidFill>
-                        <a:srgbClr val="FFFFFF"/>
-                      </a:solidFill>
-                    </a:lnL>
-                    <a:solidFill>
-                      <a:srgbClr val="FFFFFF"/>
-                    </a:solidFill>
-                  </a:tcPr>
-                </a:tc>
-                <a:tc>
-                  <a:txBody>
-                    <a:bodyPr/>
-                    <a:lstStyle/>
-                    <a:p>
-                      <a:pPr algn="ctr"/>
-                      <a:r>
-                        <a:rPr sz="1150" b="0" i="0">
-                          <a:solidFill>
-                            <a:srgbClr val="1C2833"/>
-                          </a:solidFill>
-                          <a:latin typeface="Malgun Gothic"/>
-                        </a:rPr>
-                        <a:t>수량 미확정</a:t>
-                      </a:r>
-                    </a:p>
-                  </a:txBody>
-                  <a:tcPr marL="73152" marR="73152" marT="18288" marB="18288" anchor="ctr">
-                    <a:lnB w="9525" cap="flat" cmpd="sng" algn="ctr">
-                      <a:solidFill>
-                        <a:srgbClr val="D5DBDB"/>
-                      </a:solidFill>
-                    </a:lnB>
-                    <a:lnT w="9525" cap="flat" cmpd="sng" algn="ctr">
-                      <a:solidFill>
-                        <a:srgbClr val="FFFFFF"/>
-                      </a:solidFill>
-                    </a:lnT>
-                    <a:lnR w="9525" cap="flat" cmpd="sng" algn="ctr">
-                      <a:solidFill>
-                        <a:srgbClr val="FFFFFF"/>
-                      </a:solidFill>
-                    </a:lnR>
-                    <a:lnL w="9525" cap="flat" cmpd="sng" algn="ctr">
-                      <a:solidFill>
-                        <a:srgbClr val="FFFFFF"/>
-                      </a:solidFill>
-                    </a:lnL>
-                    <a:solidFill>
-                      <a:srgbClr val="FFFFFF"/>
-                    </a:solidFill>
-                  </a:tcPr>
-                </a:tc>
-                <a:tc>
-                  <a:txBody>
-                    <a:bodyPr/>
-                    <a:lstStyle/>
-                    <a:p>
-                      <a:pPr algn="r"/>
-                      <a:r>
-                        <a:rPr sz="1150" b="0" i="0">
-                          <a:solidFill>
-                            <a:srgbClr val="1C2833"/>
-                          </a:solidFill>
-                          <a:latin typeface="Malgun Gothic"/>
-                        </a:rPr>
-                        <a:t>별도 산정</a:t>
-                      </a:r>
-                    </a:p>
-                  </a:txBody>
-                  <a:tcPr marL="73152" marR="73152" marT="18288" marB="18288" anchor="ctr">
-                    <a:lnB w="9525" cap="flat" cmpd="sng" algn="ctr">
-                      <a:solidFill>
-                        <a:srgbClr val="D5DBDB"/>
-                      </a:solidFill>
-                    </a:lnB>
-                    <a:lnT w="9525" cap="flat" cmpd="sng" algn="ctr">
-                      <a:solidFill>
-                        <a:srgbClr val="FFFFFF"/>
-                      </a:solidFill>
-                    </a:lnT>
-                    <a:lnR w="9525" cap="flat" cmpd="sng" algn="ctr">
-                      <a:solidFill>
-                        <a:srgbClr val="FFFFFF"/>
-                      </a:solidFill>
-                    </a:lnR>
-                    <a:lnL w="9525" cap="flat" cmpd="sng" algn="ctr">
-                      <a:solidFill>
-                        <a:srgbClr val="FFFFFF"/>
-                      </a:solidFill>
-                    </a:lnL>
-                    <a:solidFill>
-                      <a:srgbClr val="FFFFFF"/>
-                    </a:solidFill>
-                  </a:tcPr>
-                </a:tc>
-              </a:tr>
-              <a:tr h="457200">
-                <a:tc>
-                  <a:txBody>
-                    <a:bodyPr/>
-                    <a:lstStyle/>
-                    <a:p>
-                      <a:pPr algn="l"/>
-                      <a:r>
-                        <a:rPr sz="1150" b="1" i="0">
-                          <a:solidFill>
-                            <a:srgbClr val="1C2833"/>
-                          </a:solidFill>
-                          <a:latin typeface="Malgun Gothic"/>
-                        </a:rPr>
-                        <a:t>합계 (EOD 제외)</a:t>
+                        <a:t>합계</a:t>
                       </a:r>
                     </a:p>
                   </a:txBody>
@@ -8457,7 +8457,7 @@
                           </a:solidFill>
                           <a:latin typeface="Malgun Gothic"/>
                         </a:rPr>
-                        <a:t>2,430,000원</a:t>
+                        <a:t>3,310,000원</a:t>
                       </a:r>
                     </a:p>
                   </a:txBody>
@@ -8526,7 +8526,7 @@
                 </a:solidFill>
                 <a:latin typeface="Malgun Gothic"/>
               </a:rPr>
-              <a:t>상시 인원 5명 센터 — 2,100,000 + 550,000 = </a:t>
+              <a:t>상시 인원 5명 센터 — 2,100,000 + 880,000 + 550,000 = </a:t>
             </a:r>
             <a:r>
               <a:rPr sz="1200" b="1" i="0">
@@ -8535,7 +8535,7 @@
                 </a:solidFill>
                 <a:latin typeface="Malgun Gothic"/>
               </a:rPr>
-              <a:t>2,650,000원</a:t>
+              <a:t>3,530,000원</a:t>
             </a:r>
           </a:p>
         </p:txBody>
@@ -8848,7 +8848,7 @@
                           </a:solidFill>
                           <a:latin typeface="Malgun Gothic"/>
                         </a:rPr>
-                        <a:t>12,150,000원</a:t>
+                        <a:t>16,550,000원</a:t>
                       </a:r>
                     </a:p>
                   </a:txBody>
@@ -8891,7 +8891,7 @@
                           </a:solidFill>
                           <a:latin typeface="Malgun Gothic"/>
                         </a:rPr>
-                        <a:t>24,300,000원</a:t>
+                        <a:t>33,100,000원</a:t>
                       </a:r>
                     </a:p>
                   </a:txBody>
@@ -8934,7 +8934,7 @@
                           </a:solidFill>
                           <a:latin typeface="Malgun Gothic"/>
                         </a:rPr>
-                        <a:t>36,450,000원</a:t>
+                        <a:t>49,650,000원</a:t>
                       </a:r>
                     </a:p>
                   </a:txBody>
@@ -8978,7 +8978,7 @@
         <p:spPr>
           <a:xfrm>
             <a:off x="868680" y="5541264"/>
-            <a:ext cx="10058400" cy="256032"/>
+            <a:ext cx="8046720" cy="256032"/>
           </a:xfrm>
           <a:prstGeom prst="rect">
             <a:avLst/>
@@ -8997,7 +8997,7 @@
               </a:spcAft>
             </a:pPr>
             <a:r>
-              <a:rPr sz="1100" b="0" i="0">
+              <a:rPr sz="1050" b="0" i="0">
                 <a:solidFill>
                   <a:srgbClr val="5D6D7E"/>
                 </a:solidFill>
@@ -9017,7 +9017,7 @@
         <p:spPr>
           <a:xfrm>
             <a:off x="868680" y="5806440"/>
-            <a:ext cx="10058400" cy="256032"/>
+            <a:ext cx="8046720" cy="256032"/>
           </a:xfrm>
           <a:prstGeom prst="rect">
             <a:avLst/>
@@ -9036,7 +9036,7 @@
               </a:spcAft>
             </a:pPr>
             <a:r>
-              <a:rPr sz="1100" b="0" i="0">
+              <a:rPr sz="1050" b="0" i="0">
                 <a:solidFill>
                   <a:srgbClr val="5D6D7E"/>
                 </a:solidFill>
@@ -9056,7 +9056,7 @@
         <p:spPr>
           <a:xfrm>
             <a:off x="868680" y="6071616"/>
-            <a:ext cx="10058400" cy="256032"/>
+            <a:ext cx="8046720" cy="256032"/>
           </a:xfrm>
           <a:prstGeom prst="rect">
             <a:avLst/>
@@ -9075,13 +9075,13 @@
               </a:spcAft>
             </a:pPr>
             <a:r>
-              <a:rPr sz="1100" b="0" i="0">
+              <a:rPr sz="1050" b="0" i="0">
                 <a:solidFill>
                   <a:srgbClr val="5D6D7E"/>
                 </a:solidFill>
                 <a:latin typeface="Malgun Gothic"/>
               </a:rPr>
-              <a:t>·  EOD 는 수량 기준이 확인되지 않아 합계에서 뺐다. 포함하면 금액은 더 커진다.</a:t>
+              <a:t>·  다만 EOD 의 3m 자동 셧다운은 SafeAlert 가 대신하지 못한다 — 금액 비교는 감지 · 경보 범위에 한한다.</a:t>
             </a:r>
           </a:p>
         </p:txBody>
@@ -9794,7 +9794,7 @@
                 </a:solidFill>
                 <a:latin typeface="Malgun Gothic"/>
               </a:rPr>
-              <a:t>I-PAS 1세트 약 54만원 대비</a:t>
+              <a:t>센터 1곳 태그 비용 331만원 대비</a:t>
             </a:r>
           </a:p>
         </p:txBody>
@@ -12512,7 +12512,7 @@
                 </a:solidFill>
                 <a:latin typeface="Malgun Gothic"/>
               </a:rPr>
-              <a:t>지금 요청은 대체가 아니다. I-PAS 가 덮지 않는 구간을 추가 하드웨어 없이 덮는 값이다.</a:t>
+              <a:t>I-PAS 는 3m 에서 장비를 세운다. SafeAlert 는 그 전에 사람에게 알린다 — 대체가 아니라 앞단이다.</a:t>
             </a:r>
           </a:p>
         </p:txBody>
@@ -12728,7 +12728,7 @@
                           </a:solidFill>
                           <a:latin typeface="Malgun Gothic"/>
                         </a:rPr>
-                        <a:t>차량 태그 52.5만 · 보행자 태그 11만 · EOD 22만</a:t>
+                        <a:t>차량 태그 52.5만 + EOD 22만 (PIT 전량) · 보행자 태그 11만</a:t>
                       </a:r>
                     </a:p>
                   </a:txBody>
@@ -12816,7 +12816,7 @@
                           </a:solidFill>
                           <a:latin typeface="Malgun Gothic"/>
                         </a:rPr>
-                        <a:t>설치 · 거치</a:t>
+                        <a:t>동작</a:t>
                       </a:r>
                     </a:p>
                   </a:txBody>
@@ -12859,7 +12859,7 @@
                           </a:solidFill>
                           <a:latin typeface="Malgun Gothic"/>
                         </a:rPr>
-                        <a:t>장비별 장착과 거치대 작업 필요</a:t>
+                        <a:t>3m 내 감지 시 자동 셧다운 — 최후 개입</a:t>
                       </a:r>
                     </a:p>
                   </a:txBody>
@@ -12902,7 +12902,138 @@
                           </a:solidFill>
                           <a:latin typeface="Malgun Gothic"/>
                         </a:rPr>
-                        <a:t>없음</a:t>
+                        <a:t>15m 경고 · 8m 위험 경보. 장비 정지는 못 한다</a:t>
+                      </a:r>
+                    </a:p>
+                  </a:txBody>
+                  <a:tcPr marL="73152" marR="73152" marT="18288" marB="18288" anchor="ctr">
+                    <a:lnB w="9525" cap="flat" cmpd="sng" algn="ctr">
+                      <a:solidFill>
+                        <a:srgbClr val="D5DBDB"/>
+                      </a:solidFill>
+                    </a:lnB>
+                    <a:lnT w="9525" cap="flat" cmpd="sng" algn="ctr">
+                      <a:solidFill>
+                        <a:srgbClr val="FFFFFF"/>
+                      </a:solidFill>
+                    </a:lnT>
+                    <a:lnR w="9525" cap="flat" cmpd="sng" algn="ctr">
+                      <a:solidFill>
+                        <a:srgbClr val="FFFFFF"/>
+                      </a:solidFill>
+                    </a:lnR>
+                    <a:lnL w="9525" cap="flat" cmpd="sng" algn="ctr">
+                      <a:solidFill>
+                        <a:srgbClr val="FFFFFF"/>
+                      </a:solidFill>
+                    </a:lnL>
+                    <a:solidFill>
+                      <a:srgbClr val="FFFFFF"/>
+                    </a:solidFill>
+                  </a:tcPr>
+                </a:tc>
+              </a:tr>
+              <a:tr h="457200">
+                <a:tc>
+                  <a:txBody>
+                    <a:bodyPr/>
+                    <a:lstStyle/>
+                    <a:p>
+                      <a:pPr algn="l"/>
+                      <a:r>
+                        <a:rPr sz="1150" b="1" i="0">
+                          <a:solidFill>
+                            <a:srgbClr val="1C2833"/>
+                          </a:solidFill>
+                          <a:latin typeface="Malgun Gothic"/>
+                        </a:rPr>
+                        <a:t>덮는 대상</a:t>
+                      </a:r>
+                    </a:p>
+                  </a:txBody>
+                  <a:tcPr marL="73152" marR="73152" marT="18288" marB="18288" anchor="ctr">
+                    <a:lnB w="9525" cap="flat" cmpd="sng" algn="ctr">
+                      <a:solidFill>
+                        <a:srgbClr val="D5DBDB"/>
+                      </a:solidFill>
+                    </a:lnB>
+                    <a:lnT w="9525" cap="flat" cmpd="sng" algn="ctr">
+                      <a:solidFill>
+                        <a:srgbClr val="FFFFFF"/>
+                      </a:solidFill>
+                    </a:lnT>
+                    <a:lnR w="9525" cap="flat" cmpd="sng" algn="ctr">
+                      <a:solidFill>
+                        <a:srgbClr val="FFFFFF"/>
+                      </a:solidFill>
+                    </a:lnR>
+                    <a:lnL w="9525" cap="flat" cmpd="sng" algn="ctr">
+                      <a:solidFill>
+                        <a:srgbClr val="FFFFFF"/>
+                      </a:solidFill>
+                    </a:lnL>
+                    <a:solidFill>
+                      <a:srgbClr val="FFFFFF"/>
+                    </a:solidFill>
+                  </a:tcPr>
+                </a:tc>
+                <a:tc>
+                  <a:txBody>
+                    <a:bodyPr/>
+                    <a:lstStyle/>
+                    <a:p>
+                      <a:pPr algn="l"/>
+                      <a:r>
+                        <a:rPr sz="1150" b="0" i="0">
+                          <a:solidFill>
+                            <a:srgbClr val="1C2833"/>
+                          </a:solidFill>
+                          <a:latin typeface="Malgun Gothic"/>
+                        </a:rPr>
+                        <a:t>태그를 단 장비와 사람</a:t>
+                      </a:r>
+                    </a:p>
+                  </a:txBody>
+                  <a:tcPr marL="73152" marR="73152" marT="18288" marB="18288" anchor="ctr">
+                    <a:lnB w="9525" cap="flat" cmpd="sng" algn="ctr">
+                      <a:solidFill>
+                        <a:srgbClr val="D5DBDB"/>
+                      </a:solidFill>
+                    </a:lnB>
+                    <a:lnT w="9525" cap="flat" cmpd="sng" algn="ctr">
+                      <a:solidFill>
+                        <a:srgbClr val="FFFFFF"/>
+                      </a:solidFill>
+                    </a:lnT>
+                    <a:lnR w="9525" cap="flat" cmpd="sng" algn="ctr">
+                      <a:solidFill>
+                        <a:srgbClr val="FFFFFF"/>
+                      </a:solidFill>
+                    </a:lnR>
+                    <a:lnL w="9525" cap="flat" cmpd="sng" algn="ctr">
+                      <a:solidFill>
+                        <a:srgbClr val="FFFFFF"/>
+                      </a:solidFill>
+                    </a:lnL>
+                    <a:solidFill>
+                      <a:srgbClr val="FFFFFF"/>
+                    </a:solidFill>
+                  </a:tcPr>
+                </a:tc>
+                <a:tc>
+                  <a:txBody>
+                    <a:bodyPr/>
+                    <a:lstStyle/>
+                    <a:p>
+                      <a:pPr algn="l"/>
+                      <a:r>
+                        <a:rPr sz="1150" b="0" i="0">
+                          <a:solidFill>
+                            <a:srgbClr val="1C2833"/>
+                          </a:solidFill>
+                          <a:latin typeface="Malgun Gothic"/>
+                        </a:rPr>
+                        <a:t>앱을 넣은 모든 단말 (보행자끼리 · EPJ 포함)</a:t>
                       </a:r>
                     </a:p>
                   </a:txBody>
@@ -13078,137 +13209,6 @@
                           </a:solidFill>
                           <a:latin typeface="Malgun Gothic"/>
                         </a:rPr>
-                        <a:t>덮는 대상</a:t>
-                      </a:r>
-                    </a:p>
-                  </a:txBody>
-                  <a:tcPr marL="73152" marR="73152" marT="18288" marB="18288" anchor="ctr">
-                    <a:lnB w="9525" cap="flat" cmpd="sng" algn="ctr">
-                      <a:solidFill>
-                        <a:srgbClr val="D5DBDB"/>
-                      </a:solidFill>
-                    </a:lnB>
-                    <a:lnT w="9525" cap="flat" cmpd="sng" algn="ctr">
-                      <a:solidFill>
-                        <a:srgbClr val="FFFFFF"/>
-                      </a:solidFill>
-                    </a:lnT>
-                    <a:lnR w="9525" cap="flat" cmpd="sng" algn="ctr">
-                      <a:solidFill>
-                        <a:srgbClr val="FFFFFF"/>
-                      </a:solidFill>
-                    </a:lnR>
-                    <a:lnL w="9525" cap="flat" cmpd="sng" algn="ctr">
-                      <a:solidFill>
-                        <a:srgbClr val="FFFFFF"/>
-                      </a:solidFill>
-                    </a:lnL>
-                    <a:solidFill>
-                      <a:srgbClr val="FFFFFF"/>
-                    </a:solidFill>
-                  </a:tcPr>
-                </a:tc>
-                <a:tc>
-                  <a:txBody>
-                    <a:bodyPr/>
-                    <a:lstStyle/>
-                    <a:p>
-                      <a:pPr algn="l"/>
-                      <a:r>
-                        <a:rPr sz="1150" b="0" i="0">
-                          <a:solidFill>
-                            <a:srgbClr val="1C2833"/>
-                          </a:solidFill>
-                          <a:latin typeface="Malgun Gothic"/>
-                        </a:rPr>
-                        <a:t>태그를 단 장비와 사람</a:t>
-                      </a:r>
-                    </a:p>
-                  </a:txBody>
-                  <a:tcPr marL="73152" marR="73152" marT="18288" marB="18288" anchor="ctr">
-                    <a:lnB w="9525" cap="flat" cmpd="sng" algn="ctr">
-                      <a:solidFill>
-                        <a:srgbClr val="D5DBDB"/>
-                      </a:solidFill>
-                    </a:lnB>
-                    <a:lnT w="9525" cap="flat" cmpd="sng" algn="ctr">
-                      <a:solidFill>
-                        <a:srgbClr val="FFFFFF"/>
-                      </a:solidFill>
-                    </a:lnT>
-                    <a:lnR w="9525" cap="flat" cmpd="sng" algn="ctr">
-                      <a:solidFill>
-                        <a:srgbClr val="FFFFFF"/>
-                      </a:solidFill>
-                    </a:lnR>
-                    <a:lnL w="9525" cap="flat" cmpd="sng" algn="ctr">
-                      <a:solidFill>
-                        <a:srgbClr val="FFFFFF"/>
-                      </a:solidFill>
-                    </a:lnL>
-                    <a:solidFill>
-                      <a:srgbClr val="FFFFFF"/>
-                    </a:solidFill>
-                  </a:tcPr>
-                </a:tc>
-                <a:tc>
-                  <a:txBody>
-                    <a:bodyPr/>
-                    <a:lstStyle/>
-                    <a:p>
-                      <a:pPr algn="l"/>
-                      <a:r>
-                        <a:rPr sz="1150" b="0" i="0">
-                          <a:solidFill>
-                            <a:srgbClr val="1C2833"/>
-                          </a:solidFill>
-                          <a:latin typeface="Malgun Gothic"/>
-                        </a:rPr>
-                        <a:t>앱을 넣은 모든 단말 (보행자 · EPJ 포함)</a:t>
-                      </a:r>
-                    </a:p>
-                  </a:txBody>
-                  <a:tcPr marL="73152" marR="73152" marT="18288" marB="18288" anchor="ctr">
-                    <a:lnB w="9525" cap="flat" cmpd="sng" algn="ctr">
-                      <a:solidFill>
-                        <a:srgbClr val="D5DBDB"/>
-                      </a:solidFill>
-                    </a:lnB>
-                    <a:lnT w="9525" cap="flat" cmpd="sng" algn="ctr">
-                      <a:solidFill>
-                        <a:srgbClr val="FFFFFF"/>
-                      </a:solidFill>
-                    </a:lnT>
-                    <a:lnR w="9525" cap="flat" cmpd="sng" algn="ctr">
-                      <a:solidFill>
-                        <a:srgbClr val="FFFFFF"/>
-                      </a:solidFill>
-                    </a:lnR>
-                    <a:lnL w="9525" cap="flat" cmpd="sng" algn="ctr">
-                      <a:solidFill>
-                        <a:srgbClr val="FFFFFF"/>
-                      </a:solidFill>
-                    </a:lnL>
-                    <a:solidFill>
-                      <a:srgbClr val="FFFFFF"/>
-                    </a:solidFill>
-                  </a:tcPr>
-                </a:tc>
-              </a:tr>
-              <a:tr h="457200">
-                <a:tc>
-                  <a:txBody>
-                    <a:bodyPr/>
-                    <a:lstStyle/>
-                    <a:p>
-                      <a:pPr algn="l"/>
-                      <a:r>
-                        <a:rPr sz="1150" b="1" i="0">
-                          <a:solidFill>
-                            <a:srgbClr val="1C2833"/>
-                          </a:solidFill>
-                          <a:latin typeface="Malgun Gothic"/>
-                        </a:rPr>
                         <a:t>유지보수</a:t>
                       </a:r>
                     </a:p>
@@ -13408,7 +13408,7 @@
                 </a:solidFill>
                 <a:latin typeface="Malgun Gothic"/>
               </a:rPr>
-              <a:t>일반 WF 센터 1곳 — PIT 4대 × 52.5만 + 상시 3명 × 11만 =  </a:t>
+              <a:t>일반 WF 센터 1곳 — PIT 4대 × (52.5만 + EOD 22만) + 상시 3명 × 11만 =  </a:t>
             </a:r>
             <a:r>
               <a:rPr sz="1600" b="1" i="0">
@@ -13417,7 +13417,7 @@
                 </a:solidFill>
                 <a:latin typeface="Malgun Gothic"/>
               </a:rPr>
-              <a:t>243만원</a:t>
+              <a:t>331만원</a:t>
             </a:r>
             <a:r>
               <a:rPr sz="1200" b="0" i="0">
@@ -13426,7 +13426,7 @@
                 </a:solidFill>
                 <a:latin typeface="Malgun Gothic"/>
               </a:rPr>
-              <a:t>    (EOD 별도 · 인원 5명 센터는 265만원)</a:t>
+              <a:t>    (인원 5명 센터는 353만원)</a:t>
             </a:r>
           </a:p>
         </p:txBody>
@@ -13527,7 +13527,7 @@
                 </a:solidFill>
                 <a:latin typeface="Malgun Gothic"/>
               </a:rPr>
-              <a:t>1,215만원</a:t>
+              <a:t>1,655만원</a:t>
             </a:r>
           </a:p>
         </p:txBody>
@@ -13575,7 +13575,7 @@
                 </a:solidFill>
                 <a:latin typeface="Malgun Gothic"/>
               </a:rPr>
-              <a:t>2,430만원</a:t>
+              <a:t>3,310만원</a:t>
             </a:r>
           </a:p>
         </p:txBody>
@@ -13623,7 +13623,7 @@
                 </a:solidFill>
                 <a:latin typeface="Malgun Gothic"/>
               </a:rPr>
-              <a:t>3,645만원</a:t>
+              <a:t>4,965만원</a:t>
             </a:r>
           </a:p>
         </p:txBody>
@@ -13662,7 +13662,7 @@
                 </a:solidFill>
                 <a:latin typeface="Malgun Gothic"/>
               </a:rPr>
-              <a:t>·  단가는 사용자 제공 기준. 절감액이 아니라 같은 범위를 하드웨어로 덮을 때의 금액이다.</a:t>
+              <a:t>·  자동 셧다운은 SafeAlert 가 못 한다. I-PAS 를 걷어내자는 이야기가 아니다.</a:t>
             </a:r>
           </a:p>
         </p:txBody>
@@ -13701,7 +13701,7 @@
                 </a:solidFill>
                 <a:latin typeface="Malgun Gothic"/>
               </a:rPr>
-              <a:t>·  앱이 0원인 것은 단말이 이미 지급돼 있기 때문이다 (미지급 인원은 BLE 태그 필요).</a:t>
+              <a:t>·  단가는 사용자 제공 기준. 절감액이 아니라 같은 범위를 하드웨어로 덮을 때의 금액이다.</a:t>
             </a:r>
           </a:p>
         </p:txBody>
@@ -13740,7 +13740,7 @@
                 </a:solidFill>
                 <a:latin typeface="Malgun Gothic"/>
               </a:rPr>
-              <a:t>·  대체 여부는 이번 요청 범위 밖 — 로드맵 완료와 현장 데이터 확보 후 재논의한다.</a:t>
+              <a:t>·  앱이 0원인 것은 단말이 이미 지급돼 있기 때문이다 (미지급 인원은 BLE 태그 필요).</a:t>
             </a:r>
           </a:p>
         </p:txBody>
@@ -14646,7 +14646,7 @@
                 </a:solidFill>
                 <a:latin typeface="Malgun Gothic"/>
               </a:rPr>
-              <a:t>①  앱이 설치된 기기끼리만 감지 — 미설치 인원 · 장비는 보이지 않음</a:t>
+              <a:t>①  경보만 한다 — 장비를 세우지 못한다. I-PAS EOD 의 3m 자동 셧다운은 대체 불가</a:t>
             </a:r>
           </a:p>
         </p:txBody>
@@ -14685,7 +14685,7 @@
                 </a:solidFill>
                 <a:latin typeface="Malgun Gothic"/>
               </a:rPr>
-              <a:t>②  기기가 밀집하면 화면 반응이 느려짐 (20대 이상)</a:t>
+              <a:t>②  앱이 설치된 기기끼리만 감지 — 미설치 인원 · 장비는 보이지 않음</a:t>
             </a:r>
           </a:p>
         </p:txBody>
@@ -14724,7 +14724,7 @@
                 </a:solidFill>
                 <a:latin typeface="Malgun Gothic"/>
               </a:rPr>
-              <a:t>③  안드로이드 8.0 이상에서만 설치된다</a:t>
+              <a:t>③  기기가 밀집하면 화면 반응이 느려짐 (20대 이상). 안드로이드 8.0 이상 전용</a:t>
             </a:r>
           </a:p>
         </p:txBody>

--- a/docs/presentation/company_form/SafeAlert_보고_2026.08.pptx
+++ b/docs/presentation/company_form/SafeAlert_보고_2026.08.pptx
@@ -8760,7 +8760,7 @@
                           </a:solidFill>
                           <a:latin typeface="Malgun Gothic"/>
                         </a:rPr>
-                        <a:t>15개 (FFWF 전체)</a:t>
+                        <a:t>17개 (FFWF 전체)</a:t>
                       </a:r>
                     </a:p>
                   </a:txBody>
@@ -8934,7 +8934,7 @@
                           </a:solidFill>
                           <a:latin typeface="Malgun Gothic"/>
                         </a:rPr>
-                        <a:t>49,650,000원</a:t>
+                        <a:t>56,270,000원</a:t>
                       </a:r>
                     </a:p>
                   </a:txBody>
@@ -13614,7 +13614,7 @@
                 </a:solidFill>
                 <a:latin typeface="Malgun Gothic"/>
               </a:rPr>
-              <a:t>15개 센터   </a:t>
+              <a:t>17개 센터   </a:t>
             </a:r>
             <a:r>
               <a:rPr sz="1800" b="1" i="0">
@@ -13623,7 +13623,7 @@
                 </a:solidFill>
                 <a:latin typeface="Malgun Gothic"/>
               </a:rPr>
-              <a:t>4,965만원</a:t>
+              <a:t>5,627만원</a:t>
             </a:r>
           </a:p>
         </p:txBody>
